--- a/Documentation/PPT_video_Generator.pptx
+++ b/Documentation/PPT_video_Generator.pptx
@@ -224,7 +224,7 @@
             <a:fld id="{FC854283-FDB5-4502-8E0E-B1B085FD2F71}" type="datetimeFigureOut">
               <a:rPr lang="x-none" smtClean="0"/>
               <a:pPr/>
-              <a:t>3/15/2025</a:t>
+              <a:t>3/27/2025</a:t>
             </a:fld>
             <a:endParaRPr lang="x-none"/>
           </a:p>
@@ -643,7 +643,7 @@
             <a:fld id="{87C5F92A-F16F-4A80-B63C-89D210F86F56}" type="datetimeFigureOut">
               <a:rPr lang="x-none" smtClean="0"/>
               <a:pPr/>
-              <a:t>3/15/2025</a:t>
+              <a:t>3/27/2025</a:t>
             </a:fld>
             <a:endParaRPr lang="x-none"/>
           </a:p>
@@ -845,7 +845,7 @@
             <a:fld id="{87C5F92A-F16F-4A80-B63C-89D210F86F56}" type="datetimeFigureOut">
               <a:rPr lang="x-none" smtClean="0"/>
               <a:pPr/>
-              <a:t>3/15/2025</a:t>
+              <a:t>3/27/2025</a:t>
             </a:fld>
             <a:endParaRPr lang="x-none"/>
           </a:p>
@@ -1057,7 +1057,7 @@
             <a:fld id="{87C5F92A-F16F-4A80-B63C-89D210F86F56}" type="datetimeFigureOut">
               <a:rPr lang="x-none" smtClean="0"/>
               <a:pPr/>
-              <a:t>3/15/2025</a:t>
+              <a:t>3/27/2025</a:t>
             </a:fld>
             <a:endParaRPr lang="x-none"/>
           </a:p>
@@ -1259,7 +1259,7 @@
             <a:fld id="{87C5F92A-F16F-4A80-B63C-89D210F86F56}" type="datetimeFigureOut">
               <a:rPr lang="x-none" smtClean="0"/>
               <a:pPr/>
-              <a:t>3/15/2025</a:t>
+              <a:t>3/27/2025</a:t>
             </a:fld>
             <a:endParaRPr lang="x-none"/>
           </a:p>
@@ -1537,7 +1537,7 @@
             <a:fld id="{87C5F92A-F16F-4A80-B63C-89D210F86F56}" type="datetimeFigureOut">
               <a:rPr lang="x-none" smtClean="0"/>
               <a:pPr/>
-              <a:t>3/15/2025</a:t>
+              <a:t>3/27/2025</a:t>
             </a:fld>
             <a:endParaRPr lang="x-none"/>
           </a:p>
@@ -1807,7 +1807,7 @@
             <a:fld id="{87C5F92A-F16F-4A80-B63C-89D210F86F56}" type="datetimeFigureOut">
               <a:rPr lang="x-none" smtClean="0"/>
               <a:pPr/>
-              <a:t>3/15/2025</a:t>
+              <a:t>3/27/2025</a:t>
             </a:fld>
             <a:endParaRPr lang="x-none"/>
           </a:p>
@@ -2224,7 +2224,7 @@
             <a:fld id="{87C5F92A-F16F-4A80-B63C-89D210F86F56}" type="datetimeFigureOut">
               <a:rPr lang="x-none" smtClean="0"/>
               <a:pPr/>
-              <a:t>3/15/2025</a:t>
+              <a:t>3/27/2025</a:t>
             </a:fld>
             <a:endParaRPr lang="x-none"/>
           </a:p>
@@ -2368,7 +2368,7 @@
             <a:fld id="{87C5F92A-F16F-4A80-B63C-89D210F86F56}" type="datetimeFigureOut">
               <a:rPr lang="x-none" smtClean="0"/>
               <a:pPr/>
-              <a:t>3/15/2025</a:t>
+              <a:t>3/27/2025</a:t>
             </a:fld>
             <a:endParaRPr lang="x-none"/>
           </a:p>
@@ -2483,7 +2483,7 @@
             <a:fld id="{87C5F92A-F16F-4A80-B63C-89D210F86F56}" type="datetimeFigureOut">
               <a:rPr lang="x-none" smtClean="0"/>
               <a:pPr/>
-              <a:t>3/15/2025</a:t>
+              <a:t>3/27/2025</a:t>
             </a:fld>
             <a:endParaRPr lang="x-none"/>
           </a:p>
@@ -2798,7 +2798,7 @@
             <a:fld id="{87C5F92A-F16F-4A80-B63C-89D210F86F56}" type="datetimeFigureOut">
               <a:rPr lang="x-none" smtClean="0"/>
               <a:pPr/>
-              <a:t>3/15/2025</a:t>
+              <a:t>3/27/2025</a:t>
             </a:fld>
             <a:endParaRPr lang="x-none"/>
           </a:p>
@@ -3089,7 +3089,7 @@
             <a:fld id="{87C5F92A-F16F-4A80-B63C-89D210F86F56}" type="datetimeFigureOut">
               <a:rPr lang="x-none" smtClean="0"/>
               <a:pPr/>
-              <a:t>3/15/2025</a:t>
+              <a:t>3/27/2025</a:t>
             </a:fld>
             <a:endParaRPr lang="x-none"/>
           </a:p>
@@ -3334,7 +3334,7 @@
             <a:fld id="{87C5F92A-F16F-4A80-B63C-89D210F86F56}" type="datetimeFigureOut">
               <a:rPr lang="x-none" smtClean="0"/>
               <a:pPr/>
-              <a:t>3/15/2025</a:t>
+              <a:t>3/27/2025</a:t>
             </a:fld>
             <a:endParaRPr lang="x-none"/>
           </a:p>
@@ -15512,10 +15512,10 @@
   <a:themeElements>
     <a:clrScheme name="Office">
       <a:dk1>
-        <a:sysClr val="windowText" lastClr="000000"/>
+        <a:sysClr val="windowText" lastClr="3D3D3D"/>
       </a:dk1>
       <a:lt1>
-        <a:sysClr val="window" lastClr="FFFFFF"/>
+        <a:sysClr val="window" lastClr="FFFAEF"/>
       </a:lt1>
       <a:dk2>
         <a:srgbClr val="44546A"/>
@@ -15807,10 +15807,10 @@
   <a:themeElements>
     <a:clrScheme name="Office">
       <a:dk1>
-        <a:sysClr val="windowText" lastClr="000000"/>
+        <a:sysClr val="windowText" lastClr="3D3D3D"/>
       </a:dk1>
       <a:lt1>
-        <a:sysClr val="window" lastClr="FFFFFF"/>
+        <a:sysClr val="window" lastClr="FFFAEF"/>
       </a:lt1>
       <a:dk2>
         <a:srgbClr val="44546A"/>

--- a/Documentation/PPT_video_Generator.pptx
+++ b/Documentation/PPT_video_Generator.pptx
@@ -5,7 +5,7 @@
     <p:sldMasterId id="2147483648" r:id="rId1"/>
   </p:sldMasterIdLst>
   <p:notesMasterIdLst>
-    <p:notesMasterId r:id="rId18"/>
+    <p:notesMasterId r:id="rId25"/>
   </p:notesMasterIdLst>
   <p:sldIdLst>
     <p:sldId id="256" r:id="rId2"/>
@@ -23,7 +23,14 @@
     <p:sldId id="268" r:id="rId14"/>
     <p:sldId id="269" r:id="rId15"/>
     <p:sldId id="270" r:id="rId16"/>
-    <p:sldId id="271" r:id="rId17"/>
+    <p:sldId id="278" r:id="rId17"/>
+    <p:sldId id="272" r:id="rId18"/>
+    <p:sldId id="277" r:id="rId19"/>
+    <p:sldId id="273" r:id="rId20"/>
+    <p:sldId id="274" r:id="rId21"/>
+    <p:sldId id="275" r:id="rId22"/>
+    <p:sldId id="276" r:id="rId23"/>
+    <p:sldId id="271" r:id="rId24"/>
   </p:sldIdLst>
   <p:sldSz cx="12192000" cy="6858000"/>
   <p:notesSz cx="6858000" cy="9144000"/>
@@ -224,7 +231,7 @@
             <a:fld id="{FC854283-FDB5-4502-8E0E-B1B085FD2F71}" type="datetimeFigureOut">
               <a:rPr lang="x-none" smtClean="0"/>
               <a:pPr/>
-              <a:t>3/27/2025</a:t>
+              <a:t>4/10/2025</a:t>
             </a:fld>
             <a:endParaRPr lang="x-none"/>
           </a:p>
@@ -643,7 +650,7 @@
             <a:fld id="{87C5F92A-F16F-4A80-B63C-89D210F86F56}" type="datetimeFigureOut">
               <a:rPr lang="x-none" smtClean="0"/>
               <a:pPr/>
-              <a:t>3/27/2025</a:t>
+              <a:t>4/10/2025</a:t>
             </a:fld>
             <a:endParaRPr lang="x-none"/>
           </a:p>
@@ -845,7 +852,7 @@
             <a:fld id="{87C5F92A-F16F-4A80-B63C-89D210F86F56}" type="datetimeFigureOut">
               <a:rPr lang="x-none" smtClean="0"/>
               <a:pPr/>
-              <a:t>3/27/2025</a:t>
+              <a:t>4/10/2025</a:t>
             </a:fld>
             <a:endParaRPr lang="x-none"/>
           </a:p>
@@ -1057,7 +1064,7 @@
             <a:fld id="{87C5F92A-F16F-4A80-B63C-89D210F86F56}" type="datetimeFigureOut">
               <a:rPr lang="x-none" smtClean="0"/>
               <a:pPr/>
-              <a:t>3/27/2025</a:t>
+              <a:t>4/10/2025</a:t>
             </a:fld>
             <a:endParaRPr lang="x-none"/>
           </a:p>
@@ -1259,7 +1266,7 @@
             <a:fld id="{87C5F92A-F16F-4A80-B63C-89D210F86F56}" type="datetimeFigureOut">
               <a:rPr lang="x-none" smtClean="0"/>
               <a:pPr/>
-              <a:t>3/27/2025</a:t>
+              <a:t>4/10/2025</a:t>
             </a:fld>
             <a:endParaRPr lang="x-none"/>
           </a:p>
@@ -1537,7 +1544,7 @@
             <a:fld id="{87C5F92A-F16F-4A80-B63C-89D210F86F56}" type="datetimeFigureOut">
               <a:rPr lang="x-none" smtClean="0"/>
               <a:pPr/>
-              <a:t>3/27/2025</a:t>
+              <a:t>4/10/2025</a:t>
             </a:fld>
             <a:endParaRPr lang="x-none"/>
           </a:p>
@@ -1807,7 +1814,7 @@
             <a:fld id="{87C5F92A-F16F-4A80-B63C-89D210F86F56}" type="datetimeFigureOut">
               <a:rPr lang="x-none" smtClean="0"/>
               <a:pPr/>
-              <a:t>3/27/2025</a:t>
+              <a:t>4/10/2025</a:t>
             </a:fld>
             <a:endParaRPr lang="x-none"/>
           </a:p>
@@ -2224,7 +2231,7 @@
             <a:fld id="{87C5F92A-F16F-4A80-B63C-89D210F86F56}" type="datetimeFigureOut">
               <a:rPr lang="x-none" smtClean="0"/>
               <a:pPr/>
-              <a:t>3/27/2025</a:t>
+              <a:t>4/10/2025</a:t>
             </a:fld>
             <a:endParaRPr lang="x-none"/>
           </a:p>
@@ -2368,7 +2375,7 @@
             <a:fld id="{87C5F92A-F16F-4A80-B63C-89D210F86F56}" type="datetimeFigureOut">
               <a:rPr lang="x-none" smtClean="0"/>
               <a:pPr/>
-              <a:t>3/27/2025</a:t>
+              <a:t>4/10/2025</a:t>
             </a:fld>
             <a:endParaRPr lang="x-none"/>
           </a:p>
@@ -2483,7 +2490,7 @@
             <a:fld id="{87C5F92A-F16F-4A80-B63C-89D210F86F56}" type="datetimeFigureOut">
               <a:rPr lang="x-none" smtClean="0"/>
               <a:pPr/>
-              <a:t>3/27/2025</a:t>
+              <a:t>4/10/2025</a:t>
             </a:fld>
             <a:endParaRPr lang="x-none"/>
           </a:p>
@@ -2798,7 +2805,7 @@
             <a:fld id="{87C5F92A-F16F-4A80-B63C-89D210F86F56}" type="datetimeFigureOut">
               <a:rPr lang="x-none" smtClean="0"/>
               <a:pPr/>
-              <a:t>3/27/2025</a:t>
+              <a:t>4/10/2025</a:t>
             </a:fld>
             <a:endParaRPr lang="x-none"/>
           </a:p>
@@ -3089,7 +3096,7 @@
             <a:fld id="{87C5F92A-F16F-4A80-B63C-89D210F86F56}" type="datetimeFigureOut">
               <a:rPr lang="x-none" smtClean="0"/>
               <a:pPr/>
-              <a:t>3/27/2025</a:t>
+              <a:t>4/10/2025</a:t>
             </a:fld>
             <a:endParaRPr lang="x-none"/>
           </a:p>
@@ -3334,7 +3341,7 @@
             <a:fld id="{87C5F92A-F16F-4A80-B63C-89D210F86F56}" type="datetimeFigureOut">
               <a:rPr lang="x-none" smtClean="0"/>
               <a:pPr/>
-              <a:t>3/27/2025</a:t>
+              <a:t>4/10/2025</a:t>
             </a:fld>
             <a:endParaRPr lang="x-none"/>
           </a:p>
@@ -8481,7 +8488,7 @@
         <p:cNvPr id="1" name="">
           <a:extLst>
             <a:ext uri="{FF2B5EF4-FFF2-40B4-BE49-F238E27FC236}">
-              <a16:creationId xmlns:a16="http://schemas.microsoft.com/office/drawing/2014/main" id="{5227CE3F-206B-FF66-7E85-B9F6D28177A6}"/>
+              <a16:creationId xmlns:a16="http://schemas.microsoft.com/office/drawing/2014/main" id="{C1B7744A-1912-A909-8EEC-ACC0A8572389}"/>
             </a:ext>
           </a:extLst>
         </p:cNvPr>
@@ -8501,7 +8508,7 @@
           <p:cNvPr id="6" name="Rounded Rectangle 4">
             <a:extLst>
               <a:ext uri="{FF2B5EF4-FFF2-40B4-BE49-F238E27FC236}">
-                <a16:creationId xmlns:a16="http://schemas.microsoft.com/office/drawing/2014/main" id="{6E3394D2-240C-293F-84BC-AAE51C7D2721}"/>
+                <a16:creationId xmlns:a16="http://schemas.microsoft.com/office/drawing/2014/main" id="{3B83142D-654B-B079-7DD5-7161A6D15D50}"/>
               </a:ext>
             </a:extLst>
           </p:cNvPr>
@@ -8578,7 +8585,7 @@
           <p:cNvPr id="7" name="TextBox 6">
             <a:extLst>
               <a:ext uri="{FF2B5EF4-FFF2-40B4-BE49-F238E27FC236}">
-                <a16:creationId xmlns:a16="http://schemas.microsoft.com/office/drawing/2014/main" id="{E80F305C-6A20-3C54-6036-58C2818B1303}"/>
+                <a16:creationId xmlns:a16="http://schemas.microsoft.com/office/drawing/2014/main" id="{635A81BB-1FD2-BEC3-9CAA-00BB0BC41106}"/>
               </a:ext>
             </a:extLst>
           </p:cNvPr>
@@ -8642,7 +8649,7 @@
           <p:cNvPr id="3" name="Title 1">
             <a:extLst>
               <a:ext uri="{FF2B5EF4-FFF2-40B4-BE49-F238E27FC236}">
-                <a16:creationId xmlns:a16="http://schemas.microsoft.com/office/drawing/2014/main" id="{2017B7A6-5107-0E28-C1DA-BE5B96CA35EE}"/>
+                <a16:creationId xmlns:a16="http://schemas.microsoft.com/office/drawing/2014/main" id="{40701C24-D8B1-233C-F68E-48ED77FD8050}"/>
               </a:ext>
             </a:extLst>
           </p:cNvPr>
@@ -8653,8 +8660,8 @@
         </p:nvSpPr>
         <p:spPr>
           <a:xfrm>
-            <a:off x="443971" y="509588"/>
-            <a:ext cx="10515600" cy="598488"/>
+            <a:off x="2801516" y="2364036"/>
+            <a:ext cx="6090261" cy="1831785"/>
           </a:xfrm>
           <a:prstGeom prst="rect">
             <a:avLst/>
@@ -8662,7 +8669,7 @@
         </p:spPr>
         <p:txBody>
           <a:bodyPr vert="horz" wrap="square" lIns="91440" tIns="45720" rIns="91440" bIns="45720" numCol="1" rtlCol="0" anchor="ctr" anchorCtr="0" compatLnSpc="1">
-            <a:normAutofit fontScale="90000" lnSpcReduction="20000"/>
+            <a:noAutofit/>
           </a:bodyPr>
           <a:lstStyle>
             <a:lvl1pPr algn="ctr" defTabSz="914400" rtl="0" eaLnBrk="1" latinLnBrk="0" hangingPunct="1">
@@ -8684,19 +8691,26 @@
             </a:lvl1pPr>
           </a:lstStyle>
           <a:p>
-            <a:pPr algn="l">
+            <a:pPr>
               <a:defRPr/>
             </a:pPr>
             <a:r>
-              <a:rPr lang="en-IN" sz="4890" b="1" dirty="0">
+              <a:rPr lang="en-IN" b="1" dirty="0">
                 <a:solidFill>
                   <a:srgbClr val="00B0F0"/>
                 </a:solidFill>
                 <a:latin typeface="Times New Roman" panose="02020603050405020304" pitchFamily="18" charset="0"/>
                 <a:cs typeface="Times New Roman" panose="02020603050405020304" pitchFamily="18" charset="0"/>
               </a:rPr>
-              <a:t>Conclusion</a:t>
-            </a:r>
+              <a:t>Output Screenshots</a:t>
+            </a:r>
+            <a:endParaRPr lang="en-IN" sz="4000" b="1" dirty="0">
+              <a:solidFill>
+                <a:srgbClr val="00B0F0"/>
+              </a:solidFill>
+              <a:latin typeface="Times New Roman" panose="02020603050405020304" pitchFamily="18" charset="0"/>
+              <a:cs typeface="Times New Roman" panose="02020603050405020304" pitchFamily="18" charset="0"/>
+            </a:endParaRPr>
           </a:p>
         </p:txBody>
       </p:sp>
@@ -8705,7 +8719,7 @@
           <p:cNvPr id="8" name="Rounded Rectangle 4">
             <a:extLst>
               <a:ext uri="{FF2B5EF4-FFF2-40B4-BE49-F238E27FC236}">
-                <a16:creationId xmlns:a16="http://schemas.microsoft.com/office/drawing/2014/main" id="{4DB72A4E-F177-F103-6B2D-05C1D30CDEF5}"/>
+                <a16:creationId xmlns:a16="http://schemas.microsoft.com/office/drawing/2014/main" id="{9953D912-E229-8A96-B452-6CFFCE189537}"/>
               </a:ext>
             </a:extLst>
           </p:cNvPr>
@@ -8782,7 +8796,7 @@
           <p:cNvPr id="9" name="TextBox 8">
             <a:extLst>
               <a:ext uri="{FF2B5EF4-FFF2-40B4-BE49-F238E27FC236}">
-                <a16:creationId xmlns:a16="http://schemas.microsoft.com/office/drawing/2014/main" id="{BF664F33-1364-C0BA-2506-3C1C6FF2C96C}"/>
+                <a16:creationId xmlns:a16="http://schemas.microsoft.com/office/drawing/2014/main" id="{69665769-F502-6038-E670-1BAEDD1E29F5}"/>
               </a:ext>
             </a:extLst>
           </p:cNvPr>
@@ -8824,7 +8838,7 @@
           <p:cNvPr id="10" name="Picture 6">
             <a:extLst>
               <a:ext uri="{FF2B5EF4-FFF2-40B4-BE49-F238E27FC236}">
-                <a16:creationId xmlns:a16="http://schemas.microsoft.com/office/drawing/2014/main" id="{315ED282-95CD-1819-0B6F-AAEF5D5D0C58}"/>
+                <a16:creationId xmlns:a16="http://schemas.microsoft.com/office/drawing/2014/main" id="{6C54B2F6-88E3-F5C3-123E-4E1EAF28D6A9}"/>
               </a:ext>
             </a:extLst>
           </p:cNvPr>
@@ -8855,10 +8869,10 @@
       </p:pic>
       <p:sp>
         <p:nvSpPr>
-          <p:cNvPr id="13" name="Slide Number Placeholder 3">
-            <a:extLst>
-              <a:ext uri="{FF2B5EF4-FFF2-40B4-BE49-F238E27FC236}">
-                <a16:creationId xmlns:a16="http://schemas.microsoft.com/office/drawing/2014/main" id="{4D9ECAC6-C86B-BD47-DFDC-E3351740CA7B}"/>
+          <p:cNvPr id="12" name="Slide Number Placeholder 3">
+            <a:extLst>
+              <a:ext uri="{FF2B5EF4-FFF2-40B4-BE49-F238E27FC236}">
+                <a16:creationId xmlns:a16="http://schemas.microsoft.com/office/drawing/2014/main" id="{AE068F41-25D2-4AB5-4D47-34F60A429909}"/>
               </a:ext>
             </a:extLst>
           </p:cNvPr>
@@ -9004,12 +9018,189 @@
           </a:p>
         </p:txBody>
       </p:sp>
-      <p:sp>
-        <p:nvSpPr>
-          <p:cNvPr id="2" name="Content Placeholder 2">
-            <a:extLst>
-              <a:ext uri="{FF2B5EF4-FFF2-40B4-BE49-F238E27FC236}">
-                <a16:creationId xmlns:a16="http://schemas.microsoft.com/office/drawing/2014/main" id="{5B1BB66E-B7B9-A665-4512-B2CB160CAAC2}"/>
+    </p:spTree>
+    <p:extLst>
+      <p:ext uri="{BB962C8B-B14F-4D97-AF65-F5344CB8AC3E}">
+        <p14:creationId xmlns:p14="http://schemas.microsoft.com/office/powerpoint/2010/main" val="1285615108"/>
+      </p:ext>
+    </p:extLst>
+  </p:cSld>
+  <p:clrMapOvr>
+    <a:masterClrMapping/>
+  </p:clrMapOvr>
+</p:sld>
+</file>
+
+<file path=ppt/slides/slide17.xml><?xml version="1.0" encoding="utf-8"?>
+<p:sld xmlns:a="http://schemas.openxmlformats.org/drawingml/2006/main" xmlns:r="http://schemas.openxmlformats.org/officeDocument/2006/relationships" xmlns:p="http://schemas.openxmlformats.org/presentationml/2006/main">
+  <p:cSld>
+    <p:spTree>
+      <p:nvGrpSpPr>
+        <p:cNvPr id="1" name="">
+          <a:extLst>
+            <a:ext uri="{FF2B5EF4-FFF2-40B4-BE49-F238E27FC236}">
+              <a16:creationId xmlns:a16="http://schemas.microsoft.com/office/drawing/2014/main" id="{10A8743A-A924-DB9D-DD6B-FBCA5AFE7C37}"/>
+            </a:ext>
+          </a:extLst>
+        </p:cNvPr>
+        <p:cNvGrpSpPr/>
+        <p:nvPr/>
+      </p:nvGrpSpPr>
+      <p:grpSpPr>
+        <a:xfrm>
+          <a:off x="0" y="0"/>
+          <a:ext cx="0" cy="0"/>
+          <a:chOff x="0" y="0"/>
+          <a:chExt cx="0" cy="0"/>
+        </a:xfrm>
+      </p:grpSpPr>
+      <p:sp>
+        <p:nvSpPr>
+          <p:cNvPr id="6" name="Rounded Rectangle 4">
+            <a:extLst>
+              <a:ext uri="{FF2B5EF4-FFF2-40B4-BE49-F238E27FC236}">
+                <a16:creationId xmlns:a16="http://schemas.microsoft.com/office/drawing/2014/main" id="{5A933C7B-B415-9365-BE89-6BAF113965EA}"/>
+              </a:ext>
+            </a:extLst>
+          </p:cNvPr>
+          <p:cNvSpPr/>
+          <p:nvPr/>
+        </p:nvSpPr>
+        <p:spPr>
+          <a:xfrm>
+            <a:off x="0" y="6462940"/>
+            <a:ext cx="12207875" cy="393700"/>
+          </a:xfrm>
+          <a:prstGeom prst="rect">
+            <a:avLst/>
+          </a:prstGeom>
+          <a:solidFill>
+            <a:srgbClr val="5B9BD5"/>
+          </a:solidFill>
+        </p:spPr>
+        <p:style>
+          <a:lnRef idx="2">
+            <a:schemeClr val="accent1">
+              <a:shade val="50000"/>
+            </a:schemeClr>
+          </a:lnRef>
+          <a:fillRef idx="1">
+            <a:schemeClr val="accent1"/>
+          </a:fillRef>
+          <a:effectRef idx="0">
+            <a:schemeClr val="accent1"/>
+          </a:effectRef>
+          <a:fontRef idx="minor">
+            <a:schemeClr val="lt1"/>
+          </a:fontRef>
+        </p:style>
+        <p:txBody>
+          <a:bodyPr anchor="ctr"/>
+          <a:lstStyle/>
+          <a:p>
+            <a:pPr marL="0" marR="0" lvl="0" indent="0" algn="ctr" defTabSz="914400" rtl="0" eaLnBrk="0" fontAlgn="base" latinLnBrk="0" hangingPunct="0">
+              <a:lnSpc>
+                <a:spcPct val="100000"/>
+              </a:lnSpc>
+              <a:spcBef>
+                <a:spcPct val="0"/>
+              </a:spcBef>
+              <a:spcAft>
+                <a:spcPct val="0"/>
+              </a:spcAft>
+              <a:buClrTx/>
+              <a:buSzTx/>
+              <a:buFontTx/>
+              <a:buNone/>
+              <a:defRPr/>
+            </a:pPr>
+            <a:endParaRPr kumimoji="0" lang="en-IN" sz="1800" b="1" i="0" u="none" strike="noStrike" kern="1200" cap="none" spc="0" normalizeH="0" baseline="0" noProof="0" dirty="0">
+              <a:ln>
+                <a:noFill/>
+              </a:ln>
+              <a:solidFill>
+                <a:schemeClr val="tx1"/>
+              </a:solidFill>
+              <a:effectLst/>
+              <a:uLnTx/>
+              <a:uFillTx/>
+              <a:latin typeface="Arial Rounded MT Bold" pitchFamily="34" charset="0"/>
+              <a:ea typeface="+mn-ea"/>
+              <a:cs typeface="+mn-cs"/>
+            </a:endParaRPr>
+          </a:p>
+        </p:txBody>
+      </p:sp>
+      <p:sp>
+        <p:nvSpPr>
+          <p:cNvPr id="7" name="TextBox 6">
+            <a:extLst>
+              <a:ext uri="{FF2B5EF4-FFF2-40B4-BE49-F238E27FC236}">
+                <a16:creationId xmlns:a16="http://schemas.microsoft.com/office/drawing/2014/main" id="{5CC86ACE-3C2B-47D3-7A71-E96486F865B4}"/>
+              </a:ext>
+            </a:extLst>
+          </p:cNvPr>
+          <p:cNvSpPr txBox="1"/>
+          <p:nvPr/>
+        </p:nvSpPr>
+        <p:spPr>
+          <a:xfrm>
+            <a:off x="443971" y="6490513"/>
+            <a:ext cx="11288182" cy="338554"/>
+          </a:xfrm>
+          <a:prstGeom prst="rect">
+            <a:avLst/>
+          </a:prstGeom>
+          <a:noFill/>
+        </p:spPr>
+        <p:txBody>
+          <a:bodyPr wrap="square" rtlCol="0">
+            <a:spAutoFit/>
+          </a:bodyPr>
+          <a:lstStyle/>
+          <a:p>
+            <a:pPr marL="0" marR="0" lvl="0" indent="0" algn="ctr" defTabSz="914400" rtl="0" eaLnBrk="0" fontAlgn="base" latinLnBrk="0" hangingPunct="0">
+              <a:lnSpc>
+                <a:spcPct val="100000"/>
+              </a:lnSpc>
+              <a:spcBef>
+                <a:spcPct val="0"/>
+              </a:spcBef>
+              <a:spcAft>
+                <a:spcPct val="0"/>
+              </a:spcAft>
+              <a:buClrTx/>
+              <a:buSzTx/>
+              <a:buFontTx/>
+              <a:buNone/>
+              <a:defRPr/>
+            </a:pPr>
+            <a:r>
+              <a:rPr kumimoji="0" lang="en-IN" sz="1600" b="1" i="0" u="none" strike="noStrike" kern="1200" cap="none" spc="0" normalizeH="0" baseline="0" noProof="0" dirty="0">
+                <a:ln>
+                  <a:noFill/>
+                </a:ln>
+                <a:solidFill>
+                  <a:schemeClr val="tx1"/>
+                </a:solidFill>
+                <a:effectLst/>
+                <a:uLnTx/>
+                <a:uFillTx/>
+                <a:latin typeface="Arial Rounded MT Bold" pitchFamily="34" charset="0"/>
+                <a:ea typeface="+mn-ea"/>
+                <a:cs typeface="+mn-cs"/>
+              </a:rPr>
+              <a:t>B.Tech III Year – II Sem | Dept of Computational Intelligence| Application Development – II | Project Review</a:t>
+            </a:r>
+          </a:p>
+        </p:txBody>
+      </p:sp>
+      <p:sp>
+        <p:nvSpPr>
+          <p:cNvPr id="3" name="Title 1">
+            <a:extLst>
+              <a:ext uri="{FF2B5EF4-FFF2-40B4-BE49-F238E27FC236}">
+                <a16:creationId xmlns:a16="http://schemas.microsoft.com/office/drawing/2014/main" id="{38857BB8-457C-A714-4193-3EB996F9282B}"/>
               </a:ext>
             </a:extLst>
           </p:cNvPr>
@@ -9020,46 +9211,248 @@
         </p:nvSpPr>
         <p:spPr>
           <a:xfrm>
-            <a:off x="901382" y="1112431"/>
-            <a:ext cx="10405110" cy="5351145"/>
+            <a:off x="443971" y="509588"/>
+            <a:ext cx="10515600" cy="598488"/>
           </a:xfrm>
           <a:prstGeom prst="rect">
             <a:avLst/>
           </a:prstGeom>
         </p:spPr>
         <p:txBody>
-          <a:bodyPr vert="horz" wrap="square" lIns="91440" tIns="45720" rIns="91440" bIns="45720" rtlCol="0" anchor="t" anchorCtr="0">
-            <a:normAutofit/>
+          <a:bodyPr vert="horz" wrap="square" lIns="91440" tIns="45720" rIns="91440" bIns="45720" numCol="1" rtlCol="0" anchor="ctr" anchorCtr="0" compatLnSpc="1">
+            <a:normAutofit fontScale="90000" lnSpcReduction="20000"/>
           </a:bodyPr>
           <a:lstStyle>
-            <a:lvl1pPr marL="0" indent="0" algn="ctr" defTabSz="914400" rtl="0" eaLnBrk="1" latinLnBrk="0" hangingPunct="1">
+            <a:lvl1pPr algn="ctr" defTabSz="914400" rtl="0" eaLnBrk="1" latinLnBrk="0" hangingPunct="1">
               <a:lnSpc>
                 <a:spcPct val="90000"/>
               </a:lnSpc>
               <a:spcBef>
-                <a:spcPts val="1000"/>
-              </a:spcBef>
-              <a:buFont typeface="Arial" panose="020B0604020202020204" pitchFamily="34" charset="0"/>
-              <a:buNone/>
-              <a:defRPr sz="2400" kern="1200">
-                <a:solidFill>
-                  <a:schemeClr val="tx1"/>
-                </a:solidFill>
-                <a:latin typeface="+mn-lt"/>
-                <a:ea typeface="+mn-ea"/>
-                <a:cs typeface="+mn-cs"/>
+                <a:spcPct val="0"/>
+              </a:spcBef>
+              <a:buNone/>
+              <a:defRPr sz="6000" kern="1200">
+                <a:solidFill>
+                  <a:schemeClr val="tx1"/>
+                </a:solidFill>
+                <a:latin typeface="+mj-lt"/>
+                <a:ea typeface="+mj-ea"/>
+                <a:cs typeface="+mj-cs"/>
               </a:defRPr>
             </a:lvl1pPr>
-            <a:lvl2pPr marL="457200" indent="0" algn="ctr" defTabSz="914400" rtl="0" eaLnBrk="1" latinLnBrk="0" hangingPunct="1">
-              <a:lnSpc>
-                <a:spcPct val="90000"/>
-              </a:lnSpc>
-              <a:spcBef>
-                <a:spcPts val="500"/>
-              </a:spcBef>
-              <a:buFont typeface="Arial" panose="020B0604020202020204" pitchFamily="34" charset="0"/>
-              <a:buNone/>
-              <a:defRPr sz="2000" kern="1200">
+          </a:lstStyle>
+          <a:p>
+            <a:pPr algn="l">
+              <a:defRPr/>
+            </a:pPr>
+            <a:endParaRPr lang="en-IN" sz="4890" b="1" dirty="0">
+              <a:solidFill>
+                <a:srgbClr val="00B0F0"/>
+              </a:solidFill>
+              <a:latin typeface="Times New Roman" panose="02020603050405020304" pitchFamily="18" charset="0"/>
+              <a:cs typeface="Times New Roman" panose="02020603050405020304" pitchFamily="18" charset="0"/>
+            </a:endParaRPr>
+          </a:p>
+        </p:txBody>
+      </p:sp>
+      <p:sp>
+        <p:nvSpPr>
+          <p:cNvPr id="8" name="Rounded Rectangle 4">
+            <a:extLst>
+              <a:ext uri="{FF2B5EF4-FFF2-40B4-BE49-F238E27FC236}">
+                <a16:creationId xmlns:a16="http://schemas.microsoft.com/office/drawing/2014/main" id="{1F86A5A3-CE52-9656-5AAB-0FB5479D9FC0}"/>
+              </a:ext>
+            </a:extLst>
+          </p:cNvPr>
+          <p:cNvSpPr/>
+          <p:nvPr/>
+        </p:nvSpPr>
+        <p:spPr>
+          <a:xfrm>
+            <a:off x="-15875" y="-10805"/>
+            <a:ext cx="12207875" cy="393700"/>
+          </a:xfrm>
+          <a:prstGeom prst="rect">
+            <a:avLst/>
+          </a:prstGeom>
+          <a:solidFill>
+            <a:srgbClr val="5B9BD5"/>
+          </a:solidFill>
+        </p:spPr>
+        <p:style>
+          <a:lnRef idx="2">
+            <a:schemeClr val="accent1">
+              <a:shade val="50000"/>
+            </a:schemeClr>
+          </a:lnRef>
+          <a:fillRef idx="1">
+            <a:schemeClr val="accent1"/>
+          </a:fillRef>
+          <a:effectRef idx="0">
+            <a:schemeClr val="accent1"/>
+          </a:effectRef>
+          <a:fontRef idx="minor">
+            <a:schemeClr val="lt1"/>
+          </a:fontRef>
+        </p:style>
+        <p:txBody>
+          <a:bodyPr anchor="ctr"/>
+          <a:lstStyle/>
+          <a:p>
+            <a:pPr marL="0" marR="0" lvl="0" indent="0" algn="ctr" defTabSz="914400" rtl="0" eaLnBrk="0" fontAlgn="base" latinLnBrk="0" hangingPunct="0">
+              <a:lnSpc>
+                <a:spcPct val="100000"/>
+              </a:lnSpc>
+              <a:spcBef>
+                <a:spcPct val="0"/>
+              </a:spcBef>
+              <a:spcAft>
+                <a:spcPct val="0"/>
+              </a:spcAft>
+              <a:buClrTx/>
+              <a:buSzTx/>
+              <a:buFontTx/>
+              <a:buNone/>
+              <a:defRPr/>
+            </a:pPr>
+            <a:endParaRPr kumimoji="0" lang="en-IN" sz="1800" b="1" i="0" u="none" strike="noStrike" kern="1200" cap="none" spc="0" normalizeH="0" baseline="0" noProof="0" dirty="0">
+              <a:ln>
+                <a:noFill/>
+              </a:ln>
+              <a:solidFill>
+                <a:schemeClr val="tx1"/>
+              </a:solidFill>
+              <a:effectLst/>
+              <a:uLnTx/>
+              <a:uFillTx/>
+              <a:latin typeface="Arial Rounded MT Bold" pitchFamily="34" charset="0"/>
+              <a:ea typeface="+mn-ea"/>
+              <a:cs typeface="+mn-cs"/>
+            </a:endParaRPr>
+          </a:p>
+        </p:txBody>
+      </p:sp>
+      <p:sp>
+        <p:nvSpPr>
+          <p:cNvPr id="9" name="TextBox 8">
+            <a:extLst>
+              <a:ext uri="{FF2B5EF4-FFF2-40B4-BE49-F238E27FC236}">
+                <a16:creationId xmlns:a16="http://schemas.microsoft.com/office/drawing/2014/main" id="{461FCF64-72B8-AEAE-AB72-72E5BD3A7275}"/>
+              </a:ext>
+            </a:extLst>
+          </p:cNvPr>
+          <p:cNvSpPr txBox="1"/>
+          <p:nvPr/>
+        </p:nvSpPr>
+        <p:spPr>
+          <a:xfrm>
+            <a:off x="2801516" y="16768"/>
+            <a:ext cx="6588967" cy="338554"/>
+          </a:xfrm>
+          <a:prstGeom prst="rect">
+            <a:avLst/>
+          </a:prstGeom>
+          <a:noFill/>
+        </p:spPr>
+        <p:txBody>
+          <a:bodyPr wrap="square" rtlCol="0">
+            <a:spAutoFit/>
+          </a:bodyPr>
+          <a:lstStyle/>
+          <a:p>
+            <a:r>
+              <a:rPr lang="en-US" sz="1600" b="1" dirty="0">
+                <a:latin typeface="Arial Rounded MT Bold" panose="020F0704030504030204" pitchFamily="34" charset="0"/>
+                <a:cs typeface="Arial" panose="020B0604020202020204" pitchFamily="34" charset="0"/>
+              </a:rPr>
+              <a:t>MALLA REDDY COLLEGE OF ENGINEERING AND TECHNOLOGY</a:t>
+            </a:r>
+            <a:endParaRPr lang="x-none" sz="1600" b="1" dirty="0">
+              <a:latin typeface="Arial Rounded MT Bold" panose="020F0704030504030204" pitchFamily="34" charset="0"/>
+              <a:cs typeface="Arial" panose="020B0604020202020204" pitchFamily="34" charset="0"/>
+            </a:endParaRPr>
+          </a:p>
+        </p:txBody>
+      </p:sp>
+      <p:pic>
+        <p:nvPicPr>
+          <p:cNvPr id="10" name="Picture 6">
+            <a:extLst>
+              <a:ext uri="{FF2B5EF4-FFF2-40B4-BE49-F238E27FC236}">
+                <a16:creationId xmlns:a16="http://schemas.microsoft.com/office/drawing/2014/main" id="{8C5CF373-56DE-B890-1AAD-687CD96BF4DB}"/>
+              </a:ext>
+            </a:extLst>
+          </p:cNvPr>
+          <p:cNvPicPr>
+            <a:picLocks noChangeAspect="1"/>
+          </p:cNvPicPr>
+          <p:nvPr/>
+        </p:nvPicPr>
+        <p:blipFill>
+          <a:blip r:embed="rId2" cstate="print"/>
+          <a:stretch>
+            <a:fillRect/>
+          </a:stretch>
+        </p:blipFill>
+        <p:spPr>
+          <a:xfrm>
+            <a:off x="10899775" y="-128587"/>
+            <a:ext cx="1276350" cy="1276350"/>
+          </a:xfrm>
+          <a:prstGeom prst="rect">
+            <a:avLst/>
+          </a:prstGeom>
+          <a:noFill/>
+          <a:ln w="9525">
+            <a:noFill/>
+          </a:ln>
+        </p:spPr>
+      </p:pic>
+      <p:sp>
+        <p:nvSpPr>
+          <p:cNvPr id="12" name="Slide Number Placeholder 3">
+            <a:extLst>
+              <a:ext uri="{FF2B5EF4-FFF2-40B4-BE49-F238E27FC236}">
+                <a16:creationId xmlns:a16="http://schemas.microsoft.com/office/drawing/2014/main" id="{8799C33E-0AD9-32E0-ACA6-22B0A09FE613}"/>
+              </a:ext>
+            </a:extLst>
+          </p:cNvPr>
+          <p:cNvSpPr txBox="1">
+            <a:spLocks/>
+          </p:cNvSpPr>
+          <p:nvPr/>
+        </p:nvSpPr>
+        <p:spPr>
+          <a:xfrm>
+            <a:off x="9067800" y="6176963"/>
+            <a:ext cx="2743200" cy="365125"/>
+          </a:xfrm>
+          <a:prstGeom prst="rect">
+            <a:avLst/>
+          </a:prstGeom>
+          <a:noFill/>
+          <a:ln>
+            <a:noFill/>
+          </a:ln>
+        </p:spPr>
+        <p:txBody>
+          <a:bodyPr anchor="ctr" anchorCtr="0"/>
+          <a:lstStyle>
+            <a:defPPr>
+              <a:defRPr lang="x-none"/>
+            </a:defPPr>
+            <a:lvl1pPr marL="0" algn="l" defTabSz="914400" rtl="0" eaLnBrk="1" latinLnBrk="0" hangingPunct="1">
+              <a:defRPr sz="1800" kern="1200">
+                <a:solidFill>
+                  <a:schemeClr val="tx1"/>
+                </a:solidFill>
+                <a:latin typeface="+mn-lt"/>
+                <a:ea typeface="+mn-ea"/>
+                <a:cs typeface="+mn-cs"/>
+              </a:defRPr>
+            </a:lvl1pPr>
+            <a:lvl2pPr marL="457200" algn="l" defTabSz="914400" rtl="0" eaLnBrk="1" latinLnBrk="0" hangingPunct="1">
+              <a:defRPr sz="1800" kern="1200">
                 <a:solidFill>
                   <a:schemeClr val="tx1"/>
                 </a:solidFill>
@@ -9068,15 +9461,7 @@
                 <a:cs typeface="+mn-cs"/>
               </a:defRPr>
             </a:lvl2pPr>
-            <a:lvl3pPr marL="914400" indent="0" algn="ctr" defTabSz="914400" rtl="0" eaLnBrk="1" latinLnBrk="0" hangingPunct="1">
-              <a:lnSpc>
-                <a:spcPct val="90000"/>
-              </a:lnSpc>
-              <a:spcBef>
-                <a:spcPts val="500"/>
-              </a:spcBef>
-              <a:buFont typeface="Arial" panose="020B0604020202020204" pitchFamily="34" charset="0"/>
-              <a:buNone/>
+            <a:lvl3pPr marL="914400" algn="l" defTabSz="914400" rtl="0" eaLnBrk="1" latinLnBrk="0" hangingPunct="1">
               <a:defRPr sz="1800" kern="1200">
                 <a:solidFill>
                   <a:schemeClr val="tx1"/>
@@ -9086,16 +9471,8 @@
                 <a:cs typeface="+mn-cs"/>
               </a:defRPr>
             </a:lvl3pPr>
-            <a:lvl4pPr marL="1371600" indent="0" algn="ctr" defTabSz="914400" rtl="0" eaLnBrk="1" latinLnBrk="0" hangingPunct="1">
-              <a:lnSpc>
-                <a:spcPct val="90000"/>
-              </a:lnSpc>
-              <a:spcBef>
-                <a:spcPts val="500"/>
-              </a:spcBef>
-              <a:buFont typeface="Arial" panose="020B0604020202020204" pitchFamily="34" charset="0"/>
-              <a:buNone/>
-              <a:defRPr sz="1600" kern="1200">
+            <a:lvl4pPr marL="1371600" algn="l" defTabSz="914400" rtl="0" eaLnBrk="1" latinLnBrk="0" hangingPunct="1">
+              <a:defRPr sz="1800" kern="1200">
                 <a:solidFill>
                   <a:schemeClr val="tx1"/>
                 </a:solidFill>
@@ -9104,16 +9481,8 @@
                 <a:cs typeface="+mn-cs"/>
               </a:defRPr>
             </a:lvl4pPr>
-            <a:lvl5pPr marL="1828800" indent="0" algn="ctr" defTabSz="914400" rtl="0" eaLnBrk="1" latinLnBrk="0" hangingPunct="1">
-              <a:lnSpc>
-                <a:spcPct val="90000"/>
-              </a:lnSpc>
-              <a:spcBef>
-                <a:spcPts val="500"/>
-              </a:spcBef>
-              <a:buFont typeface="Arial" panose="020B0604020202020204" pitchFamily="34" charset="0"/>
-              <a:buNone/>
-              <a:defRPr sz="1600" kern="1200">
+            <a:lvl5pPr marL="1828800" algn="l" defTabSz="914400" rtl="0" eaLnBrk="1" latinLnBrk="0" hangingPunct="1">
+              <a:defRPr sz="1800" kern="1200">
                 <a:solidFill>
                   <a:schemeClr val="tx1"/>
                 </a:solidFill>
@@ -9122,16 +9491,8 @@
                 <a:cs typeface="+mn-cs"/>
               </a:defRPr>
             </a:lvl5pPr>
-            <a:lvl6pPr marL="2286000" indent="0" algn="ctr" defTabSz="914400" rtl="0" eaLnBrk="1" latinLnBrk="0" hangingPunct="1">
-              <a:lnSpc>
-                <a:spcPct val="90000"/>
-              </a:lnSpc>
-              <a:spcBef>
-                <a:spcPts val="500"/>
-              </a:spcBef>
-              <a:buFont typeface="Arial" panose="020B0604020202020204" pitchFamily="34" charset="0"/>
-              <a:buNone/>
-              <a:defRPr sz="1600" kern="1200">
+            <a:lvl6pPr marL="2286000" algn="l" defTabSz="914400" rtl="0" eaLnBrk="1" latinLnBrk="0" hangingPunct="1">
+              <a:defRPr sz="1800" kern="1200">
                 <a:solidFill>
                   <a:schemeClr val="tx1"/>
                 </a:solidFill>
@@ -9140,16 +9501,8 @@
                 <a:cs typeface="+mn-cs"/>
               </a:defRPr>
             </a:lvl6pPr>
-            <a:lvl7pPr marL="2743200" indent="0" algn="ctr" defTabSz="914400" rtl="0" eaLnBrk="1" latinLnBrk="0" hangingPunct="1">
-              <a:lnSpc>
-                <a:spcPct val="90000"/>
-              </a:lnSpc>
-              <a:spcBef>
-                <a:spcPts val="500"/>
-              </a:spcBef>
-              <a:buFont typeface="Arial" panose="020B0604020202020204" pitchFamily="34" charset="0"/>
-              <a:buNone/>
-              <a:defRPr sz="1600" kern="1200">
+            <a:lvl7pPr marL="2743200" algn="l" defTabSz="914400" rtl="0" eaLnBrk="1" latinLnBrk="0" hangingPunct="1">
+              <a:defRPr sz="1800" kern="1200">
                 <a:solidFill>
                   <a:schemeClr val="tx1"/>
                 </a:solidFill>
@@ -9158,16 +9511,8 @@
                 <a:cs typeface="+mn-cs"/>
               </a:defRPr>
             </a:lvl7pPr>
-            <a:lvl8pPr marL="3200400" indent="0" algn="ctr" defTabSz="914400" rtl="0" eaLnBrk="1" latinLnBrk="0" hangingPunct="1">
-              <a:lnSpc>
-                <a:spcPct val="90000"/>
-              </a:lnSpc>
-              <a:spcBef>
-                <a:spcPts val="500"/>
-              </a:spcBef>
-              <a:buFont typeface="Arial" panose="020B0604020202020204" pitchFamily="34" charset="0"/>
-              <a:buNone/>
-              <a:defRPr sz="1600" kern="1200">
+            <a:lvl8pPr marL="3200400" algn="l" defTabSz="914400" rtl="0" eaLnBrk="1" latinLnBrk="0" hangingPunct="1">
+              <a:defRPr sz="1800" kern="1200">
                 <a:solidFill>
                   <a:schemeClr val="tx1"/>
                 </a:solidFill>
@@ -9176,16 +9521,8 @@
                 <a:cs typeface="+mn-cs"/>
               </a:defRPr>
             </a:lvl8pPr>
-            <a:lvl9pPr marL="3657600" indent="0" algn="ctr" defTabSz="914400" rtl="0" eaLnBrk="1" latinLnBrk="0" hangingPunct="1">
-              <a:lnSpc>
-                <a:spcPct val="90000"/>
-              </a:lnSpc>
-              <a:spcBef>
-                <a:spcPts val="500"/>
-              </a:spcBef>
-              <a:buFont typeface="Arial" panose="020B0604020202020204" pitchFamily="34" charset="0"/>
-              <a:buNone/>
-              <a:defRPr sz="1600" kern="1200">
+            <a:lvl9pPr marL="3657600" algn="l" defTabSz="914400" rtl="0" eaLnBrk="1" latinLnBrk="0" hangingPunct="1">
+              <a:defRPr sz="1800" kern="1200">
                 <a:solidFill>
                   <a:schemeClr val="tx1"/>
                 </a:solidFill>
@@ -9196,165 +9533,1295 @@
             </a:lvl9pPr>
           </a:lstStyle>
           <a:p>
-            <a:pPr lvl="0" algn="l" eaLnBrk="0" fontAlgn="base" hangingPunct="0">
+            <a:pPr algn="r">
+              <a:spcBef>
+                <a:spcPct val="0"/>
+              </a:spcBef>
+            </a:pPr>
+            <a:fld id="{9A0DB2DC-4C9A-4742-B13C-FB6460FD3503}" type="slidenum">
+              <a:rPr lang="en-IN" altLang="en-US" sz="1200" b="1" smtClean="0">
+                <a:solidFill>
+                  <a:srgbClr val="C00000"/>
+                </a:solidFill>
+              </a:rPr>
+              <a:pPr algn="r">
+                <a:spcBef>
+                  <a:spcPct val="0"/>
+                </a:spcBef>
+              </a:pPr>
+              <a:t>17</a:t>
+            </a:fld>
+            <a:endParaRPr lang="en-IN" altLang="en-US" sz="1200" b="1" dirty="0">
+              <a:solidFill>
+                <a:srgbClr val="C00000"/>
+              </a:solidFill>
+            </a:endParaRPr>
+          </a:p>
+        </p:txBody>
+      </p:sp>
+      <p:pic>
+        <p:nvPicPr>
+          <p:cNvPr id="2" name="Picture 1">
+            <a:extLst>
+              <a:ext uri="{FF2B5EF4-FFF2-40B4-BE49-F238E27FC236}">
+                <a16:creationId xmlns:a16="http://schemas.microsoft.com/office/drawing/2014/main" id="{6B3B7C0D-95F0-FA30-C863-0B9B27A41B6B}"/>
+              </a:ext>
+            </a:extLst>
+          </p:cNvPr>
+          <p:cNvPicPr>
+            <a:picLocks noChangeAspect="1"/>
+          </p:cNvPicPr>
+          <p:nvPr/>
+        </p:nvPicPr>
+        <p:blipFill>
+          <a:blip r:embed="rId3">
+            <a:extLst>
+              <a:ext uri="{28A0092B-C50C-407E-A947-70E740481C1C}">
+                <a14:useLocalDpi xmlns:a14="http://schemas.microsoft.com/office/drawing/2010/main" val="0"/>
+              </a:ext>
+            </a:extLst>
+          </a:blip>
+          <a:srcRect/>
+          <a:stretch>
+            <a:fillRect/>
+          </a:stretch>
+        </p:blipFill>
+        <p:spPr bwMode="auto">
+          <a:xfrm>
+            <a:off x="1062133" y="1419278"/>
+            <a:ext cx="10083607" cy="3327399"/>
+          </a:xfrm>
+          <a:prstGeom prst="rect">
+            <a:avLst/>
+          </a:prstGeom>
+          <a:noFill/>
+          <a:ln>
+            <a:noFill/>
+          </a:ln>
+        </p:spPr>
+      </p:pic>
+      <p:sp>
+        <p:nvSpPr>
+          <p:cNvPr id="13" name="TextBox 12">
+            <a:extLst>
+              <a:ext uri="{FF2B5EF4-FFF2-40B4-BE49-F238E27FC236}">
+                <a16:creationId xmlns:a16="http://schemas.microsoft.com/office/drawing/2014/main" id="{524BDA17-339D-E192-3C14-D4C5C49EC405}"/>
+              </a:ext>
+            </a:extLst>
+          </p:cNvPr>
+          <p:cNvSpPr txBox="1"/>
+          <p:nvPr/>
+        </p:nvSpPr>
+        <p:spPr>
+          <a:xfrm>
+            <a:off x="3035709" y="5113346"/>
+            <a:ext cx="6120580" cy="458074"/>
+          </a:xfrm>
+          <a:prstGeom prst="rect">
+            <a:avLst/>
+          </a:prstGeom>
+          <a:noFill/>
+        </p:spPr>
+        <p:txBody>
+          <a:bodyPr wrap="square">
+            <a:spAutoFit/>
+          </a:bodyPr>
+          <a:lstStyle/>
+          <a:p>
+            <a:pPr algn="ctr">
               <a:lnSpc>
                 <a:spcPct val="150000"/>
               </a:lnSpc>
-              <a:spcBef>
-                <a:spcPct val="0"/>
-              </a:spcBef>
               <a:spcAft>
-                <a:spcPct val="0"/>
+                <a:spcPts val="190"/>
               </a:spcAft>
-              <a:buFontTx/>
-              <a:buChar char="•"/>
             </a:pPr>
             <a:r>
-              <a:rPr lang="en-US" altLang="en-US" dirty="0">
-                <a:latin typeface="Times New Roman" pitchFamily="18" charset="0"/>
-                <a:cs typeface="Times New Roman" pitchFamily="18" charset="0"/>
+              <a:rPr lang="en-IN" sz="1800" b="1" dirty="0">
+                <a:effectLst/>
+                <a:latin typeface="Times New Roman" panose="02020603050405020304" pitchFamily="18" charset="0"/>
+                <a:ea typeface="Segoe UI Symbol" panose="020B0502040204020203" pitchFamily="34" charset="0"/>
               </a:rPr>
-              <a:t>Features a custom rendering engine for seamless video production.</a:t>
-            </a:r>
-          </a:p>
-          <a:p>
-            <a:pPr lvl="0" algn="l" eaLnBrk="0" fontAlgn="base" hangingPunct="0">
-              <a:lnSpc>
-                <a:spcPct val="150000"/>
-              </a:lnSpc>
-              <a:spcBef>
-                <a:spcPct val="0"/>
-              </a:spcBef>
-              <a:spcAft>
-                <a:spcPct val="0"/>
-              </a:spcAft>
-              <a:buFontTx/>
-              <a:buChar char="•"/>
-            </a:pPr>
-            <a:r>
-              <a:rPr lang="en-US" altLang="en-US" dirty="0">
-                <a:latin typeface="Times New Roman" pitchFamily="18" charset="0"/>
-                <a:cs typeface="Times New Roman" pitchFamily="18" charset="0"/>
+              <a:t>Fig </a:t>
+            </a:r>
+            <a:r>
+              <a:rPr lang="en-IN" b="1" dirty="0">
+                <a:latin typeface="Times New Roman" panose="02020603050405020304" pitchFamily="18" charset="0"/>
+                <a:ea typeface="Segoe UI Symbol" panose="020B0502040204020203" pitchFamily="34" charset="0"/>
               </a:rPr>
-              <a:t>Automates the entire content creation process, from script generation to video rendering.</a:t>
-            </a:r>
-          </a:p>
-          <a:p>
-            <a:pPr lvl="0" algn="l" eaLnBrk="0" fontAlgn="base" hangingPunct="0">
-              <a:lnSpc>
-                <a:spcPct val="150000"/>
-              </a:lnSpc>
-              <a:spcBef>
-                <a:spcPct val="0"/>
-              </a:spcBef>
-              <a:spcAft>
-                <a:spcPct val="0"/>
-              </a:spcAft>
-              <a:buFontTx/>
-              <a:buChar char="•"/>
-            </a:pPr>
-            <a:r>
-              <a:rPr lang="en-US" altLang="en-US" dirty="0">
-                <a:latin typeface="Times New Roman" pitchFamily="18" charset="0"/>
-                <a:cs typeface="Times New Roman" pitchFamily="18" charset="0"/>
+              <a:t>1:</a:t>
+            </a:r>
+            <a:r>
+              <a:rPr lang="en-IN" sz="1800" b="1" dirty="0">
+                <a:effectLst/>
+                <a:latin typeface="Times New Roman" panose="02020603050405020304" pitchFamily="18" charset="0"/>
+                <a:ea typeface="Segoe UI Symbol" panose="020B0502040204020203" pitchFamily="34" charset="0"/>
               </a:rPr>
-              <a:t>Utilizes ChatGPT for scriptwriting and advanced generative AI for video creation.</a:t>
-            </a:r>
-          </a:p>
-          <a:p>
-            <a:pPr lvl="0" algn="l" eaLnBrk="0" fontAlgn="base" hangingPunct="0">
-              <a:lnSpc>
-                <a:spcPct val="150000"/>
-              </a:lnSpc>
-              <a:spcBef>
-                <a:spcPct val="0"/>
-              </a:spcBef>
-              <a:spcAft>
-                <a:spcPct val="0"/>
-              </a:spcAft>
-              <a:buFontTx/>
-              <a:buChar char="•"/>
-            </a:pPr>
-            <a:r>
-              <a:rPr lang="en-US" altLang="en-US" dirty="0">
-                <a:latin typeface="Times New Roman" pitchFamily="18" charset="0"/>
-                <a:cs typeface="Times New Roman" pitchFamily="18" charset="0"/>
-              </a:rPr>
-              <a:t>Integrates EdgeTTS for voiceovers and Whisper for generating timed captions.</a:t>
-            </a:r>
-          </a:p>
-          <a:p>
-            <a:pPr lvl="0" algn="l" eaLnBrk="0" fontAlgn="base" hangingPunct="0">
-              <a:lnSpc>
-                <a:spcPct val="150000"/>
-              </a:lnSpc>
-              <a:spcBef>
-                <a:spcPct val="0"/>
-              </a:spcBef>
-              <a:spcAft>
-                <a:spcPct val="0"/>
-              </a:spcAft>
-              <a:buFontTx/>
-              <a:buChar char="•"/>
-            </a:pPr>
-            <a:r>
-              <a:rPr lang="en-US" altLang="en-US" dirty="0">
-                <a:latin typeface="Times New Roman" pitchFamily="18" charset="0"/>
-                <a:cs typeface="Times New Roman" pitchFamily="18" charset="0"/>
-              </a:rPr>
-              <a:t>Reduces manual effort and saves time for content creators.</a:t>
-            </a:r>
-          </a:p>
-          <a:p>
-            <a:pPr lvl="0" algn="l" eaLnBrk="0" fontAlgn="base" hangingPunct="0">
-              <a:lnSpc>
-                <a:spcPct val="150000"/>
-              </a:lnSpc>
-              <a:spcBef>
-                <a:spcPct val="0"/>
-              </a:spcBef>
-              <a:spcAft>
-                <a:spcPct val="0"/>
-              </a:spcAft>
-              <a:buFontTx/>
-              <a:buChar char="•"/>
-            </a:pPr>
-            <a:r>
-              <a:rPr lang="en-US" altLang="en-US" dirty="0">
-                <a:latin typeface="Times New Roman" pitchFamily="18" charset="0"/>
-                <a:cs typeface="Times New Roman" pitchFamily="18" charset="0"/>
-              </a:rPr>
-              <a:t>Offers flexibility for user modifications at any stage.</a:t>
-            </a:r>
-          </a:p>
-          <a:p>
-            <a:pPr lvl="0" algn="l" eaLnBrk="0" fontAlgn="base" hangingPunct="0">
-              <a:lnSpc>
-                <a:spcPct val="150000"/>
-              </a:lnSpc>
-              <a:spcBef>
-                <a:spcPct val="0"/>
-              </a:spcBef>
-              <a:spcAft>
-                <a:spcPct val="0"/>
-              </a:spcAft>
-              <a:buFontTx/>
-              <a:buChar char="•"/>
-            </a:pPr>
-            <a:r>
-              <a:rPr lang="en-US" altLang="en-US" dirty="0">
-                <a:latin typeface="Times New Roman" pitchFamily="18" charset="0"/>
-                <a:cs typeface="Times New Roman" pitchFamily="18" charset="0"/>
-              </a:rPr>
-              <a:t>Provides an efficient, user-friendly solution for producing high-quality, social media-ready videos. </a:t>
-            </a:r>
+              <a:t> Initialization of application </a:t>
+            </a:r>
+            <a:endParaRPr lang="en-IN" sz="1600" dirty="0">
+              <a:effectLst/>
+              <a:latin typeface="Times New Roman" panose="02020603050405020304" pitchFamily="18" charset="0"/>
+              <a:ea typeface="Times New Roman" panose="02020603050405020304" pitchFamily="18" charset="0"/>
+            </a:endParaRPr>
           </a:p>
         </p:txBody>
       </p:sp>
     </p:spTree>
     <p:extLst>
       <p:ext uri="{BB962C8B-B14F-4D97-AF65-F5344CB8AC3E}">
-        <p14:creationId xmlns:p14="http://schemas.microsoft.com/office/powerpoint/2010/main" val="854143978"/>
+        <p14:creationId xmlns:p14="http://schemas.microsoft.com/office/powerpoint/2010/main" val="3137797657"/>
+      </p:ext>
+    </p:extLst>
+  </p:cSld>
+  <p:clrMapOvr>
+    <a:masterClrMapping/>
+  </p:clrMapOvr>
+</p:sld>
+</file>
+
+<file path=ppt/slides/slide18.xml><?xml version="1.0" encoding="utf-8"?>
+<p:sld xmlns:a="http://schemas.openxmlformats.org/drawingml/2006/main" xmlns:r="http://schemas.openxmlformats.org/officeDocument/2006/relationships" xmlns:p="http://schemas.openxmlformats.org/presentationml/2006/main">
+  <p:cSld>
+    <p:spTree>
+      <p:nvGrpSpPr>
+        <p:cNvPr id="1" name="">
+          <a:extLst>
+            <a:ext uri="{FF2B5EF4-FFF2-40B4-BE49-F238E27FC236}">
+              <a16:creationId xmlns:a16="http://schemas.microsoft.com/office/drawing/2014/main" id="{4724D830-9609-CDA2-156F-5CA33A4D3F3B}"/>
+            </a:ext>
+          </a:extLst>
+        </p:cNvPr>
+        <p:cNvGrpSpPr/>
+        <p:nvPr/>
+      </p:nvGrpSpPr>
+      <p:grpSpPr>
+        <a:xfrm>
+          <a:off x="0" y="0"/>
+          <a:ext cx="0" cy="0"/>
+          <a:chOff x="0" y="0"/>
+          <a:chExt cx="0" cy="0"/>
+        </a:xfrm>
+      </p:grpSpPr>
+      <p:sp>
+        <p:nvSpPr>
+          <p:cNvPr id="6" name="Rounded Rectangle 4">
+            <a:extLst>
+              <a:ext uri="{FF2B5EF4-FFF2-40B4-BE49-F238E27FC236}">
+                <a16:creationId xmlns:a16="http://schemas.microsoft.com/office/drawing/2014/main" id="{86E82629-5471-06BE-4B12-8E5466A58B56}"/>
+              </a:ext>
+            </a:extLst>
+          </p:cNvPr>
+          <p:cNvSpPr/>
+          <p:nvPr/>
+        </p:nvSpPr>
+        <p:spPr>
+          <a:xfrm>
+            <a:off x="0" y="6462940"/>
+            <a:ext cx="12207875" cy="393700"/>
+          </a:xfrm>
+          <a:prstGeom prst="rect">
+            <a:avLst/>
+          </a:prstGeom>
+          <a:solidFill>
+            <a:srgbClr val="5B9BD5"/>
+          </a:solidFill>
+        </p:spPr>
+        <p:style>
+          <a:lnRef idx="2">
+            <a:schemeClr val="accent1">
+              <a:shade val="50000"/>
+            </a:schemeClr>
+          </a:lnRef>
+          <a:fillRef idx="1">
+            <a:schemeClr val="accent1"/>
+          </a:fillRef>
+          <a:effectRef idx="0">
+            <a:schemeClr val="accent1"/>
+          </a:effectRef>
+          <a:fontRef idx="minor">
+            <a:schemeClr val="lt1"/>
+          </a:fontRef>
+        </p:style>
+        <p:txBody>
+          <a:bodyPr anchor="ctr"/>
+          <a:lstStyle/>
+          <a:p>
+            <a:pPr marL="0" marR="0" lvl="0" indent="0" algn="ctr" defTabSz="914400" rtl="0" eaLnBrk="0" fontAlgn="base" latinLnBrk="0" hangingPunct="0">
+              <a:lnSpc>
+                <a:spcPct val="100000"/>
+              </a:lnSpc>
+              <a:spcBef>
+                <a:spcPct val="0"/>
+              </a:spcBef>
+              <a:spcAft>
+                <a:spcPct val="0"/>
+              </a:spcAft>
+              <a:buClrTx/>
+              <a:buSzTx/>
+              <a:buFontTx/>
+              <a:buNone/>
+              <a:defRPr/>
+            </a:pPr>
+            <a:endParaRPr kumimoji="0" lang="en-IN" sz="1800" b="1" i="0" u="none" strike="noStrike" kern="1200" cap="none" spc="0" normalizeH="0" baseline="0" noProof="0" dirty="0">
+              <a:ln>
+                <a:noFill/>
+              </a:ln>
+              <a:solidFill>
+                <a:schemeClr val="tx1"/>
+              </a:solidFill>
+              <a:effectLst/>
+              <a:uLnTx/>
+              <a:uFillTx/>
+              <a:latin typeface="Arial Rounded MT Bold" pitchFamily="34" charset="0"/>
+              <a:ea typeface="+mn-ea"/>
+              <a:cs typeface="+mn-cs"/>
+            </a:endParaRPr>
+          </a:p>
+        </p:txBody>
+      </p:sp>
+      <p:sp>
+        <p:nvSpPr>
+          <p:cNvPr id="7" name="TextBox 6">
+            <a:extLst>
+              <a:ext uri="{FF2B5EF4-FFF2-40B4-BE49-F238E27FC236}">
+                <a16:creationId xmlns:a16="http://schemas.microsoft.com/office/drawing/2014/main" id="{6253F3C0-8149-C259-5386-CEE38C04398E}"/>
+              </a:ext>
+            </a:extLst>
+          </p:cNvPr>
+          <p:cNvSpPr txBox="1"/>
+          <p:nvPr/>
+        </p:nvSpPr>
+        <p:spPr>
+          <a:xfrm>
+            <a:off x="443971" y="6490513"/>
+            <a:ext cx="11288182" cy="338554"/>
+          </a:xfrm>
+          <a:prstGeom prst="rect">
+            <a:avLst/>
+          </a:prstGeom>
+          <a:noFill/>
+        </p:spPr>
+        <p:txBody>
+          <a:bodyPr wrap="square" rtlCol="0">
+            <a:spAutoFit/>
+          </a:bodyPr>
+          <a:lstStyle/>
+          <a:p>
+            <a:pPr marL="0" marR="0" lvl="0" indent="0" algn="ctr" defTabSz="914400" rtl="0" eaLnBrk="0" fontAlgn="base" latinLnBrk="0" hangingPunct="0">
+              <a:lnSpc>
+                <a:spcPct val="100000"/>
+              </a:lnSpc>
+              <a:spcBef>
+                <a:spcPct val="0"/>
+              </a:spcBef>
+              <a:spcAft>
+                <a:spcPct val="0"/>
+              </a:spcAft>
+              <a:buClrTx/>
+              <a:buSzTx/>
+              <a:buFontTx/>
+              <a:buNone/>
+              <a:defRPr/>
+            </a:pPr>
+            <a:r>
+              <a:rPr kumimoji="0" lang="en-IN" sz="1600" b="1" i="0" u="none" strike="noStrike" kern="1200" cap="none" spc="0" normalizeH="0" baseline="0" noProof="0" dirty="0">
+                <a:ln>
+                  <a:noFill/>
+                </a:ln>
+                <a:solidFill>
+                  <a:schemeClr val="tx1"/>
+                </a:solidFill>
+                <a:effectLst/>
+                <a:uLnTx/>
+                <a:uFillTx/>
+                <a:latin typeface="Arial Rounded MT Bold" pitchFamily="34" charset="0"/>
+                <a:ea typeface="+mn-ea"/>
+                <a:cs typeface="+mn-cs"/>
+              </a:rPr>
+              <a:t>B.Tech III Year – II Sem | Dept of Computational Intelligence| Application Development – II | Project Review</a:t>
+            </a:r>
+          </a:p>
+        </p:txBody>
+      </p:sp>
+      <p:sp>
+        <p:nvSpPr>
+          <p:cNvPr id="8" name="Rounded Rectangle 4">
+            <a:extLst>
+              <a:ext uri="{FF2B5EF4-FFF2-40B4-BE49-F238E27FC236}">
+                <a16:creationId xmlns:a16="http://schemas.microsoft.com/office/drawing/2014/main" id="{3F66EB5C-E15F-8F04-F4B9-D64E39AC35A9}"/>
+              </a:ext>
+            </a:extLst>
+          </p:cNvPr>
+          <p:cNvSpPr/>
+          <p:nvPr/>
+        </p:nvSpPr>
+        <p:spPr>
+          <a:xfrm>
+            <a:off x="-15875" y="-10805"/>
+            <a:ext cx="12207875" cy="393700"/>
+          </a:xfrm>
+          <a:prstGeom prst="rect">
+            <a:avLst/>
+          </a:prstGeom>
+          <a:solidFill>
+            <a:srgbClr val="5B9BD5"/>
+          </a:solidFill>
+        </p:spPr>
+        <p:style>
+          <a:lnRef idx="2">
+            <a:schemeClr val="accent1">
+              <a:shade val="50000"/>
+            </a:schemeClr>
+          </a:lnRef>
+          <a:fillRef idx="1">
+            <a:schemeClr val="accent1"/>
+          </a:fillRef>
+          <a:effectRef idx="0">
+            <a:schemeClr val="accent1"/>
+          </a:effectRef>
+          <a:fontRef idx="minor">
+            <a:schemeClr val="lt1"/>
+          </a:fontRef>
+        </p:style>
+        <p:txBody>
+          <a:bodyPr anchor="ctr"/>
+          <a:lstStyle/>
+          <a:p>
+            <a:pPr marL="0" marR="0" lvl="0" indent="0" algn="ctr" defTabSz="914400" rtl="0" eaLnBrk="0" fontAlgn="base" latinLnBrk="0" hangingPunct="0">
+              <a:lnSpc>
+                <a:spcPct val="100000"/>
+              </a:lnSpc>
+              <a:spcBef>
+                <a:spcPct val="0"/>
+              </a:spcBef>
+              <a:spcAft>
+                <a:spcPct val="0"/>
+              </a:spcAft>
+              <a:buClrTx/>
+              <a:buSzTx/>
+              <a:buFontTx/>
+              <a:buNone/>
+              <a:defRPr/>
+            </a:pPr>
+            <a:endParaRPr kumimoji="0" lang="en-IN" sz="1800" b="1" i="0" u="none" strike="noStrike" kern="1200" cap="none" spc="0" normalizeH="0" baseline="0" noProof="0" dirty="0">
+              <a:ln>
+                <a:noFill/>
+              </a:ln>
+              <a:solidFill>
+                <a:schemeClr val="tx1"/>
+              </a:solidFill>
+              <a:effectLst/>
+              <a:uLnTx/>
+              <a:uFillTx/>
+              <a:latin typeface="Arial Rounded MT Bold" pitchFamily="34" charset="0"/>
+              <a:ea typeface="+mn-ea"/>
+              <a:cs typeface="+mn-cs"/>
+            </a:endParaRPr>
+          </a:p>
+        </p:txBody>
+      </p:sp>
+      <p:sp>
+        <p:nvSpPr>
+          <p:cNvPr id="9" name="TextBox 8">
+            <a:extLst>
+              <a:ext uri="{FF2B5EF4-FFF2-40B4-BE49-F238E27FC236}">
+                <a16:creationId xmlns:a16="http://schemas.microsoft.com/office/drawing/2014/main" id="{5F932F96-F3AB-4385-A1D4-51B92036A635}"/>
+              </a:ext>
+            </a:extLst>
+          </p:cNvPr>
+          <p:cNvSpPr txBox="1"/>
+          <p:nvPr/>
+        </p:nvSpPr>
+        <p:spPr>
+          <a:xfrm>
+            <a:off x="2801516" y="16768"/>
+            <a:ext cx="6588967" cy="338554"/>
+          </a:xfrm>
+          <a:prstGeom prst="rect">
+            <a:avLst/>
+          </a:prstGeom>
+          <a:noFill/>
+        </p:spPr>
+        <p:txBody>
+          <a:bodyPr wrap="square" rtlCol="0">
+            <a:spAutoFit/>
+          </a:bodyPr>
+          <a:lstStyle/>
+          <a:p>
+            <a:r>
+              <a:rPr lang="en-US" sz="1600" b="1" dirty="0">
+                <a:latin typeface="Arial Rounded MT Bold" panose="020F0704030504030204" pitchFamily="34" charset="0"/>
+                <a:cs typeface="Arial" panose="020B0604020202020204" pitchFamily="34" charset="0"/>
+              </a:rPr>
+              <a:t>MALLA REDDY COLLEGE OF ENGINEERING AND TECHNOLOGY</a:t>
+            </a:r>
+            <a:endParaRPr lang="x-none" sz="1600" b="1" dirty="0">
+              <a:latin typeface="Arial Rounded MT Bold" panose="020F0704030504030204" pitchFamily="34" charset="0"/>
+              <a:cs typeface="Arial" panose="020B0604020202020204" pitchFamily="34" charset="0"/>
+            </a:endParaRPr>
+          </a:p>
+        </p:txBody>
+      </p:sp>
+      <p:pic>
+        <p:nvPicPr>
+          <p:cNvPr id="10" name="Picture 6">
+            <a:extLst>
+              <a:ext uri="{FF2B5EF4-FFF2-40B4-BE49-F238E27FC236}">
+                <a16:creationId xmlns:a16="http://schemas.microsoft.com/office/drawing/2014/main" id="{6FCF5BAF-CD9C-EB2B-43D8-EE931EB6FD13}"/>
+              </a:ext>
+            </a:extLst>
+          </p:cNvPr>
+          <p:cNvPicPr>
+            <a:picLocks noChangeAspect="1"/>
+          </p:cNvPicPr>
+          <p:nvPr/>
+        </p:nvPicPr>
+        <p:blipFill>
+          <a:blip r:embed="rId2" cstate="print"/>
+          <a:stretch>
+            <a:fillRect/>
+          </a:stretch>
+        </p:blipFill>
+        <p:spPr>
+          <a:xfrm>
+            <a:off x="10899775" y="-128587"/>
+            <a:ext cx="1276350" cy="1276350"/>
+          </a:xfrm>
+          <a:prstGeom prst="rect">
+            <a:avLst/>
+          </a:prstGeom>
+          <a:noFill/>
+          <a:ln w="9525">
+            <a:noFill/>
+          </a:ln>
+        </p:spPr>
+      </p:pic>
+      <p:sp>
+        <p:nvSpPr>
+          <p:cNvPr id="12" name="Slide Number Placeholder 3">
+            <a:extLst>
+              <a:ext uri="{FF2B5EF4-FFF2-40B4-BE49-F238E27FC236}">
+                <a16:creationId xmlns:a16="http://schemas.microsoft.com/office/drawing/2014/main" id="{65A7625B-190F-9A07-BADC-6AB40E572116}"/>
+              </a:ext>
+            </a:extLst>
+          </p:cNvPr>
+          <p:cNvSpPr txBox="1">
+            <a:spLocks/>
+          </p:cNvSpPr>
+          <p:nvPr/>
+        </p:nvSpPr>
+        <p:spPr>
+          <a:xfrm>
+            <a:off x="9067800" y="6176963"/>
+            <a:ext cx="2743200" cy="365125"/>
+          </a:xfrm>
+          <a:prstGeom prst="rect">
+            <a:avLst/>
+          </a:prstGeom>
+          <a:noFill/>
+          <a:ln>
+            <a:noFill/>
+          </a:ln>
+        </p:spPr>
+        <p:txBody>
+          <a:bodyPr anchor="ctr" anchorCtr="0"/>
+          <a:lstStyle>
+            <a:defPPr>
+              <a:defRPr lang="x-none"/>
+            </a:defPPr>
+            <a:lvl1pPr marL="0" algn="l" defTabSz="914400" rtl="0" eaLnBrk="1" latinLnBrk="0" hangingPunct="1">
+              <a:defRPr sz="1800" kern="1200">
+                <a:solidFill>
+                  <a:schemeClr val="tx1"/>
+                </a:solidFill>
+                <a:latin typeface="+mn-lt"/>
+                <a:ea typeface="+mn-ea"/>
+                <a:cs typeface="+mn-cs"/>
+              </a:defRPr>
+            </a:lvl1pPr>
+            <a:lvl2pPr marL="457200" algn="l" defTabSz="914400" rtl="0" eaLnBrk="1" latinLnBrk="0" hangingPunct="1">
+              <a:defRPr sz="1800" kern="1200">
+                <a:solidFill>
+                  <a:schemeClr val="tx1"/>
+                </a:solidFill>
+                <a:latin typeface="+mn-lt"/>
+                <a:ea typeface="+mn-ea"/>
+                <a:cs typeface="+mn-cs"/>
+              </a:defRPr>
+            </a:lvl2pPr>
+            <a:lvl3pPr marL="914400" algn="l" defTabSz="914400" rtl="0" eaLnBrk="1" latinLnBrk="0" hangingPunct="1">
+              <a:defRPr sz="1800" kern="1200">
+                <a:solidFill>
+                  <a:schemeClr val="tx1"/>
+                </a:solidFill>
+                <a:latin typeface="+mn-lt"/>
+                <a:ea typeface="+mn-ea"/>
+                <a:cs typeface="+mn-cs"/>
+              </a:defRPr>
+            </a:lvl3pPr>
+            <a:lvl4pPr marL="1371600" algn="l" defTabSz="914400" rtl="0" eaLnBrk="1" latinLnBrk="0" hangingPunct="1">
+              <a:defRPr sz="1800" kern="1200">
+                <a:solidFill>
+                  <a:schemeClr val="tx1"/>
+                </a:solidFill>
+                <a:latin typeface="+mn-lt"/>
+                <a:ea typeface="+mn-ea"/>
+                <a:cs typeface="+mn-cs"/>
+              </a:defRPr>
+            </a:lvl4pPr>
+            <a:lvl5pPr marL="1828800" algn="l" defTabSz="914400" rtl="0" eaLnBrk="1" latinLnBrk="0" hangingPunct="1">
+              <a:defRPr sz="1800" kern="1200">
+                <a:solidFill>
+                  <a:schemeClr val="tx1"/>
+                </a:solidFill>
+                <a:latin typeface="+mn-lt"/>
+                <a:ea typeface="+mn-ea"/>
+                <a:cs typeface="+mn-cs"/>
+              </a:defRPr>
+            </a:lvl5pPr>
+            <a:lvl6pPr marL="2286000" algn="l" defTabSz="914400" rtl="0" eaLnBrk="1" latinLnBrk="0" hangingPunct="1">
+              <a:defRPr sz="1800" kern="1200">
+                <a:solidFill>
+                  <a:schemeClr val="tx1"/>
+                </a:solidFill>
+                <a:latin typeface="+mn-lt"/>
+                <a:ea typeface="+mn-ea"/>
+                <a:cs typeface="+mn-cs"/>
+              </a:defRPr>
+            </a:lvl6pPr>
+            <a:lvl7pPr marL="2743200" algn="l" defTabSz="914400" rtl="0" eaLnBrk="1" latinLnBrk="0" hangingPunct="1">
+              <a:defRPr sz="1800" kern="1200">
+                <a:solidFill>
+                  <a:schemeClr val="tx1"/>
+                </a:solidFill>
+                <a:latin typeface="+mn-lt"/>
+                <a:ea typeface="+mn-ea"/>
+                <a:cs typeface="+mn-cs"/>
+              </a:defRPr>
+            </a:lvl7pPr>
+            <a:lvl8pPr marL="3200400" algn="l" defTabSz="914400" rtl="0" eaLnBrk="1" latinLnBrk="0" hangingPunct="1">
+              <a:defRPr sz="1800" kern="1200">
+                <a:solidFill>
+                  <a:schemeClr val="tx1"/>
+                </a:solidFill>
+                <a:latin typeface="+mn-lt"/>
+                <a:ea typeface="+mn-ea"/>
+                <a:cs typeface="+mn-cs"/>
+              </a:defRPr>
+            </a:lvl8pPr>
+            <a:lvl9pPr marL="3657600" algn="l" defTabSz="914400" rtl="0" eaLnBrk="1" latinLnBrk="0" hangingPunct="1">
+              <a:defRPr sz="1800" kern="1200">
+                <a:solidFill>
+                  <a:schemeClr val="tx1"/>
+                </a:solidFill>
+                <a:latin typeface="+mn-lt"/>
+                <a:ea typeface="+mn-ea"/>
+                <a:cs typeface="+mn-cs"/>
+              </a:defRPr>
+            </a:lvl9pPr>
+          </a:lstStyle>
+          <a:p>
+            <a:pPr algn="r">
+              <a:spcBef>
+                <a:spcPct val="0"/>
+              </a:spcBef>
+            </a:pPr>
+            <a:fld id="{9A0DB2DC-4C9A-4742-B13C-FB6460FD3503}" type="slidenum">
+              <a:rPr lang="en-IN" altLang="en-US" sz="1200" b="1" smtClean="0">
+                <a:solidFill>
+                  <a:srgbClr val="C00000"/>
+                </a:solidFill>
+              </a:rPr>
+              <a:pPr algn="r">
+                <a:spcBef>
+                  <a:spcPct val="0"/>
+                </a:spcBef>
+              </a:pPr>
+              <a:t>18</a:t>
+            </a:fld>
+            <a:endParaRPr lang="en-IN" altLang="en-US" sz="1200" b="1" dirty="0">
+              <a:solidFill>
+                <a:srgbClr val="C00000"/>
+              </a:solidFill>
+            </a:endParaRPr>
+          </a:p>
+        </p:txBody>
+      </p:sp>
+      <p:pic>
+        <p:nvPicPr>
+          <p:cNvPr id="4" name="Picture 3">
+            <a:extLst>
+              <a:ext uri="{FF2B5EF4-FFF2-40B4-BE49-F238E27FC236}">
+                <a16:creationId xmlns:a16="http://schemas.microsoft.com/office/drawing/2014/main" id="{849DE31D-D257-B953-8E3F-D40EDC386882}"/>
+              </a:ext>
+            </a:extLst>
+          </p:cNvPr>
+          <p:cNvPicPr>
+            <a:picLocks noChangeAspect="1"/>
+          </p:cNvPicPr>
+          <p:nvPr/>
+        </p:nvPicPr>
+        <p:blipFill>
+          <a:blip r:embed="rId3" cstate="print">
+            <a:extLst>
+              <a:ext uri="{28A0092B-C50C-407E-A947-70E740481C1C}">
+                <a14:useLocalDpi xmlns:a14="http://schemas.microsoft.com/office/drawing/2010/main" val="0"/>
+              </a:ext>
+            </a:extLst>
+          </a:blip>
+          <a:srcRect/>
+          <a:stretch>
+            <a:fillRect/>
+          </a:stretch>
+        </p:blipFill>
+        <p:spPr bwMode="auto">
+          <a:xfrm>
+            <a:off x="1280374" y="737614"/>
+            <a:ext cx="9338737" cy="5024429"/>
+          </a:xfrm>
+          <a:prstGeom prst="rect">
+            <a:avLst/>
+          </a:prstGeom>
+          <a:noFill/>
+          <a:ln>
+            <a:noFill/>
+          </a:ln>
+        </p:spPr>
+      </p:pic>
+      <p:sp>
+        <p:nvSpPr>
+          <p:cNvPr id="11" name="TextBox 10">
+            <a:extLst>
+              <a:ext uri="{FF2B5EF4-FFF2-40B4-BE49-F238E27FC236}">
+                <a16:creationId xmlns:a16="http://schemas.microsoft.com/office/drawing/2014/main" id="{01A0945C-821A-1488-7849-78280EC21242}"/>
+              </a:ext>
+            </a:extLst>
+          </p:cNvPr>
+          <p:cNvSpPr txBox="1"/>
+          <p:nvPr/>
+        </p:nvSpPr>
+        <p:spPr>
+          <a:xfrm>
+            <a:off x="2889452" y="5718889"/>
+            <a:ext cx="6120580" cy="458074"/>
+          </a:xfrm>
+          <a:prstGeom prst="rect">
+            <a:avLst/>
+          </a:prstGeom>
+          <a:noFill/>
+        </p:spPr>
+        <p:txBody>
+          <a:bodyPr wrap="square">
+            <a:spAutoFit/>
+          </a:bodyPr>
+          <a:lstStyle/>
+          <a:p>
+            <a:pPr algn="ctr">
+              <a:lnSpc>
+                <a:spcPct val="150000"/>
+              </a:lnSpc>
+              <a:spcAft>
+                <a:spcPts val="190"/>
+              </a:spcAft>
+            </a:pPr>
+            <a:r>
+              <a:rPr lang="en-IN" sz="1800" b="1" dirty="0">
+                <a:effectLst/>
+                <a:latin typeface="Times New Roman" panose="02020603050405020304" pitchFamily="18" charset="0"/>
+                <a:ea typeface="Segoe UI Symbol" panose="020B0502040204020203" pitchFamily="34" charset="0"/>
+              </a:rPr>
+              <a:t>Fig </a:t>
+            </a:r>
+            <a:r>
+              <a:rPr lang="en-IN" b="1" dirty="0">
+                <a:latin typeface="Times New Roman" panose="02020603050405020304" pitchFamily="18" charset="0"/>
+                <a:ea typeface="Segoe UI Symbol" panose="020B0502040204020203" pitchFamily="34" charset="0"/>
+              </a:rPr>
+              <a:t>2:</a:t>
+            </a:r>
+            <a:r>
+              <a:rPr lang="en-IN" sz="1800" b="1" dirty="0">
+                <a:effectLst/>
+                <a:latin typeface="Times New Roman" panose="02020603050405020304" pitchFamily="18" charset="0"/>
+                <a:ea typeface="Segoe UI Symbol" panose="020B0502040204020203" pitchFamily="34" charset="0"/>
+              </a:rPr>
+              <a:t> Script Generation phase </a:t>
+            </a:r>
+            <a:endParaRPr lang="en-IN" sz="1600" dirty="0">
+              <a:effectLst/>
+              <a:latin typeface="Times New Roman" panose="02020603050405020304" pitchFamily="18" charset="0"/>
+              <a:ea typeface="Times New Roman" panose="02020603050405020304" pitchFamily="18" charset="0"/>
+            </a:endParaRPr>
+          </a:p>
+        </p:txBody>
+      </p:sp>
+    </p:spTree>
+    <p:extLst>
+      <p:ext uri="{BB962C8B-B14F-4D97-AF65-F5344CB8AC3E}">
+        <p14:creationId xmlns:p14="http://schemas.microsoft.com/office/powerpoint/2010/main" val="2564376885"/>
+      </p:ext>
+    </p:extLst>
+  </p:cSld>
+  <p:clrMapOvr>
+    <a:masterClrMapping/>
+  </p:clrMapOvr>
+</p:sld>
+</file>
+
+<file path=ppt/slides/slide19.xml><?xml version="1.0" encoding="utf-8"?>
+<p:sld xmlns:a="http://schemas.openxmlformats.org/drawingml/2006/main" xmlns:r="http://schemas.openxmlformats.org/officeDocument/2006/relationships" xmlns:p="http://schemas.openxmlformats.org/presentationml/2006/main">
+  <p:cSld>
+    <p:spTree>
+      <p:nvGrpSpPr>
+        <p:cNvPr id="1" name="">
+          <a:extLst>
+            <a:ext uri="{FF2B5EF4-FFF2-40B4-BE49-F238E27FC236}">
+              <a16:creationId xmlns:a16="http://schemas.microsoft.com/office/drawing/2014/main" id="{61ADEBF6-1A97-3407-0021-02448EF5E7F8}"/>
+            </a:ext>
+          </a:extLst>
+        </p:cNvPr>
+        <p:cNvGrpSpPr/>
+        <p:nvPr/>
+      </p:nvGrpSpPr>
+      <p:grpSpPr>
+        <a:xfrm>
+          <a:off x="0" y="0"/>
+          <a:ext cx="0" cy="0"/>
+          <a:chOff x="0" y="0"/>
+          <a:chExt cx="0" cy="0"/>
+        </a:xfrm>
+      </p:grpSpPr>
+      <p:sp>
+        <p:nvSpPr>
+          <p:cNvPr id="6" name="Rounded Rectangle 4">
+            <a:extLst>
+              <a:ext uri="{FF2B5EF4-FFF2-40B4-BE49-F238E27FC236}">
+                <a16:creationId xmlns:a16="http://schemas.microsoft.com/office/drawing/2014/main" id="{1633222C-1CC0-28AD-1731-C15C09B1A64E}"/>
+              </a:ext>
+            </a:extLst>
+          </p:cNvPr>
+          <p:cNvSpPr/>
+          <p:nvPr/>
+        </p:nvSpPr>
+        <p:spPr>
+          <a:xfrm>
+            <a:off x="0" y="6462940"/>
+            <a:ext cx="12207875" cy="393700"/>
+          </a:xfrm>
+          <a:prstGeom prst="rect">
+            <a:avLst/>
+          </a:prstGeom>
+          <a:solidFill>
+            <a:srgbClr val="5B9BD5"/>
+          </a:solidFill>
+        </p:spPr>
+        <p:style>
+          <a:lnRef idx="2">
+            <a:schemeClr val="accent1">
+              <a:shade val="50000"/>
+            </a:schemeClr>
+          </a:lnRef>
+          <a:fillRef idx="1">
+            <a:schemeClr val="accent1"/>
+          </a:fillRef>
+          <a:effectRef idx="0">
+            <a:schemeClr val="accent1"/>
+          </a:effectRef>
+          <a:fontRef idx="minor">
+            <a:schemeClr val="lt1"/>
+          </a:fontRef>
+        </p:style>
+        <p:txBody>
+          <a:bodyPr anchor="ctr"/>
+          <a:lstStyle/>
+          <a:p>
+            <a:pPr marL="0" marR="0" lvl="0" indent="0" algn="ctr" defTabSz="914400" rtl="0" eaLnBrk="0" fontAlgn="base" latinLnBrk="0" hangingPunct="0">
+              <a:lnSpc>
+                <a:spcPct val="100000"/>
+              </a:lnSpc>
+              <a:spcBef>
+                <a:spcPct val="0"/>
+              </a:spcBef>
+              <a:spcAft>
+                <a:spcPct val="0"/>
+              </a:spcAft>
+              <a:buClrTx/>
+              <a:buSzTx/>
+              <a:buFontTx/>
+              <a:buNone/>
+              <a:defRPr/>
+            </a:pPr>
+            <a:endParaRPr kumimoji="0" lang="en-IN" sz="1800" b="1" i="0" u="none" strike="noStrike" kern="1200" cap="none" spc="0" normalizeH="0" baseline="0" noProof="0" dirty="0">
+              <a:ln>
+                <a:noFill/>
+              </a:ln>
+              <a:solidFill>
+                <a:schemeClr val="tx1"/>
+              </a:solidFill>
+              <a:effectLst/>
+              <a:uLnTx/>
+              <a:uFillTx/>
+              <a:latin typeface="Arial Rounded MT Bold" pitchFamily="34" charset="0"/>
+              <a:ea typeface="+mn-ea"/>
+              <a:cs typeface="+mn-cs"/>
+            </a:endParaRPr>
+          </a:p>
+        </p:txBody>
+      </p:sp>
+      <p:sp>
+        <p:nvSpPr>
+          <p:cNvPr id="7" name="TextBox 6">
+            <a:extLst>
+              <a:ext uri="{FF2B5EF4-FFF2-40B4-BE49-F238E27FC236}">
+                <a16:creationId xmlns:a16="http://schemas.microsoft.com/office/drawing/2014/main" id="{77665D6C-D3C1-973A-7C6D-D1F35B3CB618}"/>
+              </a:ext>
+            </a:extLst>
+          </p:cNvPr>
+          <p:cNvSpPr txBox="1"/>
+          <p:nvPr/>
+        </p:nvSpPr>
+        <p:spPr>
+          <a:xfrm>
+            <a:off x="443971" y="6490513"/>
+            <a:ext cx="11288182" cy="338554"/>
+          </a:xfrm>
+          <a:prstGeom prst="rect">
+            <a:avLst/>
+          </a:prstGeom>
+          <a:noFill/>
+        </p:spPr>
+        <p:txBody>
+          <a:bodyPr wrap="square" rtlCol="0">
+            <a:spAutoFit/>
+          </a:bodyPr>
+          <a:lstStyle/>
+          <a:p>
+            <a:pPr marL="0" marR="0" lvl="0" indent="0" algn="ctr" defTabSz="914400" rtl="0" eaLnBrk="0" fontAlgn="base" latinLnBrk="0" hangingPunct="0">
+              <a:lnSpc>
+                <a:spcPct val="100000"/>
+              </a:lnSpc>
+              <a:spcBef>
+                <a:spcPct val="0"/>
+              </a:spcBef>
+              <a:spcAft>
+                <a:spcPct val="0"/>
+              </a:spcAft>
+              <a:buClrTx/>
+              <a:buSzTx/>
+              <a:buFontTx/>
+              <a:buNone/>
+              <a:defRPr/>
+            </a:pPr>
+            <a:r>
+              <a:rPr kumimoji="0" lang="en-IN" sz="1600" b="1" i="0" u="none" strike="noStrike" kern="1200" cap="none" spc="0" normalizeH="0" baseline="0" noProof="0" dirty="0">
+                <a:ln>
+                  <a:noFill/>
+                </a:ln>
+                <a:solidFill>
+                  <a:schemeClr val="tx1"/>
+                </a:solidFill>
+                <a:effectLst/>
+                <a:uLnTx/>
+                <a:uFillTx/>
+                <a:latin typeface="Arial Rounded MT Bold" pitchFamily="34" charset="0"/>
+                <a:ea typeface="+mn-ea"/>
+                <a:cs typeface="+mn-cs"/>
+              </a:rPr>
+              <a:t>B.Tech III Year – II Sem | Dept of Computational Intelligence| Application Development – II | Project Review</a:t>
+            </a:r>
+          </a:p>
+        </p:txBody>
+      </p:sp>
+      <p:sp>
+        <p:nvSpPr>
+          <p:cNvPr id="8" name="Rounded Rectangle 4">
+            <a:extLst>
+              <a:ext uri="{FF2B5EF4-FFF2-40B4-BE49-F238E27FC236}">
+                <a16:creationId xmlns:a16="http://schemas.microsoft.com/office/drawing/2014/main" id="{6E6B5FD0-F6FE-465E-CA39-2E8F225DBB47}"/>
+              </a:ext>
+            </a:extLst>
+          </p:cNvPr>
+          <p:cNvSpPr/>
+          <p:nvPr/>
+        </p:nvSpPr>
+        <p:spPr>
+          <a:xfrm>
+            <a:off x="-15875" y="-10805"/>
+            <a:ext cx="12207875" cy="393700"/>
+          </a:xfrm>
+          <a:prstGeom prst="rect">
+            <a:avLst/>
+          </a:prstGeom>
+          <a:solidFill>
+            <a:srgbClr val="5B9BD5"/>
+          </a:solidFill>
+        </p:spPr>
+        <p:style>
+          <a:lnRef idx="2">
+            <a:schemeClr val="accent1">
+              <a:shade val="50000"/>
+            </a:schemeClr>
+          </a:lnRef>
+          <a:fillRef idx="1">
+            <a:schemeClr val="accent1"/>
+          </a:fillRef>
+          <a:effectRef idx="0">
+            <a:schemeClr val="accent1"/>
+          </a:effectRef>
+          <a:fontRef idx="minor">
+            <a:schemeClr val="lt1"/>
+          </a:fontRef>
+        </p:style>
+        <p:txBody>
+          <a:bodyPr anchor="ctr"/>
+          <a:lstStyle/>
+          <a:p>
+            <a:pPr marL="0" marR="0" lvl="0" indent="0" algn="ctr" defTabSz="914400" rtl="0" eaLnBrk="0" fontAlgn="base" latinLnBrk="0" hangingPunct="0">
+              <a:lnSpc>
+                <a:spcPct val="100000"/>
+              </a:lnSpc>
+              <a:spcBef>
+                <a:spcPct val="0"/>
+              </a:spcBef>
+              <a:spcAft>
+                <a:spcPct val="0"/>
+              </a:spcAft>
+              <a:buClrTx/>
+              <a:buSzTx/>
+              <a:buFontTx/>
+              <a:buNone/>
+              <a:defRPr/>
+            </a:pPr>
+            <a:endParaRPr kumimoji="0" lang="en-IN" sz="1800" b="1" i="0" u="none" strike="noStrike" kern="1200" cap="none" spc="0" normalizeH="0" baseline="0" noProof="0" dirty="0">
+              <a:ln>
+                <a:noFill/>
+              </a:ln>
+              <a:solidFill>
+                <a:schemeClr val="tx1"/>
+              </a:solidFill>
+              <a:effectLst/>
+              <a:uLnTx/>
+              <a:uFillTx/>
+              <a:latin typeface="Arial Rounded MT Bold" pitchFamily="34" charset="0"/>
+              <a:ea typeface="+mn-ea"/>
+              <a:cs typeface="+mn-cs"/>
+            </a:endParaRPr>
+          </a:p>
+        </p:txBody>
+      </p:sp>
+      <p:sp>
+        <p:nvSpPr>
+          <p:cNvPr id="9" name="TextBox 8">
+            <a:extLst>
+              <a:ext uri="{FF2B5EF4-FFF2-40B4-BE49-F238E27FC236}">
+                <a16:creationId xmlns:a16="http://schemas.microsoft.com/office/drawing/2014/main" id="{186411D7-64AF-3F4F-58EC-AB530CC40753}"/>
+              </a:ext>
+            </a:extLst>
+          </p:cNvPr>
+          <p:cNvSpPr txBox="1"/>
+          <p:nvPr/>
+        </p:nvSpPr>
+        <p:spPr>
+          <a:xfrm>
+            <a:off x="2801516" y="16768"/>
+            <a:ext cx="6588967" cy="338554"/>
+          </a:xfrm>
+          <a:prstGeom prst="rect">
+            <a:avLst/>
+          </a:prstGeom>
+          <a:noFill/>
+        </p:spPr>
+        <p:txBody>
+          <a:bodyPr wrap="square" rtlCol="0">
+            <a:spAutoFit/>
+          </a:bodyPr>
+          <a:lstStyle/>
+          <a:p>
+            <a:r>
+              <a:rPr lang="en-US" sz="1600" b="1" dirty="0">
+                <a:latin typeface="Arial Rounded MT Bold" panose="020F0704030504030204" pitchFamily="34" charset="0"/>
+                <a:cs typeface="Arial" panose="020B0604020202020204" pitchFamily="34" charset="0"/>
+              </a:rPr>
+              <a:t>MALLA REDDY COLLEGE OF ENGINEERING AND TECHNOLOGY</a:t>
+            </a:r>
+            <a:endParaRPr lang="x-none" sz="1600" b="1" dirty="0">
+              <a:latin typeface="Arial Rounded MT Bold" panose="020F0704030504030204" pitchFamily="34" charset="0"/>
+              <a:cs typeface="Arial" panose="020B0604020202020204" pitchFamily="34" charset="0"/>
+            </a:endParaRPr>
+          </a:p>
+        </p:txBody>
+      </p:sp>
+      <p:pic>
+        <p:nvPicPr>
+          <p:cNvPr id="10" name="Picture 6">
+            <a:extLst>
+              <a:ext uri="{FF2B5EF4-FFF2-40B4-BE49-F238E27FC236}">
+                <a16:creationId xmlns:a16="http://schemas.microsoft.com/office/drawing/2014/main" id="{C76F7C13-DC91-4820-2669-CC3F1CD9BD4E}"/>
+              </a:ext>
+            </a:extLst>
+          </p:cNvPr>
+          <p:cNvPicPr>
+            <a:picLocks noChangeAspect="1"/>
+          </p:cNvPicPr>
+          <p:nvPr/>
+        </p:nvPicPr>
+        <p:blipFill>
+          <a:blip r:embed="rId2" cstate="print"/>
+          <a:stretch>
+            <a:fillRect/>
+          </a:stretch>
+        </p:blipFill>
+        <p:spPr>
+          <a:xfrm>
+            <a:off x="10899775" y="-128587"/>
+            <a:ext cx="1276350" cy="1276350"/>
+          </a:xfrm>
+          <a:prstGeom prst="rect">
+            <a:avLst/>
+          </a:prstGeom>
+          <a:noFill/>
+          <a:ln w="9525">
+            <a:noFill/>
+          </a:ln>
+        </p:spPr>
+      </p:pic>
+      <p:sp>
+        <p:nvSpPr>
+          <p:cNvPr id="12" name="Slide Number Placeholder 3">
+            <a:extLst>
+              <a:ext uri="{FF2B5EF4-FFF2-40B4-BE49-F238E27FC236}">
+                <a16:creationId xmlns:a16="http://schemas.microsoft.com/office/drawing/2014/main" id="{F826CDB6-686C-9DDB-CBC0-C330AC8CF119}"/>
+              </a:ext>
+            </a:extLst>
+          </p:cNvPr>
+          <p:cNvSpPr txBox="1">
+            <a:spLocks/>
+          </p:cNvSpPr>
+          <p:nvPr/>
+        </p:nvSpPr>
+        <p:spPr>
+          <a:xfrm>
+            <a:off x="9067800" y="6176963"/>
+            <a:ext cx="2743200" cy="365125"/>
+          </a:xfrm>
+          <a:prstGeom prst="rect">
+            <a:avLst/>
+          </a:prstGeom>
+          <a:noFill/>
+          <a:ln>
+            <a:noFill/>
+          </a:ln>
+        </p:spPr>
+        <p:txBody>
+          <a:bodyPr anchor="ctr" anchorCtr="0"/>
+          <a:lstStyle>
+            <a:defPPr>
+              <a:defRPr lang="x-none"/>
+            </a:defPPr>
+            <a:lvl1pPr marL="0" algn="l" defTabSz="914400" rtl="0" eaLnBrk="1" latinLnBrk="0" hangingPunct="1">
+              <a:defRPr sz="1800" kern="1200">
+                <a:solidFill>
+                  <a:schemeClr val="tx1"/>
+                </a:solidFill>
+                <a:latin typeface="+mn-lt"/>
+                <a:ea typeface="+mn-ea"/>
+                <a:cs typeface="+mn-cs"/>
+              </a:defRPr>
+            </a:lvl1pPr>
+            <a:lvl2pPr marL="457200" algn="l" defTabSz="914400" rtl="0" eaLnBrk="1" latinLnBrk="0" hangingPunct="1">
+              <a:defRPr sz="1800" kern="1200">
+                <a:solidFill>
+                  <a:schemeClr val="tx1"/>
+                </a:solidFill>
+                <a:latin typeface="+mn-lt"/>
+                <a:ea typeface="+mn-ea"/>
+                <a:cs typeface="+mn-cs"/>
+              </a:defRPr>
+            </a:lvl2pPr>
+            <a:lvl3pPr marL="914400" algn="l" defTabSz="914400" rtl="0" eaLnBrk="1" latinLnBrk="0" hangingPunct="1">
+              <a:defRPr sz="1800" kern="1200">
+                <a:solidFill>
+                  <a:schemeClr val="tx1"/>
+                </a:solidFill>
+                <a:latin typeface="+mn-lt"/>
+                <a:ea typeface="+mn-ea"/>
+                <a:cs typeface="+mn-cs"/>
+              </a:defRPr>
+            </a:lvl3pPr>
+            <a:lvl4pPr marL="1371600" algn="l" defTabSz="914400" rtl="0" eaLnBrk="1" latinLnBrk="0" hangingPunct="1">
+              <a:defRPr sz="1800" kern="1200">
+                <a:solidFill>
+                  <a:schemeClr val="tx1"/>
+                </a:solidFill>
+                <a:latin typeface="+mn-lt"/>
+                <a:ea typeface="+mn-ea"/>
+                <a:cs typeface="+mn-cs"/>
+              </a:defRPr>
+            </a:lvl4pPr>
+            <a:lvl5pPr marL="1828800" algn="l" defTabSz="914400" rtl="0" eaLnBrk="1" latinLnBrk="0" hangingPunct="1">
+              <a:defRPr sz="1800" kern="1200">
+                <a:solidFill>
+                  <a:schemeClr val="tx1"/>
+                </a:solidFill>
+                <a:latin typeface="+mn-lt"/>
+                <a:ea typeface="+mn-ea"/>
+                <a:cs typeface="+mn-cs"/>
+              </a:defRPr>
+            </a:lvl5pPr>
+            <a:lvl6pPr marL="2286000" algn="l" defTabSz="914400" rtl="0" eaLnBrk="1" latinLnBrk="0" hangingPunct="1">
+              <a:defRPr sz="1800" kern="1200">
+                <a:solidFill>
+                  <a:schemeClr val="tx1"/>
+                </a:solidFill>
+                <a:latin typeface="+mn-lt"/>
+                <a:ea typeface="+mn-ea"/>
+                <a:cs typeface="+mn-cs"/>
+              </a:defRPr>
+            </a:lvl6pPr>
+            <a:lvl7pPr marL="2743200" algn="l" defTabSz="914400" rtl="0" eaLnBrk="1" latinLnBrk="0" hangingPunct="1">
+              <a:defRPr sz="1800" kern="1200">
+                <a:solidFill>
+                  <a:schemeClr val="tx1"/>
+                </a:solidFill>
+                <a:latin typeface="+mn-lt"/>
+                <a:ea typeface="+mn-ea"/>
+                <a:cs typeface="+mn-cs"/>
+              </a:defRPr>
+            </a:lvl7pPr>
+            <a:lvl8pPr marL="3200400" algn="l" defTabSz="914400" rtl="0" eaLnBrk="1" latinLnBrk="0" hangingPunct="1">
+              <a:defRPr sz="1800" kern="1200">
+                <a:solidFill>
+                  <a:schemeClr val="tx1"/>
+                </a:solidFill>
+                <a:latin typeface="+mn-lt"/>
+                <a:ea typeface="+mn-ea"/>
+                <a:cs typeface="+mn-cs"/>
+              </a:defRPr>
+            </a:lvl8pPr>
+            <a:lvl9pPr marL="3657600" algn="l" defTabSz="914400" rtl="0" eaLnBrk="1" latinLnBrk="0" hangingPunct="1">
+              <a:defRPr sz="1800" kern="1200">
+                <a:solidFill>
+                  <a:schemeClr val="tx1"/>
+                </a:solidFill>
+                <a:latin typeface="+mn-lt"/>
+                <a:ea typeface="+mn-ea"/>
+                <a:cs typeface="+mn-cs"/>
+              </a:defRPr>
+            </a:lvl9pPr>
+          </a:lstStyle>
+          <a:p>
+            <a:pPr algn="r">
+              <a:spcBef>
+                <a:spcPct val="0"/>
+              </a:spcBef>
+            </a:pPr>
+            <a:fld id="{9A0DB2DC-4C9A-4742-B13C-FB6460FD3503}" type="slidenum">
+              <a:rPr lang="en-IN" altLang="en-US" sz="1200" b="1" smtClean="0">
+                <a:solidFill>
+                  <a:srgbClr val="C00000"/>
+                </a:solidFill>
+              </a:rPr>
+              <a:pPr algn="r">
+                <a:spcBef>
+                  <a:spcPct val="0"/>
+                </a:spcBef>
+              </a:pPr>
+              <a:t>19</a:t>
+            </a:fld>
+            <a:endParaRPr lang="en-IN" altLang="en-US" sz="1200" b="1" dirty="0">
+              <a:solidFill>
+                <a:srgbClr val="C00000"/>
+              </a:solidFill>
+            </a:endParaRPr>
+          </a:p>
+        </p:txBody>
+      </p:sp>
+      <p:pic>
+        <p:nvPicPr>
+          <p:cNvPr id="2" name="Picture 1">
+            <a:extLst>
+              <a:ext uri="{FF2B5EF4-FFF2-40B4-BE49-F238E27FC236}">
+                <a16:creationId xmlns:a16="http://schemas.microsoft.com/office/drawing/2014/main" id="{B2DDE2C4-CB4D-8146-9B09-B6675DC79F9B}"/>
+              </a:ext>
+            </a:extLst>
+          </p:cNvPr>
+          <p:cNvPicPr>
+            <a:picLocks noChangeAspect="1"/>
+          </p:cNvPicPr>
+          <p:nvPr/>
+        </p:nvPicPr>
+        <p:blipFill>
+          <a:blip r:embed="rId3" cstate="print">
+            <a:extLst>
+              <a:ext uri="{28A0092B-C50C-407E-A947-70E740481C1C}">
+                <a14:useLocalDpi xmlns:a14="http://schemas.microsoft.com/office/drawing/2010/main" val="0"/>
+              </a:ext>
+            </a:extLst>
+          </a:blip>
+          <a:srcRect/>
+          <a:stretch>
+            <a:fillRect/>
+          </a:stretch>
+        </p:blipFill>
+        <p:spPr bwMode="auto">
+          <a:xfrm>
+            <a:off x="1195468" y="743939"/>
+            <a:ext cx="9688432" cy="4906918"/>
+          </a:xfrm>
+          <a:prstGeom prst="rect">
+            <a:avLst/>
+          </a:prstGeom>
+          <a:noFill/>
+          <a:ln>
+            <a:noFill/>
+          </a:ln>
+        </p:spPr>
+      </p:pic>
+      <p:sp>
+        <p:nvSpPr>
+          <p:cNvPr id="5" name="TextBox 4">
+            <a:extLst>
+              <a:ext uri="{FF2B5EF4-FFF2-40B4-BE49-F238E27FC236}">
+                <a16:creationId xmlns:a16="http://schemas.microsoft.com/office/drawing/2014/main" id="{B6E0BF4B-92EA-5B19-D939-134A2272B2C2}"/>
+              </a:ext>
+            </a:extLst>
+          </p:cNvPr>
+          <p:cNvSpPr txBox="1"/>
+          <p:nvPr/>
+        </p:nvSpPr>
+        <p:spPr>
+          <a:xfrm>
+            <a:off x="4359014" y="5775470"/>
+            <a:ext cx="4131844" cy="369332"/>
+          </a:xfrm>
+          <a:prstGeom prst="rect">
+            <a:avLst/>
+          </a:prstGeom>
+          <a:noFill/>
+        </p:spPr>
+        <p:txBody>
+          <a:bodyPr wrap="square">
+            <a:spAutoFit/>
+          </a:bodyPr>
+          <a:lstStyle/>
+          <a:p>
+            <a:r>
+              <a:rPr lang="en-IN" sz="1800" b="1" dirty="0">
+                <a:effectLst/>
+                <a:latin typeface="Times New Roman" panose="02020603050405020304" pitchFamily="18" charset="0"/>
+                <a:ea typeface="Segoe UI Symbol" panose="020B0502040204020203" pitchFamily="34" charset="0"/>
+              </a:rPr>
+              <a:t>Fig 3: Voiceover Generation Phase</a:t>
+            </a:r>
+            <a:endParaRPr lang="en-IN" dirty="0"/>
+          </a:p>
+        </p:txBody>
+      </p:sp>
+    </p:spTree>
+    <p:extLst>
+      <p:ext uri="{BB962C8B-B14F-4D97-AF65-F5344CB8AC3E}">
+        <p14:creationId xmlns:p14="http://schemas.microsoft.com/office/powerpoint/2010/main" val="3562426496"/>
       </p:ext>
     </p:extLst>
   </p:cSld>
@@ -10028,6 +11495,18 @@
               <a:rPr lang="en-US" altLang="en-IN" sz="2800" dirty="0">
                 <a:latin typeface="Times New Roman" panose="02020603050405020304" pitchFamily="18" charset="0"/>
               </a:rPr>
+              <a:t>Output Screenshots</a:t>
+            </a:r>
+          </a:p>
+          <a:p>
+            <a:pPr marL="342900" indent="-342900" algn="l">
+              <a:buFont typeface="Arial" panose="020B0604020202020204" pitchFamily="34" charset="0"/>
+              <a:buChar char="•"/>
+            </a:pPr>
+            <a:r>
+              <a:rPr lang="en-US" altLang="en-IN" sz="2800" dirty="0">
+                <a:latin typeface="Times New Roman" panose="02020603050405020304" pitchFamily="18" charset="0"/>
+              </a:rPr>
               <a:t>Conclusion</a:t>
             </a:r>
           </a:p>
@@ -10188,6 +11667,2619 @@
     <p:extLst>
       <p:ext uri="{BB962C8B-B14F-4D97-AF65-F5344CB8AC3E}">
         <p14:creationId xmlns:p14="http://schemas.microsoft.com/office/powerpoint/2010/main" val="3490016719"/>
+      </p:ext>
+    </p:extLst>
+  </p:cSld>
+  <p:clrMapOvr>
+    <a:masterClrMapping/>
+  </p:clrMapOvr>
+</p:sld>
+</file>
+
+<file path=ppt/slides/slide20.xml><?xml version="1.0" encoding="utf-8"?>
+<p:sld xmlns:a="http://schemas.openxmlformats.org/drawingml/2006/main" xmlns:r="http://schemas.openxmlformats.org/officeDocument/2006/relationships" xmlns:p="http://schemas.openxmlformats.org/presentationml/2006/main">
+  <p:cSld>
+    <p:spTree>
+      <p:nvGrpSpPr>
+        <p:cNvPr id="1" name="">
+          <a:extLst>
+            <a:ext uri="{FF2B5EF4-FFF2-40B4-BE49-F238E27FC236}">
+              <a16:creationId xmlns:a16="http://schemas.microsoft.com/office/drawing/2014/main" id="{38B9C2D4-B9E3-8558-1F5D-4A03F83534AE}"/>
+            </a:ext>
+          </a:extLst>
+        </p:cNvPr>
+        <p:cNvGrpSpPr/>
+        <p:nvPr/>
+      </p:nvGrpSpPr>
+      <p:grpSpPr>
+        <a:xfrm>
+          <a:off x="0" y="0"/>
+          <a:ext cx="0" cy="0"/>
+          <a:chOff x="0" y="0"/>
+          <a:chExt cx="0" cy="0"/>
+        </a:xfrm>
+      </p:grpSpPr>
+      <p:sp>
+        <p:nvSpPr>
+          <p:cNvPr id="6" name="Rounded Rectangle 4">
+            <a:extLst>
+              <a:ext uri="{FF2B5EF4-FFF2-40B4-BE49-F238E27FC236}">
+                <a16:creationId xmlns:a16="http://schemas.microsoft.com/office/drawing/2014/main" id="{43988B9E-8D2D-E7C5-AD58-89BB09EC149F}"/>
+              </a:ext>
+            </a:extLst>
+          </p:cNvPr>
+          <p:cNvSpPr/>
+          <p:nvPr/>
+        </p:nvSpPr>
+        <p:spPr>
+          <a:xfrm>
+            <a:off x="0" y="6462940"/>
+            <a:ext cx="12207875" cy="393700"/>
+          </a:xfrm>
+          <a:prstGeom prst="rect">
+            <a:avLst/>
+          </a:prstGeom>
+          <a:solidFill>
+            <a:srgbClr val="5B9BD5"/>
+          </a:solidFill>
+        </p:spPr>
+        <p:style>
+          <a:lnRef idx="2">
+            <a:schemeClr val="accent1">
+              <a:shade val="50000"/>
+            </a:schemeClr>
+          </a:lnRef>
+          <a:fillRef idx="1">
+            <a:schemeClr val="accent1"/>
+          </a:fillRef>
+          <a:effectRef idx="0">
+            <a:schemeClr val="accent1"/>
+          </a:effectRef>
+          <a:fontRef idx="minor">
+            <a:schemeClr val="lt1"/>
+          </a:fontRef>
+        </p:style>
+        <p:txBody>
+          <a:bodyPr anchor="ctr"/>
+          <a:lstStyle/>
+          <a:p>
+            <a:pPr marL="0" marR="0" lvl="0" indent="0" algn="ctr" defTabSz="914400" rtl="0" eaLnBrk="0" fontAlgn="base" latinLnBrk="0" hangingPunct="0">
+              <a:lnSpc>
+                <a:spcPct val="100000"/>
+              </a:lnSpc>
+              <a:spcBef>
+                <a:spcPct val="0"/>
+              </a:spcBef>
+              <a:spcAft>
+                <a:spcPct val="0"/>
+              </a:spcAft>
+              <a:buClrTx/>
+              <a:buSzTx/>
+              <a:buFontTx/>
+              <a:buNone/>
+              <a:defRPr/>
+            </a:pPr>
+            <a:endParaRPr kumimoji="0" lang="en-IN" sz="1800" b="1" i="0" u="none" strike="noStrike" kern="1200" cap="none" spc="0" normalizeH="0" baseline="0" noProof="0" dirty="0">
+              <a:ln>
+                <a:noFill/>
+              </a:ln>
+              <a:solidFill>
+                <a:schemeClr val="tx1"/>
+              </a:solidFill>
+              <a:effectLst/>
+              <a:uLnTx/>
+              <a:uFillTx/>
+              <a:latin typeface="Arial Rounded MT Bold" pitchFamily="34" charset="0"/>
+              <a:ea typeface="+mn-ea"/>
+              <a:cs typeface="+mn-cs"/>
+            </a:endParaRPr>
+          </a:p>
+        </p:txBody>
+      </p:sp>
+      <p:sp>
+        <p:nvSpPr>
+          <p:cNvPr id="7" name="TextBox 6">
+            <a:extLst>
+              <a:ext uri="{FF2B5EF4-FFF2-40B4-BE49-F238E27FC236}">
+                <a16:creationId xmlns:a16="http://schemas.microsoft.com/office/drawing/2014/main" id="{3161D6C9-8935-5CCE-658D-E408F5BBCC17}"/>
+              </a:ext>
+            </a:extLst>
+          </p:cNvPr>
+          <p:cNvSpPr txBox="1"/>
+          <p:nvPr/>
+        </p:nvSpPr>
+        <p:spPr>
+          <a:xfrm>
+            <a:off x="443971" y="6490513"/>
+            <a:ext cx="11288182" cy="338554"/>
+          </a:xfrm>
+          <a:prstGeom prst="rect">
+            <a:avLst/>
+          </a:prstGeom>
+          <a:noFill/>
+        </p:spPr>
+        <p:txBody>
+          <a:bodyPr wrap="square" rtlCol="0">
+            <a:spAutoFit/>
+          </a:bodyPr>
+          <a:lstStyle/>
+          <a:p>
+            <a:pPr marL="0" marR="0" lvl="0" indent="0" algn="ctr" defTabSz="914400" rtl="0" eaLnBrk="0" fontAlgn="base" latinLnBrk="0" hangingPunct="0">
+              <a:lnSpc>
+                <a:spcPct val="100000"/>
+              </a:lnSpc>
+              <a:spcBef>
+                <a:spcPct val="0"/>
+              </a:spcBef>
+              <a:spcAft>
+                <a:spcPct val="0"/>
+              </a:spcAft>
+              <a:buClrTx/>
+              <a:buSzTx/>
+              <a:buFontTx/>
+              <a:buNone/>
+              <a:defRPr/>
+            </a:pPr>
+            <a:r>
+              <a:rPr kumimoji="0" lang="en-IN" sz="1600" b="1" i="0" u="none" strike="noStrike" kern="1200" cap="none" spc="0" normalizeH="0" baseline="0" noProof="0" dirty="0">
+                <a:ln>
+                  <a:noFill/>
+                </a:ln>
+                <a:solidFill>
+                  <a:schemeClr val="tx1"/>
+                </a:solidFill>
+                <a:effectLst/>
+                <a:uLnTx/>
+                <a:uFillTx/>
+                <a:latin typeface="Arial Rounded MT Bold" pitchFamily="34" charset="0"/>
+                <a:ea typeface="+mn-ea"/>
+                <a:cs typeface="+mn-cs"/>
+              </a:rPr>
+              <a:t>B.Tech III Year – II Sem | Dept of Computational Intelligence| Application Development – II | Project Review</a:t>
+            </a:r>
+          </a:p>
+        </p:txBody>
+      </p:sp>
+      <p:sp>
+        <p:nvSpPr>
+          <p:cNvPr id="8" name="Rounded Rectangle 4">
+            <a:extLst>
+              <a:ext uri="{FF2B5EF4-FFF2-40B4-BE49-F238E27FC236}">
+                <a16:creationId xmlns:a16="http://schemas.microsoft.com/office/drawing/2014/main" id="{B110B1CC-0E07-BC2E-7A0A-1FD6F6382EBE}"/>
+              </a:ext>
+            </a:extLst>
+          </p:cNvPr>
+          <p:cNvSpPr/>
+          <p:nvPr/>
+        </p:nvSpPr>
+        <p:spPr>
+          <a:xfrm>
+            <a:off x="-15875" y="-10805"/>
+            <a:ext cx="12207875" cy="393700"/>
+          </a:xfrm>
+          <a:prstGeom prst="rect">
+            <a:avLst/>
+          </a:prstGeom>
+          <a:solidFill>
+            <a:srgbClr val="5B9BD5"/>
+          </a:solidFill>
+        </p:spPr>
+        <p:style>
+          <a:lnRef idx="2">
+            <a:schemeClr val="accent1">
+              <a:shade val="50000"/>
+            </a:schemeClr>
+          </a:lnRef>
+          <a:fillRef idx="1">
+            <a:schemeClr val="accent1"/>
+          </a:fillRef>
+          <a:effectRef idx="0">
+            <a:schemeClr val="accent1"/>
+          </a:effectRef>
+          <a:fontRef idx="minor">
+            <a:schemeClr val="lt1"/>
+          </a:fontRef>
+        </p:style>
+        <p:txBody>
+          <a:bodyPr anchor="ctr"/>
+          <a:lstStyle/>
+          <a:p>
+            <a:pPr marL="0" marR="0" lvl="0" indent="0" algn="ctr" defTabSz="914400" rtl="0" eaLnBrk="0" fontAlgn="base" latinLnBrk="0" hangingPunct="0">
+              <a:lnSpc>
+                <a:spcPct val="100000"/>
+              </a:lnSpc>
+              <a:spcBef>
+                <a:spcPct val="0"/>
+              </a:spcBef>
+              <a:spcAft>
+                <a:spcPct val="0"/>
+              </a:spcAft>
+              <a:buClrTx/>
+              <a:buSzTx/>
+              <a:buFontTx/>
+              <a:buNone/>
+              <a:defRPr/>
+            </a:pPr>
+            <a:endParaRPr kumimoji="0" lang="en-IN" sz="1800" b="1" i="0" u="none" strike="noStrike" kern="1200" cap="none" spc="0" normalizeH="0" baseline="0" noProof="0" dirty="0">
+              <a:ln>
+                <a:noFill/>
+              </a:ln>
+              <a:solidFill>
+                <a:schemeClr val="tx1"/>
+              </a:solidFill>
+              <a:effectLst/>
+              <a:uLnTx/>
+              <a:uFillTx/>
+              <a:latin typeface="Arial Rounded MT Bold" pitchFamily="34" charset="0"/>
+              <a:ea typeface="+mn-ea"/>
+              <a:cs typeface="+mn-cs"/>
+            </a:endParaRPr>
+          </a:p>
+        </p:txBody>
+      </p:sp>
+      <p:sp>
+        <p:nvSpPr>
+          <p:cNvPr id="9" name="TextBox 8">
+            <a:extLst>
+              <a:ext uri="{FF2B5EF4-FFF2-40B4-BE49-F238E27FC236}">
+                <a16:creationId xmlns:a16="http://schemas.microsoft.com/office/drawing/2014/main" id="{55FF1701-1480-5CDD-B649-5473A1823A8A}"/>
+              </a:ext>
+            </a:extLst>
+          </p:cNvPr>
+          <p:cNvSpPr txBox="1"/>
+          <p:nvPr/>
+        </p:nvSpPr>
+        <p:spPr>
+          <a:xfrm>
+            <a:off x="2801516" y="16768"/>
+            <a:ext cx="6588967" cy="338554"/>
+          </a:xfrm>
+          <a:prstGeom prst="rect">
+            <a:avLst/>
+          </a:prstGeom>
+          <a:noFill/>
+        </p:spPr>
+        <p:txBody>
+          <a:bodyPr wrap="square" rtlCol="0">
+            <a:spAutoFit/>
+          </a:bodyPr>
+          <a:lstStyle/>
+          <a:p>
+            <a:r>
+              <a:rPr lang="en-US" sz="1600" b="1" dirty="0">
+                <a:latin typeface="Arial Rounded MT Bold" panose="020F0704030504030204" pitchFamily="34" charset="0"/>
+                <a:cs typeface="Arial" panose="020B0604020202020204" pitchFamily="34" charset="0"/>
+              </a:rPr>
+              <a:t>MALLA REDDY COLLEGE OF ENGINEERING AND TECHNOLOGY</a:t>
+            </a:r>
+            <a:endParaRPr lang="x-none" sz="1600" b="1" dirty="0">
+              <a:latin typeface="Arial Rounded MT Bold" panose="020F0704030504030204" pitchFamily="34" charset="0"/>
+              <a:cs typeface="Arial" panose="020B0604020202020204" pitchFamily="34" charset="0"/>
+            </a:endParaRPr>
+          </a:p>
+        </p:txBody>
+      </p:sp>
+      <p:pic>
+        <p:nvPicPr>
+          <p:cNvPr id="10" name="Picture 6">
+            <a:extLst>
+              <a:ext uri="{FF2B5EF4-FFF2-40B4-BE49-F238E27FC236}">
+                <a16:creationId xmlns:a16="http://schemas.microsoft.com/office/drawing/2014/main" id="{973F66B4-79F8-973F-D064-12AEBB6E0EF7}"/>
+              </a:ext>
+            </a:extLst>
+          </p:cNvPr>
+          <p:cNvPicPr>
+            <a:picLocks noChangeAspect="1"/>
+          </p:cNvPicPr>
+          <p:nvPr/>
+        </p:nvPicPr>
+        <p:blipFill>
+          <a:blip r:embed="rId2" cstate="print"/>
+          <a:stretch>
+            <a:fillRect/>
+          </a:stretch>
+        </p:blipFill>
+        <p:spPr>
+          <a:xfrm>
+            <a:off x="10899775" y="-128587"/>
+            <a:ext cx="1276350" cy="1276350"/>
+          </a:xfrm>
+          <a:prstGeom prst="rect">
+            <a:avLst/>
+          </a:prstGeom>
+          <a:noFill/>
+          <a:ln w="9525">
+            <a:noFill/>
+          </a:ln>
+        </p:spPr>
+      </p:pic>
+      <p:sp>
+        <p:nvSpPr>
+          <p:cNvPr id="12" name="Slide Number Placeholder 3">
+            <a:extLst>
+              <a:ext uri="{FF2B5EF4-FFF2-40B4-BE49-F238E27FC236}">
+                <a16:creationId xmlns:a16="http://schemas.microsoft.com/office/drawing/2014/main" id="{F4E5D813-1B80-1A41-6052-C66E0EBB83C3}"/>
+              </a:ext>
+            </a:extLst>
+          </p:cNvPr>
+          <p:cNvSpPr txBox="1">
+            <a:spLocks/>
+          </p:cNvSpPr>
+          <p:nvPr/>
+        </p:nvSpPr>
+        <p:spPr>
+          <a:xfrm>
+            <a:off x="9067800" y="6176963"/>
+            <a:ext cx="2743200" cy="365125"/>
+          </a:xfrm>
+          <a:prstGeom prst="rect">
+            <a:avLst/>
+          </a:prstGeom>
+          <a:noFill/>
+          <a:ln>
+            <a:noFill/>
+          </a:ln>
+        </p:spPr>
+        <p:txBody>
+          <a:bodyPr anchor="ctr" anchorCtr="0"/>
+          <a:lstStyle>
+            <a:defPPr>
+              <a:defRPr lang="x-none"/>
+            </a:defPPr>
+            <a:lvl1pPr marL="0" algn="l" defTabSz="914400" rtl="0" eaLnBrk="1" latinLnBrk="0" hangingPunct="1">
+              <a:defRPr sz="1800" kern="1200">
+                <a:solidFill>
+                  <a:schemeClr val="tx1"/>
+                </a:solidFill>
+                <a:latin typeface="+mn-lt"/>
+                <a:ea typeface="+mn-ea"/>
+                <a:cs typeface="+mn-cs"/>
+              </a:defRPr>
+            </a:lvl1pPr>
+            <a:lvl2pPr marL="457200" algn="l" defTabSz="914400" rtl="0" eaLnBrk="1" latinLnBrk="0" hangingPunct="1">
+              <a:defRPr sz="1800" kern="1200">
+                <a:solidFill>
+                  <a:schemeClr val="tx1"/>
+                </a:solidFill>
+                <a:latin typeface="+mn-lt"/>
+                <a:ea typeface="+mn-ea"/>
+                <a:cs typeface="+mn-cs"/>
+              </a:defRPr>
+            </a:lvl2pPr>
+            <a:lvl3pPr marL="914400" algn="l" defTabSz="914400" rtl="0" eaLnBrk="1" latinLnBrk="0" hangingPunct="1">
+              <a:defRPr sz="1800" kern="1200">
+                <a:solidFill>
+                  <a:schemeClr val="tx1"/>
+                </a:solidFill>
+                <a:latin typeface="+mn-lt"/>
+                <a:ea typeface="+mn-ea"/>
+                <a:cs typeface="+mn-cs"/>
+              </a:defRPr>
+            </a:lvl3pPr>
+            <a:lvl4pPr marL="1371600" algn="l" defTabSz="914400" rtl="0" eaLnBrk="1" latinLnBrk="0" hangingPunct="1">
+              <a:defRPr sz="1800" kern="1200">
+                <a:solidFill>
+                  <a:schemeClr val="tx1"/>
+                </a:solidFill>
+                <a:latin typeface="+mn-lt"/>
+                <a:ea typeface="+mn-ea"/>
+                <a:cs typeface="+mn-cs"/>
+              </a:defRPr>
+            </a:lvl4pPr>
+            <a:lvl5pPr marL="1828800" algn="l" defTabSz="914400" rtl="0" eaLnBrk="1" latinLnBrk="0" hangingPunct="1">
+              <a:defRPr sz="1800" kern="1200">
+                <a:solidFill>
+                  <a:schemeClr val="tx1"/>
+                </a:solidFill>
+                <a:latin typeface="+mn-lt"/>
+                <a:ea typeface="+mn-ea"/>
+                <a:cs typeface="+mn-cs"/>
+              </a:defRPr>
+            </a:lvl5pPr>
+            <a:lvl6pPr marL="2286000" algn="l" defTabSz="914400" rtl="0" eaLnBrk="1" latinLnBrk="0" hangingPunct="1">
+              <a:defRPr sz="1800" kern="1200">
+                <a:solidFill>
+                  <a:schemeClr val="tx1"/>
+                </a:solidFill>
+                <a:latin typeface="+mn-lt"/>
+                <a:ea typeface="+mn-ea"/>
+                <a:cs typeface="+mn-cs"/>
+              </a:defRPr>
+            </a:lvl6pPr>
+            <a:lvl7pPr marL="2743200" algn="l" defTabSz="914400" rtl="0" eaLnBrk="1" latinLnBrk="0" hangingPunct="1">
+              <a:defRPr sz="1800" kern="1200">
+                <a:solidFill>
+                  <a:schemeClr val="tx1"/>
+                </a:solidFill>
+                <a:latin typeface="+mn-lt"/>
+                <a:ea typeface="+mn-ea"/>
+                <a:cs typeface="+mn-cs"/>
+              </a:defRPr>
+            </a:lvl7pPr>
+            <a:lvl8pPr marL="3200400" algn="l" defTabSz="914400" rtl="0" eaLnBrk="1" latinLnBrk="0" hangingPunct="1">
+              <a:defRPr sz="1800" kern="1200">
+                <a:solidFill>
+                  <a:schemeClr val="tx1"/>
+                </a:solidFill>
+                <a:latin typeface="+mn-lt"/>
+                <a:ea typeface="+mn-ea"/>
+                <a:cs typeface="+mn-cs"/>
+              </a:defRPr>
+            </a:lvl8pPr>
+            <a:lvl9pPr marL="3657600" algn="l" defTabSz="914400" rtl="0" eaLnBrk="1" latinLnBrk="0" hangingPunct="1">
+              <a:defRPr sz="1800" kern="1200">
+                <a:solidFill>
+                  <a:schemeClr val="tx1"/>
+                </a:solidFill>
+                <a:latin typeface="+mn-lt"/>
+                <a:ea typeface="+mn-ea"/>
+                <a:cs typeface="+mn-cs"/>
+              </a:defRPr>
+            </a:lvl9pPr>
+          </a:lstStyle>
+          <a:p>
+            <a:pPr algn="r">
+              <a:spcBef>
+                <a:spcPct val="0"/>
+              </a:spcBef>
+            </a:pPr>
+            <a:fld id="{9A0DB2DC-4C9A-4742-B13C-FB6460FD3503}" type="slidenum">
+              <a:rPr lang="en-IN" altLang="en-US" sz="1200" b="1" smtClean="0">
+                <a:solidFill>
+                  <a:srgbClr val="C00000"/>
+                </a:solidFill>
+              </a:rPr>
+              <a:pPr algn="r">
+                <a:spcBef>
+                  <a:spcPct val="0"/>
+                </a:spcBef>
+              </a:pPr>
+              <a:t>20</a:t>
+            </a:fld>
+            <a:endParaRPr lang="en-IN" altLang="en-US" sz="1200" b="1" dirty="0">
+              <a:solidFill>
+                <a:srgbClr val="C00000"/>
+              </a:solidFill>
+            </a:endParaRPr>
+          </a:p>
+        </p:txBody>
+      </p:sp>
+      <p:pic>
+        <p:nvPicPr>
+          <p:cNvPr id="2" name="Picture 1">
+            <a:extLst>
+              <a:ext uri="{FF2B5EF4-FFF2-40B4-BE49-F238E27FC236}">
+                <a16:creationId xmlns:a16="http://schemas.microsoft.com/office/drawing/2014/main" id="{DDB3BE8F-3784-8960-459B-E2E3260E9C21}"/>
+              </a:ext>
+            </a:extLst>
+          </p:cNvPr>
+          <p:cNvPicPr>
+            <a:picLocks noChangeAspect="1"/>
+          </p:cNvPicPr>
+          <p:nvPr/>
+        </p:nvPicPr>
+        <p:blipFill>
+          <a:blip r:embed="rId3" cstate="print">
+            <a:extLst>
+              <a:ext uri="{28A0092B-C50C-407E-A947-70E740481C1C}">
+                <a14:useLocalDpi xmlns:a14="http://schemas.microsoft.com/office/drawing/2010/main" val="0"/>
+              </a:ext>
+            </a:extLst>
+          </a:blip>
+          <a:srcRect/>
+          <a:stretch>
+            <a:fillRect/>
+          </a:stretch>
+        </p:blipFill>
+        <p:spPr bwMode="auto">
+          <a:xfrm>
+            <a:off x="1045242" y="839757"/>
+            <a:ext cx="9633127" cy="4704918"/>
+          </a:xfrm>
+          <a:prstGeom prst="rect">
+            <a:avLst/>
+          </a:prstGeom>
+          <a:noFill/>
+          <a:ln>
+            <a:noFill/>
+          </a:ln>
+        </p:spPr>
+      </p:pic>
+      <p:sp>
+        <p:nvSpPr>
+          <p:cNvPr id="5" name="TextBox 4">
+            <a:extLst>
+              <a:ext uri="{FF2B5EF4-FFF2-40B4-BE49-F238E27FC236}">
+                <a16:creationId xmlns:a16="http://schemas.microsoft.com/office/drawing/2014/main" id="{B2CB9ED2-78C3-FF6A-2089-E17A2DACC0AD}"/>
+              </a:ext>
+            </a:extLst>
+          </p:cNvPr>
+          <p:cNvSpPr txBox="1"/>
+          <p:nvPr/>
+        </p:nvSpPr>
+        <p:spPr>
+          <a:xfrm>
+            <a:off x="2801516" y="5698072"/>
+            <a:ext cx="6120580" cy="458074"/>
+          </a:xfrm>
+          <a:prstGeom prst="rect">
+            <a:avLst/>
+          </a:prstGeom>
+          <a:noFill/>
+        </p:spPr>
+        <p:txBody>
+          <a:bodyPr wrap="square">
+            <a:spAutoFit/>
+          </a:bodyPr>
+          <a:lstStyle/>
+          <a:p>
+            <a:pPr algn="ctr">
+              <a:lnSpc>
+                <a:spcPct val="150000"/>
+              </a:lnSpc>
+              <a:spcAft>
+                <a:spcPts val="190"/>
+              </a:spcAft>
+            </a:pPr>
+            <a:r>
+              <a:rPr lang="en-IN" sz="1800" b="1" dirty="0">
+                <a:effectLst/>
+                <a:latin typeface="Times New Roman" panose="02020603050405020304" pitchFamily="18" charset="0"/>
+                <a:ea typeface="Segoe UI Symbol" panose="020B0502040204020203" pitchFamily="34" charset="0"/>
+              </a:rPr>
+              <a:t>Fig 4: Video Rendering Phase Shell Interface</a:t>
+            </a:r>
+            <a:endParaRPr lang="en-IN" sz="1600" dirty="0">
+              <a:effectLst/>
+              <a:latin typeface="Times New Roman" panose="02020603050405020304" pitchFamily="18" charset="0"/>
+              <a:ea typeface="Times New Roman" panose="02020603050405020304" pitchFamily="18" charset="0"/>
+            </a:endParaRPr>
+          </a:p>
+        </p:txBody>
+      </p:sp>
+    </p:spTree>
+    <p:extLst>
+      <p:ext uri="{BB962C8B-B14F-4D97-AF65-F5344CB8AC3E}">
+        <p14:creationId xmlns:p14="http://schemas.microsoft.com/office/powerpoint/2010/main" val="2104515576"/>
+      </p:ext>
+    </p:extLst>
+  </p:cSld>
+  <p:clrMapOvr>
+    <a:masterClrMapping/>
+  </p:clrMapOvr>
+</p:sld>
+</file>
+
+<file path=ppt/slides/slide21.xml><?xml version="1.0" encoding="utf-8"?>
+<p:sld xmlns:a="http://schemas.openxmlformats.org/drawingml/2006/main" xmlns:r="http://schemas.openxmlformats.org/officeDocument/2006/relationships" xmlns:p="http://schemas.openxmlformats.org/presentationml/2006/main">
+  <p:cSld>
+    <p:spTree>
+      <p:nvGrpSpPr>
+        <p:cNvPr id="1" name="">
+          <a:extLst>
+            <a:ext uri="{FF2B5EF4-FFF2-40B4-BE49-F238E27FC236}">
+              <a16:creationId xmlns:a16="http://schemas.microsoft.com/office/drawing/2014/main" id="{82C8BEDA-5151-5885-25B7-9615FFEAA0F9}"/>
+            </a:ext>
+          </a:extLst>
+        </p:cNvPr>
+        <p:cNvGrpSpPr/>
+        <p:nvPr/>
+      </p:nvGrpSpPr>
+      <p:grpSpPr>
+        <a:xfrm>
+          <a:off x="0" y="0"/>
+          <a:ext cx="0" cy="0"/>
+          <a:chOff x="0" y="0"/>
+          <a:chExt cx="0" cy="0"/>
+        </a:xfrm>
+      </p:grpSpPr>
+      <p:sp>
+        <p:nvSpPr>
+          <p:cNvPr id="6" name="Rounded Rectangle 4">
+            <a:extLst>
+              <a:ext uri="{FF2B5EF4-FFF2-40B4-BE49-F238E27FC236}">
+                <a16:creationId xmlns:a16="http://schemas.microsoft.com/office/drawing/2014/main" id="{B95123D3-BDFE-4D02-E24B-261B2A282089}"/>
+              </a:ext>
+            </a:extLst>
+          </p:cNvPr>
+          <p:cNvSpPr/>
+          <p:nvPr/>
+        </p:nvSpPr>
+        <p:spPr>
+          <a:xfrm>
+            <a:off x="0" y="6462940"/>
+            <a:ext cx="12207875" cy="393700"/>
+          </a:xfrm>
+          <a:prstGeom prst="rect">
+            <a:avLst/>
+          </a:prstGeom>
+          <a:solidFill>
+            <a:srgbClr val="5B9BD5"/>
+          </a:solidFill>
+        </p:spPr>
+        <p:style>
+          <a:lnRef idx="2">
+            <a:schemeClr val="accent1">
+              <a:shade val="50000"/>
+            </a:schemeClr>
+          </a:lnRef>
+          <a:fillRef idx="1">
+            <a:schemeClr val="accent1"/>
+          </a:fillRef>
+          <a:effectRef idx="0">
+            <a:schemeClr val="accent1"/>
+          </a:effectRef>
+          <a:fontRef idx="minor">
+            <a:schemeClr val="lt1"/>
+          </a:fontRef>
+        </p:style>
+        <p:txBody>
+          <a:bodyPr anchor="ctr"/>
+          <a:lstStyle/>
+          <a:p>
+            <a:pPr marL="0" marR="0" lvl="0" indent="0" algn="ctr" defTabSz="914400" rtl="0" eaLnBrk="0" fontAlgn="base" latinLnBrk="0" hangingPunct="0">
+              <a:lnSpc>
+                <a:spcPct val="100000"/>
+              </a:lnSpc>
+              <a:spcBef>
+                <a:spcPct val="0"/>
+              </a:spcBef>
+              <a:spcAft>
+                <a:spcPct val="0"/>
+              </a:spcAft>
+              <a:buClrTx/>
+              <a:buSzTx/>
+              <a:buFontTx/>
+              <a:buNone/>
+              <a:defRPr/>
+            </a:pPr>
+            <a:endParaRPr kumimoji="0" lang="en-IN" sz="1800" b="1" i="0" u="none" strike="noStrike" kern="1200" cap="none" spc="0" normalizeH="0" baseline="0" noProof="0" dirty="0">
+              <a:ln>
+                <a:noFill/>
+              </a:ln>
+              <a:solidFill>
+                <a:schemeClr val="tx1"/>
+              </a:solidFill>
+              <a:effectLst/>
+              <a:uLnTx/>
+              <a:uFillTx/>
+              <a:latin typeface="Arial Rounded MT Bold" pitchFamily="34" charset="0"/>
+              <a:ea typeface="+mn-ea"/>
+              <a:cs typeface="+mn-cs"/>
+            </a:endParaRPr>
+          </a:p>
+        </p:txBody>
+      </p:sp>
+      <p:sp>
+        <p:nvSpPr>
+          <p:cNvPr id="7" name="TextBox 6">
+            <a:extLst>
+              <a:ext uri="{FF2B5EF4-FFF2-40B4-BE49-F238E27FC236}">
+                <a16:creationId xmlns:a16="http://schemas.microsoft.com/office/drawing/2014/main" id="{891FF35F-E6DD-E0BD-79EA-855F2F91B2F3}"/>
+              </a:ext>
+            </a:extLst>
+          </p:cNvPr>
+          <p:cNvSpPr txBox="1"/>
+          <p:nvPr/>
+        </p:nvSpPr>
+        <p:spPr>
+          <a:xfrm>
+            <a:off x="443971" y="6490513"/>
+            <a:ext cx="11288182" cy="338554"/>
+          </a:xfrm>
+          <a:prstGeom prst="rect">
+            <a:avLst/>
+          </a:prstGeom>
+          <a:noFill/>
+        </p:spPr>
+        <p:txBody>
+          <a:bodyPr wrap="square" rtlCol="0">
+            <a:spAutoFit/>
+          </a:bodyPr>
+          <a:lstStyle/>
+          <a:p>
+            <a:pPr marL="0" marR="0" lvl="0" indent="0" algn="ctr" defTabSz="914400" rtl="0" eaLnBrk="0" fontAlgn="base" latinLnBrk="0" hangingPunct="0">
+              <a:lnSpc>
+                <a:spcPct val="100000"/>
+              </a:lnSpc>
+              <a:spcBef>
+                <a:spcPct val="0"/>
+              </a:spcBef>
+              <a:spcAft>
+                <a:spcPct val="0"/>
+              </a:spcAft>
+              <a:buClrTx/>
+              <a:buSzTx/>
+              <a:buFontTx/>
+              <a:buNone/>
+              <a:defRPr/>
+            </a:pPr>
+            <a:r>
+              <a:rPr kumimoji="0" lang="en-IN" sz="1600" b="1" i="0" u="none" strike="noStrike" kern="1200" cap="none" spc="0" normalizeH="0" baseline="0" noProof="0" dirty="0">
+                <a:ln>
+                  <a:noFill/>
+                </a:ln>
+                <a:solidFill>
+                  <a:schemeClr val="tx1"/>
+                </a:solidFill>
+                <a:effectLst/>
+                <a:uLnTx/>
+                <a:uFillTx/>
+                <a:latin typeface="Arial Rounded MT Bold" pitchFamily="34" charset="0"/>
+                <a:ea typeface="+mn-ea"/>
+                <a:cs typeface="+mn-cs"/>
+              </a:rPr>
+              <a:t>B.Tech III Year – II Sem | Dept of Computational Intelligence| Application Development – II | Project Review</a:t>
+            </a:r>
+          </a:p>
+        </p:txBody>
+      </p:sp>
+      <p:sp>
+        <p:nvSpPr>
+          <p:cNvPr id="8" name="Rounded Rectangle 4">
+            <a:extLst>
+              <a:ext uri="{FF2B5EF4-FFF2-40B4-BE49-F238E27FC236}">
+                <a16:creationId xmlns:a16="http://schemas.microsoft.com/office/drawing/2014/main" id="{F414E090-B254-AC35-376F-AF400417477A}"/>
+              </a:ext>
+            </a:extLst>
+          </p:cNvPr>
+          <p:cNvSpPr/>
+          <p:nvPr/>
+        </p:nvSpPr>
+        <p:spPr>
+          <a:xfrm>
+            <a:off x="-15875" y="-10805"/>
+            <a:ext cx="12207875" cy="393700"/>
+          </a:xfrm>
+          <a:prstGeom prst="rect">
+            <a:avLst/>
+          </a:prstGeom>
+          <a:solidFill>
+            <a:srgbClr val="5B9BD5"/>
+          </a:solidFill>
+        </p:spPr>
+        <p:style>
+          <a:lnRef idx="2">
+            <a:schemeClr val="accent1">
+              <a:shade val="50000"/>
+            </a:schemeClr>
+          </a:lnRef>
+          <a:fillRef idx="1">
+            <a:schemeClr val="accent1"/>
+          </a:fillRef>
+          <a:effectRef idx="0">
+            <a:schemeClr val="accent1"/>
+          </a:effectRef>
+          <a:fontRef idx="minor">
+            <a:schemeClr val="lt1"/>
+          </a:fontRef>
+        </p:style>
+        <p:txBody>
+          <a:bodyPr anchor="ctr"/>
+          <a:lstStyle/>
+          <a:p>
+            <a:pPr marL="0" marR="0" lvl="0" indent="0" algn="ctr" defTabSz="914400" rtl="0" eaLnBrk="0" fontAlgn="base" latinLnBrk="0" hangingPunct="0">
+              <a:lnSpc>
+                <a:spcPct val="100000"/>
+              </a:lnSpc>
+              <a:spcBef>
+                <a:spcPct val="0"/>
+              </a:spcBef>
+              <a:spcAft>
+                <a:spcPct val="0"/>
+              </a:spcAft>
+              <a:buClrTx/>
+              <a:buSzTx/>
+              <a:buFontTx/>
+              <a:buNone/>
+              <a:defRPr/>
+            </a:pPr>
+            <a:endParaRPr kumimoji="0" lang="en-IN" sz="1800" b="1" i="0" u="none" strike="noStrike" kern="1200" cap="none" spc="0" normalizeH="0" baseline="0" noProof="0" dirty="0">
+              <a:ln>
+                <a:noFill/>
+              </a:ln>
+              <a:solidFill>
+                <a:schemeClr val="tx1"/>
+              </a:solidFill>
+              <a:effectLst/>
+              <a:uLnTx/>
+              <a:uFillTx/>
+              <a:latin typeface="Arial Rounded MT Bold" pitchFamily="34" charset="0"/>
+              <a:ea typeface="+mn-ea"/>
+              <a:cs typeface="+mn-cs"/>
+            </a:endParaRPr>
+          </a:p>
+        </p:txBody>
+      </p:sp>
+      <p:sp>
+        <p:nvSpPr>
+          <p:cNvPr id="9" name="TextBox 8">
+            <a:extLst>
+              <a:ext uri="{FF2B5EF4-FFF2-40B4-BE49-F238E27FC236}">
+                <a16:creationId xmlns:a16="http://schemas.microsoft.com/office/drawing/2014/main" id="{65009C7A-2311-6B3F-B528-A473E8922EBD}"/>
+              </a:ext>
+            </a:extLst>
+          </p:cNvPr>
+          <p:cNvSpPr txBox="1"/>
+          <p:nvPr/>
+        </p:nvSpPr>
+        <p:spPr>
+          <a:xfrm>
+            <a:off x="2801516" y="16768"/>
+            <a:ext cx="6588967" cy="338554"/>
+          </a:xfrm>
+          <a:prstGeom prst="rect">
+            <a:avLst/>
+          </a:prstGeom>
+          <a:noFill/>
+        </p:spPr>
+        <p:txBody>
+          <a:bodyPr wrap="square" rtlCol="0">
+            <a:spAutoFit/>
+          </a:bodyPr>
+          <a:lstStyle/>
+          <a:p>
+            <a:r>
+              <a:rPr lang="en-US" sz="1600" b="1" dirty="0">
+                <a:latin typeface="Arial Rounded MT Bold" panose="020F0704030504030204" pitchFamily="34" charset="0"/>
+                <a:cs typeface="Arial" panose="020B0604020202020204" pitchFamily="34" charset="0"/>
+              </a:rPr>
+              <a:t>MALLA REDDY COLLEGE OF ENGINEERING AND TECHNOLOGY</a:t>
+            </a:r>
+            <a:endParaRPr lang="x-none" sz="1600" b="1" dirty="0">
+              <a:latin typeface="Arial Rounded MT Bold" panose="020F0704030504030204" pitchFamily="34" charset="0"/>
+              <a:cs typeface="Arial" panose="020B0604020202020204" pitchFamily="34" charset="0"/>
+            </a:endParaRPr>
+          </a:p>
+        </p:txBody>
+      </p:sp>
+      <p:pic>
+        <p:nvPicPr>
+          <p:cNvPr id="10" name="Picture 6">
+            <a:extLst>
+              <a:ext uri="{FF2B5EF4-FFF2-40B4-BE49-F238E27FC236}">
+                <a16:creationId xmlns:a16="http://schemas.microsoft.com/office/drawing/2014/main" id="{C2F25562-6616-19E8-2170-47D1CA83F15B}"/>
+              </a:ext>
+            </a:extLst>
+          </p:cNvPr>
+          <p:cNvPicPr>
+            <a:picLocks noChangeAspect="1"/>
+          </p:cNvPicPr>
+          <p:nvPr/>
+        </p:nvPicPr>
+        <p:blipFill>
+          <a:blip r:embed="rId2" cstate="print"/>
+          <a:stretch>
+            <a:fillRect/>
+          </a:stretch>
+        </p:blipFill>
+        <p:spPr>
+          <a:xfrm>
+            <a:off x="10899775" y="-128587"/>
+            <a:ext cx="1276350" cy="1276350"/>
+          </a:xfrm>
+          <a:prstGeom prst="rect">
+            <a:avLst/>
+          </a:prstGeom>
+          <a:noFill/>
+          <a:ln w="9525">
+            <a:noFill/>
+          </a:ln>
+        </p:spPr>
+      </p:pic>
+      <p:sp>
+        <p:nvSpPr>
+          <p:cNvPr id="12" name="Slide Number Placeholder 3">
+            <a:extLst>
+              <a:ext uri="{FF2B5EF4-FFF2-40B4-BE49-F238E27FC236}">
+                <a16:creationId xmlns:a16="http://schemas.microsoft.com/office/drawing/2014/main" id="{05632ECF-EAB4-6DFE-0128-616CC1E38485}"/>
+              </a:ext>
+            </a:extLst>
+          </p:cNvPr>
+          <p:cNvSpPr txBox="1">
+            <a:spLocks/>
+          </p:cNvSpPr>
+          <p:nvPr/>
+        </p:nvSpPr>
+        <p:spPr>
+          <a:xfrm>
+            <a:off x="9067800" y="6176963"/>
+            <a:ext cx="2743200" cy="365125"/>
+          </a:xfrm>
+          <a:prstGeom prst="rect">
+            <a:avLst/>
+          </a:prstGeom>
+          <a:noFill/>
+          <a:ln>
+            <a:noFill/>
+          </a:ln>
+        </p:spPr>
+        <p:txBody>
+          <a:bodyPr anchor="ctr" anchorCtr="0"/>
+          <a:lstStyle>
+            <a:defPPr>
+              <a:defRPr lang="x-none"/>
+            </a:defPPr>
+            <a:lvl1pPr marL="0" algn="l" defTabSz="914400" rtl="0" eaLnBrk="1" latinLnBrk="0" hangingPunct="1">
+              <a:defRPr sz="1800" kern="1200">
+                <a:solidFill>
+                  <a:schemeClr val="tx1"/>
+                </a:solidFill>
+                <a:latin typeface="+mn-lt"/>
+                <a:ea typeface="+mn-ea"/>
+                <a:cs typeface="+mn-cs"/>
+              </a:defRPr>
+            </a:lvl1pPr>
+            <a:lvl2pPr marL="457200" algn="l" defTabSz="914400" rtl="0" eaLnBrk="1" latinLnBrk="0" hangingPunct="1">
+              <a:defRPr sz="1800" kern="1200">
+                <a:solidFill>
+                  <a:schemeClr val="tx1"/>
+                </a:solidFill>
+                <a:latin typeface="+mn-lt"/>
+                <a:ea typeface="+mn-ea"/>
+                <a:cs typeface="+mn-cs"/>
+              </a:defRPr>
+            </a:lvl2pPr>
+            <a:lvl3pPr marL="914400" algn="l" defTabSz="914400" rtl="0" eaLnBrk="1" latinLnBrk="0" hangingPunct="1">
+              <a:defRPr sz="1800" kern="1200">
+                <a:solidFill>
+                  <a:schemeClr val="tx1"/>
+                </a:solidFill>
+                <a:latin typeface="+mn-lt"/>
+                <a:ea typeface="+mn-ea"/>
+                <a:cs typeface="+mn-cs"/>
+              </a:defRPr>
+            </a:lvl3pPr>
+            <a:lvl4pPr marL="1371600" algn="l" defTabSz="914400" rtl="0" eaLnBrk="1" latinLnBrk="0" hangingPunct="1">
+              <a:defRPr sz="1800" kern="1200">
+                <a:solidFill>
+                  <a:schemeClr val="tx1"/>
+                </a:solidFill>
+                <a:latin typeface="+mn-lt"/>
+                <a:ea typeface="+mn-ea"/>
+                <a:cs typeface="+mn-cs"/>
+              </a:defRPr>
+            </a:lvl4pPr>
+            <a:lvl5pPr marL="1828800" algn="l" defTabSz="914400" rtl="0" eaLnBrk="1" latinLnBrk="0" hangingPunct="1">
+              <a:defRPr sz="1800" kern="1200">
+                <a:solidFill>
+                  <a:schemeClr val="tx1"/>
+                </a:solidFill>
+                <a:latin typeface="+mn-lt"/>
+                <a:ea typeface="+mn-ea"/>
+                <a:cs typeface="+mn-cs"/>
+              </a:defRPr>
+            </a:lvl5pPr>
+            <a:lvl6pPr marL="2286000" algn="l" defTabSz="914400" rtl="0" eaLnBrk="1" latinLnBrk="0" hangingPunct="1">
+              <a:defRPr sz="1800" kern="1200">
+                <a:solidFill>
+                  <a:schemeClr val="tx1"/>
+                </a:solidFill>
+                <a:latin typeface="+mn-lt"/>
+                <a:ea typeface="+mn-ea"/>
+                <a:cs typeface="+mn-cs"/>
+              </a:defRPr>
+            </a:lvl6pPr>
+            <a:lvl7pPr marL="2743200" algn="l" defTabSz="914400" rtl="0" eaLnBrk="1" latinLnBrk="0" hangingPunct="1">
+              <a:defRPr sz="1800" kern="1200">
+                <a:solidFill>
+                  <a:schemeClr val="tx1"/>
+                </a:solidFill>
+                <a:latin typeface="+mn-lt"/>
+                <a:ea typeface="+mn-ea"/>
+                <a:cs typeface="+mn-cs"/>
+              </a:defRPr>
+            </a:lvl7pPr>
+            <a:lvl8pPr marL="3200400" algn="l" defTabSz="914400" rtl="0" eaLnBrk="1" latinLnBrk="0" hangingPunct="1">
+              <a:defRPr sz="1800" kern="1200">
+                <a:solidFill>
+                  <a:schemeClr val="tx1"/>
+                </a:solidFill>
+                <a:latin typeface="+mn-lt"/>
+                <a:ea typeface="+mn-ea"/>
+                <a:cs typeface="+mn-cs"/>
+              </a:defRPr>
+            </a:lvl8pPr>
+            <a:lvl9pPr marL="3657600" algn="l" defTabSz="914400" rtl="0" eaLnBrk="1" latinLnBrk="0" hangingPunct="1">
+              <a:defRPr sz="1800" kern="1200">
+                <a:solidFill>
+                  <a:schemeClr val="tx1"/>
+                </a:solidFill>
+                <a:latin typeface="+mn-lt"/>
+                <a:ea typeface="+mn-ea"/>
+                <a:cs typeface="+mn-cs"/>
+              </a:defRPr>
+            </a:lvl9pPr>
+          </a:lstStyle>
+          <a:p>
+            <a:pPr algn="r">
+              <a:spcBef>
+                <a:spcPct val="0"/>
+              </a:spcBef>
+            </a:pPr>
+            <a:fld id="{9A0DB2DC-4C9A-4742-B13C-FB6460FD3503}" type="slidenum">
+              <a:rPr lang="en-IN" altLang="en-US" sz="1200" b="1" smtClean="0">
+                <a:solidFill>
+                  <a:srgbClr val="C00000"/>
+                </a:solidFill>
+              </a:rPr>
+              <a:pPr algn="r">
+                <a:spcBef>
+                  <a:spcPct val="0"/>
+                </a:spcBef>
+              </a:pPr>
+              <a:t>21</a:t>
+            </a:fld>
+            <a:endParaRPr lang="en-IN" altLang="en-US" sz="1200" b="1" dirty="0">
+              <a:solidFill>
+                <a:srgbClr val="C00000"/>
+              </a:solidFill>
+            </a:endParaRPr>
+          </a:p>
+        </p:txBody>
+      </p:sp>
+      <p:pic>
+        <p:nvPicPr>
+          <p:cNvPr id="4" name="Picture 3">
+            <a:extLst>
+              <a:ext uri="{FF2B5EF4-FFF2-40B4-BE49-F238E27FC236}">
+                <a16:creationId xmlns:a16="http://schemas.microsoft.com/office/drawing/2014/main" id="{7CBA9944-0058-65AB-1123-DF51E619ACB9}"/>
+              </a:ext>
+            </a:extLst>
+          </p:cNvPr>
+          <p:cNvPicPr>
+            <a:picLocks noChangeAspect="1"/>
+          </p:cNvPicPr>
+          <p:nvPr/>
+        </p:nvPicPr>
+        <p:blipFill>
+          <a:blip r:embed="rId3" cstate="print">
+            <a:extLst>
+              <a:ext uri="{28A0092B-C50C-407E-A947-70E740481C1C}">
+                <a14:useLocalDpi xmlns:a14="http://schemas.microsoft.com/office/drawing/2010/main" val="0"/>
+              </a:ext>
+            </a:extLst>
+          </a:blip>
+          <a:srcRect/>
+          <a:stretch>
+            <a:fillRect/>
+          </a:stretch>
+        </p:blipFill>
+        <p:spPr bwMode="auto">
+          <a:xfrm>
+            <a:off x="873173" y="727110"/>
+            <a:ext cx="9714688" cy="4900188"/>
+          </a:xfrm>
+          <a:prstGeom prst="rect">
+            <a:avLst/>
+          </a:prstGeom>
+          <a:noFill/>
+          <a:ln>
+            <a:noFill/>
+          </a:ln>
+        </p:spPr>
+      </p:pic>
+      <p:sp>
+        <p:nvSpPr>
+          <p:cNvPr id="11" name="TextBox 10">
+            <a:extLst>
+              <a:ext uri="{FF2B5EF4-FFF2-40B4-BE49-F238E27FC236}">
+                <a16:creationId xmlns:a16="http://schemas.microsoft.com/office/drawing/2014/main" id="{68996CA2-ED58-315C-7F43-6FC5C5F5340B}"/>
+              </a:ext>
+            </a:extLst>
+          </p:cNvPr>
+          <p:cNvSpPr txBox="1"/>
+          <p:nvPr/>
+        </p:nvSpPr>
+        <p:spPr>
+          <a:xfrm>
+            <a:off x="2670227" y="5691804"/>
+            <a:ext cx="6120580" cy="458074"/>
+          </a:xfrm>
+          <a:prstGeom prst="rect">
+            <a:avLst/>
+          </a:prstGeom>
+          <a:noFill/>
+        </p:spPr>
+        <p:txBody>
+          <a:bodyPr wrap="square">
+            <a:spAutoFit/>
+          </a:bodyPr>
+          <a:lstStyle/>
+          <a:p>
+            <a:pPr algn="ctr">
+              <a:lnSpc>
+                <a:spcPct val="150000"/>
+              </a:lnSpc>
+              <a:spcAft>
+                <a:spcPts val="190"/>
+              </a:spcAft>
+            </a:pPr>
+            <a:r>
+              <a:rPr lang="en-IN" sz="1800" b="1" dirty="0">
+                <a:effectLst/>
+                <a:latin typeface="Times New Roman" panose="02020603050405020304" pitchFamily="18" charset="0"/>
+                <a:ea typeface="Segoe UI Symbol" panose="020B0502040204020203" pitchFamily="34" charset="0"/>
+              </a:rPr>
+              <a:t>Fig 5: Video Generation Phase on GUI </a:t>
+            </a:r>
+            <a:endParaRPr lang="en-IN" sz="1600" dirty="0">
+              <a:effectLst/>
+              <a:latin typeface="Times New Roman" panose="02020603050405020304" pitchFamily="18" charset="0"/>
+              <a:ea typeface="Times New Roman" panose="02020603050405020304" pitchFamily="18" charset="0"/>
+            </a:endParaRPr>
+          </a:p>
+        </p:txBody>
+      </p:sp>
+    </p:spTree>
+    <p:extLst>
+      <p:ext uri="{BB962C8B-B14F-4D97-AF65-F5344CB8AC3E}">
+        <p14:creationId xmlns:p14="http://schemas.microsoft.com/office/powerpoint/2010/main" val="2841651401"/>
+      </p:ext>
+    </p:extLst>
+  </p:cSld>
+  <p:clrMapOvr>
+    <a:masterClrMapping/>
+  </p:clrMapOvr>
+</p:sld>
+</file>
+
+<file path=ppt/slides/slide22.xml><?xml version="1.0" encoding="utf-8"?>
+<p:sld xmlns:a="http://schemas.openxmlformats.org/drawingml/2006/main" xmlns:r="http://schemas.openxmlformats.org/officeDocument/2006/relationships" xmlns:p="http://schemas.openxmlformats.org/presentationml/2006/main">
+  <p:cSld>
+    <p:spTree>
+      <p:nvGrpSpPr>
+        <p:cNvPr id="1" name="">
+          <a:extLst>
+            <a:ext uri="{FF2B5EF4-FFF2-40B4-BE49-F238E27FC236}">
+              <a16:creationId xmlns:a16="http://schemas.microsoft.com/office/drawing/2014/main" id="{9B73BB3B-9E67-4360-679A-DA135D3370DA}"/>
+            </a:ext>
+          </a:extLst>
+        </p:cNvPr>
+        <p:cNvGrpSpPr/>
+        <p:nvPr/>
+      </p:nvGrpSpPr>
+      <p:grpSpPr>
+        <a:xfrm>
+          <a:off x="0" y="0"/>
+          <a:ext cx="0" cy="0"/>
+          <a:chOff x="0" y="0"/>
+          <a:chExt cx="0" cy="0"/>
+        </a:xfrm>
+      </p:grpSpPr>
+      <p:sp>
+        <p:nvSpPr>
+          <p:cNvPr id="6" name="Rounded Rectangle 4">
+            <a:extLst>
+              <a:ext uri="{FF2B5EF4-FFF2-40B4-BE49-F238E27FC236}">
+                <a16:creationId xmlns:a16="http://schemas.microsoft.com/office/drawing/2014/main" id="{7EBE33A8-3F2B-74CC-B4D0-FAE391F6D202}"/>
+              </a:ext>
+            </a:extLst>
+          </p:cNvPr>
+          <p:cNvSpPr/>
+          <p:nvPr/>
+        </p:nvSpPr>
+        <p:spPr>
+          <a:xfrm>
+            <a:off x="0" y="6462940"/>
+            <a:ext cx="12207875" cy="393700"/>
+          </a:xfrm>
+          <a:prstGeom prst="rect">
+            <a:avLst/>
+          </a:prstGeom>
+          <a:solidFill>
+            <a:srgbClr val="5B9BD5"/>
+          </a:solidFill>
+        </p:spPr>
+        <p:style>
+          <a:lnRef idx="2">
+            <a:schemeClr val="accent1">
+              <a:shade val="50000"/>
+            </a:schemeClr>
+          </a:lnRef>
+          <a:fillRef idx="1">
+            <a:schemeClr val="accent1"/>
+          </a:fillRef>
+          <a:effectRef idx="0">
+            <a:schemeClr val="accent1"/>
+          </a:effectRef>
+          <a:fontRef idx="minor">
+            <a:schemeClr val="lt1"/>
+          </a:fontRef>
+        </p:style>
+        <p:txBody>
+          <a:bodyPr anchor="ctr"/>
+          <a:lstStyle/>
+          <a:p>
+            <a:pPr marL="0" marR="0" lvl="0" indent="0" algn="ctr" defTabSz="914400" rtl="0" eaLnBrk="0" fontAlgn="base" latinLnBrk="0" hangingPunct="0">
+              <a:lnSpc>
+                <a:spcPct val="100000"/>
+              </a:lnSpc>
+              <a:spcBef>
+                <a:spcPct val="0"/>
+              </a:spcBef>
+              <a:spcAft>
+                <a:spcPct val="0"/>
+              </a:spcAft>
+              <a:buClrTx/>
+              <a:buSzTx/>
+              <a:buFontTx/>
+              <a:buNone/>
+              <a:defRPr/>
+            </a:pPr>
+            <a:endParaRPr kumimoji="0" lang="en-IN" sz="1800" b="1" i="0" u="none" strike="noStrike" kern="1200" cap="none" spc="0" normalizeH="0" baseline="0" noProof="0" dirty="0">
+              <a:ln>
+                <a:noFill/>
+              </a:ln>
+              <a:solidFill>
+                <a:schemeClr val="tx1"/>
+              </a:solidFill>
+              <a:effectLst/>
+              <a:uLnTx/>
+              <a:uFillTx/>
+              <a:latin typeface="Arial Rounded MT Bold" pitchFamily="34" charset="0"/>
+              <a:ea typeface="+mn-ea"/>
+              <a:cs typeface="+mn-cs"/>
+            </a:endParaRPr>
+          </a:p>
+        </p:txBody>
+      </p:sp>
+      <p:sp>
+        <p:nvSpPr>
+          <p:cNvPr id="7" name="TextBox 6">
+            <a:extLst>
+              <a:ext uri="{FF2B5EF4-FFF2-40B4-BE49-F238E27FC236}">
+                <a16:creationId xmlns:a16="http://schemas.microsoft.com/office/drawing/2014/main" id="{2C35B19F-48CF-C918-0FC0-10C2F385ECBD}"/>
+              </a:ext>
+            </a:extLst>
+          </p:cNvPr>
+          <p:cNvSpPr txBox="1"/>
+          <p:nvPr/>
+        </p:nvSpPr>
+        <p:spPr>
+          <a:xfrm>
+            <a:off x="443971" y="6490513"/>
+            <a:ext cx="11288182" cy="338554"/>
+          </a:xfrm>
+          <a:prstGeom prst="rect">
+            <a:avLst/>
+          </a:prstGeom>
+          <a:noFill/>
+        </p:spPr>
+        <p:txBody>
+          <a:bodyPr wrap="square" rtlCol="0">
+            <a:spAutoFit/>
+          </a:bodyPr>
+          <a:lstStyle/>
+          <a:p>
+            <a:pPr marL="0" marR="0" lvl="0" indent="0" algn="ctr" defTabSz="914400" rtl="0" eaLnBrk="0" fontAlgn="base" latinLnBrk="0" hangingPunct="0">
+              <a:lnSpc>
+                <a:spcPct val="100000"/>
+              </a:lnSpc>
+              <a:spcBef>
+                <a:spcPct val="0"/>
+              </a:spcBef>
+              <a:spcAft>
+                <a:spcPct val="0"/>
+              </a:spcAft>
+              <a:buClrTx/>
+              <a:buSzTx/>
+              <a:buFontTx/>
+              <a:buNone/>
+              <a:defRPr/>
+            </a:pPr>
+            <a:r>
+              <a:rPr kumimoji="0" lang="en-IN" sz="1600" b="1" i="0" u="none" strike="noStrike" kern="1200" cap="none" spc="0" normalizeH="0" baseline="0" noProof="0" dirty="0">
+                <a:ln>
+                  <a:noFill/>
+                </a:ln>
+                <a:solidFill>
+                  <a:schemeClr val="tx1"/>
+                </a:solidFill>
+                <a:effectLst/>
+                <a:uLnTx/>
+                <a:uFillTx/>
+                <a:latin typeface="Arial Rounded MT Bold" pitchFamily="34" charset="0"/>
+                <a:ea typeface="+mn-ea"/>
+                <a:cs typeface="+mn-cs"/>
+              </a:rPr>
+              <a:t>B.Tech III Year – II Sem | Dept of Computational Intelligence| Application Development – II | Project Review</a:t>
+            </a:r>
+          </a:p>
+        </p:txBody>
+      </p:sp>
+      <p:sp>
+        <p:nvSpPr>
+          <p:cNvPr id="8" name="Rounded Rectangle 4">
+            <a:extLst>
+              <a:ext uri="{FF2B5EF4-FFF2-40B4-BE49-F238E27FC236}">
+                <a16:creationId xmlns:a16="http://schemas.microsoft.com/office/drawing/2014/main" id="{CB4755D0-E3C1-9FB0-5812-ED03E6B6CA62}"/>
+              </a:ext>
+            </a:extLst>
+          </p:cNvPr>
+          <p:cNvSpPr/>
+          <p:nvPr/>
+        </p:nvSpPr>
+        <p:spPr>
+          <a:xfrm>
+            <a:off x="-15875" y="-10805"/>
+            <a:ext cx="12207875" cy="393700"/>
+          </a:xfrm>
+          <a:prstGeom prst="rect">
+            <a:avLst/>
+          </a:prstGeom>
+          <a:solidFill>
+            <a:srgbClr val="5B9BD5"/>
+          </a:solidFill>
+        </p:spPr>
+        <p:style>
+          <a:lnRef idx="2">
+            <a:schemeClr val="accent1">
+              <a:shade val="50000"/>
+            </a:schemeClr>
+          </a:lnRef>
+          <a:fillRef idx="1">
+            <a:schemeClr val="accent1"/>
+          </a:fillRef>
+          <a:effectRef idx="0">
+            <a:schemeClr val="accent1"/>
+          </a:effectRef>
+          <a:fontRef idx="minor">
+            <a:schemeClr val="lt1"/>
+          </a:fontRef>
+        </p:style>
+        <p:txBody>
+          <a:bodyPr anchor="ctr"/>
+          <a:lstStyle/>
+          <a:p>
+            <a:pPr marL="0" marR="0" lvl="0" indent="0" algn="ctr" defTabSz="914400" rtl="0" eaLnBrk="0" fontAlgn="base" latinLnBrk="0" hangingPunct="0">
+              <a:lnSpc>
+                <a:spcPct val="100000"/>
+              </a:lnSpc>
+              <a:spcBef>
+                <a:spcPct val="0"/>
+              </a:spcBef>
+              <a:spcAft>
+                <a:spcPct val="0"/>
+              </a:spcAft>
+              <a:buClrTx/>
+              <a:buSzTx/>
+              <a:buFontTx/>
+              <a:buNone/>
+              <a:defRPr/>
+            </a:pPr>
+            <a:endParaRPr kumimoji="0" lang="en-IN" sz="1800" b="1" i="0" u="none" strike="noStrike" kern="1200" cap="none" spc="0" normalizeH="0" baseline="0" noProof="0" dirty="0">
+              <a:ln>
+                <a:noFill/>
+              </a:ln>
+              <a:solidFill>
+                <a:schemeClr val="tx1"/>
+              </a:solidFill>
+              <a:effectLst/>
+              <a:uLnTx/>
+              <a:uFillTx/>
+              <a:latin typeface="Arial Rounded MT Bold" pitchFamily="34" charset="0"/>
+              <a:ea typeface="+mn-ea"/>
+              <a:cs typeface="+mn-cs"/>
+            </a:endParaRPr>
+          </a:p>
+        </p:txBody>
+      </p:sp>
+      <p:sp>
+        <p:nvSpPr>
+          <p:cNvPr id="9" name="TextBox 8">
+            <a:extLst>
+              <a:ext uri="{FF2B5EF4-FFF2-40B4-BE49-F238E27FC236}">
+                <a16:creationId xmlns:a16="http://schemas.microsoft.com/office/drawing/2014/main" id="{5E62CAB8-21F8-D52C-8038-A19F8FA5942F}"/>
+              </a:ext>
+            </a:extLst>
+          </p:cNvPr>
+          <p:cNvSpPr txBox="1"/>
+          <p:nvPr/>
+        </p:nvSpPr>
+        <p:spPr>
+          <a:xfrm>
+            <a:off x="2801516" y="16768"/>
+            <a:ext cx="6588967" cy="338554"/>
+          </a:xfrm>
+          <a:prstGeom prst="rect">
+            <a:avLst/>
+          </a:prstGeom>
+          <a:noFill/>
+        </p:spPr>
+        <p:txBody>
+          <a:bodyPr wrap="square" rtlCol="0">
+            <a:spAutoFit/>
+          </a:bodyPr>
+          <a:lstStyle/>
+          <a:p>
+            <a:r>
+              <a:rPr lang="en-US" sz="1600" b="1" dirty="0">
+                <a:latin typeface="Arial Rounded MT Bold" panose="020F0704030504030204" pitchFamily="34" charset="0"/>
+                <a:cs typeface="Arial" panose="020B0604020202020204" pitchFamily="34" charset="0"/>
+              </a:rPr>
+              <a:t>MALLA REDDY COLLEGE OF ENGINEERING AND TECHNOLOGY</a:t>
+            </a:r>
+            <a:endParaRPr lang="x-none" sz="1600" b="1" dirty="0">
+              <a:latin typeface="Arial Rounded MT Bold" panose="020F0704030504030204" pitchFamily="34" charset="0"/>
+              <a:cs typeface="Arial" panose="020B0604020202020204" pitchFamily="34" charset="0"/>
+            </a:endParaRPr>
+          </a:p>
+        </p:txBody>
+      </p:sp>
+      <p:pic>
+        <p:nvPicPr>
+          <p:cNvPr id="10" name="Picture 6">
+            <a:extLst>
+              <a:ext uri="{FF2B5EF4-FFF2-40B4-BE49-F238E27FC236}">
+                <a16:creationId xmlns:a16="http://schemas.microsoft.com/office/drawing/2014/main" id="{0EFC16D0-2A7B-3BFF-F14C-DC73F38FD5F5}"/>
+              </a:ext>
+            </a:extLst>
+          </p:cNvPr>
+          <p:cNvPicPr>
+            <a:picLocks noChangeAspect="1"/>
+          </p:cNvPicPr>
+          <p:nvPr/>
+        </p:nvPicPr>
+        <p:blipFill>
+          <a:blip r:embed="rId2" cstate="print"/>
+          <a:stretch>
+            <a:fillRect/>
+          </a:stretch>
+        </p:blipFill>
+        <p:spPr>
+          <a:xfrm>
+            <a:off x="10899775" y="-128587"/>
+            <a:ext cx="1276350" cy="1276350"/>
+          </a:xfrm>
+          <a:prstGeom prst="rect">
+            <a:avLst/>
+          </a:prstGeom>
+          <a:noFill/>
+          <a:ln w="9525">
+            <a:noFill/>
+          </a:ln>
+        </p:spPr>
+      </p:pic>
+      <p:sp>
+        <p:nvSpPr>
+          <p:cNvPr id="12" name="Slide Number Placeholder 3">
+            <a:extLst>
+              <a:ext uri="{FF2B5EF4-FFF2-40B4-BE49-F238E27FC236}">
+                <a16:creationId xmlns:a16="http://schemas.microsoft.com/office/drawing/2014/main" id="{CF36EA5C-6F86-76D7-AFF1-039F4E2108A8}"/>
+              </a:ext>
+            </a:extLst>
+          </p:cNvPr>
+          <p:cNvSpPr txBox="1">
+            <a:spLocks/>
+          </p:cNvSpPr>
+          <p:nvPr/>
+        </p:nvSpPr>
+        <p:spPr>
+          <a:xfrm>
+            <a:off x="9067800" y="6176963"/>
+            <a:ext cx="2743200" cy="365125"/>
+          </a:xfrm>
+          <a:prstGeom prst="rect">
+            <a:avLst/>
+          </a:prstGeom>
+          <a:noFill/>
+          <a:ln>
+            <a:noFill/>
+          </a:ln>
+        </p:spPr>
+        <p:txBody>
+          <a:bodyPr anchor="ctr" anchorCtr="0"/>
+          <a:lstStyle>
+            <a:defPPr>
+              <a:defRPr lang="x-none"/>
+            </a:defPPr>
+            <a:lvl1pPr marL="0" algn="l" defTabSz="914400" rtl="0" eaLnBrk="1" latinLnBrk="0" hangingPunct="1">
+              <a:defRPr sz="1800" kern="1200">
+                <a:solidFill>
+                  <a:schemeClr val="tx1"/>
+                </a:solidFill>
+                <a:latin typeface="+mn-lt"/>
+                <a:ea typeface="+mn-ea"/>
+                <a:cs typeface="+mn-cs"/>
+              </a:defRPr>
+            </a:lvl1pPr>
+            <a:lvl2pPr marL="457200" algn="l" defTabSz="914400" rtl="0" eaLnBrk="1" latinLnBrk="0" hangingPunct="1">
+              <a:defRPr sz="1800" kern="1200">
+                <a:solidFill>
+                  <a:schemeClr val="tx1"/>
+                </a:solidFill>
+                <a:latin typeface="+mn-lt"/>
+                <a:ea typeface="+mn-ea"/>
+                <a:cs typeface="+mn-cs"/>
+              </a:defRPr>
+            </a:lvl2pPr>
+            <a:lvl3pPr marL="914400" algn="l" defTabSz="914400" rtl="0" eaLnBrk="1" latinLnBrk="0" hangingPunct="1">
+              <a:defRPr sz="1800" kern="1200">
+                <a:solidFill>
+                  <a:schemeClr val="tx1"/>
+                </a:solidFill>
+                <a:latin typeface="+mn-lt"/>
+                <a:ea typeface="+mn-ea"/>
+                <a:cs typeface="+mn-cs"/>
+              </a:defRPr>
+            </a:lvl3pPr>
+            <a:lvl4pPr marL="1371600" algn="l" defTabSz="914400" rtl="0" eaLnBrk="1" latinLnBrk="0" hangingPunct="1">
+              <a:defRPr sz="1800" kern="1200">
+                <a:solidFill>
+                  <a:schemeClr val="tx1"/>
+                </a:solidFill>
+                <a:latin typeface="+mn-lt"/>
+                <a:ea typeface="+mn-ea"/>
+                <a:cs typeface="+mn-cs"/>
+              </a:defRPr>
+            </a:lvl4pPr>
+            <a:lvl5pPr marL="1828800" algn="l" defTabSz="914400" rtl="0" eaLnBrk="1" latinLnBrk="0" hangingPunct="1">
+              <a:defRPr sz="1800" kern="1200">
+                <a:solidFill>
+                  <a:schemeClr val="tx1"/>
+                </a:solidFill>
+                <a:latin typeface="+mn-lt"/>
+                <a:ea typeface="+mn-ea"/>
+                <a:cs typeface="+mn-cs"/>
+              </a:defRPr>
+            </a:lvl5pPr>
+            <a:lvl6pPr marL="2286000" algn="l" defTabSz="914400" rtl="0" eaLnBrk="1" latinLnBrk="0" hangingPunct="1">
+              <a:defRPr sz="1800" kern="1200">
+                <a:solidFill>
+                  <a:schemeClr val="tx1"/>
+                </a:solidFill>
+                <a:latin typeface="+mn-lt"/>
+                <a:ea typeface="+mn-ea"/>
+                <a:cs typeface="+mn-cs"/>
+              </a:defRPr>
+            </a:lvl6pPr>
+            <a:lvl7pPr marL="2743200" algn="l" defTabSz="914400" rtl="0" eaLnBrk="1" latinLnBrk="0" hangingPunct="1">
+              <a:defRPr sz="1800" kern="1200">
+                <a:solidFill>
+                  <a:schemeClr val="tx1"/>
+                </a:solidFill>
+                <a:latin typeface="+mn-lt"/>
+                <a:ea typeface="+mn-ea"/>
+                <a:cs typeface="+mn-cs"/>
+              </a:defRPr>
+            </a:lvl7pPr>
+            <a:lvl8pPr marL="3200400" algn="l" defTabSz="914400" rtl="0" eaLnBrk="1" latinLnBrk="0" hangingPunct="1">
+              <a:defRPr sz="1800" kern="1200">
+                <a:solidFill>
+                  <a:schemeClr val="tx1"/>
+                </a:solidFill>
+                <a:latin typeface="+mn-lt"/>
+                <a:ea typeface="+mn-ea"/>
+                <a:cs typeface="+mn-cs"/>
+              </a:defRPr>
+            </a:lvl8pPr>
+            <a:lvl9pPr marL="3657600" algn="l" defTabSz="914400" rtl="0" eaLnBrk="1" latinLnBrk="0" hangingPunct="1">
+              <a:defRPr sz="1800" kern="1200">
+                <a:solidFill>
+                  <a:schemeClr val="tx1"/>
+                </a:solidFill>
+                <a:latin typeface="+mn-lt"/>
+                <a:ea typeface="+mn-ea"/>
+                <a:cs typeface="+mn-cs"/>
+              </a:defRPr>
+            </a:lvl9pPr>
+          </a:lstStyle>
+          <a:p>
+            <a:pPr algn="r">
+              <a:spcBef>
+                <a:spcPct val="0"/>
+              </a:spcBef>
+            </a:pPr>
+            <a:fld id="{9A0DB2DC-4C9A-4742-B13C-FB6460FD3503}" type="slidenum">
+              <a:rPr lang="en-IN" altLang="en-US" sz="1200" b="1" smtClean="0">
+                <a:solidFill>
+                  <a:srgbClr val="C00000"/>
+                </a:solidFill>
+              </a:rPr>
+              <a:pPr algn="r">
+                <a:spcBef>
+                  <a:spcPct val="0"/>
+                </a:spcBef>
+              </a:pPr>
+              <a:t>22</a:t>
+            </a:fld>
+            <a:endParaRPr lang="en-IN" altLang="en-US" sz="1200" b="1" dirty="0">
+              <a:solidFill>
+                <a:srgbClr val="C00000"/>
+              </a:solidFill>
+            </a:endParaRPr>
+          </a:p>
+        </p:txBody>
+      </p:sp>
+      <p:pic>
+        <p:nvPicPr>
+          <p:cNvPr id="5" name="Picture 4">
+            <a:extLst>
+              <a:ext uri="{FF2B5EF4-FFF2-40B4-BE49-F238E27FC236}">
+                <a16:creationId xmlns:a16="http://schemas.microsoft.com/office/drawing/2014/main" id="{0BB17FB3-70AD-0FED-80A4-EEB3C13D7333}"/>
+              </a:ext>
+            </a:extLst>
+          </p:cNvPr>
+          <p:cNvPicPr>
+            <a:picLocks noChangeAspect="1"/>
+          </p:cNvPicPr>
+          <p:nvPr/>
+        </p:nvPicPr>
+        <p:blipFill>
+          <a:blip r:embed="rId3" cstate="print">
+            <a:extLst>
+              <a:ext uri="{28A0092B-C50C-407E-A947-70E740481C1C}">
+                <a14:useLocalDpi xmlns:a14="http://schemas.microsoft.com/office/drawing/2010/main" val="0"/>
+              </a:ext>
+            </a:extLst>
+          </a:blip>
+          <a:srcRect/>
+          <a:stretch>
+            <a:fillRect/>
+          </a:stretch>
+        </p:blipFill>
+        <p:spPr bwMode="auto">
+          <a:xfrm>
+            <a:off x="965096" y="714023"/>
+            <a:ext cx="9777917" cy="4845836"/>
+          </a:xfrm>
+          <a:prstGeom prst="rect">
+            <a:avLst/>
+          </a:prstGeom>
+          <a:noFill/>
+          <a:ln>
+            <a:noFill/>
+          </a:ln>
+        </p:spPr>
+      </p:pic>
+      <p:sp>
+        <p:nvSpPr>
+          <p:cNvPr id="13" name="TextBox 12">
+            <a:extLst>
+              <a:ext uri="{FF2B5EF4-FFF2-40B4-BE49-F238E27FC236}">
+                <a16:creationId xmlns:a16="http://schemas.microsoft.com/office/drawing/2014/main" id="{2E6C046D-7ECF-704F-0733-C9D87032FC69}"/>
+              </a:ext>
+            </a:extLst>
+          </p:cNvPr>
+          <p:cNvSpPr txBox="1"/>
+          <p:nvPr/>
+        </p:nvSpPr>
+        <p:spPr>
+          <a:xfrm>
+            <a:off x="2970796" y="5670499"/>
+            <a:ext cx="6266282" cy="458074"/>
+          </a:xfrm>
+          <a:prstGeom prst="rect">
+            <a:avLst/>
+          </a:prstGeom>
+          <a:noFill/>
+        </p:spPr>
+        <p:txBody>
+          <a:bodyPr wrap="square">
+            <a:spAutoFit/>
+          </a:bodyPr>
+          <a:lstStyle/>
+          <a:p>
+            <a:pPr algn="ctr">
+              <a:lnSpc>
+                <a:spcPct val="150000"/>
+              </a:lnSpc>
+              <a:spcAft>
+                <a:spcPts val="190"/>
+              </a:spcAft>
+            </a:pPr>
+            <a:r>
+              <a:rPr lang="en-IN" sz="1800" b="1" dirty="0">
+                <a:effectLst/>
+                <a:latin typeface="Times New Roman" panose="02020603050405020304" pitchFamily="18" charset="0"/>
+                <a:ea typeface="Segoe UI Symbol" panose="020B0502040204020203" pitchFamily="34" charset="0"/>
+              </a:rPr>
+              <a:t>Fig 6: Generated Video Successfully Displayed to The User</a:t>
+            </a:r>
+            <a:endParaRPr lang="en-IN" sz="1600" dirty="0">
+              <a:effectLst/>
+              <a:latin typeface="Times New Roman" panose="02020603050405020304" pitchFamily="18" charset="0"/>
+              <a:ea typeface="Times New Roman" panose="02020603050405020304" pitchFamily="18" charset="0"/>
+            </a:endParaRPr>
+          </a:p>
+        </p:txBody>
+      </p:sp>
+    </p:spTree>
+    <p:extLst>
+      <p:ext uri="{BB962C8B-B14F-4D97-AF65-F5344CB8AC3E}">
+        <p14:creationId xmlns:p14="http://schemas.microsoft.com/office/powerpoint/2010/main" val="2369076689"/>
+      </p:ext>
+    </p:extLst>
+  </p:cSld>
+  <p:clrMapOvr>
+    <a:masterClrMapping/>
+  </p:clrMapOvr>
+</p:sld>
+</file>
+
+<file path=ppt/slides/slide23.xml><?xml version="1.0" encoding="utf-8"?>
+<p:sld xmlns:a="http://schemas.openxmlformats.org/drawingml/2006/main" xmlns:r="http://schemas.openxmlformats.org/officeDocument/2006/relationships" xmlns:p="http://schemas.openxmlformats.org/presentationml/2006/main">
+  <p:cSld>
+    <p:spTree>
+      <p:nvGrpSpPr>
+        <p:cNvPr id="1" name="">
+          <a:extLst>
+            <a:ext uri="{FF2B5EF4-FFF2-40B4-BE49-F238E27FC236}">
+              <a16:creationId xmlns:a16="http://schemas.microsoft.com/office/drawing/2014/main" id="{5227CE3F-206B-FF66-7E85-B9F6D28177A6}"/>
+            </a:ext>
+          </a:extLst>
+        </p:cNvPr>
+        <p:cNvGrpSpPr/>
+        <p:nvPr/>
+      </p:nvGrpSpPr>
+      <p:grpSpPr>
+        <a:xfrm>
+          <a:off x="0" y="0"/>
+          <a:ext cx="0" cy="0"/>
+          <a:chOff x="0" y="0"/>
+          <a:chExt cx="0" cy="0"/>
+        </a:xfrm>
+      </p:grpSpPr>
+      <p:sp>
+        <p:nvSpPr>
+          <p:cNvPr id="6" name="Rounded Rectangle 4">
+            <a:extLst>
+              <a:ext uri="{FF2B5EF4-FFF2-40B4-BE49-F238E27FC236}">
+                <a16:creationId xmlns:a16="http://schemas.microsoft.com/office/drawing/2014/main" id="{6E3394D2-240C-293F-84BC-AAE51C7D2721}"/>
+              </a:ext>
+            </a:extLst>
+          </p:cNvPr>
+          <p:cNvSpPr/>
+          <p:nvPr/>
+        </p:nvSpPr>
+        <p:spPr>
+          <a:xfrm>
+            <a:off x="0" y="6462940"/>
+            <a:ext cx="12207875" cy="393700"/>
+          </a:xfrm>
+          <a:prstGeom prst="rect">
+            <a:avLst/>
+          </a:prstGeom>
+          <a:solidFill>
+            <a:srgbClr val="5B9BD5"/>
+          </a:solidFill>
+        </p:spPr>
+        <p:style>
+          <a:lnRef idx="2">
+            <a:schemeClr val="accent1">
+              <a:shade val="50000"/>
+            </a:schemeClr>
+          </a:lnRef>
+          <a:fillRef idx="1">
+            <a:schemeClr val="accent1"/>
+          </a:fillRef>
+          <a:effectRef idx="0">
+            <a:schemeClr val="accent1"/>
+          </a:effectRef>
+          <a:fontRef idx="minor">
+            <a:schemeClr val="lt1"/>
+          </a:fontRef>
+        </p:style>
+        <p:txBody>
+          <a:bodyPr anchor="ctr"/>
+          <a:lstStyle/>
+          <a:p>
+            <a:pPr marL="0" marR="0" lvl="0" indent="0" algn="ctr" defTabSz="914400" rtl="0" eaLnBrk="0" fontAlgn="base" latinLnBrk="0" hangingPunct="0">
+              <a:lnSpc>
+                <a:spcPct val="100000"/>
+              </a:lnSpc>
+              <a:spcBef>
+                <a:spcPct val="0"/>
+              </a:spcBef>
+              <a:spcAft>
+                <a:spcPct val="0"/>
+              </a:spcAft>
+              <a:buClrTx/>
+              <a:buSzTx/>
+              <a:buFontTx/>
+              <a:buNone/>
+              <a:defRPr/>
+            </a:pPr>
+            <a:endParaRPr kumimoji="0" lang="en-IN" sz="1800" b="1" i="0" u="none" strike="noStrike" kern="1200" cap="none" spc="0" normalizeH="0" baseline="0" noProof="0" dirty="0">
+              <a:ln>
+                <a:noFill/>
+              </a:ln>
+              <a:solidFill>
+                <a:schemeClr val="tx1"/>
+              </a:solidFill>
+              <a:effectLst/>
+              <a:uLnTx/>
+              <a:uFillTx/>
+              <a:latin typeface="Arial Rounded MT Bold" pitchFamily="34" charset="0"/>
+              <a:ea typeface="+mn-ea"/>
+              <a:cs typeface="+mn-cs"/>
+            </a:endParaRPr>
+          </a:p>
+        </p:txBody>
+      </p:sp>
+      <p:sp>
+        <p:nvSpPr>
+          <p:cNvPr id="7" name="TextBox 6">
+            <a:extLst>
+              <a:ext uri="{FF2B5EF4-FFF2-40B4-BE49-F238E27FC236}">
+                <a16:creationId xmlns:a16="http://schemas.microsoft.com/office/drawing/2014/main" id="{E80F305C-6A20-3C54-6036-58C2818B1303}"/>
+              </a:ext>
+            </a:extLst>
+          </p:cNvPr>
+          <p:cNvSpPr txBox="1"/>
+          <p:nvPr/>
+        </p:nvSpPr>
+        <p:spPr>
+          <a:xfrm>
+            <a:off x="443971" y="6490513"/>
+            <a:ext cx="11288182" cy="338554"/>
+          </a:xfrm>
+          <a:prstGeom prst="rect">
+            <a:avLst/>
+          </a:prstGeom>
+          <a:noFill/>
+        </p:spPr>
+        <p:txBody>
+          <a:bodyPr wrap="square" rtlCol="0">
+            <a:spAutoFit/>
+          </a:bodyPr>
+          <a:lstStyle/>
+          <a:p>
+            <a:pPr marL="0" marR="0" lvl="0" indent="0" algn="ctr" defTabSz="914400" rtl="0" eaLnBrk="0" fontAlgn="base" latinLnBrk="0" hangingPunct="0">
+              <a:lnSpc>
+                <a:spcPct val="100000"/>
+              </a:lnSpc>
+              <a:spcBef>
+                <a:spcPct val="0"/>
+              </a:spcBef>
+              <a:spcAft>
+                <a:spcPct val="0"/>
+              </a:spcAft>
+              <a:buClrTx/>
+              <a:buSzTx/>
+              <a:buFontTx/>
+              <a:buNone/>
+              <a:defRPr/>
+            </a:pPr>
+            <a:r>
+              <a:rPr kumimoji="0" lang="en-IN" sz="1600" b="1" i="0" u="none" strike="noStrike" kern="1200" cap="none" spc="0" normalizeH="0" baseline="0" noProof="0" dirty="0">
+                <a:ln>
+                  <a:noFill/>
+                </a:ln>
+                <a:solidFill>
+                  <a:schemeClr val="tx1"/>
+                </a:solidFill>
+                <a:effectLst/>
+                <a:uLnTx/>
+                <a:uFillTx/>
+                <a:latin typeface="Arial Rounded MT Bold" pitchFamily="34" charset="0"/>
+                <a:ea typeface="+mn-ea"/>
+                <a:cs typeface="+mn-cs"/>
+              </a:rPr>
+              <a:t>B.Tech III Year – II Sem | Dept of Computational Intelligence| Application Development – II | Project Review</a:t>
+            </a:r>
+          </a:p>
+        </p:txBody>
+      </p:sp>
+      <p:sp>
+        <p:nvSpPr>
+          <p:cNvPr id="3" name="Title 1">
+            <a:extLst>
+              <a:ext uri="{FF2B5EF4-FFF2-40B4-BE49-F238E27FC236}">
+                <a16:creationId xmlns:a16="http://schemas.microsoft.com/office/drawing/2014/main" id="{2017B7A6-5107-0E28-C1DA-BE5B96CA35EE}"/>
+              </a:ext>
+            </a:extLst>
+          </p:cNvPr>
+          <p:cNvSpPr txBox="1">
+            <a:spLocks/>
+          </p:cNvSpPr>
+          <p:nvPr/>
+        </p:nvSpPr>
+        <p:spPr>
+          <a:xfrm>
+            <a:off x="443971" y="509588"/>
+            <a:ext cx="10515600" cy="598488"/>
+          </a:xfrm>
+          <a:prstGeom prst="rect">
+            <a:avLst/>
+          </a:prstGeom>
+        </p:spPr>
+        <p:txBody>
+          <a:bodyPr vert="horz" wrap="square" lIns="91440" tIns="45720" rIns="91440" bIns="45720" numCol="1" rtlCol="0" anchor="ctr" anchorCtr="0" compatLnSpc="1">
+            <a:normAutofit fontScale="90000" lnSpcReduction="20000"/>
+          </a:bodyPr>
+          <a:lstStyle>
+            <a:lvl1pPr algn="ctr" defTabSz="914400" rtl="0" eaLnBrk="1" latinLnBrk="0" hangingPunct="1">
+              <a:lnSpc>
+                <a:spcPct val="90000"/>
+              </a:lnSpc>
+              <a:spcBef>
+                <a:spcPct val="0"/>
+              </a:spcBef>
+              <a:buNone/>
+              <a:defRPr sz="6000" kern="1200">
+                <a:solidFill>
+                  <a:schemeClr val="tx1"/>
+                </a:solidFill>
+                <a:latin typeface="+mj-lt"/>
+                <a:ea typeface="+mj-ea"/>
+                <a:cs typeface="+mj-cs"/>
+              </a:defRPr>
+            </a:lvl1pPr>
+          </a:lstStyle>
+          <a:p>
+            <a:pPr algn="l">
+              <a:defRPr/>
+            </a:pPr>
+            <a:r>
+              <a:rPr lang="en-IN" sz="4890" b="1" dirty="0">
+                <a:solidFill>
+                  <a:srgbClr val="00B0F0"/>
+                </a:solidFill>
+                <a:latin typeface="Times New Roman" panose="02020603050405020304" pitchFamily="18" charset="0"/>
+                <a:cs typeface="Times New Roman" panose="02020603050405020304" pitchFamily="18" charset="0"/>
+              </a:rPr>
+              <a:t>Conclusion</a:t>
+            </a:r>
+          </a:p>
+        </p:txBody>
+      </p:sp>
+      <p:sp>
+        <p:nvSpPr>
+          <p:cNvPr id="8" name="Rounded Rectangle 4">
+            <a:extLst>
+              <a:ext uri="{FF2B5EF4-FFF2-40B4-BE49-F238E27FC236}">
+                <a16:creationId xmlns:a16="http://schemas.microsoft.com/office/drawing/2014/main" id="{4DB72A4E-F177-F103-6B2D-05C1D30CDEF5}"/>
+              </a:ext>
+            </a:extLst>
+          </p:cNvPr>
+          <p:cNvSpPr/>
+          <p:nvPr/>
+        </p:nvSpPr>
+        <p:spPr>
+          <a:xfrm>
+            <a:off x="-15875" y="-10805"/>
+            <a:ext cx="12207875" cy="393700"/>
+          </a:xfrm>
+          <a:prstGeom prst="rect">
+            <a:avLst/>
+          </a:prstGeom>
+          <a:solidFill>
+            <a:srgbClr val="5B9BD5"/>
+          </a:solidFill>
+        </p:spPr>
+        <p:style>
+          <a:lnRef idx="2">
+            <a:schemeClr val="accent1">
+              <a:shade val="50000"/>
+            </a:schemeClr>
+          </a:lnRef>
+          <a:fillRef idx="1">
+            <a:schemeClr val="accent1"/>
+          </a:fillRef>
+          <a:effectRef idx="0">
+            <a:schemeClr val="accent1"/>
+          </a:effectRef>
+          <a:fontRef idx="minor">
+            <a:schemeClr val="lt1"/>
+          </a:fontRef>
+        </p:style>
+        <p:txBody>
+          <a:bodyPr anchor="ctr"/>
+          <a:lstStyle/>
+          <a:p>
+            <a:pPr marL="0" marR="0" lvl="0" indent="0" algn="ctr" defTabSz="914400" rtl="0" eaLnBrk="0" fontAlgn="base" latinLnBrk="0" hangingPunct="0">
+              <a:lnSpc>
+                <a:spcPct val="100000"/>
+              </a:lnSpc>
+              <a:spcBef>
+                <a:spcPct val="0"/>
+              </a:spcBef>
+              <a:spcAft>
+                <a:spcPct val="0"/>
+              </a:spcAft>
+              <a:buClrTx/>
+              <a:buSzTx/>
+              <a:buFontTx/>
+              <a:buNone/>
+              <a:defRPr/>
+            </a:pPr>
+            <a:endParaRPr kumimoji="0" lang="en-IN" sz="1800" b="1" i="0" u="none" strike="noStrike" kern="1200" cap="none" spc="0" normalizeH="0" baseline="0" noProof="0" dirty="0">
+              <a:ln>
+                <a:noFill/>
+              </a:ln>
+              <a:solidFill>
+                <a:schemeClr val="tx1"/>
+              </a:solidFill>
+              <a:effectLst/>
+              <a:uLnTx/>
+              <a:uFillTx/>
+              <a:latin typeface="Arial Rounded MT Bold" pitchFamily="34" charset="0"/>
+              <a:ea typeface="+mn-ea"/>
+              <a:cs typeface="+mn-cs"/>
+            </a:endParaRPr>
+          </a:p>
+        </p:txBody>
+      </p:sp>
+      <p:sp>
+        <p:nvSpPr>
+          <p:cNvPr id="9" name="TextBox 8">
+            <a:extLst>
+              <a:ext uri="{FF2B5EF4-FFF2-40B4-BE49-F238E27FC236}">
+                <a16:creationId xmlns:a16="http://schemas.microsoft.com/office/drawing/2014/main" id="{BF664F33-1364-C0BA-2506-3C1C6FF2C96C}"/>
+              </a:ext>
+            </a:extLst>
+          </p:cNvPr>
+          <p:cNvSpPr txBox="1"/>
+          <p:nvPr/>
+        </p:nvSpPr>
+        <p:spPr>
+          <a:xfrm>
+            <a:off x="2801516" y="16768"/>
+            <a:ext cx="6588967" cy="338554"/>
+          </a:xfrm>
+          <a:prstGeom prst="rect">
+            <a:avLst/>
+          </a:prstGeom>
+          <a:noFill/>
+        </p:spPr>
+        <p:txBody>
+          <a:bodyPr wrap="square" rtlCol="0">
+            <a:spAutoFit/>
+          </a:bodyPr>
+          <a:lstStyle/>
+          <a:p>
+            <a:r>
+              <a:rPr lang="en-US" sz="1600" b="1" dirty="0">
+                <a:latin typeface="Arial Rounded MT Bold" panose="020F0704030504030204" pitchFamily="34" charset="0"/>
+                <a:cs typeface="Arial" panose="020B0604020202020204" pitchFamily="34" charset="0"/>
+              </a:rPr>
+              <a:t>MALLA REDDY COLLEGE OF ENGINEERING AND TECHNOLOGY</a:t>
+            </a:r>
+            <a:endParaRPr lang="x-none" sz="1600" b="1" dirty="0">
+              <a:latin typeface="Arial Rounded MT Bold" panose="020F0704030504030204" pitchFamily="34" charset="0"/>
+              <a:cs typeface="Arial" panose="020B0604020202020204" pitchFamily="34" charset="0"/>
+            </a:endParaRPr>
+          </a:p>
+        </p:txBody>
+      </p:sp>
+      <p:pic>
+        <p:nvPicPr>
+          <p:cNvPr id="10" name="Picture 6">
+            <a:extLst>
+              <a:ext uri="{FF2B5EF4-FFF2-40B4-BE49-F238E27FC236}">
+                <a16:creationId xmlns:a16="http://schemas.microsoft.com/office/drawing/2014/main" id="{315ED282-95CD-1819-0B6F-AAEF5D5D0C58}"/>
+              </a:ext>
+            </a:extLst>
+          </p:cNvPr>
+          <p:cNvPicPr>
+            <a:picLocks noChangeAspect="1"/>
+          </p:cNvPicPr>
+          <p:nvPr/>
+        </p:nvPicPr>
+        <p:blipFill>
+          <a:blip r:embed="rId2" cstate="print"/>
+          <a:stretch>
+            <a:fillRect/>
+          </a:stretch>
+        </p:blipFill>
+        <p:spPr>
+          <a:xfrm>
+            <a:off x="10899775" y="-128587"/>
+            <a:ext cx="1276350" cy="1276350"/>
+          </a:xfrm>
+          <a:prstGeom prst="rect">
+            <a:avLst/>
+          </a:prstGeom>
+          <a:noFill/>
+          <a:ln w="9525">
+            <a:noFill/>
+          </a:ln>
+        </p:spPr>
+      </p:pic>
+      <p:sp>
+        <p:nvSpPr>
+          <p:cNvPr id="13" name="Slide Number Placeholder 3">
+            <a:extLst>
+              <a:ext uri="{FF2B5EF4-FFF2-40B4-BE49-F238E27FC236}">
+                <a16:creationId xmlns:a16="http://schemas.microsoft.com/office/drawing/2014/main" id="{4D9ECAC6-C86B-BD47-DFDC-E3351740CA7B}"/>
+              </a:ext>
+            </a:extLst>
+          </p:cNvPr>
+          <p:cNvSpPr txBox="1">
+            <a:spLocks/>
+          </p:cNvSpPr>
+          <p:nvPr/>
+        </p:nvSpPr>
+        <p:spPr>
+          <a:xfrm>
+            <a:off x="9067800" y="6176963"/>
+            <a:ext cx="2743200" cy="365125"/>
+          </a:xfrm>
+          <a:prstGeom prst="rect">
+            <a:avLst/>
+          </a:prstGeom>
+          <a:noFill/>
+          <a:ln>
+            <a:noFill/>
+          </a:ln>
+        </p:spPr>
+        <p:txBody>
+          <a:bodyPr anchor="ctr" anchorCtr="0"/>
+          <a:lstStyle>
+            <a:defPPr>
+              <a:defRPr lang="x-none"/>
+            </a:defPPr>
+            <a:lvl1pPr marL="0" algn="l" defTabSz="914400" rtl="0" eaLnBrk="1" latinLnBrk="0" hangingPunct="1">
+              <a:defRPr sz="1800" kern="1200">
+                <a:solidFill>
+                  <a:schemeClr val="tx1"/>
+                </a:solidFill>
+                <a:latin typeface="+mn-lt"/>
+                <a:ea typeface="+mn-ea"/>
+                <a:cs typeface="+mn-cs"/>
+              </a:defRPr>
+            </a:lvl1pPr>
+            <a:lvl2pPr marL="457200" algn="l" defTabSz="914400" rtl="0" eaLnBrk="1" latinLnBrk="0" hangingPunct="1">
+              <a:defRPr sz="1800" kern="1200">
+                <a:solidFill>
+                  <a:schemeClr val="tx1"/>
+                </a:solidFill>
+                <a:latin typeface="+mn-lt"/>
+                <a:ea typeface="+mn-ea"/>
+                <a:cs typeface="+mn-cs"/>
+              </a:defRPr>
+            </a:lvl2pPr>
+            <a:lvl3pPr marL="914400" algn="l" defTabSz="914400" rtl="0" eaLnBrk="1" latinLnBrk="0" hangingPunct="1">
+              <a:defRPr sz="1800" kern="1200">
+                <a:solidFill>
+                  <a:schemeClr val="tx1"/>
+                </a:solidFill>
+                <a:latin typeface="+mn-lt"/>
+                <a:ea typeface="+mn-ea"/>
+                <a:cs typeface="+mn-cs"/>
+              </a:defRPr>
+            </a:lvl3pPr>
+            <a:lvl4pPr marL="1371600" algn="l" defTabSz="914400" rtl="0" eaLnBrk="1" latinLnBrk="0" hangingPunct="1">
+              <a:defRPr sz="1800" kern="1200">
+                <a:solidFill>
+                  <a:schemeClr val="tx1"/>
+                </a:solidFill>
+                <a:latin typeface="+mn-lt"/>
+                <a:ea typeface="+mn-ea"/>
+                <a:cs typeface="+mn-cs"/>
+              </a:defRPr>
+            </a:lvl4pPr>
+            <a:lvl5pPr marL="1828800" algn="l" defTabSz="914400" rtl="0" eaLnBrk="1" latinLnBrk="0" hangingPunct="1">
+              <a:defRPr sz="1800" kern="1200">
+                <a:solidFill>
+                  <a:schemeClr val="tx1"/>
+                </a:solidFill>
+                <a:latin typeface="+mn-lt"/>
+                <a:ea typeface="+mn-ea"/>
+                <a:cs typeface="+mn-cs"/>
+              </a:defRPr>
+            </a:lvl5pPr>
+            <a:lvl6pPr marL="2286000" algn="l" defTabSz="914400" rtl="0" eaLnBrk="1" latinLnBrk="0" hangingPunct="1">
+              <a:defRPr sz="1800" kern="1200">
+                <a:solidFill>
+                  <a:schemeClr val="tx1"/>
+                </a:solidFill>
+                <a:latin typeface="+mn-lt"/>
+                <a:ea typeface="+mn-ea"/>
+                <a:cs typeface="+mn-cs"/>
+              </a:defRPr>
+            </a:lvl6pPr>
+            <a:lvl7pPr marL="2743200" algn="l" defTabSz="914400" rtl="0" eaLnBrk="1" latinLnBrk="0" hangingPunct="1">
+              <a:defRPr sz="1800" kern="1200">
+                <a:solidFill>
+                  <a:schemeClr val="tx1"/>
+                </a:solidFill>
+                <a:latin typeface="+mn-lt"/>
+                <a:ea typeface="+mn-ea"/>
+                <a:cs typeface="+mn-cs"/>
+              </a:defRPr>
+            </a:lvl7pPr>
+            <a:lvl8pPr marL="3200400" algn="l" defTabSz="914400" rtl="0" eaLnBrk="1" latinLnBrk="0" hangingPunct="1">
+              <a:defRPr sz="1800" kern="1200">
+                <a:solidFill>
+                  <a:schemeClr val="tx1"/>
+                </a:solidFill>
+                <a:latin typeface="+mn-lt"/>
+                <a:ea typeface="+mn-ea"/>
+                <a:cs typeface="+mn-cs"/>
+              </a:defRPr>
+            </a:lvl8pPr>
+            <a:lvl9pPr marL="3657600" algn="l" defTabSz="914400" rtl="0" eaLnBrk="1" latinLnBrk="0" hangingPunct="1">
+              <a:defRPr sz="1800" kern="1200">
+                <a:solidFill>
+                  <a:schemeClr val="tx1"/>
+                </a:solidFill>
+                <a:latin typeface="+mn-lt"/>
+                <a:ea typeface="+mn-ea"/>
+                <a:cs typeface="+mn-cs"/>
+              </a:defRPr>
+            </a:lvl9pPr>
+          </a:lstStyle>
+          <a:p>
+            <a:pPr algn="r">
+              <a:spcBef>
+                <a:spcPct val="0"/>
+              </a:spcBef>
+            </a:pPr>
+            <a:fld id="{9A0DB2DC-4C9A-4742-B13C-FB6460FD3503}" type="slidenum">
+              <a:rPr lang="en-IN" altLang="en-US" sz="1200" b="1" smtClean="0">
+                <a:solidFill>
+                  <a:srgbClr val="C00000"/>
+                </a:solidFill>
+              </a:rPr>
+              <a:pPr algn="r">
+                <a:spcBef>
+                  <a:spcPct val="0"/>
+                </a:spcBef>
+              </a:pPr>
+              <a:t>23</a:t>
+            </a:fld>
+            <a:endParaRPr lang="en-IN" altLang="en-US" sz="1200" b="1" dirty="0">
+              <a:solidFill>
+                <a:srgbClr val="C00000"/>
+              </a:solidFill>
+            </a:endParaRPr>
+          </a:p>
+        </p:txBody>
+      </p:sp>
+      <p:sp>
+        <p:nvSpPr>
+          <p:cNvPr id="2" name="Content Placeholder 2">
+            <a:extLst>
+              <a:ext uri="{FF2B5EF4-FFF2-40B4-BE49-F238E27FC236}">
+                <a16:creationId xmlns:a16="http://schemas.microsoft.com/office/drawing/2014/main" id="{5B1BB66E-B7B9-A665-4512-B2CB160CAAC2}"/>
+              </a:ext>
+            </a:extLst>
+          </p:cNvPr>
+          <p:cNvSpPr txBox="1">
+            <a:spLocks/>
+          </p:cNvSpPr>
+          <p:nvPr/>
+        </p:nvSpPr>
+        <p:spPr>
+          <a:xfrm>
+            <a:off x="901382" y="1112431"/>
+            <a:ext cx="10405110" cy="5351145"/>
+          </a:xfrm>
+          <a:prstGeom prst="rect">
+            <a:avLst/>
+          </a:prstGeom>
+        </p:spPr>
+        <p:txBody>
+          <a:bodyPr vert="horz" wrap="square" lIns="91440" tIns="45720" rIns="91440" bIns="45720" rtlCol="0" anchor="t" anchorCtr="0">
+            <a:normAutofit/>
+          </a:bodyPr>
+          <a:lstStyle>
+            <a:lvl1pPr marL="0" indent="0" algn="ctr" defTabSz="914400" rtl="0" eaLnBrk="1" latinLnBrk="0" hangingPunct="1">
+              <a:lnSpc>
+                <a:spcPct val="90000"/>
+              </a:lnSpc>
+              <a:spcBef>
+                <a:spcPts val="1000"/>
+              </a:spcBef>
+              <a:buFont typeface="Arial" panose="020B0604020202020204" pitchFamily="34" charset="0"/>
+              <a:buNone/>
+              <a:defRPr sz="2400" kern="1200">
+                <a:solidFill>
+                  <a:schemeClr val="tx1"/>
+                </a:solidFill>
+                <a:latin typeface="+mn-lt"/>
+                <a:ea typeface="+mn-ea"/>
+                <a:cs typeface="+mn-cs"/>
+              </a:defRPr>
+            </a:lvl1pPr>
+            <a:lvl2pPr marL="457200" indent="0" algn="ctr" defTabSz="914400" rtl="0" eaLnBrk="1" latinLnBrk="0" hangingPunct="1">
+              <a:lnSpc>
+                <a:spcPct val="90000"/>
+              </a:lnSpc>
+              <a:spcBef>
+                <a:spcPts val="500"/>
+              </a:spcBef>
+              <a:buFont typeface="Arial" panose="020B0604020202020204" pitchFamily="34" charset="0"/>
+              <a:buNone/>
+              <a:defRPr sz="2000" kern="1200">
+                <a:solidFill>
+                  <a:schemeClr val="tx1"/>
+                </a:solidFill>
+                <a:latin typeface="+mn-lt"/>
+                <a:ea typeface="+mn-ea"/>
+                <a:cs typeface="+mn-cs"/>
+              </a:defRPr>
+            </a:lvl2pPr>
+            <a:lvl3pPr marL="914400" indent="0" algn="ctr" defTabSz="914400" rtl="0" eaLnBrk="1" latinLnBrk="0" hangingPunct="1">
+              <a:lnSpc>
+                <a:spcPct val="90000"/>
+              </a:lnSpc>
+              <a:spcBef>
+                <a:spcPts val="500"/>
+              </a:spcBef>
+              <a:buFont typeface="Arial" panose="020B0604020202020204" pitchFamily="34" charset="0"/>
+              <a:buNone/>
+              <a:defRPr sz="1800" kern="1200">
+                <a:solidFill>
+                  <a:schemeClr val="tx1"/>
+                </a:solidFill>
+                <a:latin typeface="+mn-lt"/>
+                <a:ea typeface="+mn-ea"/>
+                <a:cs typeface="+mn-cs"/>
+              </a:defRPr>
+            </a:lvl3pPr>
+            <a:lvl4pPr marL="1371600" indent="0" algn="ctr" defTabSz="914400" rtl="0" eaLnBrk="1" latinLnBrk="0" hangingPunct="1">
+              <a:lnSpc>
+                <a:spcPct val="90000"/>
+              </a:lnSpc>
+              <a:spcBef>
+                <a:spcPts val="500"/>
+              </a:spcBef>
+              <a:buFont typeface="Arial" panose="020B0604020202020204" pitchFamily="34" charset="0"/>
+              <a:buNone/>
+              <a:defRPr sz="1600" kern="1200">
+                <a:solidFill>
+                  <a:schemeClr val="tx1"/>
+                </a:solidFill>
+                <a:latin typeface="+mn-lt"/>
+                <a:ea typeface="+mn-ea"/>
+                <a:cs typeface="+mn-cs"/>
+              </a:defRPr>
+            </a:lvl4pPr>
+            <a:lvl5pPr marL="1828800" indent="0" algn="ctr" defTabSz="914400" rtl="0" eaLnBrk="1" latinLnBrk="0" hangingPunct="1">
+              <a:lnSpc>
+                <a:spcPct val="90000"/>
+              </a:lnSpc>
+              <a:spcBef>
+                <a:spcPts val="500"/>
+              </a:spcBef>
+              <a:buFont typeface="Arial" panose="020B0604020202020204" pitchFamily="34" charset="0"/>
+              <a:buNone/>
+              <a:defRPr sz="1600" kern="1200">
+                <a:solidFill>
+                  <a:schemeClr val="tx1"/>
+                </a:solidFill>
+                <a:latin typeface="+mn-lt"/>
+                <a:ea typeface="+mn-ea"/>
+                <a:cs typeface="+mn-cs"/>
+              </a:defRPr>
+            </a:lvl5pPr>
+            <a:lvl6pPr marL="2286000" indent="0" algn="ctr" defTabSz="914400" rtl="0" eaLnBrk="1" latinLnBrk="0" hangingPunct="1">
+              <a:lnSpc>
+                <a:spcPct val="90000"/>
+              </a:lnSpc>
+              <a:spcBef>
+                <a:spcPts val="500"/>
+              </a:spcBef>
+              <a:buFont typeface="Arial" panose="020B0604020202020204" pitchFamily="34" charset="0"/>
+              <a:buNone/>
+              <a:defRPr sz="1600" kern="1200">
+                <a:solidFill>
+                  <a:schemeClr val="tx1"/>
+                </a:solidFill>
+                <a:latin typeface="+mn-lt"/>
+                <a:ea typeface="+mn-ea"/>
+                <a:cs typeface="+mn-cs"/>
+              </a:defRPr>
+            </a:lvl6pPr>
+            <a:lvl7pPr marL="2743200" indent="0" algn="ctr" defTabSz="914400" rtl="0" eaLnBrk="1" latinLnBrk="0" hangingPunct="1">
+              <a:lnSpc>
+                <a:spcPct val="90000"/>
+              </a:lnSpc>
+              <a:spcBef>
+                <a:spcPts val="500"/>
+              </a:spcBef>
+              <a:buFont typeface="Arial" panose="020B0604020202020204" pitchFamily="34" charset="0"/>
+              <a:buNone/>
+              <a:defRPr sz="1600" kern="1200">
+                <a:solidFill>
+                  <a:schemeClr val="tx1"/>
+                </a:solidFill>
+                <a:latin typeface="+mn-lt"/>
+                <a:ea typeface="+mn-ea"/>
+                <a:cs typeface="+mn-cs"/>
+              </a:defRPr>
+            </a:lvl7pPr>
+            <a:lvl8pPr marL="3200400" indent="0" algn="ctr" defTabSz="914400" rtl="0" eaLnBrk="1" latinLnBrk="0" hangingPunct="1">
+              <a:lnSpc>
+                <a:spcPct val="90000"/>
+              </a:lnSpc>
+              <a:spcBef>
+                <a:spcPts val="500"/>
+              </a:spcBef>
+              <a:buFont typeface="Arial" panose="020B0604020202020204" pitchFamily="34" charset="0"/>
+              <a:buNone/>
+              <a:defRPr sz="1600" kern="1200">
+                <a:solidFill>
+                  <a:schemeClr val="tx1"/>
+                </a:solidFill>
+                <a:latin typeface="+mn-lt"/>
+                <a:ea typeface="+mn-ea"/>
+                <a:cs typeface="+mn-cs"/>
+              </a:defRPr>
+            </a:lvl8pPr>
+            <a:lvl9pPr marL="3657600" indent="0" algn="ctr" defTabSz="914400" rtl="0" eaLnBrk="1" latinLnBrk="0" hangingPunct="1">
+              <a:lnSpc>
+                <a:spcPct val="90000"/>
+              </a:lnSpc>
+              <a:spcBef>
+                <a:spcPts val="500"/>
+              </a:spcBef>
+              <a:buFont typeface="Arial" panose="020B0604020202020204" pitchFamily="34" charset="0"/>
+              <a:buNone/>
+              <a:defRPr sz="1600" kern="1200">
+                <a:solidFill>
+                  <a:schemeClr val="tx1"/>
+                </a:solidFill>
+                <a:latin typeface="+mn-lt"/>
+                <a:ea typeface="+mn-ea"/>
+                <a:cs typeface="+mn-cs"/>
+              </a:defRPr>
+            </a:lvl9pPr>
+          </a:lstStyle>
+          <a:p>
+            <a:pPr lvl="0" algn="l" eaLnBrk="0" fontAlgn="base" hangingPunct="0">
+              <a:lnSpc>
+                <a:spcPct val="150000"/>
+              </a:lnSpc>
+              <a:spcBef>
+                <a:spcPct val="0"/>
+              </a:spcBef>
+              <a:spcAft>
+                <a:spcPct val="0"/>
+              </a:spcAft>
+              <a:buFontTx/>
+              <a:buChar char="•"/>
+            </a:pPr>
+            <a:r>
+              <a:rPr lang="en-US" altLang="en-US" dirty="0">
+                <a:latin typeface="Times New Roman" pitchFamily="18" charset="0"/>
+                <a:cs typeface="Times New Roman" pitchFamily="18" charset="0"/>
+              </a:rPr>
+              <a:t>Features a custom rendering engine for seamless video production.</a:t>
+            </a:r>
+          </a:p>
+          <a:p>
+            <a:pPr lvl="0" algn="l" eaLnBrk="0" fontAlgn="base" hangingPunct="0">
+              <a:lnSpc>
+                <a:spcPct val="150000"/>
+              </a:lnSpc>
+              <a:spcBef>
+                <a:spcPct val="0"/>
+              </a:spcBef>
+              <a:spcAft>
+                <a:spcPct val="0"/>
+              </a:spcAft>
+              <a:buFontTx/>
+              <a:buChar char="•"/>
+            </a:pPr>
+            <a:r>
+              <a:rPr lang="en-US" altLang="en-US" dirty="0">
+                <a:latin typeface="Times New Roman" pitchFamily="18" charset="0"/>
+                <a:cs typeface="Times New Roman" pitchFamily="18" charset="0"/>
+              </a:rPr>
+              <a:t>Automates the entire content creation process, from script generation to video rendering.</a:t>
+            </a:r>
+          </a:p>
+          <a:p>
+            <a:pPr lvl="0" algn="l" eaLnBrk="0" fontAlgn="base" hangingPunct="0">
+              <a:lnSpc>
+                <a:spcPct val="150000"/>
+              </a:lnSpc>
+              <a:spcBef>
+                <a:spcPct val="0"/>
+              </a:spcBef>
+              <a:spcAft>
+                <a:spcPct val="0"/>
+              </a:spcAft>
+              <a:buFontTx/>
+              <a:buChar char="•"/>
+            </a:pPr>
+            <a:r>
+              <a:rPr lang="en-US" altLang="en-US" dirty="0">
+                <a:latin typeface="Times New Roman" pitchFamily="18" charset="0"/>
+                <a:cs typeface="Times New Roman" pitchFamily="18" charset="0"/>
+              </a:rPr>
+              <a:t>Utilizes ChatGPT for scriptwriting and advanced generative AI for video creation.</a:t>
+            </a:r>
+          </a:p>
+          <a:p>
+            <a:pPr lvl="0" algn="l" eaLnBrk="0" fontAlgn="base" hangingPunct="0">
+              <a:lnSpc>
+                <a:spcPct val="150000"/>
+              </a:lnSpc>
+              <a:spcBef>
+                <a:spcPct val="0"/>
+              </a:spcBef>
+              <a:spcAft>
+                <a:spcPct val="0"/>
+              </a:spcAft>
+              <a:buFontTx/>
+              <a:buChar char="•"/>
+            </a:pPr>
+            <a:r>
+              <a:rPr lang="en-US" altLang="en-US" dirty="0">
+                <a:latin typeface="Times New Roman" pitchFamily="18" charset="0"/>
+                <a:cs typeface="Times New Roman" pitchFamily="18" charset="0"/>
+              </a:rPr>
+              <a:t>Integrates EdgeTTS for voiceovers and Whisper for generating timed captions.</a:t>
+            </a:r>
+          </a:p>
+          <a:p>
+            <a:pPr lvl="0" algn="l" eaLnBrk="0" fontAlgn="base" hangingPunct="0">
+              <a:lnSpc>
+                <a:spcPct val="150000"/>
+              </a:lnSpc>
+              <a:spcBef>
+                <a:spcPct val="0"/>
+              </a:spcBef>
+              <a:spcAft>
+                <a:spcPct val="0"/>
+              </a:spcAft>
+              <a:buFontTx/>
+              <a:buChar char="•"/>
+            </a:pPr>
+            <a:r>
+              <a:rPr lang="en-US" altLang="en-US" dirty="0">
+                <a:latin typeface="Times New Roman" pitchFamily="18" charset="0"/>
+                <a:cs typeface="Times New Roman" pitchFamily="18" charset="0"/>
+              </a:rPr>
+              <a:t>Reduces manual effort and saves time for content creators.</a:t>
+            </a:r>
+          </a:p>
+          <a:p>
+            <a:pPr lvl="0" algn="l" eaLnBrk="0" fontAlgn="base" hangingPunct="0">
+              <a:lnSpc>
+                <a:spcPct val="150000"/>
+              </a:lnSpc>
+              <a:spcBef>
+                <a:spcPct val="0"/>
+              </a:spcBef>
+              <a:spcAft>
+                <a:spcPct val="0"/>
+              </a:spcAft>
+              <a:buFontTx/>
+              <a:buChar char="•"/>
+            </a:pPr>
+            <a:r>
+              <a:rPr lang="en-US" altLang="en-US" dirty="0">
+                <a:latin typeface="Times New Roman" pitchFamily="18" charset="0"/>
+                <a:cs typeface="Times New Roman" pitchFamily="18" charset="0"/>
+              </a:rPr>
+              <a:t>Offers flexibility for user modifications at any stage.</a:t>
+            </a:r>
+          </a:p>
+          <a:p>
+            <a:pPr lvl="0" algn="l" eaLnBrk="0" fontAlgn="base" hangingPunct="0">
+              <a:lnSpc>
+                <a:spcPct val="150000"/>
+              </a:lnSpc>
+              <a:spcBef>
+                <a:spcPct val="0"/>
+              </a:spcBef>
+              <a:spcAft>
+                <a:spcPct val="0"/>
+              </a:spcAft>
+              <a:buFontTx/>
+              <a:buChar char="•"/>
+            </a:pPr>
+            <a:r>
+              <a:rPr lang="en-US" altLang="en-US" dirty="0">
+                <a:latin typeface="Times New Roman" pitchFamily="18" charset="0"/>
+                <a:cs typeface="Times New Roman" pitchFamily="18" charset="0"/>
+              </a:rPr>
+              <a:t>Provides an efficient, user-friendly solution for producing high-quality, social media-ready videos. </a:t>
+            </a:r>
+          </a:p>
+        </p:txBody>
+      </p:sp>
+    </p:spTree>
+    <p:extLst>
+      <p:ext uri="{BB962C8B-B14F-4D97-AF65-F5344CB8AC3E}">
+        <p14:creationId xmlns:p14="http://schemas.microsoft.com/office/powerpoint/2010/main" val="854143978"/>
       </p:ext>
     </p:extLst>
   </p:cSld>
@@ -15512,10 +19604,10 @@
   <a:themeElements>
     <a:clrScheme name="Office">
       <a:dk1>
-        <a:sysClr val="windowText" lastClr="3D3D3D"/>
+        <a:sysClr val="windowText" lastClr="000000"/>
       </a:dk1>
       <a:lt1>
-        <a:sysClr val="window" lastClr="FFFAEF"/>
+        <a:sysClr val="window" lastClr="FFFFFF"/>
       </a:lt1>
       <a:dk2>
         <a:srgbClr val="44546A"/>
@@ -15807,10 +19899,10 @@
   <a:themeElements>
     <a:clrScheme name="Office">
       <a:dk1>
-        <a:sysClr val="windowText" lastClr="3D3D3D"/>
+        <a:sysClr val="windowText" lastClr="000000"/>
       </a:dk1>
       <a:lt1>
-        <a:sysClr val="window" lastClr="FFFAEF"/>
+        <a:sysClr val="window" lastClr="FFFFFF"/>
       </a:lt1>
       <a:dk2>
         <a:srgbClr val="44546A"/>

--- a/Documentation/PPT_video_Generator.pptx
+++ b/Documentation/PPT_video_Generator.pptx
@@ -5,7 +5,7 @@
     <p:sldMasterId id="2147483648" r:id="rId1"/>
   </p:sldMasterIdLst>
   <p:notesMasterIdLst>
-    <p:notesMasterId r:id="rId25"/>
+    <p:notesMasterId r:id="rId30"/>
   </p:notesMasterIdLst>
   <p:sldIdLst>
     <p:sldId id="256" r:id="rId2"/>
@@ -18,19 +18,24 @@
     <p:sldId id="263" r:id="rId9"/>
     <p:sldId id="265" r:id="rId10"/>
     <p:sldId id="266" r:id="rId11"/>
-    <p:sldId id="264" r:id="rId12"/>
-    <p:sldId id="267" r:id="rId13"/>
-    <p:sldId id="268" r:id="rId14"/>
-    <p:sldId id="269" r:id="rId15"/>
-    <p:sldId id="270" r:id="rId16"/>
-    <p:sldId id="278" r:id="rId17"/>
-    <p:sldId id="272" r:id="rId18"/>
-    <p:sldId id="277" r:id="rId19"/>
-    <p:sldId id="273" r:id="rId20"/>
-    <p:sldId id="274" r:id="rId21"/>
-    <p:sldId id="275" r:id="rId22"/>
-    <p:sldId id="276" r:id="rId23"/>
-    <p:sldId id="271" r:id="rId24"/>
+    <p:sldId id="279" r:id="rId12"/>
+    <p:sldId id="280" r:id="rId13"/>
+    <p:sldId id="264" r:id="rId14"/>
+    <p:sldId id="267" r:id="rId15"/>
+    <p:sldId id="268" r:id="rId16"/>
+    <p:sldId id="269" r:id="rId17"/>
+    <p:sldId id="270" r:id="rId18"/>
+    <p:sldId id="278" r:id="rId19"/>
+    <p:sldId id="272" r:id="rId20"/>
+    <p:sldId id="277" r:id="rId21"/>
+    <p:sldId id="273" r:id="rId22"/>
+    <p:sldId id="274" r:id="rId23"/>
+    <p:sldId id="275" r:id="rId24"/>
+    <p:sldId id="276" r:id="rId25"/>
+    <p:sldId id="271" r:id="rId26"/>
+    <p:sldId id="283" r:id="rId27"/>
+    <p:sldId id="281" r:id="rId28"/>
+    <p:sldId id="282" r:id="rId29"/>
   </p:sldIdLst>
   <p:sldSz cx="12192000" cy="6858000"/>
   <p:notesSz cx="6858000" cy="9144000"/>
@@ -231,7 +236,7 @@
             <a:fld id="{FC854283-FDB5-4502-8E0E-B1B085FD2F71}" type="datetimeFigureOut">
               <a:rPr lang="x-none" smtClean="0"/>
               <a:pPr/>
-              <a:t>4/10/2025</a:t>
+              <a:t>4/23/2025</a:t>
             </a:fld>
             <a:endParaRPr lang="x-none"/>
           </a:p>
@@ -650,7 +655,7 @@
             <a:fld id="{87C5F92A-F16F-4A80-B63C-89D210F86F56}" type="datetimeFigureOut">
               <a:rPr lang="x-none" smtClean="0"/>
               <a:pPr/>
-              <a:t>4/10/2025</a:t>
+              <a:t>4/23/2025</a:t>
             </a:fld>
             <a:endParaRPr lang="x-none"/>
           </a:p>
@@ -852,7 +857,7 @@
             <a:fld id="{87C5F92A-F16F-4A80-B63C-89D210F86F56}" type="datetimeFigureOut">
               <a:rPr lang="x-none" smtClean="0"/>
               <a:pPr/>
-              <a:t>4/10/2025</a:t>
+              <a:t>4/23/2025</a:t>
             </a:fld>
             <a:endParaRPr lang="x-none"/>
           </a:p>
@@ -1064,7 +1069,7 @@
             <a:fld id="{87C5F92A-F16F-4A80-B63C-89D210F86F56}" type="datetimeFigureOut">
               <a:rPr lang="x-none" smtClean="0"/>
               <a:pPr/>
-              <a:t>4/10/2025</a:t>
+              <a:t>4/23/2025</a:t>
             </a:fld>
             <a:endParaRPr lang="x-none"/>
           </a:p>
@@ -1266,7 +1271,7 @@
             <a:fld id="{87C5F92A-F16F-4A80-B63C-89D210F86F56}" type="datetimeFigureOut">
               <a:rPr lang="x-none" smtClean="0"/>
               <a:pPr/>
-              <a:t>4/10/2025</a:t>
+              <a:t>4/23/2025</a:t>
             </a:fld>
             <a:endParaRPr lang="x-none"/>
           </a:p>
@@ -1544,7 +1549,7 @@
             <a:fld id="{87C5F92A-F16F-4A80-B63C-89D210F86F56}" type="datetimeFigureOut">
               <a:rPr lang="x-none" smtClean="0"/>
               <a:pPr/>
-              <a:t>4/10/2025</a:t>
+              <a:t>4/23/2025</a:t>
             </a:fld>
             <a:endParaRPr lang="x-none"/>
           </a:p>
@@ -1814,7 +1819,7 @@
             <a:fld id="{87C5F92A-F16F-4A80-B63C-89D210F86F56}" type="datetimeFigureOut">
               <a:rPr lang="x-none" smtClean="0"/>
               <a:pPr/>
-              <a:t>4/10/2025</a:t>
+              <a:t>4/23/2025</a:t>
             </a:fld>
             <a:endParaRPr lang="x-none"/>
           </a:p>
@@ -2231,7 +2236,7 @@
             <a:fld id="{87C5F92A-F16F-4A80-B63C-89D210F86F56}" type="datetimeFigureOut">
               <a:rPr lang="x-none" smtClean="0"/>
               <a:pPr/>
-              <a:t>4/10/2025</a:t>
+              <a:t>4/23/2025</a:t>
             </a:fld>
             <a:endParaRPr lang="x-none"/>
           </a:p>
@@ -2375,7 +2380,7 @@
             <a:fld id="{87C5F92A-F16F-4A80-B63C-89D210F86F56}" type="datetimeFigureOut">
               <a:rPr lang="x-none" smtClean="0"/>
               <a:pPr/>
-              <a:t>4/10/2025</a:t>
+              <a:t>4/23/2025</a:t>
             </a:fld>
             <a:endParaRPr lang="x-none"/>
           </a:p>
@@ -2490,7 +2495,7 @@
             <a:fld id="{87C5F92A-F16F-4A80-B63C-89D210F86F56}" type="datetimeFigureOut">
               <a:rPr lang="x-none" smtClean="0"/>
               <a:pPr/>
-              <a:t>4/10/2025</a:t>
+              <a:t>4/23/2025</a:t>
             </a:fld>
             <a:endParaRPr lang="x-none"/>
           </a:p>
@@ -2805,7 +2810,7 @@
             <a:fld id="{87C5F92A-F16F-4A80-B63C-89D210F86F56}" type="datetimeFigureOut">
               <a:rPr lang="x-none" smtClean="0"/>
               <a:pPr/>
-              <a:t>4/10/2025</a:t>
+              <a:t>4/23/2025</a:t>
             </a:fld>
             <a:endParaRPr lang="x-none"/>
           </a:p>
@@ -3096,7 +3101,7 @@
             <a:fld id="{87C5F92A-F16F-4A80-B63C-89D210F86F56}" type="datetimeFigureOut">
               <a:rPr lang="x-none" smtClean="0"/>
               <a:pPr/>
-              <a:t>4/10/2025</a:t>
+              <a:t>4/23/2025</a:t>
             </a:fld>
             <a:endParaRPr lang="x-none"/>
           </a:p>
@@ -3341,7 +3346,7 @@
             <a:fld id="{87C5F92A-F16F-4A80-B63C-89D210F86F56}" type="datetimeFigureOut">
               <a:rPr lang="x-none" smtClean="0"/>
               <a:pPr/>
-              <a:t>4/10/2025</a:t>
+              <a:t>4/23/2025</a:t>
             </a:fld>
             <a:endParaRPr lang="x-none"/>
           </a:p>
@@ -4156,8 +4161,29 @@
                 <a:cs typeface="Gotham Bold"/>
                 <a:sym typeface="Gotham Bold"/>
               </a:rPr>
-              <a:t>1.D. ANIRUDH                 -    22N31A6626</a:t>
-            </a:r>
+              <a:t>1.D. ANIRUDH                 </a:t>
+            </a:r>
+            <a:r>
+              <a:rPr lang="en-US" sz="2800" b="1">
+                <a:solidFill>
+                  <a:srgbClr val="191919"/>
+                </a:solidFill>
+                <a:latin typeface="Gotham Bold"/>
+                <a:ea typeface="Gotham Bold"/>
+                <a:cs typeface="Gotham Bold"/>
+                <a:sym typeface="Gotham Bold"/>
+              </a:rPr>
+              <a:t>-    22N31A6648</a:t>
+            </a:r>
+            <a:endParaRPr lang="en-US" sz="2800" b="1" dirty="0">
+              <a:solidFill>
+                <a:srgbClr val="191919"/>
+              </a:solidFill>
+              <a:latin typeface="Gotham Bold"/>
+              <a:ea typeface="Gotham Bold"/>
+              <a:cs typeface="Gotham Bold"/>
+              <a:sym typeface="Gotham Bold"/>
+            </a:endParaRPr>
           </a:p>
           <a:p>
             <a:pPr marL="0" marR="0" lvl="0" indent="0" algn="ctr" defTabSz="914400" rtl="0" eaLnBrk="1" fontAlgn="base" latinLnBrk="0" hangingPunct="1">
@@ -5615,7 +5641,7 @@
         <p:cNvPr id="1" name="">
           <a:extLst>
             <a:ext uri="{FF2B5EF4-FFF2-40B4-BE49-F238E27FC236}">
-              <a16:creationId xmlns:a16="http://schemas.microsoft.com/office/drawing/2014/main" id="{AF6CCE0E-16E4-B477-D8B9-2EDA966294AB}"/>
+              <a16:creationId xmlns:a16="http://schemas.microsoft.com/office/drawing/2014/main" id="{DDE96FCA-71A5-8925-203F-32EE9F1433FD}"/>
             </a:ext>
           </a:extLst>
         </p:cNvPr>
@@ -5635,7 +5661,7 @@
           <p:cNvPr id="6" name="Rounded Rectangle 4">
             <a:extLst>
               <a:ext uri="{FF2B5EF4-FFF2-40B4-BE49-F238E27FC236}">
-                <a16:creationId xmlns:a16="http://schemas.microsoft.com/office/drawing/2014/main" id="{1761FE9E-6B9C-22C4-B217-369E5666C3D6}"/>
+                <a16:creationId xmlns:a16="http://schemas.microsoft.com/office/drawing/2014/main" id="{6671D8D6-3A84-8DAB-411E-6F0274AB3F44}"/>
               </a:ext>
             </a:extLst>
           </p:cNvPr>
@@ -5712,7 +5738,7 @@
           <p:cNvPr id="7" name="TextBox 6">
             <a:extLst>
               <a:ext uri="{FF2B5EF4-FFF2-40B4-BE49-F238E27FC236}">
-                <a16:creationId xmlns:a16="http://schemas.microsoft.com/office/drawing/2014/main" id="{43272BD6-DF8E-8D41-23C3-30763D7275EA}"/>
+                <a16:creationId xmlns:a16="http://schemas.microsoft.com/office/drawing/2014/main" id="{47A64151-FDBC-D147-4A02-4C8D3308AE1F}"/>
               </a:ext>
             </a:extLst>
           </p:cNvPr>
@@ -5773,88 +5799,10 @@
       </p:sp>
       <p:sp>
         <p:nvSpPr>
-          <p:cNvPr id="3" name="Title 1">
-            <a:extLst>
-              <a:ext uri="{FF2B5EF4-FFF2-40B4-BE49-F238E27FC236}">
-                <a16:creationId xmlns:a16="http://schemas.microsoft.com/office/drawing/2014/main" id="{1EE4D4A6-7BBB-968D-4EFD-79B1F7848A85}"/>
-              </a:ext>
-            </a:extLst>
-          </p:cNvPr>
-          <p:cNvSpPr txBox="1">
-            <a:spLocks/>
-          </p:cNvSpPr>
-          <p:nvPr/>
-        </p:nvSpPr>
-        <p:spPr>
-          <a:xfrm>
-            <a:off x="3042931" y="3123673"/>
-            <a:ext cx="6090261" cy="598488"/>
-          </a:xfrm>
-          <a:prstGeom prst="rect">
-            <a:avLst/>
-          </a:prstGeom>
-        </p:spPr>
-        <p:txBody>
-          <a:bodyPr vert="horz" wrap="square" lIns="91440" tIns="45720" rIns="91440" bIns="45720" numCol="1" rtlCol="0" anchor="ctr" anchorCtr="0" compatLnSpc="1">
-            <a:noAutofit/>
-          </a:bodyPr>
-          <a:lstStyle>
-            <a:lvl1pPr algn="ctr" defTabSz="914400" rtl="0" eaLnBrk="1" latinLnBrk="0" hangingPunct="1">
-              <a:lnSpc>
-                <a:spcPct val="90000"/>
-              </a:lnSpc>
-              <a:spcBef>
-                <a:spcPct val="0"/>
-              </a:spcBef>
-              <a:buNone/>
-              <a:defRPr sz="6000" kern="1200">
-                <a:solidFill>
-                  <a:schemeClr val="tx1"/>
-                </a:solidFill>
-                <a:latin typeface="+mj-lt"/>
-                <a:ea typeface="+mj-ea"/>
-                <a:cs typeface="+mj-cs"/>
-              </a:defRPr>
-            </a:lvl1pPr>
-          </a:lstStyle>
-          <a:p>
-            <a:pPr>
-              <a:defRPr/>
-            </a:pPr>
-            <a:r>
-              <a:rPr lang="en-IN" b="1" dirty="0">
-                <a:solidFill>
-                  <a:srgbClr val="00B0F0"/>
-                </a:solidFill>
-                <a:latin typeface="Times New Roman" panose="02020603050405020304" pitchFamily="18" charset="0"/>
-                <a:cs typeface="Times New Roman" panose="02020603050405020304" pitchFamily="18" charset="0"/>
-              </a:rPr>
-              <a:t>System Models</a:t>
-            </a:r>
-          </a:p>
-          <a:p>
-            <a:pPr>
-              <a:defRPr/>
-            </a:pPr>
-            <a:r>
-              <a:rPr lang="en-IN" sz="4000" b="1" dirty="0">
-                <a:solidFill>
-                  <a:srgbClr val="00B0F0"/>
-                </a:solidFill>
-                <a:latin typeface="Times New Roman" panose="02020603050405020304" pitchFamily="18" charset="0"/>
-                <a:cs typeface="Times New Roman" panose="02020603050405020304" pitchFamily="18" charset="0"/>
-              </a:rPr>
-              <a:t>(UML Diagrams)</a:t>
-            </a:r>
-          </a:p>
-        </p:txBody>
-      </p:sp>
-      <p:sp>
-        <p:nvSpPr>
           <p:cNvPr id="8" name="Rounded Rectangle 4">
             <a:extLst>
               <a:ext uri="{FF2B5EF4-FFF2-40B4-BE49-F238E27FC236}">
-                <a16:creationId xmlns:a16="http://schemas.microsoft.com/office/drawing/2014/main" id="{B325BCA7-9E1B-82D2-A3AE-C0635D84C361}"/>
+                <a16:creationId xmlns:a16="http://schemas.microsoft.com/office/drawing/2014/main" id="{CFD2EA6B-992C-73B8-5655-CF73AD82AB4E}"/>
               </a:ext>
             </a:extLst>
           </p:cNvPr>
@@ -5931,7 +5879,7 @@
           <p:cNvPr id="9" name="TextBox 8">
             <a:extLst>
               <a:ext uri="{FF2B5EF4-FFF2-40B4-BE49-F238E27FC236}">
-                <a16:creationId xmlns:a16="http://schemas.microsoft.com/office/drawing/2014/main" id="{CC9123F4-1D17-E3FF-53C7-C6C2E045D566}"/>
+                <a16:creationId xmlns:a16="http://schemas.microsoft.com/office/drawing/2014/main" id="{BEF77AF1-5DEB-52E2-F8DA-A99B136B94AB}"/>
               </a:ext>
             </a:extLst>
           </p:cNvPr>
@@ -5973,7 +5921,7 @@
           <p:cNvPr id="10" name="Picture 6">
             <a:extLst>
               <a:ext uri="{FF2B5EF4-FFF2-40B4-BE49-F238E27FC236}">
-                <a16:creationId xmlns:a16="http://schemas.microsoft.com/office/drawing/2014/main" id="{7095D0F4-7B93-B1E8-EEA2-8E2B98B9FCD7}"/>
+                <a16:creationId xmlns:a16="http://schemas.microsoft.com/office/drawing/2014/main" id="{E4A89936-E437-1F16-C45C-E43BB38B243E}"/>
               </a:ext>
             </a:extLst>
           </p:cNvPr>
@@ -6007,7 +5955,7 @@
           <p:cNvPr id="12" name="Slide Number Placeholder 3">
             <a:extLst>
               <a:ext uri="{FF2B5EF4-FFF2-40B4-BE49-F238E27FC236}">
-                <a16:creationId xmlns:a16="http://schemas.microsoft.com/office/drawing/2014/main" id="{C7448B5B-A85F-EFF0-057D-1EB1E0F3A053}"/>
+                <a16:creationId xmlns:a16="http://schemas.microsoft.com/office/drawing/2014/main" id="{7F78BD91-832A-3326-BF71-BB0BF0830BBF}"/>
               </a:ext>
             </a:extLst>
           </p:cNvPr>
@@ -6153,6 +6101,1741 @@
           </a:p>
         </p:txBody>
       </p:sp>
+      <p:sp>
+        <p:nvSpPr>
+          <p:cNvPr id="2" name="Content Placeholder 2">
+            <a:extLst>
+              <a:ext uri="{FF2B5EF4-FFF2-40B4-BE49-F238E27FC236}">
+                <a16:creationId xmlns:a16="http://schemas.microsoft.com/office/drawing/2014/main" id="{DD2D5F61-F3ED-53D8-8257-A692C36A0223}"/>
+              </a:ext>
+            </a:extLst>
+          </p:cNvPr>
+          <p:cNvSpPr txBox="1">
+            <a:spLocks/>
+          </p:cNvSpPr>
+          <p:nvPr/>
+        </p:nvSpPr>
+        <p:spPr>
+          <a:xfrm>
+            <a:off x="0" y="1242539"/>
+            <a:ext cx="10405110" cy="5351145"/>
+          </a:xfrm>
+          <a:prstGeom prst="rect">
+            <a:avLst/>
+          </a:prstGeom>
+        </p:spPr>
+        <p:txBody>
+          <a:bodyPr vert="horz" wrap="square" lIns="91440" tIns="45720" rIns="91440" bIns="45720" rtlCol="0" anchor="t" anchorCtr="0">
+            <a:normAutofit/>
+          </a:bodyPr>
+          <a:lstStyle>
+            <a:lvl1pPr marL="0" indent="0" algn="ctr" defTabSz="914400" rtl="0" eaLnBrk="1" latinLnBrk="0" hangingPunct="1">
+              <a:lnSpc>
+                <a:spcPct val="90000"/>
+              </a:lnSpc>
+              <a:spcBef>
+                <a:spcPts val="1000"/>
+              </a:spcBef>
+              <a:buFont typeface="Arial" panose="020B0604020202020204" pitchFamily="34" charset="0"/>
+              <a:buNone/>
+              <a:defRPr sz="2400" kern="1200">
+                <a:solidFill>
+                  <a:schemeClr val="tx1"/>
+                </a:solidFill>
+                <a:latin typeface="+mn-lt"/>
+                <a:ea typeface="+mn-ea"/>
+                <a:cs typeface="+mn-cs"/>
+              </a:defRPr>
+            </a:lvl1pPr>
+            <a:lvl2pPr marL="457200" indent="0" algn="ctr" defTabSz="914400" rtl="0" eaLnBrk="1" latinLnBrk="0" hangingPunct="1">
+              <a:lnSpc>
+                <a:spcPct val="90000"/>
+              </a:lnSpc>
+              <a:spcBef>
+                <a:spcPts val="500"/>
+              </a:spcBef>
+              <a:buFont typeface="Arial" panose="020B0604020202020204" pitchFamily="34" charset="0"/>
+              <a:buNone/>
+              <a:defRPr sz="2000" kern="1200">
+                <a:solidFill>
+                  <a:schemeClr val="tx1"/>
+                </a:solidFill>
+                <a:latin typeface="+mn-lt"/>
+                <a:ea typeface="+mn-ea"/>
+                <a:cs typeface="+mn-cs"/>
+              </a:defRPr>
+            </a:lvl2pPr>
+            <a:lvl3pPr marL="914400" indent="0" algn="ctr" defTabSz="914400" rtl="0" eaLnBrk="1" latinLnBrk="0" hangingPunct="1">
+              <a:lnSpc>
+                <a:spcPct val="90000"/>
+              </a:lnSpc>
+              <a:spcBef>
+                <a:spcPts val="500"/>
+              </a:spcBef>
+              <a:buFont typeface="Arial" panose="020B0604020202020204" pitchFamily="34" charset="0"/>
+              <a:buNone/>
+              <a:defRPr sz="1800" kern="1200">
+                <a:solidFill>
+                  <a:schemeClr val="tx1"/>
+                </a:solidFill>
+                <a:latin typeface="+mn-lt"/>
+                <a:ea typeface="+mn-ea"/>
+                <a:cs typeface="+mn-cs"/>
+              </a:defRPr>
+            </a:lvl3pPr>
+            <a:lvl4pPr marL="1371600" indent="0" algn="ctr" defTabSz="914400" rtl="0" eaLnBrk="1" latinLnBrk="0" hangingPunct="1">
+              <a:lnSpc>
+                <a:spcPct val="90000"/>
+              </a:lnSpc>
+              <a:spcBef>
+                <a:spcPts val="500"/>
+              </a:spcBef>
+              <a:buFont typeface="Arial" panose="020B0604020202020204" pitchFamily="34" charset="0"/>
+              <a:buNone/>
+              <a:defRPr sz="1600" kern="1200">
+                <a:solidFill>
+                  <a:schemeClr val="tx1"/>
+                </a:solidFill>
+                <a:latin typeface="+mn-lt"/>
+                <a:ea typeface="+mn-ea"/>
+                <a:cs typeface="+mn-cs"/>
+              </a:defRPr>
+            </a:lvl4pPr>
+            <a:lvl5pPr marL="1828800" indent="0" algn="ctr" defTabSz="914400" rtl="0" eaLnBrk="1" latinLnBrk="0" hangingPunct="1">
+              <a:lnSpc>
+                <a:spcPct val="90000"/>
+              </a:lnSpc>
+              <a:spcBef>
+                <a:spcPts val="500"/>
+              </a:spcBef>
+              <a:buFont typeface="Arial" panose="020B0604020202020204" pitchFamily="34" charset="0"/>
+              <a:buNone/>
+              <a:defRPr sz="1600" kern="1200">
+                <a:solidFill>
+                  <a:schemeClr val="tx1"/>
+                </a:solidFill>
+                <a:latin typeface="+mn-lt"/>
+                <a:ea typeface="+mn-ea"/>
+                <a:cs typeface="+mn-cs"/>
+              </a:defRPr>
+            </a:lvl5pPr>
+            <a:lvl6pPr marL="2286000" indent="0" algn="ctr" defTabSz="914400" rtl="0" eaLnBrk="1" latinLnBrk="0" hangingPunct="1">
+              <a:lnSpc>
+                <a:spcPct val="90000"/>
+              </a:lnSpc>
+              <a:spcBef>
+                <a:spcPts val="500"/>
+              </a:spcBef>
+              <a:buFont typeface="Arial" panose="020B0604020202020204" pitchFamily="34" charset="0"/>
+              <a:buNone/>
+              <a:defRPr sz="1600" kern="1200">
+                <a:solidFill>
+                  <a:schemeClr val="tx1"/>
+                </a:solidFill>
+                <a:latin typeface="+mn-lt"/>
+                <a:ea typeface="+mn-ea"/>
+                <a:cs typeface="+mn-cs"/>
+              </a:defRPr>
+            </a:lvl6pPr>
+            <a:lvl7pPr marL="2743200" indent="0" algn="ctr" defTabSz="914400" rtl="0" eaLnBrk="1" latinLnBrk="0" hangingPunct="1">
+              <a:lnSpc>
+                <a:spcPct val="90000"/>
+              </a:lnSpc>
+              <a:spcBef>
+                <a:spcPts val="500"/>
+              </a:spcBef>
+              <a:buFont typeface="Arial" panose="020B0604020202020204" pitchFamily="34" charset="0"/>
+              <a:buNone/>
+              <a:defRPr sz="1600" kern="1200">
+                <a:solidFill>
+                  <a:schemeClr val="tx1"/>
+                </a:solidFill>
+                <a:latin typeface="+mn-lt"/>
+                <a:ea typeface="+mn-ea"/>
+                <a:cs typeface="+mn-cs"/>
+              </a:defRPr>
+            </a:lvl7pPr>
+            <a:lvl8pPr marL="3200400" indent="0" algn="ctr" defTabSz="914400" rtl="0" eaLnBrk="1" latinLnBrk="0" hangingPunct="1">
+              <a:lnSpc>
+                <a:spcPct val="90000"/>
+              </a:lnSpc>
+              <a:spcBef>
+                <a:spcPts val="500"/>
+              </a:spcBef>
+              <a:buFont typeface="Arial" panose="020B0604020202020204" pitchFamily="34" charset="0"/>
+              <a:buNone/>
+              <a:defRPr sz="1600" kern="1200">
+                <a:solidFill>
+                  <a:schemeClr val="tx1"/>
+                </a:solidFill>
+                <a:latin typeface="+mn-lt"/>
+                <a:ea typeface="+mn-ea"/>
+                <a:cs typeface="+mn-cs"/>
+              </a:defRPr>
+            </a:lvl8pPr>
+            <a:lvl9pPr marL="3657600" indent="0" algn="ctr" defTabSz="914400" rtl="0" eaLnBrk="1" latinLnBrk="0" hangingPunct="1">
+              <a:lnSpc>
+                <a:spcPct val="90000"/>
+              </a:lnSpc>
+              <a:spcBef>
+                <a:spcPts val="500"/>
+              </a:spcBef>
+              <a:buFont typeface="Arial" panose="020B0604020202020204" pitchFamily="34" charset="0"/>
+              <a:buNone/>
+              <a:defRPr sz="1600" kern="1200">
+                <a:solidFill>
+                  <a:schemeClr val="tx1"/>
+                </a:solidFill>
+                <a:latin typeface="+mn-lt"/>
+                <a:ea typeface="+mn-ea"/>
+                <a:cs typeface="+mn-cs"/>
+              </a:defRPr>
+            </a:lvl9pPr>
+          </a:lstStyle>
+          <a:p>
+            <a:pPr marL="1364464" lvl="2" indent="-454821" algn="just">
+              <a:lnSpc>
+                <a:spcPts val="4265"/>
+              </a:lnSpc>
+              <a:buFont typeface="Arial"/>
+              <a:buChar char="⚬"/>
+            </a:pPr>
+            <a:r>
+              <a:rPr lang="en-US" sz="2400" spc="189" dirty="0">
+                <a:solidFill>
+                  <a:srgbClr val="000000"/>
+                </a:solidFill>
+                <a:latin typeface="Times New Roman" pitchFamily="18" charset="0"/>
+                <a:ea typeface="DM Sans"/>
+                <a:cs typeface="Times New Roman" pitchFamily="18" charset="0"/>
+                <a:sym typeface="DM Sans"/>
+              </a:rPr>
+              <a:t>Generate Scripts</a:t>
+            </a:r>
+          </a:p>
+          <a:p>
+            <a:pPr marL="1364464" lvl="2" indent="-454821" algn="just">
+              <a:lnSpc>
+                <a:spcPts val="4265"/>
+              </a:lnSpc>
+              <a:buFont typeface="Arial"/>
+              <a:buChar char="⚬"/>
+            </a:pPr>
+            <a:r>
+              <a:rPr lang="en-US" sz="2400" spc="189" dirty="0">
+                <a:solidFill>
+                  <a:srgbClr val="000000"/>
+                </a:solidFill>
+                <a:latin typeface="Times New Roman" pitchFamily="18" charset="0"/>
+                <a:ea typeface="DM Sans"/>
+                <a:cs typeface="Times New Roman" pitchFamily="18" charset="0"/>
+                <a:sym typeface="DM Sans"/>
+              </a:rPr>
+              <a:t>Synthesize Voiceovers</a:t>
+            </a:r>
+          </a:p>
+          <a:p>
+            <a:pPr marL="1364464" lvl="2" indent="-454821" algn="just">
+              <a:lnSpc>
+                <a:spcPts val="4265"/>
+              </a:lnSpc>
+              <a:buFont typeface="Arial"/>
+              <a:buChar char="⚬"/>
+            </a:pPr>
+            <a:r>
+              <a:rPr lang="en-US" sz="2400" spc="189" dirty="0">
+                <a:solidFill>
+                  <a:srgbClr val="000000"/>
+                </a:solidFill>
+                <a:latin typeface="Times New Roman" pitchFamily="18" charset="0"/>
+                <a:ea typeface="DM Sans"/>
+                <a:cs typeface="Times New Roman" pitchFamily="18" charset="0"/>
+                <a:sym typeface="DM Sans"/>
+              </a:rPr>
+              <a:t>Create Captions</a:t>
+            </a:r>
+          </a:p>
+          <a:p>
+            <a:pPr marL="1364464" lvl="2" indent="-454821" algn="just">
+              <a:lnSpc>
+                <a:spcPts val="4265"/>
+              </a:lnSpc>
+              <a:buFont typeface="Arial"/>
+              <a:buChar char="⚬"/>
+            </a:pPr>
+            <a:r>
+              <a:rPr lang="en-US" sz="2400" spc="189" dirty="0">
+                <a:solidFill>
+                  <a:srgbClr val="000000"/>
+                </a:solidFill>
+                <a:latin typeface="Times New Roman" pitchFamily="18" charset="0"/>
+                <a:ea typeface="DM Sans"/>
+                <a:cs typeface="Times New Roman" pitchFamily="18" charset="0"/>
+                <a:sym typeface="DM Sans"/>
+              </a:rPr>
+              <a:t>Compile Videos Seamlessly</a:t>
+            </a:r>
+          </a:p>
+        </p:txBody>
+      </p:sp>
+      <p:sp>
+        <p:nvSpPr>
+          <p:cNvPr id="3" name="Title 1">
+            <a:extLst>
+              <a:ext uri="{FF2B5EF4-FFF2-40B4-BE49-F238E27FC236}">
+                <a16:creationId xmlns:a16="http://schemas.microsoft.com/office/drawing/2014/main" id="{AF0259CD-DF2D-4898-9F2F-B39D5C5F3311}"/>
+              </a:ext>
+            </a:extLst>
+          </p:cNvPr>
+          <p:cNvSpPr txBox="1">
+            <a:spLocks/>
+          </p:cNvSpPr>
+          <p:nvPr/>
+        </p:nvSpPr>
+        <p:spPr>
+          <a:xfrm>
+            <a:off x="443971" y="615914"/>
+            <a:ext cx="10515600" cy="598488"/>
+          </a:xfrm>
+          <a:prstGeom prst="rect">
+            <a:avLst/>
+          </a:prstGeom>
+        </p:spPr>
+        <p:txBody>
+          <a:bodyPr vert="horz" wrap="square" lIns="91440" tIns="45720" rIns="91440" bIns="45720" numCol="1" rtlCol="0" anchor="ctr" anchorCtr="0" compatLnSpc="1">
+            <a:normAutofit fontScale="90000" lnSpcReduction="20000"/>
+          </a:bodyPr>
+          <a:lstStyle>
+            <a:lvl1pPr algn="ctr" defTabSz="914400" rtl="0" eaLnBrk="1" latinLnBrk="0" hangingPunct="1">
+              <a:lnSpc>
+                <a:spcPct val="90000"/>
+              </a:lnSpc>
+              <a:spcBef>
+                <a:spcPct val="0"/>
+              </a:spcBef>
+              <a:buNone/>
+              <a:defRPr sz="6000" kern="1200">
+                <a:solidFill>
+                  <a:schemeClr val="tx1"/>
+                </a:solidFill>
+                <a:latin typeface="+mj-lt"/>
+                <a:ea typeface="+mj-ea"/>
+                <a:cs typeface="+mj-cs"/>
+              </a:defRPr>
+            </a:lvl1pPr>
+          </a:lstStyle>
+          <a:p>
+            <a:pPr algn="l">
+              <a:defRPr/>
+            </a:pPr>
+            <a:r>
+              <a:rPr lang="en-IN" sz="4890" b="1" dirty="0">
+                <a:solidFill>
+                  <a:srgbClr val="00B0F0"/>
+                </a:solidFill>
+                <a:latin typeface="Times New Roman" panose="02020603050405020304" pitchFamily="18" charset="0"/>
+                <a:cs typeface="Times New Roman" panose="02020603050405020304" pitchFamily="18" charset="0"/>
+              </a:rPr>
+              <a:t>Functional Requirements</a:t>
+            </a:r>
+          </a:p>
+        </p:txBody>
+      </p:sp>
+    </p:spTree>
+    <p:extLst>
+      <p:ext uri="{BB962C8B-B14F-4D97-AF65-F5344CB8AC3E}">
+        <p14:creationId xmlns:p14="http://schemas.microsoft.com/office/powerpoint/2010/main" val="781708303"/>
+      </p:ext>
+    </p:extLst>
+  </p:cSld>
+  <p:clrMapOvr>
+    <a:masterClrMapping/>
+  </p:clrMapOvr>
+</p:sld>
+</file>
+
+<file path=ppt/slides/slide12.xml><?xml version="1.0" encoding="utf-8"?>
+<p:sld xmlns:a="http://schemas.openxmlformats.org/drawingml/2006/main" xmlns:r="http://schemas.openxmlformats.org/officeDocument/2006/relationships" xmlns:p="http://schemas.openxmlformats.org/presentationml/2006/main">
+  <p:cSld>
+    <p:spTree>
+      <p:nvGrpSpPr>
+        <p:cNvPr id="1" name="">
+          <a:extLst>
+            <a:ext uri="{FF2B5EF4-FFF2-40B4-BE49-F238E27FC236}">
+              <a16:creationId xmlns:a16="http://schemas.microsoft.com/office/drawing/2014/main" id="{824A975C-BCCE-300D-C823-DD960F4F068D}"/>
+            </a:ext>
+          </a:extLst>
+        </p:cNvPr>
+        <p:cNvGrpSpPr/>
+        <p:nvPr/>
+      </p:nvGrpSpPr>
+      <p:grpSpPr>
+        <a:xfrm>
+          <a:off x="0" y="0"/>
+          <a:ext cx="0" cy="0"/>
+          <a:chOff x="0" y="0"/>
+          <a:chExt cx="0" cy="0"/>
+        </a:xfrm>
+      </p:grpSpPr>
+      <p:sp>
+        <p:nvSpPr>
+          <p:cNvPr id="6" name="Rounded Rectangle 4">
+            <a:extLst>
+              <a:ext uri="{FF2B5EF4-FFF2-40B4-BE49-F238E27FC236}">
+                <a16:creationId xmlns:a16="http://schemas.microsoft.com/office/drawing/2014/main" id="{E437A326-9DB2-EBBE-6070-12CF24463266}"/>
+              </a:ext>
+            </a:extLst>
+          </p:cNvPr>
+          <p:cNvSpPr/>
+          <p:nvPr/>
+        </p:nvSpPr>
+        <p:spPr>
+          <a:xfrm>
+            <a:off x="0" y="6462940"/>
+            <a:ext cx="12207875" cy="393700"/>
+          </a:xfrm>
+          <a:prstGeom prst="rect">
+            <a:avLst/>
+          </a:prstGeom>
+          <a:solidFill>
+            <a:srgbClr val="5B9BD5"/>
+          </a:solidFill>
+        </p:spPr>
+        <p:style>
+          <a:lnRef idx="2">
+            <a:schemeClr val="accent1">
+              <a:shade val="50000"/>
+            </a:schemeClr>
+          </a:lnRef>
+          <a:fillRef idx="1">
+            <a:schemeClr val="accent1"/>
+          </a:fillRef>
+          <a:effectRef idx="0">
+            <a:schemeClr val="accent1"/>
+          </a:effectRef>
+          <a:fontRef idx="minor">
+            <a:schemeClr val="lt1"/>
+          </a:fontRef>
+        </p:style>
+        <p:txBody>
+          <a:bodyPr anchor="ctr"/>
+          <a:lstStyle/>
+          <a:p>
+            <a:pPr marL="0" marR="0" lvl="0" indent="0" algn="ctr" defTabSz="914400" rtl="0" eaLnBrk="0" fontAlgn="base" latinLnBrk="0" hangingPunct="0">
+              <a:lnSpc>
+                <a:spcPct val="100000"/>
+              </a:lnSpc>
+              <a:spcBef>
+                <a:spcPct val="0"/>
+              </a:spcBef>
+              <a:spcAft>
+                <a:spcPct val="0"/>
+              </a:spcAft>
+              <a:buClrTx/>
+              <a:buSzTx/>
+              <a:buFontTx/>
+              <a:buNone/>
+              <a:defRPr/>
+            </a:pPr>
+            <a:endParaRPr kumimoji="0" lang="en-IN" sz="1800" b="1" i="0" u="none" strike="noStrike" kern="1200" cap="none" spc="0" normalizeH="0" baseline="0" noProof="0" dirty="0">
+              <a:ln>
+                <a:noFill/>
+              </a:ln>
+              <a:solidFill>
+                <a:schemeClr val="tx1"/>
+              </a:solidFill>
+              <a:effectLst/>
+              <a:uLnTx/>
+              <a:uFillTx/>
+              <a:latin typeface="Arial Rounded MT Bold" pitchFamily="34" charset="0"/>
+              <a:ea typeface="+mn-ea"/>
+              <a:cs typeface="+mn-cs"/>
+            </a:endParaRPr>
+          </a:p>
+        </p:txBody>
+      </p:sp>
+      <p:sp>
+        <p:nvSpPr>
+          <p:cNvPr id="7" name="TextBox 6">
+            <a:extLst>
+              <a:ext uri="{FF2B5EF4-FFF2-40B4-BE49-F238E27FC236}">
+                <a16:creationId xmlns:a16="http://schemas.microsoft.com/office/drawing/2014/main" id="{DE971EBF-2302-3BD0-CDF7-C63640A7D570}"/>
+              </a:ext>
+            </a:extLst>
+          </p:cNvPr>
+          <p:cNvSpPr txBox="1"/>
+          <p:nvPr/>
+        </p:nvSpPr>
+        <p:spPr>
+          <a:xfrm>
+            <a:off x="443971" y="6490513"/>
+            <a:ext cx="11288182" cy="338554"/>
+          </a:xfrm>
+          <a:prstGeom prst="rect">
+            <a:avLst/>
+          </a:prstGeom>
+          <a:noFill/>
+        </p:spPr>
+        <p:txBody>
+          <a:bodyPr wrap="square" rtlCol="0">
+            <a:spAutoFit/>
+          </a:bodyPr>
+          <a:lstStyle/>
+          <a:p>
+            <a:pPr marL="0" marR="0" lvl="0" indent="0" algn="ctr" defTabSz="914400" rtl="0" eaLnBrk="0" fontAlgn="base" latinLnBrk="0" hangingPunct="0">
+              <a:lnSpc>
+                <a:spcPct val="100000"/>
+              </a:lnSpc>
+              <a:spcBef>
+                <a:spcPct val="0"/>
+              </a:spcBef>
+              <a:spcAft>
+                <a:spcPct val="0"/>
+              </a:spcAft>
+              <a:buClrTx/>
+              <a:buSzTx/>
+              <a:buFontTx/>
+              <a:buNone/>
+              <a:defRPr/>
+            </a:pPr>
+            <a:r>
+              <a:rPr kumimoji="0" lang="en-IN" sz="1600" b="1" i="0" u="none" strike="noStrike" kern="1200" cap="none" spc="0" normalizeH="0" baseline="0" noProof="0" dirty="0">
+                <a:ln>
+                  <a:noFill/>
+                </a:ln>
+                <a:solidFill>
+                  <a:schemeClr val="tx1"/>
+                </a:solidFill>
+                <a:effectLst/>
+                <a:uLnTx/>
+                <a:uFillTx/>
+                <a:latin typeface="Arial Rounded MT Bold" pitchFamily="34" charset="0"/>
+                <a:ea typeface="+mn-ea"/>
+                <a:cs typeface="+mn-cs"/>
+              </a:rPr>
+              <a:t>B.Tech III Year – II Sem | Dept of Computational Intelligence| Application Development – II | Project Review</a:t>
+            </a:r>
+          </a:p>
+        </p:txBody>
+      </p:sp>
+      <p:sp>
+        <p:nvSpPr>
+          <p:cNvPr id="8" name="Rounded Rectangle 4">
+            <a:extLst>
+              <a:ext uri="{FF2B5EF4-FFF2-40B4-BE49-F238E27FC236}">
+                <a16:creationId xmlns:a16="http://schemas.microsoft.com/office/drawing/2014/main" id="{A19752B9-B682-858F-B2D2-81FE72A02271}"/>
+              </a:ext>
+            </a:extLst>
+          </p:cNvPr>
+          <p:cNvSpPr/>
+          <p:nvPr/>
+        </p:nvSpPr>
+        <p:spPr>
+          <a:xfrm>
+            <a:off x="-15875" y="-10805"/>
+            <a:ext cx="12207875" cy="393700"/>
+          </a:xfrm>
+          <a:prstGeom prst="rect">
+            <a:avLst/>
+          </a:prstGeom>
+          <a:solidFill>
+            <a:srgbClr val="5B9BD5"/>
+          </a:solidFill>
+        </p:spPr>
+        <p:style>
+          <a:lnRef idx="2">
+            <a:schemeClr val="accent1">
+              <a:shade val="50000"/>
+            </a:schemeClr>
+          </a:lnRef>
+          <a:fillRef idx="1">
+            <a:schemeClr val="accent1"/>
+          </a:fillRef>
+          <a:effectRef idx="0">
+            <a:schemeClr val="accent1"/>
+          </a:effectRef>
+          <a:fontRef idx="minor">
+            <a:schemeClr val="lt1"/>
+          </a:fontRef>
+        </p:style>
+        <p:txBody>
+          <a:bodyPr anchor="ctr"/>
+          <a:lstStyle/>
+          <a:p>
+            <a:pPr marL="0" marR="0" lvl="0" indent="0" algn="ctr" defTabSz="914400" rtl="0" eaLnBrk="0" fontAlgn="base" latinLnBrk="0" hangingPunct="0">
+              <a:lnSpc>
+                <a:spcPct val="100000"/>
+              </a:lnSpc>
+              <a:spcBef>
+                <a:spcPct val="0"/>
+              </a:spcBef>
+              <a:spcAft>
+                <a:spcPct val="0"/>
+              </a:spcAft>
+              <a:buClrTx/>
+              <a:buSzTx/>
+              <a:buFontTx/>
+              <a:buNone/>
+              <a:defRPr/>
+            </a:pPr>
+            <a:endParaRPr kumimoji="0" lang="en-IN" sz="1800" b="1" i="0" u="none" strike="noStrike" kern="1200" cap="none" spc="0" normalizeH="0" baseline="0" noProof="0" dirty="0">
+              <a:ln>
+                <a:noFill/>
+              </a:ln>
+              <a:solidFill>
+                <a:schemeClr val="tx1"/>
+              </a:solidFill>
+              <a:effectLst/>
+              <a:uLnTx/>
+              <a:uFillTx/>
+              <a:latin typeface="Arial Rounded MT Bold" pitchFamily="34" charset="0"/>
+              <a:ea typeface="+mn-ea"/>
+              <a:cs typeface="+mn-cs"/>
+            </a:endParaRPr>
+          </a:p>
+        </p:txBody>
+      </p:sp>
+      <p:sp>
+        <p:nvSpPr>
+          <p:cNvPr id="9" name="TextBox 8">
+            <a:extLst>
+              <a:ext uri="{FF2B5EF4-FFF2-40B4-BE49-F238E27FC236}">
+                <a16:creationId xmlns:a16="http://schemas.microsoft.com/office/drawing/2014/main" id="{08E4473E-D5CA-AC03-2913-D0D14037CD89}"/>
+              </a:ext>
+            </a:extLst>
+          </p:cNvPr>
+          <p:cNvSpPr txBox="1"/>
+          <p:nvPr/>
+        </p:nvSpPr>
+        <p:spPr>
+          <a:xfrm>
+            <a:off x="2801516" y="16768"/>
+            <a:ext cx="6588967" cy="338554"/>
+          </a:xfrm>
+          <a:prstGeom prst="rect">
+            <a:avLst/>
+          </a:prstGeom>
+          <a:noFill/>
+        </p:spPr>
+        <p:txBody>
+          <a:bodyPr wrap="square" rtlCol="0">
+            <a:spAutoFit/>
+          </a:bodyPr>
+          <a:lstStyle/>
+          <a:p>
+            <a:r>
+              <a:rPr lang="en-US" sz="1600" b="1" dirty="0">
+                <a:latin typeface="Arial Rounded MT Bold" panose="020F0704030504030204" pitchFamily="34" charset="0"/>
+                <a:cs typeface="Arial" panose="020B0604020202020204" pitchFamily="34" charset="0"/>
+              </a:rPr>
+              <a:t>MALLA REDDY COLLEGE OF ENGINEERING AND TECHNOLOGY</a:t>
+            </a:r>
+            <a:endParaRPr lang="x-none" sz="1600" b="1" dirty="0">
+              <a:latin typeface="Arial Rounded MT Bold" panose="020F0704030504030204" pitchFamily="34" charset="0"/>
+              <a:cs typeface="Arial" panose="020B0604020202020204" pitchFamily="34" charset="0"/>
+            </a:endParaRPr>
+          </a:p>
+        </p:txBody>
+      </p:sp>
+      <p:pic>
+        <p:nvPicPr>
+          <p:cNvPr id="10" name="Picture 6">
+            <a:extLst>
+              <a:ext uri="{FF2B5EF4-FFF2-40B4-BE49-F238E27FC236}">
+                <a16:creationId xmlns:a16="http://schemas.microsoft.com/office/drawing/2014/main" id="{14DAEAC4-A2EE-B150-FC26-34344702C903}"/>
+              </a:ext>
+            </a:extLst>
+          </p:cNvPr>
+          <p:cNvPicPr>
+            <a:picLocks noChangeAspect="1"/>
+          </p:cNvPicPr>
+          <p:nvPr/>
+        </p:nvPicPr>
+        <p:blipFill>
+          <a:blip r:embed="rId2" cstate="print"/>
+          <a:stretch>
+            <a:fillRect/>
+          </a:stretch>
+        </p:blipFill>
+        <p:spPr>
+          <a:xfrm>
+            <a:off x="10899775" y="-128587"/>
+            <a:ext cx="1276350" cy="1276350"/>
+          </a:xfrm>
+          <a:prstGeom prst="rect">
+            <a:avLst/>
+          </a:prstGeom>
+          <a:noFill/>
+          <a:ln w="9525">
+            <a:noFill/>
+          </a:ln>
+        </p:spPr>
+      </p:pic>
+      <p:sp>
+        <p:nvSpPr>
+          <p:cNvPr id="12" name="Slide Number Placeholder 3">
+            <a:extLst>
+              <a:ext uri="{FF2B5EF4-FFF2-40B4-BE49-F238E27FC236}">
+                <a16:creationId xmlns:a16="http://schemas.microsoft.com/office/drawing/2014/main" id="{71BC9F55-5F8B-0A67-5D50-5B26B7296EE6}"/>
+              </a:ext>
+            </a:extLst>
+          </p:cNvPr>
+          <p:cNvSpPr txBox="1">
+            <a:spLocks/>
+          </p:cNvSpPr>
+          <p:nvPr/>
+        </p:nvSpPr>
+        <p:spPr>
+          <a:xfrm>
+            <a:off x="9067800" y="6176963"/>
+            <a:ext cx="2743200" cy="365125"/>
+          </a:xfrm>
+          <a:prstGeom prst="rect">
+            <a:avLst/>
+          </a:prstGeom>
+          <a:noFill/>
+          <a:ln>
+            <a:noFill/>
+          </a:ln>
+        </p:spPr>
+        <p:txBody>
+          <a:bodyPr anchor="ctr" anchorCtr="0"/>
+          <a:lstStyle>
+            <a:defPPr>
+              <a:defRPr lang="x-none"/>
+            </a:defPPr>
+            <a:lvl1pPr marL="0" algn="l" defTabSz="914400" rtl="0" eaLnBrk="1" latinLnBrk="0" hangingPunct="1">
+              <a:defRPr sz="1800" kern="1200">
+                <a:solidFill>
+                  <a:schemeClr val="tx1"/>
+                </a:solidFill>
+                <a:latin typeface="+mn-lt"/>
+                <a:ea typeface="+mn-ea"/>
+                <a:cs typeface="+mn-cs"/>
+              </a:defRPr>
+            </a:lvl1pPr>
+            <a:lvl2pPr marL="457200" algn="l" defTabSz="914400" rtl="0" eaLnBrk="1" latinLnBrk="0" hangingPunct="1">
+              <a:defRPr sz="1800" kern="1200">
+                <a:solidFill>
+                  <a:schemeClr val="tx1"/>
+                </a:solidFill>
+                <a:latin typeface="+mn-lt"/>
+                <a:ea typeface="+mn-ea"/>
+                <a:cs typeface="+mn-cs"/>
+              </a:defRPr>
+            </a:lvl2pPr>
+            <a:lvl3pPr marL="914400" algn="l" defTabSz="914400" rtl="0" eaLnBrk="1" latinLnBrk="0" hangingPunct="1">
+              <a:defRPr sz="1800" kern="1200">
+                <a:solidFill>
+                  <a:schemeClr val="tx1"/>
+                </a:solidFill>
+                <a:latin typeface="+mn-lt"/>
+                <a:ea typeface="+mn-ea"/>
+                <a:cs typeface="+mn-cs"/>
+              </a:defRPr>
+            </a:lvl3pPr>
+            <a:lvl4pPr marL="1371600" algn="l" defTabSz="914400" rtl="0" eaLnBrk="1" latinLnBrk="0" hangingPunct="1">
+              <a:defRPr sz="1800" kern="1200">
+                <a:solidFill>
+                  <a:schemeClr val="tx1"/>
+                </a:solidFill>
+                <a:latin typeface="+mn-lt"/>
+                <a:ea typeface="+mn-ea"/>
+                <a:cs typeface="+mn-cs"/>
+              </a:defRPr>
+            </a:lvl4pPr>
+            <a:lvl5pPr marL="1828800" algn="l" defTabSz="914400" rtl="0" eaLnBrk="1" latinLnBrk="0" hangingPunct="1">
+              <a:defRPr sz="1800" kern="1200">
+                <a:solidFill>
+                  <a:schemeClr val="tx1"/>
+                </a:solidFill>
+                <a:latin typeface="+mn-lt"/>
+                <a:ea typeface="+mn-ea"/>
+                <a:cs typeface="+mn-cs"/>
+              </a:defRPr>
+            </a:lvl5pPr>
+            <a:lvl6pPr marL="2286000" algn="l" defTabSz="914400" rtl="0" eaLnBrk="1" latinLnBrk="0" hangingPunct="1">
+              <a:defRPr sz="1800" kern="1200">
+                <a:solidFill>
+                  <a:schemeClr val="tx1"/>
+                </a:solidFill>
+                <a:latin typeface="+mn-lt"/>
+                <a:ea typeface="+mn-ea"/>
+                <a:cs typeface="+mn-cs"/>
+              </a:defRPr>
+            </a:lvl6pPr>
+            <a:lvl7pPr marL="2743200" algn="l" defTabSz="914400" rtl="0" eaLnBrk="1" latinLnBrk="0" hangingPunct="1">
+              <a:defRPr sz="1800" kern="1200">
+                <a:solidFill>
+                  <a:schemeClr val="tx1"/>
+                </a:solidFill>
+                <a:latin typeface="+mn-lt"/>
+                <a:ea typeface="+mn-ea"/>
+                <a:cs typeface="+mn-cs"/>
+              </a:defRPr>
+            </a:lvl7pPr>
+            <a:lvl8pPr marL="3200400" algn="l" defTabSz="914400" rtl="0" eaLnBrk="1" latinLnBrk="0" hangingPunct="1">
+              <a:defRPr sz="1800" kern="1200">
+                <a:solidFill>
+                  <a:schemeClr val="tx1"/>
+                </a:solidFill>
+                <a:latin typeface="+mn-lt"/>
+                <a:ea typeface="+mn-ea"/>
+                <a:cs typeface="+mn-cs"/>
+              </a:defRPr>
+            </a:lvl8pPr>
+            <a:lvl9pPr marL="3657600" algn="l" defTabSz="914400" rtl="0" eaLnBrk="1" latinLnBrk="0" hangingPunct="1">
+              <a:defRPr sz="1800" kern="1200">
+                <a:solidFill>
+                  <a:schemeClr val="tx1"/>
+                </a:solidFill>
+                <a:latin typeface="+mn-lt"/>
+                <a:ea typeface="+mn-ea"/>
+                <a:cs typeface="+mn-cs"/>
+              </a:defRPr>
+            </a:lvl9pPr>
+          </a:lstStyle>
+          <a:p>
+            <a:pPr algn="r">
+              <a:spcBef>
+                <a:spcPct val="0"/>
+              </a:spcBef>
+            </a:pPr>
+            <a:fld id="{9A0DB2DC-4C9A-4742-B13C-FB6460FD3503}" type="slidenum">
+              <a:rPr lang="en-IN" altLang="en-US" sz="1200" b="1" smtClean="0">
+                <a:solidFill>
+                  <a:srgbClr val="C00000"/>
+                </a:solidFill>
+              </a:rPr>
+              <a:pPr algn="r">
+                <a:spcBef>
+                  <a:spcPct val="0"/>
+                </a:spcBef>
+              </a:pPr>
+              <a:t>12</a:t>
+            </a:fld>
+            <a:endParaRPr lang="en-IN" altLang="en-US" sz="1200" b="1" dirty="0">
+              <a:solidFill>
+                <a:srgbClr val="C00000"/>
+              </a:solidFill>
+            </a:endParaRPr>
+          </a:p>
+        </p:txBody>
+      </p:sp>
+      <p:sp>
+        <p:nvSpPr>
+          <p:cNvPr id="2" name="Content Placeholder 2">
+            <a:extLst>
+              <a:ext uri="{FF2B5EF4-FFF2-40B4-BE49-F238E27FC236}">
+                <a16:creationId xmlns:a16="http://schemas.microsoft.com/office/drawing/2014/main" id="{5D83517D-2911-DB9E-3139-2B62DA6B7E1B}"/>
+              </a:ext>
+            </a:extLst>
+          </p:cNvPr>
+          <p:cNvSpPr txBox="1">
+            <a:spLocks/>
+          </p:cNvSpPr>
+          <p:nvPr/>
+        </p:nvSpPr>
+        <p:spPr>
+          <a:xfrm>
+            <a:off x="0" y="1242539"/>
+            <a:ext cx="10405110" cy="5351145"/>
+          </a:xfrm>
+          <a:prstGeom prst="rect">
+            <a:avLst/>
+          </a:prstGeom>
+        </p:spPr>
+        <p:txBody>
+          <a:bodyPr vert="horz" wrap="square" lIns="91440" tIns="45720" rIns="91440" bIns="45720" rtlCol="0" anchor="t" anchorCtr="0">
+            <a:normAutofit/>
+          </a:bodyPr>
+          <a:lstStyle>
+            <a:lvl1pPr marL="0" indent="0" algn="ctr" defTabSz="914400" rtl="0" eaLnBrk="1" latinLnBrk="0" hangingPunct="1">
+              <a:lnSpc>
+                <a:spcPct val="90000"/>
+              </a:lnSpc>
+              <a:spcBef>
+                <a:spcPts val="1000"/>
+              </a:spcBef>
+              <a:buFont typeface="Arial" panose="020B0604020202020204" pitchFamily="34" charset="0"/>
+              <a:buNone/>
+              <a:defRPr sz="2400" kern="1200">
+                <a:solidFill>
+                  <a:schemeClr val="tx1"/>
+                </a:solidFill>
+                <a:latin typeface="+mn-lt"/>
+                <a:ea typeface="+mn-ea"/>
+                <a:cs typeface="+mn-cs"/>
+              </a:defRPr>
+            </a:lvl1pPr>
+            <a:lvl2pPr marL="457200" indent="0" algn="ctr" defTabSz="914400" rtl="0" eaLnBrk="1" latinLnBrk="0" hangingPunct="1">
+              <a:lnSpc>
+                <a:spcPct val="90000"/>
+              </a:lnSpc>
+              <a:spcBef>
+                <a:spcPts val="500"/>
+              </a:spcBef>
+              <a:buFont typeface="Arial" panose="020B0604020202020204" pitchFamily="34" charset="0"/>
+              <a:buNone/>
+              <a:defRPr sz="2000" kern="1200">
+                <a:solidFill>
+                  <a:schemeClr val="tx1"/>
+                </a:solidFill>
+                <a:latin typeface="+mn-lt"/>
+                <a:ea typeface="+mn-ea"/>
+                <a:cs typeface="+mn-cs"/>
+              </a:defRPr>
+            </a:lvl2pPr>
+            <a:lvl3pPr marL="914400" indent="0" algn="ctr" defTabSz="914400" rtl="0" eaLnBrk="1" latinLnBrk="0" hangingPunct="1">
+              <a:lnSpc>
+                <a:spcPct val="90000"/>
+              </a:lnSpc>
+              <a:spcBef>
+                <a:spcPts val="500"/>
+              </a:spcBef>
+              <a:buFont typeface="Arial" panose="020B0604020202020204" pitchFamily="34" charset="0"/>
+              <a:buNone/>
+              <a:defRPr sz="1800" kern="1200">
+                <a:solidFill>
+                  <a:schemeClr val="tx1"/>
+                </a:solidFill>
+                <a:latin typeface="+mn-lt"/>
+                <a:ea typeface="+mn-ea"/>
+                <a:cs typeface="+mn-cs"/>
+              </a:defRPr>
+            </a:lvl3pPr>
+            <a:lvl4pPr marL="1371600" indent="0" algn="ctr" defTabSz="914400" rtl="0" eaLnBrk="1" latinLnBrk="0" hangingPunct="1">
+              <a:lnSpc>
+                <a:spcPct val="90000"/>
+              </a:lnSpc>
+              <a:spcBef>
+                <a:spcPts val="500"/>
+              </a:spcBef>
+              <a:buFont typeface="Arial" panose="020B0604020202020204" pitchFamily="34" charset="0"/>
+              <a:buNone/>
+              <a:defRPr sz="1600" kern="1200">
+                <a:solidFill>
+                  <a:schemeClr val="tx1"/>
+                </a:solidFill>
+                <a:latin typeface="+mn-lt"/>
+                <a:ea typeface="+mn-ea"/>
+                <a:cs typeface="+mn-cs"/>
+              </a:defRPr>
+            </a:lvl4pPr>
+            <a:lvl5pPr marL="1828800" indent="0" algn="ctr" defTabSz="914400" rtl="0" eaLnBrk="1" latinLnBrk="0" hangingPunct="1">
+              <a:lnSpc>
+                <a:spcPct val="90000"/>
+              </a:lnSpc>
+              <a:spcBef>
+                <a:spcPts val="500"/>
+              </a:spcBef>
+              <a:buFont typeface="Arial" panose="020B0604020202020204" pitchFamily="34" charset="0"/>
+              <a:buNone/>
+              <a:defRPr sz="1600" kern="1200">
+                <a:solidFill>
+                  <a:schemeClr val="tx1"/>
+                </a:solidFill>
+                <a:latin typeface="+mn-lt"/>
+                <a:ea typeface="+mn-ea"/>
+                <a:cs typeface="+mn-cs"/>
+              </a:defRPr>
+            </a:lvl5pPr>
+            <a:lvl6pPr marL="2286000" indent="0" algn="ctr" defTabSz="914400" rtl="0" eaLnBrk="1" latinLnBrk="0" hangingPunct="1">
+              <a:lnSpc>
+                <a:spcPct val="90000"/>
+              </a:lnSpc>
+              <a:spcBef>
+                <a:spcPts val="500"/>
+              </a:spcBef>
+              <a:buFont typeface="Arial" panose="020B0604020202020204" pitchFamily="34" charset="0"/>
+              <a:buNone/>
+              <a:defRPr sz="1600" kern="1200">
+                <a:solidFill>
+                  <a:schemeClr val="tx1"/>
+                </a:solidFill>
+                <a:latin typeface="+mn-lt"/>
+                <a:ea typeface="+mn-ea"/>
+                <a:cs typeface="+mn-cs"/>
+              </a:defRPr>
+            </a:lvl6pPr>
+            <a:lvl7pPr marL="2743200" indent="0" algn="ctr" defTabSz="914400" rtl="0" eaLnBrk="1" latinLnBrk="0" hangingPunct="1">
+              <a:lnSpc>
+                <a:spcPct val="90000"/>
+              </a:lnSpc>
+              <a:spcBef>
+                <a:spcPts val="500"/>
+              </a:spcBef>
+              <a:buFont typeface="Arial" panose="020B0604020202020204" pitchFamily="34" charset="0"/>
+              <a:buNone/>
+              <a:defRPr sz="1600" kern="1200">
+                <a:solidFill>
+                  <a:schemeClr val="tx1"/>
+                </a:solidFill>
+                <a:latin typeface="+mn-lt"/>
+                <a:ea typeface="+mn-ea"/>
+                <a:cs typeface="+mn-cs"/>
+              </a:defRPr>
+            </a:lvl7pPr>
+            <a:lvl8pPr marL="3200400" indent="0" algn="ctr" defTabSz="914400" rtl="0" eaLnBrk="1" latinLnBrk="0" hangingPunct="1">
+              <a:lnSpc>
+                <a:spcPct val="90000"/>
+              </a:lnSpc>
+              <a:spcBef>
+                <a:spcPts val="500"/>
+              </a:spcBef>
+              <a:buFont typeface="Arial" panose="020B0604020202020204" pitchFamily="34" charset="0"/>
+              <a:buNone/>
+              <a:defRPr sz="1600" kern="1200">
+                <a:solidFill>
+                  <a:schemeClr val="tx1"/>
+                </a:solidFill>
+                <a:latin typeface="+mn-lt"/>
+                <a:ea typeface="+mn-ea"/>
+                <a:cs typeface="+mn-cs"/>
+              </a:defRPr>
+            </a:lvl8pPr>
+            <a:lvl9pPr marL="3657600" indent="0" algn="ctr" defTabSz="914400" rtl="0" eaLnBrk="1" latinLnBrk="0" hangingPunct="1">
+              <a:lnSpc>
+                <a:spcPct val="90000"/>
+              </a:lnSpc>
+              <a:spcBef>
+                <a:spcPts val="500"/>
+              </a:spcBef>
+              <a:buFont typeface="Arial" panose="020B0604020202020204" pitchFamily="34" charset="0"/>
+              <a:buNone/>
+              <a:defRPr sz="1600" kern="1200">
+                <a:solidFill>
+                  <a:schemeClr val="tx1"/>
+                </a:solidFill>
+                <a:latin typeface="+mn-lt"/>
+                <a:ea typeface="+mn-ea"/>
+                <a:cs typeface="+mn-cs"/>
+              </a:defRPr>
+            </a:lvl9pPr>
+          </a:lstStyle>
+          <a:p>
+            <a:pPr marL="1364464" lvl="2" indent="-454821" algn="just">
+              <a:lnSpc>
+                <a:spcPts val="4265"/>
+              </a:lnSpc>
+              <a:buFont typeface="Arial"/>
+              <a:buChar char="⚬"/>
+            </a:pPr>
+            <a:r>
+              <a:rPr lang="en-US" sz="2400" b="1" spc="189" dirty="0">
+                <a:solidFill>
+                  <a:srgbClr val="000000"/>
+                </a:solidFill>
+                <a:latin typeface="Times New Roman" pitchFamily="18" charset="0"/>
+                <a:ea typeface="DM Sans"/>
+                <a:cs typeface="Times New Roman" pitchFamily="18" charset="0"/>
+                <a:sym typeface="DM Sans"/>
+              </a:rPr>
+              <a:t>Efficient </a:t>
+            </a:r>
+            <a:r>
+              <a:rPr lang="en-US" sz="2400" spc="189" dirty="0">
+                <a:solidFill>
+                  <a:srgbClr val="000000"/>
+                </a:solidFill>
+                <a:latin typeface="Times New Roman" pitchFamily="18" charset="0"/>
+                <a:ea typeface="DM Sans"/>
+                <a:cs typeface="Times New Roman" pitchFamily="18" charset="0"/>
+                <a:sym typeface="DM Sans"/>
+              </a:rPr>
+              <a:t>(requirement for speed and performance)</a:t>
+            </a:r>
+          </a:p>
+          <a:p>
+            <a:pPr marL="1364464" lvl="2" indent="-454821" algn="just">
+              <a:lnSpc>
+                <a:spcPts val="4265"/>
+              </a:lnSpc>
+              <a:buFont typeface="Arial"/>
+              <a:buChar char="⚬"/>
+            </a:pPr>
+            <a:r>
+              <a:rPr lang="en-US" sz="2400" b="1" spc="189" dirty="0">
+                <a:solidFill>
+                  <a:srgbClr val="000000"/>
+                </a:solidFill>
+                <a:latin typeface="Times New Roman" pitchFamily="18" charset="0"/>
+                <a:ea typeface="DM Sans"/>
+                <a:cs typeface="Times New Roman" pitchFamily="18" charset="0"/>
+                <a:sym typeface="DM Sans"/>
+              </a:rPr>
+              <a:t>Scalable </a:t>
+            </a:r>
+            <a:r>
+              <a:rPr lang="en-US" sz="2400" spc="189" dirty="0">
+                <a:solidFill>
+                  <a:srgbClr val="000000"/>
+                </a:solidFill>
+                <a:latin typeface="Times New Roman" pitchFamily="18" charset="0"/>
+                <a:ea typeface="DM Sans"/>
+                <a:cs typeface="Times New Roman" pitchFamily="18" charset="0"/>
+                <a:sym typeface="DM Sans"/>
+              </a:rPr>
+              <a:t>(requirement for flexibility and adaptability)</a:t>
+            </a:r>
+          </a:p>
+          <a:p>
+            <a:pPr marL="1364464" lvl="2" indent="-454821" algn="just">
+              <a:lnSpc>
+                <a:spcPts val="4265"/>
+              </a:lnSpc>
+              <a:buFont typeface="Arial"/>
+              <a:buChar char="⚬"/>
+            </a:pPr>
+            <a:r>
+              <a:rPr lang="en-US" sz="2400" b="1" spc="189" dirty="0">
+                <a:solidFill>
+                  <a:srgbClr val="000000"/>
+                </a:solidFill>
+                <a:latin typeface="Times New Roman" pitchFamily="18" charset="0"/>
+                <a:ea typeface="DM Sans"/>
+                <a:cs typeface="Times New Roman" pitchFamily="18" charset="0"/>
+                <a:sym typeface="DM Sans"/>
+              </a:rPr>
+              <a:t>Accessible </a:t>
+            </a:r>
+            <a:r>
+              <a:rPr lang="en-US" sz="2400" spc="189" dirty="0">
+                <a:solidFill>
+                  <a:srgbClr val="000000"/>
+                </a:solidFill>
+                <a:latin typeface="Times New Roman" pitchFamily="18" charset="0"/>
+                <a:ea typeface="DM Sans"/>
+                <a:cs typeface="Times New Roman" pitchFamily="18" charset="0"/>
+                <a:sym typeface="DM Sans"/>
+              </a:rPr>
+              <a:t>(Requirement for ease of use)</a:t>
+            </a:r>
+          </a:p>
+        </p:txBody>
+      </p:sp>
+      <p:sp>
+        <p:nvSpPr>
+          <p:cNvPr id="3" name="Title 1">
+            <a:extLst>
+              <a:ext uri="{FF2B5EF4-FFF2-40B4-BE49-F238E27FC236}">
+                <a16:creationId xmlns:a16="http://schemas.microsoft.com/office/drawing/2014/main" id="{1BE0E8B0-D45F-3A9A-52D3-F5C3F7A5D95C}"/>
+              </a:ext>
+            </a:extLst>
+          </p:cNvPr>
+          <p:cNvSpPr txBox="1">
+            <a:spLocks/>
+          </p:cNvSpPr>
+          <p:nvPr/>
+        </p:nvSpPr>
+        <p:spPr>
+          <a:xfrm>
+            <a:off x="443971" y="615914"/>
+            <a:ext cx="10515600" cy="598488"/>
+          </a:xfrm>
+          <a:prstGeom prst="rect">
+            <a:avLst/>
+          </a:prstGeom>
+        </p:spPr>
+        <p:txBody>
+          <a:bodyPr vert="horz" wrap="square" lIns="91440" tIns="45720" rIns="91440" bIns="45720" numCol="1" rtlCol="0" anchor="ctr" anchorCtr="0" compatLnSpc="1">
+            <a:normAutofit fontScale="90000" lnSpcReduction="20000"/>
+          </a:bodyPr>
+          <a:lstStyle>
+            <a:lvl1pPr algn="ctr" defTabSz="914400" rtl="0" eaLnBrk="1" latinLnBrk="0" hangingPunct="1">
+              <a:lnSpc>
+                <a:spcPct val="90000"/>
+              </a:lnSpc>
+              <a:spcBef>
+                <a:spcPct val="0"/>
+              </a:spcBef>
+              <a:buNone/>
+              <a:defRPr sz="6000" kern="1200">
+                <a:solidFill>
+                  <a:schemeClr val="tx1"/>
+                </a:solidFill>
+                <a:latin typeface="+mj-lt"/>
+                <a:ea typeface="+mj-ea"/>
+                <a:cs typeface="+mj-cs"/>
+              </a:defRPr>
+            </a:lvl1pPr>
+          </a:lstStyle>
+          <a:p>
+            <a:pPr algn="l">
+              <a:defRPr/>
+            </a:pPr>
+            <a:r>
+              <a:rPr lang="en-IN" sz="4890" b="1" dirty="0">
+                <a:solidFill>
+                  <a:srgbClr val="00B0F0"/>
+                </a:solidFill>
+                <a:latin typeface="Times New Roman" panose="02020603050405020304" pitchFamily="18" charset="0"/>
+                <a:cs typeface="Times New Roman" panose="02020603050405020304" pitchFamily="18" charset="0"/>
+              </a:rPr>
+              <a:t>Non Functional Requirements</a:t>
+            </a:r>
+          </a:p>
+        </p:txBody>
+      </p:sp>
+    </p:spTree>
+    <p:extLst>
+      <p:ext uri="{BB962C8B-B14F-4D97-AF65-F5344CB8AC3E}">
+        <p14:creationId xmlns:p14="http://schemas.microsoft.com/office/powerpoint/2010/main" val="400822347"/>
+      </p:ext>
+    </p:extLst>
+  </p:cSld>
+  <p:clrMapOvr>
+    <a:masterClrMapping/>
+  </p:clrMapOvr>
+</p:sld>
+</file>
+
+<file path=ppt/slides/slide13.xml><?xml version="1.0" encoding="utf-8"?>
+<p:sld xmlns:a="http://schemas.openxmlformats.org/drawingml/2006/main" xmlns:r="http://schemas.openxmlformats.org/officeDocument/2006/relationships" xmlns:p="http://schemas.openxmlformats.org/presentationml/2006/main">
+  <p:cSld>
+    <p:spTree>
+      <p:nvGrpSpPr>
+        <p:cNvPr id="1" name="">
+          <a:extLst>
+            <a:ext uri="{FF2B5EF4-FFF2-40B4-BE49-F238E27FC236}">
+              <a16:creationId xmlns:a16="http://schemas.microsoft.com/office/drawing/2014/main" id="{AF6CCE0E-16E4-B477-D8B9-2EDA966294AB}"/>
+            </a:ext>
+          </a:extLst>
+        </p:cNvPr>
+        <p:cNvGrpSpPr/>
+        <p:nvPr/>
+      </p:nvGrpSpPr>
+      <p:grpSpPr>
+        <a:xfrm>
+          <a:off x="0" y="0"/>
+          <a:ext cx="0" cy="0"/>
+          <a:chOff x="0" y="0"/>
+          <a:chExt cx="0" cy="0"/>
+        </a:xfrm>
+      </p:grpSpPr>
+      <p:sp>
+        <p:nvSpPr>
+          <p:cNvPr id="6" name="Rounded Rectangle 4">
+            <a:extLst>
+              <a:ext uri="{FF2B5EF4-FFF2-40B4-BE49-F238E27FC236}">
+                <a16:creationId xmlns:a16="http://schemas.microsoft.com/office/drawing/2014/main" id="{1761FE9E-6B9C-22C4-B217-369E5666C3D6}"/>
+              </a:ext>
+            </a:extLst>
+          </p:cNvPr>
+          <p:cNvSpPr/>
+          <p:nvPr/>
+        </p:nvSpPr>
+        <p:spPr>
+          <a:xfrm>
+            <a:off x="0" y="6462940"/>
+            <a:ext cx="12207875" cy="393700"/>
+          </a:xfrm>
+          <a:prstGeom prst="rect">
+            <a:avLst/>
+          </a:prstGeom>
+          <a:solidFill>
+            <a:srgbClr val="5B9BD5"/>
+          </a:solidFill>
+        </p:spPr>
+        <p:style>
+          <a:lnRef idx="2">
+            <a:schemeClr val="accent1">
+              <a:shade val="50000"/>
+            </a:schemeClr>
+          </a:lnRef>
+          <a:fillRef idx="1">
+            <a:schemeClr val="accent1"/>
+          </a:fillRef>
+          <a:effectRef idx="0">
+            <a:schemeClr val="accent1"/>
+          </a:effectRef>
+          <a:fontRef idx="minor">
+            <a:schemeClr val="lt1"/>
+          </a:fontRef>
+        </p:style>
+        <p:txBody>
+          <a:bodyPr anchor="ctr"/>
+          <a:lstStyle/>
+          <a:p>
+            <a:pPr marL="0" marR="0" lvl="0" indent="0" algn="ctr" defTabSz="914400" rtl="0" eaLnBrk="0" fontAlgn="base" latinLnBrk="0" hangingPunct="0">
+              <a:lnSpc>
+                <a:spcPct val="100000"/>
+              </a:lnSpc>
+              <a:spcBef>
+                <a:spcPct val="0"/>
+              </a:spcBef>
+              <a:spcAft>
+                <a:spcPct val="0"/>
+              </a:spcAft>
+              <a:buClrTx/>
+              <a:buSzTx/>
+              <a:buFontTx/>
+              <a:buNone/>
+              <a:defRPr/>
+            </a:pPr>
+            <a:endParaRPr kumimoji="0" lang="en-IN" sz="1800" b="1" i="0" u="none" strike="noStrike" kern="1200" cap="none" spc="0" normalizeH="0" baseline="0" noProof="0" dirty="0">
+              <a:ln>
+                <a:noFill/>
+              </a:ln>
+              <a:solidFill>
+                <a:schemeClr val="tx1"/>
+              </a:solidFill>
+              <a:effectLst/>
+              <a:uLnTx/>
+              <a:uFillTx/>
+              <a:latin typeface="Arial Rounded MT Bold" pitchFamily="34" charset="0"/>
+              <a:ea typeface="+mn-ea"/>
+              <a:cs typeface="+mn-cs"/>
+            </a:endParaRPr>
+          </a:p>
+        </p:txBody>
+      </p:sp>
+      <p:sp>
+        <p:nvSpPr>
+          <p:cNvPr id="7" name="TextBox 6">
+            <a:extLst>
+              <a:ext uri="{FF2B5EF4-FFF2-40B4-BE49-F238E27FC236}">
+                <a16:creationId xmlns:a16="http://schemas.microsoft.com/office/drawing/2014/main" id="{43272BD6-DF8E-8D41-23C3-30763D7275EA}"/>
+              </a:ext>
+            </a:extLst>
+          </p:cNvPr>
+          <p:cNvSpPr txBox="1"/>
+          <p:nvPr/>
+        </p:nvSpPr>
+        <p:spPr>
+          <a:xfrm>
+            <a:off x="443971" y="6490513"/>
+            <a:ext cx="11288182" cy="338554"/>
+          </a:xfrm>
+          <a:prstGeom prst="rect">
+            <a:avLst/>
+          </a:prstGeom>
+          <a:noFill/>
+        </p:spPr>
+        <p:txBody>
+          <a:bodyPr wrap="square" rtlCol="0">
+            <a:spAutoFit/>
+          </a:bodyPr>
+          <a:lstStyle/>
+          <a:p>
+            <a:pPr marL="0" marR="0" lvl="0" indent="0" algn="ctr" defTabSz="914400" rtl="0" eaLnBrk="0" fontAlgn="base" latinLnBrk="0" hangingPunct="0">
+              <a:lnSpc>
+                <a:spcPct val="100000"/>
+              </a:lnSpc>
+              <a:spcBef>
+                <a:spcPct val="0"/>
+              </a:spcBef>
+              <a:spcAft>
+                <a:spcPct val="0"/>
+              </a:spcAft>
+              <a:buClrTx/>
+              <a:buSzTx/>
+              <a:buFontTx/>
+              <a:buNone/>
+              <a:defRPr/>
+            </a:pPr>
+            <a:r>
+              <a:rPr kumimoji="0" lang="en-IN" sz="1600" b="1" i="0" u="none" strike="noStrike" kern="1200" cap="none" spc="0" normalizeH="0" baseline="0" noProof="0" dirty="0">
+                <a:ln>
+                  <a:noFill/>
+                </a:ln>
+                <a:solidFill>
+                  <a:schemeClr val="tx1"/>
+                </a:solidFill>
+                <a:effectLst/>
+                <a:uLnTx/>
+                <a:uFillTx/>
+                <a:latin typeface="Arial Rounded MT Bold" pitchFamily="34" charset="0"/>
+                <a:ea typeface="+mn-ea"/>
+                <a:cs typeface="+mn-cs"/>
+              </a:rPr>
+              <a:t>B.Tech III Year – II Sem | Dept of Computational Intelligence| Application Development – II | Project Review</a:t>
+            </a:r>
+          </a:p>
+        </p:txBody>
+      </p:sp>
+      <p:sp>
+        <p:nvSpPr>
+          <p:cNvPr id="3" name="Title 1">
+            <a:extLst>
+              <a:ext uri="{FF2B5EF4-FFF2-40B4-BE49-F238E27FC236}">
+                <a16:creationId xmlns:a16="http://schemas.microsoft.com/office/drawing/2014/main" id="{1EE4D4A6-7BBB-968D-4EFD-79B1F7848A85}"/>
+              </a:ext>
+            </a:extLst>
+          </p:cNvPr>
+          <p:cNvSpPr txBox="1">
+            <a:spLocks/>
+          </p:cNvSpPr>
+          <p:nvPr/>
+        </p:nvSpPr>
+        <p:spPr>
+          <a:xfrm>
+            <a:off x="3042931" y="3123673"/>
+            <a:ext cx="6090261" cy="598488"/>
+          </a:xfrm>
+          <a:prstGeom prst="rect">
+            <a:avLst/>
+          </a:prstGeom>
+        </p:spPr>
+        <p:txBody>
+          <a:bodyPr vert="horz" wrap="square" lIns="91440" tIns="45720" rIns="91440" bIns="45720" numCol="1" rtlCol="0" anchor="ctr" anchorCtr="0" compatLnSpc="1">
+            <a:noAutofit/>
+          </a:bodyPr>
+          <a:lstStyle>
+            <a:lvl1pPr algn="ctr" defTabSz="914400" rtl="0" eaLnBrk="1" latinLnBrk="0" hangingPunct="1">
+              <a:lnSpc>
+                <a:spcPct val="90000"/>
+              </a:lnSpc>
+              <a:spcBef>
+                <a:spcPct val="0"/>
+              </a:spcBef>
+              <a:buNone/>
+              <a:defRPr sz="6000" kern="1200">
+                <a:solidFill>
+                  <a:schemeClr val="tx1"/>
+                </a:solidFill>
+                <a:latin typeface="+mj-lt"/>
+                <a:ea typeface="+mj-ea"/>
+                <a:cs typeface="+mj-cs"/>
+              </a:defRPr>
+            </a:lvl1pPr>
+          </a:lstStyle>
+          <a:p>
+            <a:pPr>
+              <a:defRPr/>
+            </a:pPr>
+            <a:r>
+              <a:rPr lang="en-IN" b="1" dirty="0">
+                <a:solidFill>
+                  <a:srgbClr val="00B0F0"/>
+                </a:solidFill>
+                <a:latin typeface="Times New Roman" panose="02020603050405020304" pitchFamily="18" charset="0"/>
+                <a:cs typeface="Times New Roman" panose="02020603050405020304" pitchFamily="18" charset="0"/>
+              </a:rPr>
+              <a:t>System Models</a:t>
+            </a:r>
+          </a:p>
+          <a:p>
+            <a:pPr>
+              <a:defRPr/>
+            </a:pPr>
+            <a:r>
+              <a:rPr lang="en-IN" sz="4000" b="1" dirty="0">
+                <a:solidFill>
+                  <a:srgbClr val="00B0F0"/>
+                </a:solidFill>
+                <a:latin typeface="Times New Roman" panose="02020603050405020304" pitchFamily="18" charset="0"/>
+                <a:cs typeface="Times New Roman" panose="02020603050405020304" pitchFamily="18" charset="0"/>
+              </a:rPr>
+              <a:t>(UML Diagrams)</a:t>
+            </a:r>
+          </a:p>
+        </p:txBody>
+      </p:sp>
+      <p:sp>
+        <p:nvSpPr>
+          <p:cNvPr id="8" name="Rounded Rectangle 4">
+            <a:extLst>
+              <a:ext uri="{FF2B5EF4-FFF2-40B4-BE49-F238E27FC236}">
+                <a16:creationId xmlns:a16="http://schemas.microsoft.com/office/drawing/2014/main" id="{B325BCA7-9E1B-82D2-A3AE-C0635D84C361}"/>
+              </a:ext>
+            </a:extLst>
+          </p:cNvPr>
+          <p:cNvSpPr/>
+          <p:nvPr/>
+        </p:nvSpPr>
+        <p:spPr>
+          <a:xfrm>
+            <a:off x="-15875" y="-10805"/>
+            <a:ext cx="12207875" cy="393700"/>
+          </a:xfrm>
+          <a:prstGeom prst="rect">
+            <a:avLst/>
+          </a:prstGeom>
+          <a:solidFill>
+            <a:srgbClr val="5B9BD5"/>
+          </a:solidFill>
+        </p:spPr>
+        <p:style>
+          <a:lnRef idx="2">
+            <a:schemeClr val="accent1">
+              <a:shade val="50000"/>
+            </a:schemeClr>
+          </a:lnRef>
+          <a:fillRef idx="1">
+            <a:schemeClr val="accent1"/>
+          </a:fillRef>
+          <a:effectRef idx="0">
+            <a:schemeClr val="accent1"/>
+          </a:effectRef>
+          <a:fontRef idx="minor">
+            <a:schemeClr val="lt1"/>
+          </a:fontRef>
+        </p:style>
+        <p:txBody>
+          <a:bodyPr anchor="ctr"/>
+          <a:lstStyle/>
+          <a:p>
+            <a:pPr marL="0" marR="0" lvl="0" indent="0" algn="ctr" defTabSz="914400" rtl="0" eaLnBrk="0" fontAlgn="base" latinLnBrk="0" hangingPunct="0">
+              <a:lnSpc>
+                <a:spcPct val="100000"/>
+              </a:lnSpc>
+              <a:spcBef>
+                <a:spcPct val="0"/>
+              </a:spcBef>
+              <a:spcAft>
+                <a:spcPct val="0"/>
+              </a:spcAft>
+              <a:buClrTx/>
+              <a:buSzTx/>
+              <a:buFontTx/>
+              <a:buNone/>
+              <a:defRPr/>
+            </a:pPr>
+            <a:endParaRPr kumimoji="0" lang="en-IN" sz="1800" b="1" i="0" u="none" strike="noStrike" kern="1200" cap="none" spc="0" normalizeH="0" baseline="0" noProof="0" dirty="0">
+              <a:ln>
+                <a:noFill/>
+              </a:ln>
+              <a:solidFill>
+                <a:schemeClr val="tx1"/>
+              </a:solidFill>
+              <a:effectLst/>
+              <a:uLnTx/>
+              <a:uFillTx/>
+              <a:latin typeface="Arial Rounded MT Bold" pitchFamily="34" charset="0"/>
+              <a:ea typeface="+mn-ea"/>
+              <a:cs typeface="+mn-cs"/>
+            </a:endParaRPr>
+          </a:p>
+        </p:txBody>
+      </p:sp>
+      <p:sp>
+        <p:nvSpPr>
+          <p:cNvPr id="9" name="TextBox 8">
+            <a:extLst>
+              <a:ext uri="{FF2B5EF4-FFF2-40B4-BE49-F238E27FC236}">
+                <a16:creationId xmlns:a16="http://schemas.microsoft.com/office/drawing/2014/main" id="{CC9123F4-1D17-E3FF-53C7-C6C2E045D566}"/>
+              </a:ext>
+            </a:extLst>
+          </p:cNvPr>
+          <p:cNvSpPr txBox="1"/>
+          <p:nvPr/>
+        </p:nvSpPr>
+        <p:spPr>
+          <a:xfrm>
+            <a:off x="2801516" y="16768"/>
+            <a:ext cx="6588967" cy="338554"/>
+          </a:xfrm>
+          <a:prstGeom prst="rect">
+            <a:avLst/>
+          </a:prstGeom>
+          <a:noFill/>
+        </p:spPr>
+        <p:txBody>
+          <a:bodyPr wrap="square" rtlCol="0">
+            <a:spAutoFit/>
+          </a:bodyPr>
+          <a:lstStyle/>
+          <a:p>
+            <a:r>
+              <a:rPr lang="en-US" sz="1600" b="1" dirty="0">
+                <a:latin typeface="Arial Rounded MT Bold" panose="020F0704030504030204" pitchFamily="34" charset="0"/>
+                <a:cs typeface="Arial" panose="020B0604020202020204" pitchFamily="34" charset="0"/>
+              </a:rPr>
+              <a:t>MALLA REDDY COLLEGE OF ENGINEERING AND TECHNOLOGY</a:t>
+            </a:r>
+            <a:endParaRPr lang="x-none" sz="1600" b="1" dirty="0">
+              <a:latin typeface="Arial Rounded MT Bold" panose="020F0704030504030204" pitchFamily="34" charset="0"/>
+              <a:cs typeface="Arial" panose="020B0604020202020204" pitchFamily="34" charset="0"/>
+            </a:endParaRPr>
+          </a:p>
+        </p:txBody>
+      </p:sp>
+      <p:pic>
+        <p:nvPicPr>
+          <p:cNvPr id="10" name="Picture 6">
+            <a:extLst>
+              <a:ext uri="{FF2B5EF4-FFF2-40B4-BE49-F238E27FC236}">
+                <a16:creationId xmlns:a16="http://schemas.microsoft.com/office/drawing/2014/main" id="{7095D0F4-7B93-B1E8-EEA2-8E2B98B9FCD7}"/>
+              </a:ext>
+            </a:extLst>
+          </p:cNvPr>
+          <p:cNvPicPr>
+            <a:picLocks noChangeAspect="1"/>
+          </p:cNvPicPr>
+          <p:nvPr/>
+        </p:nvPicPr>
+        <p:blipFill>
+          <a:blip r:embed="rId2" cstate="print"/>
+          <a:stretch>
+            <a:fillRect/>
+          </a:stretch>
+        </p:blipFill>
+        <p:spPr>
+          <a:xfrm>
+            <a:off x="10899775" y="-128587"/>
+            <a:ext cx="1276350" cy="1276350"/>
+          </a:xfrm>
+          <a:prstGeom prst="rect">
+            <a:avLst/>
+          </a:prstGeom>
+          <a:noFill/>
+          <a:ln w="9525">
+            <a:noFill/>
+          </a:ln>
+        </p:spPr>
+      </p:pic>
+      <p:sp>
+        <p:nvSpPr>
+          <p:cNvPr id="12" name="Slide Number Placeholder 3">
+            <a:extLst>
+              <a:ext uri="{FF2B5EF4-FFF2-40B4-BE49-F238E27FC236}">
+                <a16:creationId xmlns:a16="http://schemas.microsoft.com/office/drawing/2014/main" id="{C7448B5B-A85F-EFF0-057D-1EB1E0F3A053}"/>
+              </a:ext>
+            </a:extLst>
+          </p:cNvPr>
+          <p:cNvSpPr txBox="1">
+            <a:spLocks/>
+          </p:cNvSpPr>
+          <p:nvPr/>
+        </p:nvSpPr>
+        <p:spPr>
+          <a:xfrm>
+            <a:off x="9067800" y="6176963"/>
+            <a:ext cx="2743200" cy="365125"/>
+          </a:xfrm>
+          <a:prstGeom prst="rect">
+            <a:avLst/>
+          </a:prstGeom>
+          <a:noFill/>
+          <a:ln>
+            <a:noFill/>
+          </a:ln>
+        </p:spPr>
+        <p:txBody>
+          <a:bodyPr anchor="ctr" anchorCtr="0"/>
+          <a:lstStyle>
+            <a:defPPr>
+              <a:defRPr lang="x-none"/>
+            </a:defPPr>
+            <a:lvl1pPr marL="0" algn="l" defTabSz="914400" rtl="0" eaLnBrk="1" latinLnBrk="0" hangingPunct="1">
+              <a:defRPr sz="1800" kern="1200">
+                <a:solidFill>
+                  <a:schemeClr val="tx1"/>
+                </a:solidFill>
+                <a:latin typeface="+mn-lt"/>
+                <a:ea typeface="+mn-ea"/>
+                <a:cs typeface="+mn-cs"/>
+              </a:defRPr>
+            </a:lvl1pPr>
+            <a:lvl2pPr marL="457200" algn="l" defTabSz="914400" rtl="0" eaLnBrk="1" latinLnBrk="0" hangingPunct="1">
+              <a:defRPr sz="1800" kern="1200">
+                <a:solidFill>
+                  <a:schemeClr val="tx1"/>
+                </a:solidFill>
+                <a:latin typeface="+mn-lt"/>
+                <a:ea typeface="+mn-ea"/>
+                <a:cs typeface="+mn-cs"/>
+              </a:defRPr>
+            </a:lvl2pPr>
+            <a:lvl3pPr marL="914400" algn="l" defTabSz="914400" rtl="0" eaLnBrk="1" latinLnBrk="0" hangingPunct="1">
+              <a:defRPr sz="1800" kern="1200">
+                <a:solidFill>
+                  <a:schemeClr val="tx1"/>
+                </a:solidFill>
+                <a:latin typeface="+mn-lt"/>
+                <a:ea typeface="+mn-ea"/>
+                <a:cs typeface="+mn-cs"/>
+              </a:defRPr>
+            </a:lvl3pPr>
+            <a:lvl4pPr marL="1371600" algn="l" defTabSz="914400" rtl="0" eaLnBrk="1" latinLnBrk="0" hangingPunct="1">
+              <a:defRPr sz="1800" kern="1200">
+                <a:solidFill>
+                  <a:schemeClr val="tx1"/>
+                </a:solidFill>
+                <a:latin typeface="+mn-lt"/>
+                <a:ea typeface="+mn-ea"/>
+                <a:cs typeface="+mn-cs"/>
+              </a:defRPr>
+            </a:lvl4pPr>
+            <a:lvl5pPr marL="1828800" algn="l" defTabSz="914400" rtl="0" eaLnBrk="1" latinLnBrk="0" hangingPunct="1">
+              <a:defRPr sz="1800" kern="1200">
+                <a:solidFill>
+                  <a:schemeClr val="tx1"/>
+                </a:solidFill>
+                <a:latin typeface="+mn-lt"/>
+                <a:ea typeface="+mn-ea"/>
+                <a:cs typeface="+mn-cs"/>
+              </a:defRPr>
+            </a:lvl5pPr>
+            <a:lvl6pPr marL="2286000" algn="l" defTabSz="914400" rtl="0" eaLnBrk="1" latinLnBrk="0" hangingPunct="1">
+              <a:defRPr sz="1800" kern="1200">
+                <a:solidFill>
+                  <a:schemeClr val="tx1"/>
+                </a:solidFill>
+                <a:latin typeface="+mn-lt"/>
+                <a:ea typeface="+mn-ea"/>
+                <a:cs typeface="+mn-cs"/>
+              </a:defRPr>
+            </a:lvl6pPr>
+            <a:lvl7pPr marL="2743200" algn="l" defTabSz="914400" rtl="0" eaLnBrk="1" latinLnBrk="0" hangingPunct="1">
+              <a:defRPr sz="1800" kern="1200">
+                <a:solidFill>
+                  <a:schemeClr val="tx1"/>
+                </a:solidFill>
+                <a:latin typeface="+mn-lt"/>
+                <a:ea typeface="+mn-ea"/>
+                <a:cs typeface="+mn-cs"/>
+              </a:defRPr>
+            </a:lvl7pPr>
+            <a:lvl8pPr marL="3200400" algn="l" defTabSz="914400" rtl="0" eaLnBrk="1" latinLnBrk="0" hangingPunct="1">
+              <a:defRPr sz="1800" kern="1200">
+                <a:solidFill>
+                  <a:schemeClr val="tx1"/>
+                </a:solidFill>
+                <a:latin typeface="+mn-lt"/>
+                <a:ea typeface="+mn-ea"/>
+                <a:cs typeface="+mn-cs"/>
+              </a:defRPr>
+            </a:lvl8pPr>
+            <a:lvl9pPr marL="3657600" algn="l" defTabSz="914400" rtl="0" eaLnBrk="1" latinLnBrk="0" hangingPunct="1">
+              <a:defRPr sz="1800" kern="1200">
+                <a:solidFill>
+                  <a:schemeClr val="tx1"/>
+                </a:solidFill>
+                <a:latin typeface="+mn-lt"/>
+                <a:ea typeface="+mn-ea"/>
+                <a:cs typeface="+mn-cs"/>
+              </a:defRPr>
+            </a:lvl9pPr>
+          </a:lstStyle>
+          <a:p>
+            <a:pPr algn="r">
+              <a:spcBef>
+                <a:spcPct val="0"/>
+              </a:spcBef>
+            </a:pPr>
+            <a:fld id="{9A0DB2DC-4C9A-4742-B13C-FB6460FD3503}" type="slidenum">
+              <a:rPr lang="en-IN" altLang="en-US" sz="1200" b="1" smtClean="0">
+                <a:solidFill>
+                  <a:srgbClr val="C00000"/>
+                </a:solidFill>
+              </a:rPr>
+              <a:pPr algn="r">
+                <a:spcBef>
+                  <a:spcPct val="0"/>
+                </a:spcBef>
+              </a:pPr>
+              <a:t>13</a:t>
+            </a:fld>
+            <a:endParaRPr lang="en-IN" altLang="en-US" sz="1200" b="1" dirty="0">
+              <a:solidFill>
+                <a:srgbClr val="C00000"/>
+              </a:solidFill>
+            </a:endParaRPr>
+          </a:p>
+        </p:txBody>
+      </p:sp>
     </p:spTree>
     <p:extLst>
       <p:ext uri="{BB962C8B-B14F-4D97-AF65-F5344CB8AC3E}">
@@ -6166,7 +7849,7 @@
 </p:sld>
 </file>
 
-<file path=ppt/slides/slide12.xml><?xml version="1.0" encoding="utf-8"?>
+<file path=ppt/slides/slide14.xml><?xml version="1.0" encoding="utf-8"?>
 <p:sld xmlns:a="http://schemas.openxmlformats.org/drawingml/2006/main" xmlns:r="http://schemas.openxmlformats.org/officeDocument/2006/relationships" xmlns:p="http://schemas.openxmlformats.org/presentationml/2006/main">
   <p:cSld>
     <p:spTree>
@@ -6687,7 +8370,7 @@
                   <a:spcPct val="0"/>
                 </a:spcBef>
               </a:pPr>
-              <a:t>12</a:t>
+              <a:t>14</a:t>
             </a:fld>
             <a:endParaRPr lang="en-IN" altLang="en-US" sz="1200" b="1" dirty="0">
               <a:solidFill>
@@ -6746,7 +8429,7 @@
 </p:sld>
 </file>
 
-<file path=ppt/slides/slide13.xml><?xml version="1.0" encoding="utf-8"?>
+<file path=ppt/slides/slide15.xml><?xml version="1.0" encoding="utf-8"?>
 <p:sld xmlns:a="http://schemas.openxmlformats.org/drawingml/2006/main" xmlns:r="http://schemas.openxmlformats.org/officeDocument/2006/relationships" xmlns:p="http://schemas.openxmlformats.org/presentationml/2006/main">
   <p:cSld>
     <p:spTree>
@@ -7297,7 +8980,7 @@
                   <a:spcPct val="0"/>
                 </a:spcBef>
               </a:pPr>
-              <a:t>13</a:t>
+              <a:t>15</a:t>
             </a:fld>
             <a:endParaRPr lang="en-IN" altLang="en-US" sz="1200" b="1" dirty="0">
               <a:solidFill>
@@ -7320,7 +9003,7 @@
 </p:sld>
 </file>
 
-<file path=ppt/slides/slide14.xml><?xml version="1.0" encoding="utf-8"?>
+<file path=ppt/slides/slide16.xml><?xml version="1.0" encoding="utf-8"?>
 <p:sld xmlns:a="http://schemas.openxmlformats.org/drawingml/2006/main" xmlns:r="http://schemas.openxmlformats.org/officeDocument/2006/relationships" xmlns:p="http://schemas.openxmlformats.org/presentationml/2006/main">
   <p:cSld>
     <p:spTree>
@@ -7841,7 +9524,7 @@
                   <a:spcPct val="0"/>
                 </a:spcBef>
               </a:pPr>
-              <a:t>14</a:t>
+              <a:t>16</a:t>
             </a:fld>
             <a:endParaRPr lang="en-IN" altLang="en-US" sz="1200" b="1" dirty="0">
               <a:solidFill>
@@ -7900,7 +9583,7 @@
 </p:sld>
 </file>
 
-<file path=ppt/slides/slide15.xml><?xml version="1.0" encoding="utf-8"?>
+<file path=ppt/slides/slide17.xml><?xml version="1.0" encoding="utf-8"?>
 <p:sld xmlns:a="http://schemas.openxmlformats.org/drawingml/2006/main" xmlns:r="http://schemas.openxmlformats.org/officeDocument/2006/relationships" xmlns:p="http://schemas.openxmlformats.org/presentationml/2006/main">
   <p:cSld>
     <p:spTree>
@@ -8421,7 +10104,7 @@
                   <a:spcPct val="0"/>
                 </a:spcBef>
               </a:pPr>
-              <a:t>15</a:t>
+              <a:t>17</a:t>
             </a:fld>
             <a:endParaRPr lang="en-IN" altLang="en-US" sz="1200" b="1" dirty="0">
               <a:solidFill>
@@ -8480,7 +10163,7 @@
 </p:sld>
 </file>
 
-<file path=ppt/slides/slide16.xml><?xml version="1.0" encoding="utf-8"?>
+<file path=ppt/slides/slide18.xml><?xml version="1.0" encoding="utf-8"?>
 <p:sld xmlns:a="http://schemas.openxmlformats.org/drawingml/2006/main" xmlns:r="http://schemas.openxmlformats.org/officeDocument/2006/relationships" xmlns:p="http://schemas.openxmlformats.org/presentationml/2006/main">
   <p:cSld>
     <p:spTree>
@@ -8695,22 +10378,15 @@
               <a:defRPr/>
             </a:pPr>
             <a:r>
-              <a:rPr lang="en-IN" b="1" dirty="0">
+              <a:rPr lang="en-IN" sz="4000" b="1" dirty="0">
                 <a:solidFill>
                   <a:srgbClr val="00B0F0"/>
                 </a:solidFill>
                 <a:latin typeface="Times New Roman" panose="02020603050405020304" pitchFamily="18" charset="0"/>
                 <a:cs typeface="Times New Roman" panose="02020603050405020304" pitchFamily="18" charset="0"/>
               </a:rPr>
-              <a:t>Output Screenshots</a:t>
-            </a:r>
-            <a:endParaRPr lang="en-IN" sz="4000" b="1" dirty="0">
-              <a:solidFill>
-                <a:srgbClr val="00B0F0"/>
-              </a:solidFill>
-              <a:latin typeface="Times New Roman" panose="02020603050405020304" pitchFamily="18" charset="0"/>
-              <a:cs typeface="Times New Roman" panose="02020603050405020304" pitchFamily="18" charset="0"/>
-            </a:endParaRPr>
+              <a:t>Implementation &amp; Testcases</a:t>
+            </a:r>
           </a:p>
         </p:txBody>
       </p:sp>
@@ -9008,7 +10684,7 @@
                   <a:spcPct val="0"/>
                 </a:spcBef>
               </a:pPr>
-              <a:t>16</a:t>
+              <a:t>18</a:t>
             </a:fld>
             <a:endParaRPr lang="en-IN" altLang="en-US" sz="1200" b="1" dirty="0">
               <a:solidFill>
@@ -9031,7 +10707,7 @@
 </p:sld>
 </file>
 
-<file path=ppt/slides/slide17.xml><?xml version="1.0" encoding="utf-8"?>
+<file path=ppt/slides/slide19.xml><?xml version="1.0" encoding="utf-8"?>
 <p:sld xmlns:a="http://schemas.openxmlformats.org/drawingml/2006/main" xmlns:r="http://schemas.openxmlformats.org/officeDocument/2006/relationships" xmlns:p="http://schemas.openxmlformats.org/presentationml/2006/main">
   <p:cSld>
     <p:spTree>
@@ -9549,7 +11225,7 @@
                   <a:spcPct val="0"/>
                 </a:spcBef>
               </a:pPr>
-              <a:t>17</a:t>
+              <a:t>19</a:t>
             </a:fld>
             <a:endParaRPr lang="en-IN" altLang="en-US" sz="1200" b="1" dirty="0">
               <a:solidFill>
@@ -9671,1157 +11347,6 @@
     <p:extLst>
       <p:ext uri="{BB962C8B-B14F-4D97-AF65-F5344CB8AC3E}">
         <p14:creationId xmlns:p14="http://schemas.microsoft.com/office/powerpoint/2010/main" val="3137797657"/>
-      </p:ext>
-    </p:extLst>
-  </p:cSld>
-  <p:clrMapOvr>
-    <a:masterClrMapping/>
-  </p:clrMapOvr>
-</p:sld>
-</file>
-
-<file path=ppt/slides/slide18.xml><?xml version="1.0" encoding="utf-8"?>
-<p:sld xmlns:a="http://schemas.openxmlformats.org/drawingml/2006/main" xmlns:r="http://schemas.openxmlformats.org/officeDocument/2006/relationships" xmlns:p="http://schemas.openxmlformats.org/presentationml/2006/main">
-  <p:cSld>
-    <p:spTree>
-      <p:nvGrpSpPr>
-        <p:cNvPr id="1" name="">
-          <a:extLst>
-            <a:ext uri="{FF2B5EF4-FFF2-40B4-BE49-F238E27FC236}">
-              <a16:creationId xmlns:a16="http://schemas.microsoft.com/office/drawing/2014/main" id="{4724D830-9609-CDA2-156F-5CA33A4D3F3B}"/>
-            </a:ext>
-          </a:extLst>
-        </p:cNvPr>
-        <p:cNvGrpSpPr/>
-        <p:nvPr/>
-      </p:nvGrpSpPr>
-      <p:grpSpPr>
-        <a:xfrm>
-          <a:off x="0" y="0"/>
-          <a:ext cx="0" cy="0"/>
-          <a:chOff x="0" y="0"/>
-          <a:chExt cx="0" cy="0"/>
-        </a:xfrm>
-      </p:grpSpPr>
-      <p:sp>
-        <p:nvSpPr>
-          <p:cNvPr id="6" name="Rounded Rectangle 4">
-            <a:extLst>
-              <a:ext uri="{FF2B5EF4-FFF2-40B4-BE49-F238E27FC236}">
-                <a16:creationId xmlns:a16="http://schemas.microsoft.com/office/drawing/2014/main" id="{86E82629-5471-06BE-4B12-8E5466A58B56}"/>
-              </a:ext>
-            </a:extLst>
-          </p:cNvPr>
-          <p:cNvSpPr/>
-          <p:nvPr/>
-        </p:nvSpPr>
-        <p:spPr>
-          <a:xfrm>
-            <a:off x="0" y="6462940"/>
-            <a:ext cx="12207875" cy="393700"/>
-          </a:xfrm>
-          <a:prstGeom prst="rect">
-            <a:avLst/>
-          </a:prstGeom>
-          <a:solidFill>
-            <a:srgbClr val="5B9BD5"/>
-          </a:solidFill>
-        </p:spPr>
-        <p:style>
-          <a:lnRef idx="2">
-            <a:schemeClr val="accent1">
-              <a:shade val="50000"/>
-            </a:schemeClr>
-          </a:lnRef>
-          <a:fillRef idx="1">
-            <a:schemeClr val="accent1"/>
-          </a:fillRef>
-          <a:effectRef idx="0">
-            <a:schemeClr val="accent1"/>
-          </a:effectRef>
-          <a:fontRef idx="minor">
-            <a:schemeClr val="lt1"/>
-          </a:fontRef>
-        </p:style>
-        <p:txBody>
-          <a:bodyPr anchor="ctr"/>
-          <a:lstStyle/>
-          <a:p>
-            <a:pPr marL="0" marR="0" lvl="0" indent="0" algn="ctr" defTabSz="914400" rtl="0" eaLnBrk="0" fontAlgn="base" latinLnBrk="0" hangingPunct="0">
-              <a:lnSpc>
-                <a:spcPct val="100000"/>
-              </a:lnSpc>
-              <a:spcBef>
-                <a:spcPct val="0"/>
-              </a:spcBef>
-              <a:spcAft>
-                <a:spcPct val="0"/>
-              </a:spcAft>
-              <a:buClrTx/>
-              <a:buSzTx/>
-              <a:buFontTx/>
-              <a:buNone/>
-              <a:defRPr/>
-            </a:pPr>
-            <a:endParaRPr kumimoji="0" lang="en-IN" sz="1800" b="1" i="0" u="none" strike="noStrike" kern="1200" cap="none" spc="0" normalizeH="0" baseline="0" noProof="0" dirty="0">
-              <a:ln>
-                <a:noFill/>
-              </a:ln>
-              <a:solidFill>
-                <a:schemeClr val="tx1"/>
-              </a:solidFill>
-              <a:effectLst/>
-              <a:uLnTx/>
-              <a:uFillTx/>
-              <a:latin typeface="Arial Rounded MT Bold" pitchFamily="34" charset="0"/>
-              <a:ea typeface="+mn-ea"/>
-              <a:cs typeface="+mn-cs"/>
-            </a:endParaRPr>
-          </a:p>
-        </p:txBody>
-      </p:sp>
-      <p:sp>
-        <p:nvSpPr>
-          <p:cNvPr id="7" name="TextBox 6">
-            <a:extLst>
-              <a:ext uri="{FF2B5EF4-FFF2-40B4-BE49-F238E27FC236}">
-                <a16:creationId xmlns:a16="http://schemas.microsoft.com/office/drawing/2014/main" id="{6253F3C0-8149-C259-5386-CEE38C04398E}"/>
-              </a:ext>
-            </a:extLst>
-          </p:cNvPr>
-          <p:cNvSpPr txBox="1"/>
-          <p:nvPr/>
-        </p:nvSpPr>
-        <p:spPr>
-          <a:xfrm>
-            <a:off x="443971" y="6490513"/>
-            <a:ext cx="11288182" cy="338554"/>
-          </a:xfrm>
-          <a:prstGeom prst="rect">
-            <a:avLst/>
-          </a:prstGeom>
-          <a:noFill/>
-        </p:spPr>
-        <p:txBody>
-          <a:bodyPr wrap="square" rtlCol="0">
-            <a:spAutoFit/>
-          </a:bodyPr>
-          <a:lstStyle/>
-          <a:p>
-            <a:pPr marL="0" marR="0" lvl="0" indent="0" algn="ctr" defTabSz="914400" rtl="0" eaLnBrk="0" fontAlgn="base" latinLnBrk="0" hangingPunct="0">
-              <a:lnSpc>
-                <a:spcPct val="100000"/>
-              </a:lnSpc>
-              <a:spcBef>
-                <a:spcPct val="0"/>
-              </a:spcBef>
-              <a:spcAft>
-                <a:spcPct val="0"/>
-              </a:spcAft>
-              <a:buClrTx/>
-              <a:buSzTx/>
-              <a:buFontTx/>
-              <a:buNone/>
-              <a:defRPr/>
-            </a:pPr>
-            <a:r>
-              <a:rPr kumimoji="0" lang="en-IN" sz="1600" b="1" i="0" u="none" strike="noStrike" kern="1200" cap="none" spc="0" normalizeH="0" baseline="0" noProof="0" dirty="0">
-                <a:ln>
-                  <a:noFill/>
-                </a:ln>
-                <a:solidFill>
-                  <a:schemeClr val="tx1"/>
-                </a:solidFill>
-                <a:effectLst/>
-                <a:uLnTx/>
-                <a:uFillTx/>
-                <a:latin typeface="Arial Rounded MT Bold" pitchFamily="34" charset="0"/>
-                <a:ea typeface="+mn-ea"/>
-                <a:cs typeface="+mn-cs"/>
-              </a:rPr>
-              <a:t>B.Tech III Year – II Sem | Dept of Computational Intelligence| Application Development – II | Project Review</a:t>
-            </a:r>
-          </a:p>
-        </p:txBody>
-      </p:sp>
-      <p:sp>
-        <p:nvSpPr>
-          <p:cNvPr id="8" name="Rounded Rectangle 4">
-            <a:extLst>
-              <a:ext uri="{FF2B5EF4-FFF2-40B4-BE49-F238E27FC236}">
-                <a16:creationId xmlns:a16="http://schemas.microsoft.com/office/drawing/2014/main" id="{3F66EB5C-E15F-8F04-F4B9-D64E39AC35A9}"/>
-              </a:ext>
-            </a:extLst>
-          </p:cNvPr>
-          <p:cNvSpPr/>
-          <p:nvPr/>
-        </p:nvSpPr>
-        <p:spPr>
-          <a:xfrm>
-            <a:off x="-15875" y="-10805"/>
-            <a:ext cx="12207875" cy="393700"/>
-          </a:xfrm>
-          <a:prstGeom prst="rect">
-            <a:avLst/>
-          </a:prstGeom>
-          <a:solidFill>
-            <a:srgbClr val="5B9BD5"/>
-          </a:solidFill>
-        </p:spPr>
-        <p:style>
-          <a:lnRef idx="2">
-            <a:schemeClr val="accent1">
-              <a:shade val="50000"/>
-            </a:schemeClr>
-          </a:lnRef>
-          <a:fillRef idx="1">
-            <a:schemeClr val="accent1"/>
-          </a:fillRef>
-          <a:effectRef idx="0">
-            <a:schemeClr val="accent1"/>
-          </a:effectRef>
-          <a:fontRef idx="minor">
-            <a:schemeClr val="lt1"/>
-          </a:fontRef>
-        </p:style>
-        <p:txBody>
-          <a:bodyPr anchor="ctr"/>
-          <a:lstStyle/>
-          <a:p>
-            <a:pPr marL="0" marR="0" lvl="0" indent="0" algn="ctr" defTabSz="914400" rtl="0" eaLnBrk="0" fontAlgn="base" latinLnBrk="0" hangingPunct="0">
-              <a:lnSpc>
-                <a:spcPct val="100000"/>
-              </a:lnSpc>
-              <a:spcBef>
-                <a:spcPct val="0"/>
-              </a:spcBef>
-              <a:spcAft>
-                <a:spcPct val="0"/>
-              </a:spcAft>
-              <a:buClrTx/>
-              <a:buSzTx/>
-              <a:buFontTx/>
-              <a:buNone/>
-              <a:defRPr/>
-            </a:pPr>
-            <a:endParaRPr kumimoji="0" lang="en-IN" sz="1800" b="1" i="0" u="none" strike="noStrike" kern="1200" cap="none" spc="0" normalizeH="0" baseline="0" noProof="0" dirty="0">
-              <a:ln>
-                <a:noFill/>
-              </a:ln>
-              <a:solidFill>
-                <a:schemeClr val="tx1"/>
-              </a:solidFill>
-              <a:effectLst/>
-              <a:uLnTx/>
-              <a:uFillTx/>
-              <a:latin typeface="Arial Rounded MT Bold" pitchFamily="34" charset="0"/>
-              <a:ea typeface="+mn-ea"/>
-              <a:cs typeface="+mn-cs"/>
-            </a:endParaRPr>
-          </a:p>
-        </p:txBody>
-      </p:sp>
-      <p:sp>
-        <p:nvSpPr>
-          <p:cNvPr id="9" name="TextBox 8">
-            <a:extLst>
-              <a:ext uri="{FF2B5EF4-FFF2-40B4-BE49-F238E27FC236}">
-                <a16:creationId xmlns:a16="http://schemas.microsoft.com/office/drawing/2014/main" id="{5F932F96-F3AB-4385-A1D4-51B92036A635}"/>
-              </a:ext>
-            </a:extLst>
-          </p:cNvPr>
-          <p:cNvSpPr txBox="1"/>
-          <p:nvPr/>
-        </p:nvSpPr>
-        <p:spPr>
-          <a:xfrm>
-            <a:off x="2801516" y="16768"/>
-            <a:ext cx="6588967" cy="338554"/>
-          </a:xfrm>
-          <a:prstGeom prst="rect">
-            <a:avLst/>
-          </a:prstGeom>
-          <a:noFill/>
-        </p:spPr>
-        <p:txBody>
-          <a:bodyPr wrap="square" rtlCol="0">
-            <a:spAutoFit/>
-          </a:bodyPr>
-          <a:lstStyle/>
-          <a:p>
-            <a:r>
-              <a:rPr lang="en-US" sz="1600" b="1" dirty="0">
-                <a:latin typeface="Arial Rounded MT Bold" panose="020F0704030504030204" pitchFamily="34" charset="0"/>
-                <a:cs typeface="Arial" panose="020B0604020202020204" pitchFamily="34" charset="0"/>
-              </a:rPr>
-              <a:t>MALLA REDDY COLLEGE OF ENGINEERING AND TECHNOLOGY</a:t>
-            </a:r>
-            <a:endParaRPr lang="x-none" sz="1600" b="1" dirty="0">
-              <a:latin typeface="Arial Rounded MT Bold" panose="020F0704030504030204" pitchFamily="34" charset="0"/>
-              <a:cs typeface="Arial" panose="020B0604020202020204" pitchFamily="34" charset="0"/>
-            </a:endParaRPr>
-          </a:p>
-        </p:txBody>
-      </p:sp>
-      <p:pic>
-        <p:nvPicPr>
-          <p:cNvPr id="10" name="Picture 6">
-            <a:extLst>
-              <a:ext uri="{FF2B5EF4-FFF2-40B4-BE49-F238E27FC236}">
-                <a16:creationId xmlns:a16="http://schemas.microsoft.com/office/drawing/2014/main" id="{6FCF5BAF-CD9C-EB2B-43D8-EE931EB6FD13}"/>
-              </a:ext>
-            </a:extLst>
-          </p:cNvPr>
-          <p:cNvPicPr>
-            <a:picLocks noChangeAspect="1"/>
-          </p:cNvPicPr>
-          <p:nvPr/>
-        </p:nvPicPr>
-        <p:blipFill>
-          <a:blip r:embed="rId2" cstate="print"/>
-          <a:stretch>
-            <a:fillRect/>
-          </a:stretch>
-        </p:blipFill>
-        <p:spPr>
-          <a:xfrm>
-            <a:off x="10899775" y="-128587"/>
-            <a:ext cx="1276350" cy="1276350"/>
-          </a:xfrm>
-          <a:prstGeom prst="rect">
-            <a:avLst/>
-          </a:prstGeom>
-          <a:noFill/>
-          <a:ln w="9525">
-            <a:noFill/>
-          </a:ln>
-        </p:spPr>
-      </p:pic>
-      <p:sp>
-        <p:nvSpPr>
-          <p:cNvPr id="12" name="Slide Number Placeholder 3">
-            <a:extLst>
-              <a:ext uri="{FF2B5EF4-FFF2-40B4-BE49-F238E27FC236}">
-                <a16:creationId xmlns:a16="http://schemas.microsoft.com/office/drawing/2014/main" id="{65A7625B-190F-9A07-BADC-6AB40E572116}"/>
-              </a:ext>
-            </a:extLst>
-          </p:cNvPr>
-          <p:cNvSpPr txBox="1">
-            <a:spLocks/>
-          </p:cNvSpPr>
-          <p:nvPr/>
-        </p:nvSpPr>
-        <p:spPr>
-          <a:xfrm>
-            <a:off x="9067800" y="6176963"/>
-            <a:ext cx="2743200" cy="365125"/>
-          </a:xfrm>
-          <a:prstGeom prst="rect">
-            <a:avLst/>
-          </a:prstGeom>
-          <a:noFill/>
-          <a:ln>
-            <a:noFill/>
-          </a:ln>
-        </p:spPr>
-        <p:txBody>
-          <a:bodyPr anchor="ctr" anchorCtr="0"/>
-          <a:lstStyle>
-            <a:defPPr>
-              <a:defRPr lang="x-none"/>
-            </a:defPPr>
-            <a:lvl1pPr marL="0" algn="l" defTabSz="914400" rtl="0" eaLnBrk="1" latinLnBrk="0" hangingPunct="1">
-              <a:defRPr sz="1800" kern="1200">
-                <a:solidFill>
-                  <a:schemeClr val="tx1"/>
-                </a:solidFill>
-                <a:latin typeface="+mn-lt"/>
-                <a:ea typeface="+mn-ea"/>
-                <a:cs typeface="+mn-cs"/>
-              </a:defRPr>
-            </a:lvl1pPr>
-            <a:lvl2pPr marL="457200" algn="l" defTabSz="914400" rtl="0" eaLnBrk="1" latinLnBrk="0" hangingPunct="1">
-              <a:defRPr sz="1800" kern="1200">
-                <a:solidFill>
-                  <a:schemeClr val="tx1"/>
-                </a:solidFill>
-                <a:latin typeface="+mn-lt"/>
-                <a:ea typeface="+mn-ea"/>
-                <a:cs typeface="+mn-cs"/>
-              </a:defRPr>
-            </a:lvl2pPr>
-            <a:lvl3pPr marL="914400" algn="l" defTabSz="914400" rtl="0" eaLnBrk="1" latinLnBrk="0" hangingPunct="1">
-              <a:defRPr sz="1800" kern="1200">
-                <a:solidFill>
-                  <a:schemeClr val="tx1"/>
-                </a:solidFill>
-                <a:latin typeface="+mn-lt"/>
-                <a:ea typeface="+mn-ea"/>
-                <a:cs typeface="+mn-cs"/>
-              </a:defRPr>
-            </a:lvl3pPr>
-            <a:lvl4pPr marL="1371600" algn="l" defTabSz="914400" rtl="0" eaLnBrk="1" latinLnBrk="0" hangingPunct="1">
-              <a:defRPr sz="1800" kern="1200">
-                <a:solidFill>
-                  <a:schemeClr val="tx1"/>
-                </a:solidFill>
-                <a:latin typeface="+mn-lt"/>
-                <a:ea typeface="+mn-ea"/>
-                <a:cs typeface="+mn-cs"/>
-              </a:defRPr>
-            </a:lvl4pPr>
-            <a:lvl5pPr marL="1828800" algn="l" defTabSz="914400" rtl="0" eaLnBrk="1" latinLnBrk="0" hangingPunct="1">
-              <a:defRPr sz="1800" kern="1200">
-                <a:solidFill>
-                  <a:schemeClr val="tx1"/>
-                </a:solidFill>
-                <a:latin typeface="+mn-lt"/>
-                <a:ea typeface="+mn-ea"/>
-                <a:cs typeface="+mn-cs"/>
-              </a:defRPr>
-            </a:lvl5pPr>
-            <a:lvl6pPr marL="2286000" algn="l" defTabSz="914400" rtl="0" eaLnBrk="1" latinLnBrk="0" hangingPunct="1">
-              <a:defRPr sz="1800" kern="1200">
-                <a:solidFill>
-                  <a:schemeClr val="tx1"/>
-                </a:solidFill>
-                <a:latin typeface="+mn-lt"/>
-                <a:ea typeface="+mn-ea"/>
-                <a:cs typeface="+mn-cs"/>
-              </a:defRPr>
-            </a:lvl6pPr>
-            <a:lvl7pPr marL="2743200" algn="l" defTabSz="914400" rtl="0" eaLnBrk="1" latinLnBrk="0" hangingPunct="1">
-              <a:defRPr sz="1800" kern="1200">
-                <a:solidFill>
-                  <a:schemeClr val="tx1"/>
-                </a:solidFill>
-                <a:latin typeface="+mn-lt"/>
-                <a:ea typeface="+mn-ea"/>
-                <a:cs typeface="+mn-cs"/>
-              </a:defRPr>
-            </a:lvl7pPr>
-            <a:lvl8pPr marL="3200400" algn="l" defTabSz="914400" rtl="0" eaLnBrk="1" latinLnBrk="0" hangingPunct="1">
-              <a:defRPr sz="1800" kern="1200">
-                <a:solidFill>
-                  <a:schemeClr val="tx1"/>
-                </a:solidFill>
-                <a:latin typeface="+mn-lt"/>
-                <a:ea typeface="+mn-ea"/>
-                <a:cs typeface="+mn-cs"/>
-              </a:defRPr>
-            </a:lvl8pPr>
-            <a:lvl9pPr marL="3657600" algn="l" defTabSz="914400" rtl="0" eaLnBrk="1" latinLnBrk="0" hangingPunct="1">
-              <a:defRPr sz="1800" kern="1200">
-                <a:solidFill>
-                  <a:schemeClr val="tx1"/>
-                </a:solidFill>
-                <a:latin typeface="+mn-lt"/>
-                <a:ea typeface="+mn-ea"/>
-                <a:cs typeface="+mn-cs"/>
-              </a:defRPr>
-            </a:lvl9pPr>
-          </a:lstStyle>
-          <a:p>
-            <a:pPr algn="r">
-              <a:spcBef>
-                <a:spcPct val="0"/>
-              </a:spcBef>
-            </a:pPr>
-            <a:fld id="{9A0DB2DC-4C9A-4742-B13C-FB6460FD3503}" type="slidenum">
-              <a:rPr lang="en-IN" altLang="en-US" sz="1200" b="1" smtClean="0">
-                <a:solidFill>
-                  <a:srgbClr val="C00000"/>
-                </a:solidFill>
-              </a:rPr>
-              <a:pPr algn="r">
-                <a:spcBef>
-                  <a:spcPct val="0"/>
-                </a:spcBef>
-              </a:pPr>
-              <a:t>18</a:t>
-            </a:fld>
-            <a:endParaRPr lang="en-IN" altLang="en-US" sz="1200" b="1" dirty="0">
-              <a:solidFill>
-                <a:srgbClr val="C00000"/>
-              </a:solidFill>
-            </a:endParaRPr>
-          </a:p>
-        </p:txBody>
-      </p:sp>
-      <p:pic>
-        <p:nvPicPr>
-          <p:cNvPr id="4" name="Picture 3">
-            <a:extLst>
-              <a:ext uri="{FF2B5EF4-FFF2-40B4-BE49-F238E27FC236}">
-                <a16:creationId xmlns:a16="http://schemas.microsoft.com/office/drawing/2014/main" id="{849DE31D-D257-B953-8E3F-D40EDC386882}"/>
-              </a:ext>
-            </a:extLst>
-          </p:cNvPr>
-          <p:cNvPicPr>
-            <a:picLocks noChangeAspect="1"/>
-          </p:cNvPicPr>
-          <p:nvPr/>
-        </p:nvPicPr>
-        <p:blipFill>
-          <a:blip r:embed="rId3" cstate="print">
-            <a:extLst>
-              <a:ext uri="{28A0092B-C50C-407E-A947-70E740481C1C}">
-                <a14:useLocalDpi xmlns:a14="http://schemas.microsoft.com/office/drawing/2010/main" val="0"/>
-              </a:ext>
-            </a:extLst>
-          </a:blip>
-          <a:srcRect/>
-          <a:stretch>
-            <a:fillRect/>
-          </a:stretch>
-        </p:blipFill>
-        <p:spPr bwMode="auto">
-          <a:xfrm>
-            <a:off x="1280374" y="737614"/>
-            <a:ext cx="9338737" cy="5024429"/>
-          </a:xfrm>
-          <a:prstGeom prst="rect">
-            <a:avLst/>
-          </a:prstGeom>
-          <a:noFill/>
-          <a:ln>
-            <a:noFill/>
-          </a:ln>
-        </p:spPr>
-      </p:pic>
-      <p:sp>
-        <p:nvSpPr>
-          <p:cNvPr id="11" name="TextBox 10">
-            <a:extLst>
-              <a:ext uri="{FF2B5EF4-FFF2-40B4-BE49-F238E27FC236}">
-                <a16:creationId xmlns:a16="http://schemas.microsoft.com/office/drawing/2014/main" id="{01A0945C-821A-1488-7849-78280EC21242}"/>
-              </a:ext>
-            </a:extLst>
-          </p:cNvPr>
-          <p:cNvSpPr txBox="1"/>
-          <p:nvPr/>
-        </p:nvSpPr>
-        <p:spPr>
-          <a:xfrm>
-            <a:off x="2889452" y="5718889"/>
-            <a:ext cx="6120580" cy="458074"/>
-          </a:xfrm>
-          <a:prstGeom prst="rect">
-            <a:avLst/>
-          </a:prstGeom>
-          <a:noFill/>
-        </p:spPr>
-        <p:txBody>
-          <a:bodyPr wrap="square">
-            <a:spAutoFit/>
-          </a:bodyPr>
-          <a:lstStyle/>
-          <a:p>
-            <a:pPr algn="ctr">
-              <a:lnSpc>
-                <a:spcPct val="150000"/>
-              </a:lnSpc>
-              <a:spcAft>
-                <a:spcPts val="190"/>
-              </a:spcAft>
-            </a:pPr>
-            <a:r>
-              <a:rPr lang="en-IN" sz="1800" b="1" dirty="0">
-                <a:effectLst/>
-                <a:latin typeface="Times New Roman" panose="02020603050405020304" pitchFamily="18" charset="0"/>
-                <a:ea typeface="Segoe UI Symbol" panose="020B0502040204020203" pitchFamily="34" charset="0"/>
-              </a:rPr>
-              <a:t>Fig </a:t>
-            </a:r>
-            <a:r>
-              <a:rPr lang="en-IN" b="1" dirty="0">
-                <a:latin typeface="Times New Roman" panose="02020603050405020304" pitchFamily="18" charset="0"/>
-                <a:ea typeface="Segoe UI Symbol" panose="020B0502040204020203" pitchFamily="34" charset="0"/>
-              </a:rPr>
-              <a:t>2:</a:t>
-            </a:r>
-            <a:r>
-              <a:rPr lang="en-IN" sz="1800" b="1" dirty="0">
-                <a:effectLst/>
-                <a:latin typeface="Times New Roman" panose="02020603050405020304" pitchFamily="18" charset="0"/>
-                <a:ea typeface="Segoe UI Symbol" panose="020B0502040204020203" pitchFamily="34" charset="0"/>
-              </a:rPr>
-              <a:t> Script Generation phase </a:t>
-            </a:r>
-            <a:endParaRPr lang="en-IN" sz="1600" dirty="0">
-              <a:effectLst/>
-              <a:latin typeface="Times New Roman" panose="02020603050405020304" pitchFamily="18" charset="0"/>
-              <a:ea typeface="Times New Roman" panose="02020603050405020304" pitchFamily="18" charset="0"/>
-            </a:endParaRPr>
-          </a:p>
-        </p:txBody>
-      </p:sp>
-    </p:spTree>
-    <p:extLst>
-      <p:ext uri="{BB962C8B-B14F-4D97-AF65-F5344CB8AC3E}">
-        <p14:creationId xmlns:p14="http://schemas.microsoft.com/office/powerpoint/2010/main" val="2564376885"/>
-      </p:ext>
-    </p:extLst>
-  </p:cSld>
-  <p:clrMapOvr>
-    <a:masterClrMapping/>
-  </p:clrMapOvr>
-</p:sld>
-</file>
-
-<file path=ppt/slides/slide19.xml><?xml version="1.0" encoding="utf-8"?>
-<p:sld xmlns:a="http://schemas.openxmlformats.org/drawingml/2006/main" xmlns:r="http://schemas.openxmlformats.org/officeDocument/2006/relationships" xmlns:p="http://schemas.openxmlformats.org/presentationml/2006/main">
-  <p:cSld>
-    <p:spTree>
-      <p:nvGrpSpPr>
-        <p:cNvPr id="1" name="">
-          <a:extLst>
-            <a:ext uri="{FF2B5EF4-FFF2-40B4-BE49-F238E27FC236}">
-              <a16:creationId xmlns:a16="http://schemas.microsoft.com/office/drawing/2014/main" id="{61ADEBF6-1A97-3407-0021-02448EF5E7F8}"/>
-            </a:ext>
-          </a:extLst>
-        </p:cNvPr>
-        <p:cNvGrpSpPr/>
-        <p:nvPr/>
-      </p:nvGrpSpPr>
-      <p:grpSpPr>
-        <a:xfrm>
-          <a:off x="0" y="0"/>
-          <a:ext cx="0" cy="0"/>
-          <a:chOff x="0" y="0"/>
-          <a:chExt cx="0" cy="0"/>
-        </a:xfrm>
-      </p:grpSpPr>
-      <p:sp>
-        <p:nvSpPr>
-          <p:cNvPr id="6" name="Rounded Rectangle 4">
-            <a:extLst>
-              <a:ext uri="{FF2B5EF4-FFF2-40B4-BE49-F238E27FC236}">
-                <a16:creationId xmlns:a16="http://schemas.microsoft.com/office/drawing/2014/main" id="{1633222C-1CC0-28AD-1731-C15C09B1A64E}"/>
-              </a:ext>
-            </a:extLst>
-          </p:cNvPr>
-          <p:cNvSpPr/>
-          <p:nvPr/>
-        </p:nvSpPr>
-        <p:spPr>
-          <a:xfrm>
-            <a:off x="0" y="6462940"/>
-            <a:ext cx="12207875" cy="393700"/>
-          </a:xfrm>
-          <a:prstGeom prst="rect">
-            <a:avLst/>
-          </a:prstGeom>
-          <a:solidFill>
-            <a:srgbClr val="5B9BD5"/>
-          </a:solidFill>
-        </p:spPr>
-        <p:style>
-          <a:lnRef idx="2">
-            <a:schemeClr val="accent1">
-              <a:shade val="50000"/>
-            </a:schemeClr>
-          </a:lnRef>
-          <a:fillRef idx="1">
-            <a:schemeClr val="accent1"/>
-          </a:fillRef>
-          <a:effectRef idx="0">
-            <a:schemeClr val="accent1"/>
-          </a:effectRef>
-          <a:fontRef idx="minor">
-            <a:schemeClr val="lt1"/>
-          </a:fontRef>
-        </p:style>
-        <p:txBody>
-          <a:bodyPr anchor="ctr"/>
-          <a:lstStyle/>
-          <a:p>
-            <a:pPr marL="0" marR="0" lvl="0" indent="0" algn="ctr" defTabSz="914400" rtl="0" eaLnBrk="0" fontAlgn="base" latinLnBrk="0" hangingPunct="0">
-              <a:lnSpc>
-                <a:spcPct val="100000"/>
-              </a:lnSpc>
-              <a:spcBef>
-                <a:spcPct val="0"/>
-              </a:spcBef>
-              <a:spcAft>
-                <a:spcPct val="0"/>
-              </a:spcAft>
-              <a:buClrTx/>
-              <a:buSzTx/>
-              <a:buFontTx/>
-              <a:buNone/>
-              <a:defRPr/>
-            </a:pPr>
-            <a:endParaRPr kumimoji="0" lang="en-IN" sz="1800" b="1" i="0" u="none" strike="noStrike" kern="1200" cap="none" spc="0" normalizeH="0" baseline="0" noProof="0" dirty="0">
-              <a:ln>
-                <a:noFill/>
-              </a:ln>
-              <a:solidFill>
-                <a:schemeClr val="tx1"/>
-              </a:solidFill>
-              <a:effectLst/>
-              <a:uLnTx/>
-              <a:uFillTx/>
-              <a:latin typeface="Arial Rounded MT Bold" pitchFamily="34" charset="0"/>
-              <a:ea typeface="+mn-ea"/>
-              <a:cs typeface="+mn-cs"/>
-            </a:endParaRPr>
-          </a:p>
-        </p:txBody>
-      </p:sp>
-      <p:sp>
-        <p:nvSpPr>
-          <p:cNvPr id="7" name="TextBox 6">
-            <a:extLst>
-              <a:ext uri="{FF2B5EF4-FFF2-40B4-BE49-F238E27FC236}">
-                <a16:creationId xmlns:a16="http://schemas.microsoft.com/office/drawing/2014/main" id="{77665D6C-D3C1-973A-7C6D-D1F35B3CB618}"/>
-              </a:ext>
-            </a:extLst>
-          </p:cNvPr>
-          <p:cNvSpPr txBox="1"/>
-          <p:nvPr/>
-        </p:nvSpPr>
-        <p:spPr>
-          <a:xfrm>
-            <a:off x="443971" y="6490513"/>
-            <a:ext cx="11288182" cy="338554"/>
-          </a:xfrm>
-          <a:prstGeom prst="rect">
-            <a:avLst/>
-          </a:prstGeom>
-          <a:noFill/>
-        </p:spPr>
-        <p:txBody>
-          <a:bodyPr wrap="square" rtlCol="0">
-            <a:spAutoFit/>
-          </a:bodyPr>
-          <a:lstStyle/>
-          <a:p>
-            <a:pPr marL="0" marR="0" lvl="0" indent="0" algn="ctr" defTabSz="914400" rtl="0" eaLnBrk="0" fontAlgn="base" latinLnBrk="0" hangingPunct="0">
-              <a:lnSpc>
-                <a:spcPct val="100000"/>
-              </a:lnSpc>
-              <a:spcBef>
-                <a:spcPct val="0"/>
-              </a:spcBef>
-              <a:spcAft>
-                <a:spcPct val="0"/>
-              </a:spcAft>
-              <a:buClrTx/>
-              <a:buSzTx/>
-              <a:buFontTx/>
-              <a:buNone/>
-              <a:defRPr/>
-            </a:pPr>
-            <a:r>
-              <a:rPr kumimoji="0" lang="en-IN" sz="1600" b="1" i="0" u="none" strike="noStrike" kern="1200" cap="none" spc="0" normalizeH="0" baseline="0" noProof="0" dirty="0">
-                <a:ln>
-                  <a:noFill/>
-                </a:ln>
-                <a:solidFill>
-                  <a:schemeClr val="tx1"/>
-                </a:solidFill>
-                <a:effectLst/>
-                <a:uLnTx/>
-                <a:uFillTx/>
-                <a:latin typeface="Arial Rounded MT Bold" pitchFamily="34" charset="0"/>
-                <a:ea typeface="+mn-ea"/>
-                <a:cs typeface="+mn-cs"/>
-              </a:rPr>
-              <a:t>B.Tech III Year – II Sem | Dept of Computational Intelligence| Application Development – II | Project Review</a:t>
-            </a:r>
-          </a:p>
-        </p:txBody>
-      </p:sp>
-      <p:sp>
-        <p:nvSpPr>
-          <p:cNvPr id="8" name="Rounded Rectangle 4">
-            <a:extLst>
-              <a:ext uri="{FF2B5EF4-FFF2-40B4-BE49-F238E27FC236}">
-                <a16:creationId xmlns:a16="http://schemas.microsoft.com/office/drawing/2014/main" id="{6E6B5FD0-F6FE-465E-CA39-2E8F225DBB47}"/>
-              </a:ext>
-            </a:extLst>
-          </p:cNvPr>
-          <p:cNvSpPr/>
-          <p:nvPr/>
-        </p:nvSpPr>
-        <p:spPr>
-          <a:xfrm>
-            <a:off x="-15875" y="-10805"/>
-            <a:ext cx="12207875" cy="393700"/>
-          </a:xfrm>
-          <a:prstGeom prst="rect">
-            <a:avLst/>
-          </a:prstGeom>
-          <a:solidFill>
-            <a:srgbClr val="5B9BD5"/>
-          </a:solidFill>
-        </p:spPr>
-        <p:style>
-          <a:lnRef idx="2">
-            <a:schemeClr val="accent1">
-              <a:shade val="50000"/>
-            </a:schemeClr>
-          </a:lnRef>
-          <a:fillRef idx="1">
-            <a:schemeClr val="accent1"/>
-          </a:fillRef>
-          <a:effectRef idx="0">
-            <a:schemeClr val="accent1"/>
-          </a:effectRef>
-          <a:fontRef idx="minor">
-            <a:schemeClr val="lt1"/>
-          </a:fontRef>
-        </p:style>
-        <p:txBody>
-          <a:bodyPr anchor="ctr"/>
-          <a:lstStyle/>
-          <a:p>
-            <a:pPr marL="0" marR="0" lvl="0" indent="0" algn="ctr" defTabSz="914400" rtl="0" eaLnBrk="0" fontAlgn="base" latinLnBrk="0" hangingPunct="0">
-              <a:lnSpc>
-                <a:spcPct val="100000"/>
-              </a:lnSpc>
-              <a:spcBef>
-                <a:spcPct val="0"/>
-              </a:spcBef>
-              <a:spcAft>
-                <a:spcPct val="0"/>
-              </a:spcAft>
-              <a:buClrTx/>
-              <a:buSzTx/>
-              <a:buFontTx/>
-              <a:buNone/>
-              <a:defRPr/>
-            </a:pPr>
-            <a:endParaRPr kumimoji="0" lang="en-IN" sz="1800" b="1" i="0" u="none" strike="noStrike" kern="1200" cap="none" spc="0" normalizeH="0" baseline="0" noProof="0" dirty="0">
-              <a:ln>
-                <a:noFill/>
-              </a:ln>
-              <a:solidFill>
-                <a:schemeClr val="tx1"/>
-              </a:solidFill>
-              <a:effectLst/>
-              <a:uLnTx/>
-              <a:uFillTx/>
-              <a:latin typeface="Arial Rounded MT Bold" pitchFamily="34" charset="0"/>
-              <a:ea typeface="+mn-ea"/>
-              <a:cs typeface="+mn-cs"/>
-            </a:endParaRPr>
-          </a:p>
-        </p:txBody>
-      </p:sp>
-      <p:sp>
-        <p:nvSpPr>
-          <p:cNvPr id="9" name="TextBox 8">
-            <a:extLst>
-              <a:ext uri="{FF2B5EF4-FFF2-40B4-BE49-F238E27FC236}">
-                <a16:creationId xmlns:a16="http://schemas.microsoft.com/office/drawing/2014/main" id="{186411D7-64AF-3F4F-58EC-AB530CC40753}"/>
-              </a:ext>
-            </a:extLst>
-          </p:cNvPr>
-          <p:cNvSpPr txBox="1"/>
-          <p:nvPr/>
-        </p:nvSpPr>
-        <p:spPr>
-          <a:xfrm>
-            <a:off x="2801516" y="16768"/>
-            <a:ext cx="6588967" cy="338554"/>
-          </a:xfrm>
-          <a:prstGeom prst="rect">
-            <a:avLst/>
-          </a:prstGeom>
-          <a:noFill/>
-        </p:spPr>
-        <p:txBody>
-          <a:bodyPr wrap="square" rtlCol="0">
-            <a:spAutoFit/>
-          </a:bodyPr>
-          <a:lstStyle/>
-          <a:p>
-            <a:r>
-              <a:rPr lang="en-US" sz="1600" b="1" dirty="0">
-                <a:latin typeface="Arial Rounded MT Bold" panose="020F0704030504030204" pitchFamily="34" charset="0"/>
-                <a:cs typeface="Arial" panose="020B0604020202020204" pitchFamily="34" charset="0"/>
-              </a:rPr>
-              <a:t>MALLA REDDY COLLEGE OF ENGINEERING AND TECHNOLOGY</a:t>
-            </a:r>
-            <a:endParaRPr lang="x-none" sz="1600" b="1" dirty="0">
-              <a:latin typeface="Arial Rounded MT Bold" panose="020F0704030504030204" pitchFamily="34" charset="0"/>
-              <a:cs typeface="Arial" panose="020B0604020202020204" pitchFamily="34" charset="0"/>
-            </a:endParaRPr>
-          </a:p>
-        </p:txBody>
-      </p:sp>
-      <p:pic>
-        <p:nvPicPr>
-          <p:cNvPr id="10" name="Picture 6">
-            <a:extLst>
-              <a:ext uri="{FF2B5EF4-FFF2-40B4-BE49-F238E27FC236}">
-                <a16:creationId xmlns:a16="http://schemas.microsoft.com/office/drawing/2014/main" id="{C76F7C13-DC91-4820-2669-CC3F1CD9BD4E}"/>
-              </a:ext>
-            </a:extLst>
-          </p:cNvPr>
-          <p:cNvPicPr>
-            <a:picLocks noChangeAspect="1"/>
-          </p:cNvPicPr>
-          <p:nvPr/>
-        </p:nvPicPr>
-        <p:blipFill>
-          <a:blip r:embed="rId2" cstate="print"/>
-          <a:stretch>
-            <a:fillRect/>
-          </a:stretch>
-        </p:blipFill>
-        <p:spPr>
-          <a:xfrm>
-            <a:off x="10899775" y="-128587"/>
-            <a:ext cx="1276350" cy="1276350"/>
-          </a:xfrm>
-          <a:prstGeom prst="rect">
-            <a:avLst/>
-          </a:prstGeom>
-          <a:noFill/>
-          <a:ln w="9525">
-            <a:noFill/>
-          </a:ln>
-        </p:spPr>
-      </p:pic>
-      <p:sp>
-        <p:nvSpPr>
-          <p:cNvPr id="12" name="Slide Number Placeholder 3">
-            <a:extLst>
-              <a:ext uri="{FF2B5EF4-FFF2-40B4-BE49-F238E27FC236}">
-                <a16:creationId xmlns:a16="http://schemas.microsoft.com/office/drawing/2014/main" id="{F826CDB6-686C-9DDB-CBC0-C330AC8CF119}"/>
-              </a:ext>
-            </a:extLst>
-          </p:cNvPr>
-          <p:cNvSpPr txBox="1">
-            <a:spLocks/>
-          </p:cNvSpPr>
-          <p:nvPr/>
-        </p:nvSpPr>
-        <p:spPr>
-          <a:xfrm>
-            <a:off x="9067800" y="6176963"/>
-            <a:ext cx="2743200" cy="365125"/>
-          </a:xfrm>
-          <a:prstGeom prst="rect">
-            <a:avLst/>
-          </a:prstGeom>
-          <a:noFill/>
-          <a:ln>
-            <a:noFill/>
-          </a:ln>
-        </p:spPr>
-        <p:txBody>
-          <a:bodyPr anchor="ctr" anchorCtr="0"/>
-          <a:lstStyle>
-            <a:defPPr>
-              <a:defRPr lang="x-none"/>
-            </a:defPPr>
-            <a:lvl1pPr marL="0" algn="l" defTabSz="914400" rtl="0" eaLnBrk="1" latinLnBrk="0" hangingPunct="1">
-              <a:defRPr sz="1800" kern="1200">
-                <a:solidFill>
-                  <a:schemeClr val="tx1"/>
-                </a:solidFill>
-                <a:latin typeface="+mn-lt"/>
-                <a:ea typeface="+mn-ea"/>
-                <a:cs typeface="+mn-cs"/>
-              </a:defRPr>
-            </a:lvl1pPr>
-            <a:lvl2pPr marL="457200" algn="l" defTabSz="914400" rtl="0" eaLnBrk="1" latinLnBrk="0" hangingPunct="1">
-              <a:defRPr sz="1800" kern="1200">
-                <a:solidFill>
-                  <a:schemeClr val="tx1"/>
-                </a:solidFill>
-                <a:latin typeface="+mn-lt"/>
-                <a:ea typeface="+mn-ea"/>
-                <a:cs typeface="+mn-cs"/>
-              </a:defRPr>
-            </a:lvl2pPr>
-            <a:lvl3pPr marL="914400" algn="l" defTabSz="914400" rtl="0" eaLnBrk="1" latinLnBrk="0" hangingPunct="1">
-              <a:defRPr sz="1800" kern="1200">
-                <a:solidFill>
-                  <a:schemeClr val="tx1"/>
-                </a:solidFill>
-                <a:latin typeface="+mn-lt"/>
-                <a:ea typeface="+mn-ea"/>
-                <a:cs typeface="+mn-cs"/>
-              </a:defRPr>
-            </a:lvl3pPr>
-            <a:lvl4pPr marL="1371600" algn="l" defTabSz="914400" rtl="0" eaLnBrk="1" latinLnBrk="0" hangingPunct="1">
-              <a:defRPr sz="1800" kern="1200">
-                <a:solidFill>
-                  <a:schemeClr val="tx1"/>
-                </a:solidFill>
-                <a:latin typeface="+mn-lt"/>
-                <a:ea typeface="+mn-ea"/>
-                <a:cs typeface="+mn-cs"/>
-              </a:defRPr>
-            </a:lvl4pPr>
-            <a:lvl5pPr marL="1828800" algn="l" defTabSz="914400" rtl="0" eaLnBrk="1" latinLnBrk="0" hangingPunct="1">
-              <a:defRPr sz="1800" kern="1200">
-                <a:solidFill>
-                  <a:schemeClr val="tx1"/>
-                </a:solidFill>
-                <a:latin typeface="+mn-lt"/>
-                <a:ea typeface="+mn-ea"/>
-                <a:cs typeface="+mn-cs"/>
-              </a:defRPr>
-            </a:lvl5pPr>
-            <a:lvl6pPr marL="2286000" algn="l" defTabSz="914400" rtl="0" eaLnBrk="1" latinLnBrk="0" hangingPunct="1">
-              <a:defRPr sz="1800" kern="1200">
-                <a:solidFill>
-                  <a:schemeClr val="tx1"/>
-                </a:solidFill>
-                <a:latin typeface="+mn-lt"/>
-                <a:ea typeface="+mn-ea"/>
-                <a:cs typeface="+mn-cs"/>
-              </a:defRPr>
-            </a:lvl6pPr>
-            <a:lvl7pPr marL="2743200" algn="l" defTabSz="914400" rtl="0" eaLnBrk="1" latinLnBrk="0" hangingPunct="1">
-              <a:defRPr sz="1800" kern="1200">
-                <a:solidFill>
-                  <a:schemeClr val="tx1"/>
-                </a:solidFill>
-                <a:latin typeface="+mn-lt"/>
-                <a:ea typeface="+mn-ea"/>
-                <a:cs typeface="+mn-cs"/>
-              </a:defRPr>
-            </a:lvl7pPr>
-            <a:lvl8pPr marL="3200400" algn="l" defTabSz="914400" rtl="0" eaLnBrk="1" latinLnBrk="0" hangingPunct="1">
-              <a:defRPr sz="1800" kern="1200">
-                <a:solidFill>
-                  <a:schemeClr val="tx1"/>
-                </a:solidFill>
-                <a:latin typeface="+mn-lt"/>
-                <a:ea typeface="+mn-ea"/>
-                <a:cs typeface="+mn-cs"/>
-              </a:defRPr>
-            </a:lvl8pPr>
-            <a:lvl9pPr marL="3657600" algn="l" defTabSz="914400" rtl="0" eaLnBrk="1" latinLnBrk="0" hangingPunct="1">
-              <a:defRPr sz="1800" kern="1200">
-                <a:solidFill>
-                  <a:schemeClr val="tx1"/>
-                </a:solidFill>
-                <a:latin typeface="+mn-lt"/>
-                <a:ea typeface="+mn-ea"/>
-                <a:cs typeface="+mn-cs"/>
-              </a:defRPr>
-            </a:lvl9pPr>
-          </a:lstStyle>
-          <a:p>
-            <a:pPr algn="r">
-              <a:spcBef>
-                <a:spcPct val="0"/>
-              </a:spcBef>
-            </a:pPr>
-            <a:fld id="{9A0DB2DC-4C9A-4742-B13C-FB6460FD3503}" type="slidenum">
-              <a:rPr lang="en-IN" altLang="en-US" sz="1200" b="1" smtClean="0">
-                <a:solidFill>
-                  <a:srgbClr val="C00000"/>
-                </a:solidFill>
-              </a:rPr>
-              <a:pPr algn="r">
-                <a:spcBef>
-                  <a:spcPct val="0"/>
-                </a:spcBef>
-              </a:pPr>
-              <a:t>19</a:t>
-            </a:fld>
-            <a:endParaRPr lang="en-IN" altLang="en-US" sz="1200" b="1" dirty="0">
-              <a:solidFill>
-                <a:srgbClr val="C00000"/>
-              </a:solidFill>
-            </a:endParaRPr>
-          </a:p>
-        </p:txBody>
-      </p:sp>
-      <p:pic>
-        <p:nvPicPr>
-          <p:cNvPr id="2" name="Picture 1">
-            <a:extLst>
-              <a:ext uri="{FF2B5EF4-FFF2-40B4-BE49-F238E27FC236}">
-                <a16:creationId xmlns:a16="http://schemas.microsoft.com/office/drawing/2014/main" id="{B2DDE2C4-CB4D-8146-9B09-B6675DC79F9B}"/>
-              </a:ext>
-            </a:extLst>
-          </p:cNvPr>
-          <p:cNvPicPr>
-            <a:picLocks noChangeAspect="1"/>
-          </p:cNvPicPr>
-          <p:nvPr/>
-        </p:nvPicPr>
-        <p:blipFill>
-          <a:blip r:embed="rId3" cstate="print">
-            <a:extLst>
-              <a:ext uri="{28A0092B-C50C-407E-A947-70E740481C1C}">
-                <a14:useLocalDpi xmlns:a14="http://schemas.microsoft.com/office/drawing/2010/main" val="0"/>
-              </a:ext>
-            </a:extLst>
-          </a:blip>
-          <a:srcRect/>
-          <a:stretch>
-            <a:fillRect/>
-          </a:stretch>
-        </p:blipFill>
-        <p:spPr bwMode="auto">
-          <a:xfrm>
-            <a:off x="1195468" y="743939"/>
-            <a:ext cx="9688432" cy="4906918"/>
-          </a:xfrm>
-          <a:prstGeom prst="rect">
-            <a:avLst/>
-          </a:prstGeom>
-          <a:noFill/>
-          <a:ln>
-            <a:noFill/>
-          </a:ln>
-        </p:spPr>
-      </p:pic>
-      <p:sp>
-        <p:nvSpPr>
-          <p:cNvPr id="5" name="TextBox 4">
-            <a:extLst>
-              <a:ext uri="{FF2B5EF4-FFF2-40B4-BE49-F238E27FC236}">
-                <a16:creationId xmlns:a16="http://schemas.microsoft.com/office/drawing/2014/main" id="{B6E0BF4B-92EA-5B19-D939-134A2272B2C2}"/>
-              </a:ext>
-            </a:extLst>
-          </p:cNvPr>
-          <p:cNvSpPr txBox="1"/>
-          <p:nvPr/>
-        </p:nvSpPr>
-        <p:spPr>
-          <a:xfrm>
-            <a:off x="4359014" y="5775470"/>
-            <a:ext cx="4131844" cy="369332"/>
-          </a:xfrm>
-          <a:prstGeom prst="rect">
-            <a:avLst/>
-          </a:prstGeom>
-          <a:noFill/>
-        </p:spPr>
-        <p:txBody>
-          <a:bodyPr wrap="square">
-            <a:spAutoFit/>
-          </a:bodyPr>
-          <a:lstStyle/>
-          <a:p>
-            <a:r>
-              <a:rPr lang="en-IN" sz="1800" b="1" dirty="0">
-                <a:effectLst/>
-                <a:latin typeface="Times New Roman" panose="02020603050405020304" pitchFamily="18" charset="0"/>
-                <a:ea typeface="Segoe UI Symbol" panose="020B0502040204020203" pitchFamily="34" charset="0"/>
-              </a:rPr>
-              <a:t>Fig 3: Voiceover Generation Phase</a:t>
-            </a:r>
-            <a:endParaRPr lang="en-IN" dirty="0"/>
-          </a:p>
-        </p:txBody>
-      </p:sp>
-    </p:spTree>
-    <p:extLst>
-      <p:ext uri="{BB962C8B-B14F-4D97-AF65-F5344CB8AC3E}">
-        <p14:creationId xmlns:p14="http://schemas.microsoft.com/office/powerpoint/2010/main" val="3562426496"/>
       </p:ext>
     </p:extLst>
   </p:cSld>
@@ -11403,9 +11928,9 @@
             </a:lvl9pPr>
           </a:lstStyle>
           <a:p>
-            <a:pPr marL="342900" indent="-342900" algn="l">
-              <a:buFont typeface="Arial" panose="020B0604020202020204" pitchFamily="34" charset="0"/>
-              <a:buChar char="•"/>
+            <a:pPr marL="514350" indent="-514350" algn="l">
+              <a:buFont typeface="+mj-lt"/>
+              <a:buAutoNum type="arabicPeriod"/>
             </a:pPr>
             <a:r>
               <a:rPr lang="en-US" altLang="en-IN" sz="2800" dirty="0">
@@ -11415,9 +11940,9 @@
             </a:r>
           </a:p>
           <a:p>
-            <a:pPr marL="342900" indent="-342900" algn="l">
-              <a:buFont typeface="Arial" panose="020B0604020202020204" pitchFamily="34" charset="0"/>
-              <a:buChar char="•"/>
+            <a:pPr marL="514350" indent="-514350" algn="l">
+              <a:buFont typeface="+mj-lt"/>
+              <a:buAutoNum type="arabicPeriod"/>
             </a:pPr>
             <a:r>
               <a:rPr lang="en-US" altLang="en-IN" sz="2800" dirty="0">
@@ -11427,9 +11952,9 @@
             </a:r>
           </a:p>
           <a:p>
-            <a:pPr marL="342900" indent="-342900" algn="l">
-              <a:buFont typeface="Arial" panose="020B0604020202020204" pitchFamily="34" charset="0"/>
-              <a:buChar char="•"/>
+            <a:pPr marL="514350" indent="-514350" algn="l">
+              <a:buFont typeface="+mj-lt"/>
+              <a:buAutoNum type="arabicPeriod"/>
             </a:pPr>
             <a:r>
               <a:rPr lang="en-US" altLang="en-IN" sz="2800" dirty="0">
@@ -11439,9 +11964,9 @@
             </a:r>
           </a:p>
           <a:p>
-            <a:pPr marL="342900" indent="-342900" algn="l">
-              <a:buFont typeface="Arial" panose="020B0604020202020204" pitchFamily="34" charset="0"/>
-              <a:buChar char="•"/>
+            <a:pPr marL="514350" indent="-514350" algn="l">
+              <a:buFont typeface="+mj-lt"/>
+              <a:buAutoNum type="arabicPeriod"/>
             </a:pPr>
             <a:r>
               <a:rPr lang="en-US" altLang="en-IN" sz="2800" dirty="0">
@@ -11451,9 +11976,9 @@
             </a:r>
           </a:p>
           <a:p>
-            <a:pPr marL="342900" indent="-342900" algn="l">
-              <a:buFont typeface="Arial" panose="020B0604020202020204" pitchFamily="34" charset="0"/>
-              <a:buChar char="•"/>
+            <a:pPr marL="514350" indent="-514350" algn="l">
+              <a:buFont typeface="+mj-lt"/>
+              <a:buAutoNum type="arabicPeriod"/>
             </a:pPr>
             <a:r>
               <a:rPr lang="en-US" altLang="en-IN" sz="2800" dirty="0">
@@ -11463,9 +11988,9 @@
             </a:r>
           </a:p>
           <a:p>
-            <a:pPr marL="342900" indent="-342900" algn="l">
-              <a:buFont typeface="Arial" panose="020B0604020202020204" pitchFamily="34" charset="0"/>
-              <a:buChar char="•"/>
+            <a:pPr marL="514350" indent="-514350" algn="l">
+              <a:buFont typeface="+mj-lt"/>
+              <a:buAutoNum type="arabicPeriod"/>
             </a:pPr>
             <a:r>
               <a:rPr lang="en-US" altLang="en-IN" sz="2800" dirty="0">
@@ -11475,9 +12000,9 @@
             </a:r>
           </a:p>
           <a:p>
-            <a:pPr marL="342900" indent="-342900" algn="l">
-              <a:buFont typeface="Arial" panose="020B0604020202020204" pitchFamily="34" charset="0"/>
-              <a:buChar char="•"/>
+            <a:pPr marL="514350" indent="-514350" algn="l">
+              <a:buFont typeface="+mj-lt"/>
+              <a:buAutoNum type="arabicPeriod"/>
             </a:pPr>
             <a:r>
               <a:rPr lang="en-US" altLang="en-IN" sz="2800" dirty="0">
@@ -11487,27 +12012,39 @@
             </a:r>
           </a:p>
           <a:p>
-            <a:pPr marL="342900" indent="-342900" algn="l">
-              <a:buFont typeface="Arial" panose="020B0604020202020204" pitchFamily="34" charset="0"/>
-              <a:buChar char="•"/>
+            <a:pPr marL="514350" indent="-514350" algn="l">
+              <a:buFont typeface="+mj-lt"/>
+              <a:buAutoNum type="arabicPeriod"/>
             </a:pPr>
             <a:r>
               <a:rPr lang="en-US" altLang="en-IN" sz="2800" dirty="0">
                 <a:latin typeface="Times New Roman" panose="02020603050405020304" pitchFamily="18" charset="0"/>
               </a:rPr>
-              <a:t>Output Screenshots</a:t>
-            </a:r>
-          </a:p>
-          <a:p>
-            <a:pPr marL="342900" indent="-342900" algn="l">
-              <a:buFont typeface="Arial" panose="020B0604020202020204" pitchFamily="34" charset="0"/>
-              <a:buChar char="•"/>
+              <a:t>Implementation and Testcases</a:t>
+            </a:r>
+          </a:p>
+          <a:p>
+            <a:pPr marL="514350" indent="-514350" algn="l">
+              <a:buFont typeface="+mj-lt"/>
+              <a:buAutoNum type="arabicPeriod"/>
             </a:pPr>
             <a:r>
               <a:rPr lang="en-US" altLang="en-IN" sz="2800" dirty="0">
                 <a:latin typeface="Times New Roman" panose="02020603050405020304" pitchFamily="18" charset="0"/>
               </a:rPr>
-              <a:t>Conclusion</a:t>
+              <a:t>Conclusion &amp; Future Enhancement</a:t>
+            </a:r>
+          </a:p>
+          <a:p>
+            <a:pPr marL="514350" indent="-514350" algn="l">
+              <a:buFont typeface="+mj-lt"/>
+              <a:buAutoNum type="arabicPeriod"/>
+            </a:pPr>
+            <a:r>
+              <a:rPr lang="en-US" altLang="en-IN" sz="2800" dirty="0">
+                <a:latin typeface="Times New Roman" panose="02020603050405020304" pitchFamily="18" charset="0"/>
+              </a:rPr>
+              <a:t>References</a:t>
             </a:r>
           </a:p>
         </p:txBody>
@@ -11677,6 +12214,1157 @@
 </file>
 
 <file path=ppt/slides/slide20.xml><?xml version="1.0" encoding="utf-8"?>
+<p:sld xmlns:a="http://schemas.openxmlformats.org/drawingml/2006/main" xmlns:r="http://schemas.openxmlformats.org/officeDocument/2006/relationships" xmlns:p="http://schemas.openxmlformats.org/presentationml/2006/main">
+  <p:cSld>
+    <p:spTree>
+      <p:nvGrpSpPr>
+        <p:cNvPr id="1" name="">
+          <a:extLst>
+            <a:ext uri="{FF2B5EF4-FFF2-40B4-BE49-F238E27FC236}">
+              <a16:creationId xmlns:a16="http://schemas.microsoft.com/office/drawing/2014/main" id="{4724D830-9609-CDA2-156F-5CA33A4D3F3B}"/>
+            </a:ext>
+          </a:extLst>
+        </p:cNvPr>
+        <p:cNvGrpSpPr/>
+        <p:nvPr/>
+      </p:nvGrpSpPr>
+      <p:grpSpPr>
+        <a:xfrm>
+          <a:off x="0" y="0"/>
+          <a:ext cx="0" cy="0"/>
+          <a:chOff x="0" y="0"/>
+          <a:chExt cx="0" cy="0"/>
+        </a:xfrm>
+      </p:grpSpPr>
+      <p:sp>
+        <p:nvSpPr>
+          <p:cNvPr id="6" name="Rounded Rectangle 4">
+            <a:extLst>
+              <a:ext uri="{FF2B5EF4-FFF2-40B4-BE49-F238E27FC236}">
+                <a16:creationId xmlns:a16="http://schemas.microsoft.com/office/drawing/2014/main" id="{86E82629-5471-06BE-4B12-8E5466A58B56}"/>
+              </a:ext>
+            </a:extLst>
+          </p:cNvPr>
+          <p:cNvSpPr/>
+          <p:nvPr/>
+        </p:nvSpPr>
+        <p:spPr>
+          <a:xfrm>
+            <a:off x="0" y="6462940"/>
+            <a:ext cx="12207875" cy="393700"/>
+          </a:xfrm>
+          <a:prstGeom prst="rect">
+            <a:avLst/>
+          </a:prstGeom>
+          <a:solidFill>
+            <a:srgbClr val="5B9BD5"/>
+          </a:solidFill>
+        </p:spPr>
+        <p:style>
+          <a:lnRef idx="2">
+            <a:schemeClr val="accent1">
+              <a:shade val="50000"/>
+            </a:schemeClr>
+          </a:lnRef>
+          <a:fillRef idx="1">
+            <a:schemeClr val="accent1"/>
+          </a:fillRef>
+          <a:effectRef idx="0">
+            <a:schemeClr val="accent1"/>
+          </a:effectRef>
+          <a:fontRef idx="minor">
+            <a:schemeClr val="lt1"/>
+          </a:fontRef>
+        </p:style>
+        <p:txBody>
+          <a:bodyPr anchor="ctr"/>
+          <a:lstStyle/>
+          <a:p>
+            <a:pPr marL="0" marR="0" lvl="0" indent="0" algn="ctr" defTabSz="914400" rtl="0" eaLnBrk="0" fontAlgn="base" latinLnBrk="0" hangingPunct="0">
+              <a:lnSpc>
+                <a:spcPct val="100000"/>
+              </a:lnSpc>
+              <a:spcBef>
+                <a:spcPct val="0"/>
+              </a:spcBef>
+              <a:spcAft>
+                <a:spcPct val="0"/>
+              </a:spcAft>
+              <a:buClrTx/>
+              <a:buSzTx/>
+              <a:buFontTx/>
+              <a:buNone/>
+              <a:defRPr/>
+            </a:pPr>
+            <a:endParaRPr kumimoji="0" lang="en-IN" sz="1800" b="1" i="0" u="none" strike="noStrike" kern="1200" cap="none" spc="0" normalizeH="0" baseline="0" noProof="0" dirty="0">
+              <a:ln>
+                <a:noFill/>
+              </a:ln>
+              <a:solidFill>
+                <a:schemeClr val="tx1"/>
+              </a:solidFill>
+              <a:effectLst/>
+              <a:uLnTx/>
+              <a:uFillTx/>
+              <a:latin typeface="Arial Rounded MT Bold" pitchFamily="34" charset="0"/>
+              <a:ea typeface="+mn-ea"/>
+              <a:cs typeface="+mn-cs"/>
+            </a:endParaRPr>
+          </a:p>
+        </p:txBody>
+      </p:sp>
+      <p:sp>
+        <p:nvSpPr>
+          <p:cNvPr id="7" name="TextBox 6">
+            <a:extLst>
+              <a:ext uri="{FF2B5EF4-FFF2-40B4-BE49-F238E27FC236}">
+                <a16:creationId xmlns:a16="http://schemas.microsoft.com/office/drawing/2014/main" id="{6253F3C0-8149-C259-5386-CEE38C04398E}"/>
+              </a:ext>
+            </a:extLst>
+          </p:cNvPr>
+          <p:cNvSpPr txBox="1"/>
+          <p:nvPr/>
+        </p:nvSpPr>
+        <p:spPr>
+          <a:xfrm>
+            <a:off x="443971" y="6490513"/>
+            <a:ext cx="11288182" cy="338554"/>
+          </a:xfrm>
+          <a:prstGeom prst="rect">
+            <a:avLst/>
+          </a:prstGeom>
+          <a:noFill/>
+        </p:spPr>
+        <p:txBody>
+          <a:bodyPr wrap="square" rtlCol="0">
+            <a:spAutoFit/>
+          </a:bodyPr>
+          <a:lstStyle/>
+          <a:p>
+            <a:pPr marL="0" marR="0" lvl="0" indent="0" algn="ctr" defTabSz="914400" rtl="0" eaLnBrk="0" fontAlgn="base" latinLnBrk="0" hangingPunct="0">
+              <a:lnSpc>
+                <a:spcPct val="100000"/>
+              </a:lnSpc>
+              <a:spcBef>
+                <a:spcPct val="0"/>
+              </a:spcBef>
+              <a:spcAft>
+                <a:spcPct val="0"/>
+              </a:spcAft>
+              <a:buClrTx/>
+              <a:buSzTx/>
+              <a:buFontTx/>
+              <a:buNone/>
+              <a:defRPr/>
+            </a:pPr>
+            <a:r>
+              <a:rPr kumimoji="0" lang="en-IN" sz="1600" b="1" i="0" u="none" strike="noStrike" kern="1200" cap="none" spc="0" normalizeH="0" baseline="0" noProof="0" dirty="0">
+                <a:ln>
+                  <a:noFill/>
+                </a:ln>
+                <a:solidFill>
+                  <a:schemeClr val="tx1"/>
+                </a:solidFill>
+                <a:effectLst/>
+                <a:uLnTx/>
+                <a:uFillTx/>
+                <a:latin typeface="Arial Rounded MT Bold" pitchFamily="34" charset="0"/>
+                <a:ea typeface="+mn-ea"/>
+                <a:cs typeface="+mn-cs"/>
+              </a:rPr>
+              <a:t>B.Tech III Year – II Sem | Dept of Computational Intelligence| Application Development – II | Project Review</a:t>
+            </a:r>
+          </a:p>
+        </p:txBody>
+      </p:sp>
+      <p:sp>
+        <p:nvSpPr>
+          <p:cNvPr id="8" name="Rounded Rectangle 4">
+            <a:extLst>
+              <a:ext uri="{FF2B5EF4-FFF2-40B4-BE49-F238E27FC236}">
+                <a16:creationId xmlns:a16="http://schemas.microsoft.com/office/drawing/2014/main" id="{3F66EB5C-E15F-8F04-F4B9-D64E39AC35A9}"/>
+              </a:ext>
+            </a:extLst>
+          </p:cNvPr>
+          <p:cNvSpPr/>
+          <p:nvPr/>
+        </p:nvSpPr>
+        <p:spPr>
+          <a:xfrm>
+            <a:off x="-15875" y="-10805"/>
+            <a:ext cx="12207875" cy="393700"/>
+          </a:xfrm>
+          <a:prstGeom prst="rect">
+            <a:avLst/>
+          </a:prstGeom>
+          <a:solidFill>
+            <a:srgbClr val="5B9BD5"/>
+          </a:solidFill>
+        </p:spPr>
+        <p:style>
+          <a:lnRef idx="2">
+            <a:schemeClr val="accent1">
+              <a:shade val="50000"/>
+            </a:schemeClr>
+          </a:lnRef>
+          <a:fillRef idx="1">
+            <a:schemeClr val="accent1"/>
+          </a:fillRef>
+          <a:effectRef idx="0">
+            <a:schemeClr val="accent1"/>
+          </a:effectRef>
+          <a:fontRef idx="minor">
+            <a:schemeClr val="lt1"/>
+          </a:fontRef>
+        </p:style>
+        <p:txBody>
+          <a:bodyPr anchor="ctr"/>
+          <a:lstStyle/>
+          <a:p>
+            <a:pPr marL="0" marR="0" lvl="0" indent="0" algn="ctr" defTabSz="914400" rtl="0" eaLnBrk="0" fontAlgn="base" latinLnBrk="0" hangingPunct="0">
+              <a:lnSpc>
+                <a:spcPct val="100000"/>
+              </a:lnSpc>
+              <a:spcBef>
+                <a:spcPct val="0"/>
+              </a:spcBef>
+              <a:spcAft>
+                <a:spcPct val="0"/>
+              </a:spcAft>
+              <a:buClrTx/>
+              <a:buSzTx/>
+              <a:buFontTx/>
+              <a:buNone/>
+              <a:defRPr/>
+            </a:pPr>
+            <a:endParaRPr kumimoji="0" lang="en-IN" sz="1800" b="1" i="0" u="none" strike="noStrike" kern="1200" cap="none" spc="0" normalizeH="0" baseline="0" noProof="0" dirty="0">
+              <a:ln>
+                <a:noFill/>
+              </a:ln>
+              <a:solidFill>
+                <a:schemeClr val="tx1"/>
+              </a:solidFill>
+              <a:effectLst/>
+              <a:uLnTx/>
+              <a:uFillTx/>
+              <a:latin typeface="Arial Rounded MT Bold" pitchFamily="34" charset="0"/>
+              <a:ea typeface="+mn-ea"/>
+              <a:cs typeface="+mn-cs"/>
+            </a:endParaRPr>
+          </a:p>
+        </p:txBody>
+      </p:sp>
+      <p:sp>
+        <p:nvSpPr>
+          <p:cNvPr id="9" name="TextBox 8">
+            <a:extLst>
+              <a:ext uri="{FF2B5EF4-FFF2-40B4-BE49-F238E27FC236}">
+                <a16:creationId xmlns:a16="http://schemas.microsoft.com/office/drawing/2014/main" id="{5F932F96-F3AB-4385-A1D4-51B92036A635}"/>
+              </a:ext>
+            </a:extLst>
+          </p:cNvPr>
+          <p:cNvSpPr txBox="1"/>
+          <p:nvPr/>
+        </p:nvSpPr>
+        <p:spPr>
+          <a:xfrm>
+            <a:off x="2801516" y="16768"/>
+            <a:ext cx="6588967" cy="338554"/>
+          </a:xfrm>
+          <a:prstGeom prst="rect">
+            <a:avLst/>
+          </a:prstGeom>
+          <a:noFill/>
+        </p:spPr>
+        <p:txBody>
+          <a:bodyPr wrap="square" rtlCol="0">
+            <a:spAutoFit/>
+          </a:bodyPr>
+          <a:lstStyle/>
+          <a:p>
+            <a:r>
+              <a:rPr lang="en-US" sz="1600" b="1" dirty="0">
+                <a:latin typeface="Arial Rounded MT Bold" panose="020F0704030504030204" pitchFamily="34" charset="0"/>
+                <a:cs typeface="Arial" panose="020B0604020202020204" pitchFamily="34" charset="0"/>
+              </a:rPr>
+              <a:t>MALLA REDDY COLLEGE OF ENGINEERING AND TECHNOLOGY</a:t>
+            </a:r>
+            <a:endParaRPr lang="x-none" sz="1600" b="1" dirty="0">
+              <a:latin typeface="Arial Rounded MT Bold" panose="020F0704030504030204" pitchFamily="34" charset="0"/>
+              <a:cs typeface="Arial" panose="020B0604020202020204" pitchFamily="34" charset="0"/>
+            </a:endParaRPr>
+          </a:p>
+        </p:txBody>
+      </p:sp>
+      <p:pic>
+        <p:nvPicPr>
+          <p:cNvPr id="10" name="Picture 6">
+            <a:extLst>
+              <a:ext uri="{FF2B5EF4-FFF2-40B4-BE49-F238E27FC236}">
+                <a16:creationId xmlns:a16="http://schemas.microsoft.com/office/drawing/2014/main" id="{6FCF5BAF-CD9C-EB2B-43D8-EE931EB6FD13}"/>
+              </a:ext>
+            </a:extLst>
+          </p:cNvPr>
+          <p:cNvPicPr>
+            <a:picLocks noChangeAspect="1"/>
+          </p:cNvPicPr>
+          <p:nvPr/>
+        </p:nvPicPr>
+        <p:blipFill>
+          <a:blip r:embed="rId2" cstate="print"/>
+          <a:stretch>
+            <a:fillRect/>
+          </a:stretch>
+        </p:blipFill>
+        <p:spPr>
+          <a:xfrm>
+            <a:off x="10899775" y="-128587"/>
+            <a:ext cx="1276350" cy="1276350"/>
+          </a:xfrm>
+          <a:prstGeom prst="rect">
+            <a:avLst/>
+          </a:prstGeom>
+          <a:noFill/>
+          <a:ln w="9525">
+            <a:noFill/>
+          </a:ln>
+        </p:spPr>
+      </p:pic>
+      <p:sp>
+        <p:nvSpPr>
+          <p:cNvPr id="12" name="Slide Number Placeholder 3">
+            <a:extLst>
+              <a:ext uri="{FF2B5EF4-FFF2-40B4-BE49-F238E27FC236}">
+                <a16:creationId xmlns:a16="http://schemas.microsoft.com/office/drawing/2014/main" id="{65A7625B-190F-9A07-BADC-6AB40E572116}"/>
+              </a:ext>
+            </a:extLst>
+          </p:cNvPr>
+          <p:cNvSpPr txBox="1">
+            <a:spLocks/>
+          </p:cNvSpPr>
+          <p:nvPr/>
+        </p:nvSpPr>
+        <p:spPr>
+          <a:xfrm>
+            <a:off x="9067800" y="6176963"/>
+            <a:ext cx="2743200" cy="365125"/>
+          </a:xfrm>
+          <a:prstGeom prst="rect">
+            <a:avLst/>
+          </a:prstGeom>
+          <a:noFill/>
+          <a:ln>
+            <a:noFill/>
+          </a:ln>
+        </p:spPr>
+        <p:txBody>
+          <a:bodyPr anchor="ctr" anchorCtr="0"/>
+          <a:lstStyle>
+            <a:defPPr>
+              <a:defRPr lang="x-none"/>
+            </a:defPPr>
+            <a:lvl1pPr marL="0" algn="l" defTabSz="914400" rtl="0" eaLnBrk="1" latinLnBrk="0" hangingPunct="1">
+              <a:defRPr sz="1800" kern="1200">
+                <a:solidFill>
+                  <a:schemeClr val="tx1"/>
+                </a:solidFill>
+                <a:latin typeface="+mn-lt"/>
+                <a:ea typeface="+mn-ea"/>
+                <a:cs typeface="+mn-cs"/>
+              </a:defRPr>
+            </a:lvl1pPr>
+            <a:lvl2pPr marL="457200" algn="l" defTabSz="914400" rtl="0" eaLnBrk="1" latinLnBrk="0" hangingPunct="1">
+              <a:defRPr sz="1800" kern="1200">
+                <a:solidFill>
+                  <a:schemeClr val="tx1"/>
+                </a:solidFill>
+                <a:latin typeface="+mn-lt"/>
+                <a:ea typeface="+mn-ea"/>
+                <a:cs typeface="+mn-cs"/>
+              </a:defRPr>
+            </a:lvl2pPr>
+            <a:lvl3pPr marL="914400" algn="l" defTabSz="914400" rtl="0" eaLnBrk="1" latinLnBrk="0" hangingPunct="1">
+              <a:defRPr sz="1800" kern="1200">
+                <a:solidFill>
+                  <a:schemeClr val="tx1"/>
+                </a:solidFill>
+                <a:latin typeface="+mn-lt"/>
+                <a:ea typeface="+mn-ea"/>
+                <a:cs typeface="+mn-cs"/>
+              </a:defRPr>
+            </a:lvl3pPr>
+            <a:lvl4pPr marL="1371600" algn="l" defTabSz="914400" rtl="0" eaLnBrk="1" latinLnBrk="0" hangingPunct="1">
+              <a:defRPr sz="1800" kern="1200">
+                <a:solidFill>
+                  <a:schemeClr val="tx1"/>
+                </a:solidFill>
+                <a:latin typeface="+mn-lt"/>
+                <a:ea typeface="+mn-ea"/>
+                <a:cs typeface="+mn-cs"/>
+              </a:defRPr>
+            </a:lvl4pPr>
+            <a:lvl5pPr marL="1828800" algn="l" defTabSz="914400" rtl="0" eaLnBrk="1" latinLnBrk="0" hangingPunct="1">
+              <a:defRPr sz="1800" kern="1200">
+                <a:solidFill>
+                  <a:schemeClr val="tx1"/>
+                </a:solidFill>
+                <a:latin typeface="+mn-lt"/>
+                <a:ea typeface="+mn-ea"/>
+                <a:cs typeface="+mn-cs"/>
+              </a:defRPr>
+            </a:lvl5pPr>
+            <a:lvl6pPr marL="2286000" algn="l" defTabSz="914400" rtl="0" eaLnBrk="1" latinLnBrk="0" hangingPunct="1">
+              <a:defRPr sz="1800" kern="1200">
+                <a:solidFill>
+                  <a:schemeClr val="tx1"/>
+                </a:solidFill>
+                <a:latin typeface="+mn-lt"/>
+                <a:ea typeface="+mn-ea"/>
+                <a:cs typeface="+mn-cs"/>
+              </a:defRPr>
+            </a:lvl6pPr>
+            <a:lvl7pPr marL="2743200" algn="l" defTabSz="914400" rtl="0" eaLnBrk="1" latinLnBrk="0" hangingPunct="1">
+              <a:defRPr sz="1800" kern="1200">
+                <a:solidFill>
+                  <a:schemeClr val="tx1"/>
+                </a:solidFill>
+                <a:latin typeface="+mn-lt"/>
+                <a:ea typeface="+mn-ea"/>
+                <a:cs typeface="+mn-cs"/>
+              </a:defRPr>
+            </a:lvl7pPr>
+            <a:lvl8pPr marL="3200400" algn="l" defTabSz="914400" rtl="0" eaLnBrk="1" latinLnBrk="0" hangingPunct="1">
+              <a:defRPr sz="1800" kern="1200">
+                <a:solidFill>
+                  <a:schemeClr val="tx1"/>
+                </a:solidFill>
+                <a:latin typeface="+mn-lt"/>
+                <a:ea typeface="+mn-ea"/>
+                <a:cs typeface="+mn-cs"/>
+              </a:defRPr>
+            </a:lvl8pPr>
+            <a:lvl9pPr marL="3657600" algn="l" defTabSz="914400" rtl="0" eaLnBrk="1" latinLnBrk="0" hangingPunct="1">
+              <a:defRPr sz="1800" kern="1200">
+                <a:solidFill>
+                  <a:schemeClr val="tx1"/>
+                </a:solidFill>
+                <a:latin typeface="+mn-lt"/>
+                <a:ea typeface="+mn-ea"/>
+                <a:cs typeface="+mn-cs"/>
+              </a:defRPr>
+            </a:lvl9pPr>
+          </a:lstStyle>
+          <a:p>
+            <a:pPr algn="r">
+              <a:spcBef>
+                <a:spcPct val="0"/>
+              </a:spcBef>
+            </a:pPr>
+            <a:fld id="{9A0DB2DC-4C9A-4742-B13C-FB6460FD3503}" type="slidenum">
+              <a:rPr lang="en-IN" altLang="en-US" sz="1200" b="1" smtClean="0">
+                <a:solidFill>
+                  <a:srgbClr val="C00000"/>
+                </a:solidFill>
+              </a:rPr>
+              <a:pPr algn="r">
+                <a:spcBef>
+                  <a:spcPct val="0"/>
+                </a:spcBef>
+              </a:pPr>
+              <a:t>20</a:t>
+            </a:fld>
+            <a:endParaRPr lang="en-IN" altLang="en-US" sz="1200" b="1" dirty="0">
+              <a:solidFill>
+                <a:srgbClr val="C00000"/>
+              </a:solidFill>
+            </a:endParaRPr>
+          </a:p>
+        </p:txBody>
+      </p:sp>
+      <p:pic>
+        <p:nvPicPr>
+          <p:cNvPr id="4" name="Picture 3">
+            <a:extLst>
+              <a:ext uri="{FF2B5EF4-FFF2-40B4-BE49-F238E27FC236}">
+                <a16:creationId xmlns:a16="http://schemas.microsoft.com/office/drawing/2014/main" id="{849DE31D-D257-B953-8E3F-D40EDC386882}"/>
+              </a:ext>
+            </a:extLst>
+          </p:cNvPr>
+          <p:cNvPicPr>
+            <a:picLocks noChangeAspect="1"/>
+          </p:cNvPicPr>
+          <p:nvPr/>
+        </p:nvPicPr>
+        <p:blipFill>
+          <a:blip r:embed="rId3" cstate="print">
+            <a:extLst>
+              <a:ext uri="{28A0092B-C50C-407E-A947-70E740481C1C}">
+                <a14:useLocalDpi xmlns:a14="http://schemas.microsoft.com/office/drawing/2010/main" val="0"/>
+              </a:ext>
+            </a:extLst>
+          </a:blip>
+          <a:srcRect/>
+          <a:stretch>
+            <a:fillRect/>
+          </a:stretch>
+        </p:blipFill>
+        <p:spPr bwMode="auto">
+          <a:xfrm>
+            <a:off x="1280374" y="737614"/>
+            <a:ext cx="9338737" cy="5024429"/>
+          </a:xfrm>
+          <a:prstGeom prst="rect">
+            <a:avLst/>
+          </a:prstGeom>
+          <a:noFill/>
+          <a:ln>
+            <a:noFill/>
+          </a:ln>
+        </p:spPr>
+      </p:pic>
+      <p:sp>
+        <p:nvSpPr>
+          <p:cNvPr id="11" name="TextBox 10">
+            <a:extLst>
+              <a:ext uri="{FF2B5EF4-FFF2-40B4-BE49-F238E27FC236}">
+                <a16:creationId xmlns:a16="http://schemas.microsoft.com/office/drawing/2014/main" id="{01A0945C-821A-1488-7849-78280EC21242}"/>
+              </a:ext>
+            </a:extLst>
+          </p:cNvPr>
+          <p:cNvSpPr txBox="1"/>
+          <p:nvPr/>
+        </p:nvSpPr>
+        <p:spPr>
+          <a:xfrm>
+            <a:off x="2889452" y="5718889"/>
+            <a:ext cx="6120580" cy="458074"/>
+          </a:xfrm>
+          <a:prstGeom prst="rect">
+            <a:avLst/>
+          </a:prstGeom>
+          <a:noFill/>
+        </p:spPr>
+        <p:txBody>
+          <a:bodyPr wrap="square">
+            <a:spAutoFit/>
+          </a:bodyPr>
+          <a:lstStyle/>
+          <a:p>
+            <a:pPr algn="ctr">
+              <a:lnSpc>
+                <a:spcPct val="150000"/>
+              </a:lnSpc>
+              <a:spcAft>
+                <a:spcPts val="190"/>
+              </a:spcAft>
+            </a:pPr>
+            <a:r>
+              <a:rPr lang="en-IN" sz="1800" b="1" dirty="0">
+                <a:effectLst/>
+                <a:latin typeface="Times New Roman" panose="02020603050405020304" pitchFamily="18" charset="0"/>
+                <a:ea typeface="Segoe UI Symbol" panose="020B0502040204020203" pitchFamily="34" charset="0"/>
+              </a:rPr>
+              <a:t>Fig </a:t>
+            </a:r>
+            <a:r>
+              <a:rPr lang="en-IN" b="1" dirty="0">
+                <a:latin typeface="Times New Roman" panose="02020603050405020304" pitchFamily="18" charset="0"/>
+                <a:ea typeface="Segoe UI Symbol" panose="020B0502040204020203" pitchFamily="34" charset="0"/>
+              </a:rPr>
+              <a:t>2:</a:t>
+            </a:r>
+            <a:r>
+              <a:rPr lang="en-IN" sz="1800" b="1" dirty="0">
+                <a:effectLst/>
+                <a:latin typeface="Times New Roman" panose="02020603050405020304" pitchFamily="18" charset="0"/>
+                <a:ea typeface="Segoe UI Symbol" panose="020B0502040204020203" pitchFamily="34" charset="0"/>
+              </a:rPr>
+              <a:t> Script Generation phase </a:t>
+            </a:r>
+            <a:endParaRPr lang="en-IN" sz="1600" dirty="0">
+              <a:effectLst/>
+              <a:latin typeface="Times New Roman" panose="02020603050405020304" pitchFamily="18" charset="0"/>
+              <a:ea typeface="Times New Roman" panose="02020603050405020304" pitchFamily="18" charset="0"/>
+            </a:endParaRPr>
+          </a:p>
+        </p:txBody>
+      </p:sp>
+    </p:spTree>
+    <p:extLst>
+      <p:ext uri="{BB962C8B-B14F-4D97-AF65-F5344CB8AC3E}">
+        <p14:creationId xmlns:p14="http://schemas.microsoft.com/office/powerpoint/2010/main" val="2564376885"/>
+      </p:ext>
+    </p:extLst>
+  </p:cSld>
+  <p:clrMapOvr>
+    <a:masterClrMapping/>
+  </p:clrMapOvr>
+</p:sld>
+</file>
+
+<file path=ppt/slides/slide21.xml><?xml version="1.0" encoding="utf-8"?>
+<p:sld xmlns:a="http://schemas.openxmlformats.org/drawingml/2006/main" xmlns:r="http://schemas.openxmlformats.org/officeDocument/2006/relationships" xmlns:p="http://schemas.openxmlformats.org/presentationml/2006/main">
+  <p:cSld>
+    <p:spTree>
+      <p:nvGrpSpPr>
+        <p:cNvPr id="1" name="">
+          <a:extLst>
+            <a:ext uri="{FF2B5EF4-FFF2-40B4-BE49-F238E27FC236}">
+              <a16:creationId xmlns:a16="http://schemas.microsoft.com/office/drawing/2014/main" id="{61ADEBF6-1A97-3407-0021-02448EF5E7F8}"/>
+            </a:ext>
+          </a:extLst>
+        </p:cNvPr>
+        <p:cNvGrpSpPr/>
+        <p:nvPr/>
+      </p:nvGrpSpPr>
+      <p:grpSpPr>
+        <a:xfrm>
+          <a:off x="0" y="0"/>
+          <a:ext cx="0" cy="0"/>
+          <a:chOff x="0" y="0"/>
+          <a:chExt cx="0" cy="0"/>
+        </a:xfrm>
+      </p:grpSpPr>
+      <p:sp>
+        <p:nvSpPr>
+          <p:cNvPr id="6" name="Rounded Rectangle 4">
+            <a:extLst>
+              <a:ext uri="{FF2B5EF4-FFF2-40B4-BE49-F238E27FC236}">
+                <a16:creationId xmlns:a16="http://schemas.microsoft.com/office/drawing/2014/main" id="{1633222C-1CC0-28AD-1731-C15C09B1A64E}"/>
+              </a:ext>
+            </a:extLst>
+          </p:cNvPr>
+          <p:cNvSpPr/>
+          <p:nvPr/>
+        </p:nvSpPr>
+        <p:spPr>
+          <a:xfrm>
+            <a:off x="0" y="6462940"/>
+            <a:ext cx="12207875" cy="393700"/>
+          </a:xfrm>
+          <a:prstGeom prst="rect">
+            <a:avLst/>
+          </a:prstGeom>
+          <a:solidFill>
+            <a:srgbClr val="5B9BD5"/>
+          </a:solidFill>
+        </p:spPr>
+        <p:style>
+          <a:lnRef idx="2">
+            <a:schemeClr val="accent1">
+              <a:shade val="50000"/>
+            </a:schemeClr>
+          </a:lnRef>
+          <a:fillRef idx="1">
+            <a:schemeClr val="accent1"/>
+          </a:fillRef>
+          <a:effectRef idx="0">
+            <a:schemeClr val="accent1"/>
+          </a:effectRef>
+          <a:fontRef idx="minor">
+            <a:schemeClr val="lt1"/>
+          </a:fontRef>
+        </p:style>
+        <p:txBody>
+          <a:bodyPr anchor="ctr"/>
+          <a:lstStyle/>
+          <a:p>
+            <a:pPr marL="0" marR="0" lvl="0" indent="0" algn="ctr" defTabSz="914400" rtl="0" eaLnBrk="0" fontAlgn="base" latinLnBrk="0" hangingPunct="0">
+              <a:lnSpc>
+                <a:spcPct val="100000"/>
+              </a:lnSpc>
+              <a:spcBef>
+                <a:spcPct val="0"/>
+              </a:spcBef>
+              <a:spcAft>
+                <a:spcPct val="0"/>
+              </a:spcAft>
+              <a:buClrTx/>
+              <a:buSzTx/>
+              <a:buFontTx/>
+              <a:buNone/>
+              <a:defRPr/>
+            </a:pPr>
+            <a:endParaRPr kumimoji="0" lang="en-IN" sz="1800" b="1" i="0" u="none" strike="noStrike" kern="1200" cap="none" spc="0" normalizeH="0" baseline="0" noProof="0" dirty="0">
+              <a:ln>
+                <a:noFill/>
+              </a:ln>
+              <a:solidFill>
+                <a:schemeClr val="tx1"/>
+              </a:solidFill>
+              <a:effectLst/>
+              <a:uLnTx/>
+              <a:uFillTx/>
+              <a:latin typeface="Arial Rounded MT Bold" pitchFamily="34" charset="0"/>
+              <a:ea typeface="+mn-ea"/>
+              <a:cs typeface="+mn-cs"/>
+            </a:endParaRPr>
+          </a:p>
+        </p:txBody>
+      </p:sp>
+      <p:sp>
+        <p:nvSpPr>
+          <p:cNvPr id="7" name="TextBox 6">
+            <a:extLst>
+              <a:ext uri="{FF2B5EF4-FFF2-40B4-BE49-F238E27FC236}">
+                <a16:creationId xmlns:a16="http://schemas.microsoft.com/office/drawing/2014/main" id="{77665D6C-D3C1-973A-7C6D-D1F35B3CB618}"/>
+              </a:ext>
+            </a:extLst>
+          </p:cNvPr>
+          <p:cNvSpPr txBox="1"/>
+          <p:nvPr/>
+        </p:nvSpPr>
+        <p:spPr>
+          <a:xfrm>
+            <a:off x="443971" y="6490513"/>
+            <a:ext cx="11288182" cy="338554"/>
+          </a:xfrm>
+          <a:prstGeom prst="rect">
+            <a:avLst/>
+          </a:prstGeom>
+          <a:noFill/>
+        </p:spPr>
+        <p:txBody>
+          <a:bodyPr wrap="square" rtlCol="0">
+            <a:spAutoFit/>
+          </a:bodyPr>
+          <a:lstStyle/>
+          <a:p>
+            <a:pPr marL="0" marR="0" lvl="0" indent="0" algn="ctr" defTabSz="914400" rtl="0" eaLnBrk="0" fontAlgn="base" latinLnBrk="0" hangingPunct="0">
+              <a:lnSpc>
+                <a:spcPct val="100000"/>
+              </a:lnSpc>
+              <a:spcBef>
+                <a:spcPct val="0"/>
+              </a:spcBef>
+              <a:spcAft>
+                <a:spcPct val="0"/>
+              </a:spcAft>
+              <a:buClrTx/>
+              <a:buSzTx/>
+              <a:buFontTx/>
+              <a:buNone/>
+              <a:defRPr/>
+            </a:pPr>
+            <a:r>
+              <a:rPr kumimoji="0" lang="en-IN" sz="1600" b="1" i="0" u="none" strike="noStrike" kern="1200" cap="none" spc="0" normalizeH="0" baseline="0" noProof="0" dirty="0">
+                <a:ln>
+                  <a:noFill/>
+                </a:ln>
+                <a:solidFill>
+                  <a:schemeClr val="tx1"/>
+                </a:solidFill>
+                <a:effectLst/>
+                <a:uLnTx/>
+                <a:uFillTx/>
+                <a:latin typeface="Arial Rounded MT Bold" pitchFamily="34" charset="0"/>
+                <a:ea typeface="+mn-ea"/>
+                <a:cs typeface="+mn-cs"/>
+              </a:rPr>
+              <a:t>B.Tech III Year – II Sem | Dept of Computational Intelligence| Application Development – II | Project Review</a:t>
+            </a:r>
+          </a:p>
+        </p:txBody>
+      </p:sp>
+      <p:sp>
+        <p:nvSpPr>
+          <p:cNvPr id="8" name="Rounded Rectangle 4">
+            <a:extLst>
+              <a:ext uri="{FF2B5EF4-FFF2-40B4-BE49-F238E27FC236}">
+                <a16:creationId xmlns:a16="http://schemas.microsoft.com/office/drawing/2014/main" id="{6E6B5FD0-F6FE-465E-CA39-2E8F225DBB47}"/>
+              </a:ext>
+            </a:extLst>
+          </p:cNvPr>
+          <p:cNvSpPr/>
+          <p:nvPr/>
+        </p:nvSpPr>
+        <p:spPr>
+          <a:xfrm>
+            <a:off x="-15875" y="-10805"/>
+            <a:ext cx="12207875" cy="393700"/>
+          </a:xfrm>
+          <a:prstGeom prst="rect">
+            <a:avLst/>
+          </a:prstGeom>
+          <a:solidFill>
+            <a:srgbClr val="5B9BD5"/>
+          </a:solidFill>
+        </p:spPr>
+        <p:style>
+          <a:lnRef idx="2">
+            <a:schemeClr val="accent1">
+              <a:shade val="50000"/>
+            </a:schemeClr>
+          </a:lnRef>
+          <a:fillRef idx="1">
+            <a:schemeClr val="accent1"/>
+          </a:fillRef>
+          <a:effectRef idx="0">
+            <a:schemeClr val="accent1"/>
+          </a:effectRef>
+          <a:fontRef idx="minor">
+            <a:schemeClr val="lt1"/>
+          </a:fontRef>
+        </p:style>
+        <p:txBody>
+          <a:bodyPr anchor="ctr"/>
+          <a:lstStyle/>
+          <a:p>
+            <a:pPr marL="0" marR="0" lvl="0" indent="0" algn="ctr" defTabSz="914400" rtl="0" eaLnBrk="0" fontAlgn="base" latinLnBrk="0" hangingPunct="0">
+              <a:lnSpc>
+                <a:spcPct val="100000"/>
+              </a:lnSpc>
+              <a:spcBef>
+                <a:spcPct val="0"/>
+              </a:spcBef>
+              <a:spcAft>
+                <a:spcPct val="0"/>
+              </a:spcAft>
+              <a:buClrTx/>
+              <a:buSzTx/>
+              <a:buFontTx/>
+              <a:buNone/>
+              <a:defRPr/>
+            </a:pPr>
+            <a:endParaRPr kumimoji="0" lang="en-IN" sz="1800" b="1" i="0" u="none" strike="noStrike" kern="1200" cap="none" spc="0" normalizeH="0" baseline="0" noProof="0" dirty="0">
+              <a:ln>
+                <a:noFill/>
+              </a:ln>
+              <a:solidFill>
+                <a:schemeClr val="tx1"/>
+              </a:solidFill>
+              <a:effectLst/>
+              <a:uLnTx/>
+              <a:uFillTx/>
+              <a:latin typeface="Arial Rounded MT Bold" pitchFamily="34" charset="0"/>
+              <a:ea typeface="+mn-ea"/>
+              <a:cs typeface="+mn-cs"/>
+            </a:endParaRPr>
+          </a:p>
+        </p:txBody>
+      </p:sp>
+      <p:sp>
+        <p:nvSpPr>
+          <p:cNvPr id="9" name="TextBox 8">
+            <a:extLst>
+              <a:ext uri="{FF2B5EF4-FFF2-40B4-BE49-F238E27FC236}">
+                <a16:creationId xmlns:a16="http://schemas.microsoft.com/office/drawing/2014/main" id="{186411D7-64AF-3F4F-58EC-AB530CC40753}"/>
+              </a:ext>
+            </a:extLst>
+          </p:cNvPr>
+          <p:cNvSpPr txBox="1"/>
+          <p:nvPr/>
+        </p:nvSpPr>
+        <p:spPr>
+          <a:xfrm>
+            <a:off x="2801516" y="16768"/>
+            <a:ext cx="6588967" cy="338554"/>
+          </a:xfrm>
+          <a:prstGeom prst="rect">
+            <a:avLst/>
+          </a:prstGeom>
+          <a:noFill/>
+        </p:spPr>
+        <p:txBody>
+          <a:bodyPr wrap="square" rtlCol="0">
+            <a:spAutoFit/>
+          </a:bodyPr>
+          <a:lstStyle/>
+          <a:p>
+            <a:r>
+              <a:rPr lang="en-US" sz="1600" b="1" dirty="0">
+                <a:latin typeface="Arial Rounded MT Bold" panose="020F0704030504030204" pitchFamily="34" charset="0"/>
+                <a:cs typeface="Arial" panose="020B0604020202020204" pitchFamily="34" charset="0"/>
+              </a:rPr>
+              <a:t>MALLA REDDY COLLEGE OF ENGINEERING AND TECHNOLOGY</a:t>
+            </a:r>
+            <a:endParaRPr lang="x-none" sz="1600" b="1" dirty="0">
+              <a:latin typeface="Arial Rounded MT Bold" panose="020F0704030504030204" pitchFamily="34" charset="0"/>
+              <a:cs typeface="Arial" panose="020B0604020202020204" pitchFamily="34" charset="0"/>
+            </a:endParaRPr>
+          </a:p>
+        </p:txBody>
+      </p:sp>
+      <p:pic>
+        <p:nvPicPr>
+          <p:cNvPr id="10" name="Picture 6">
+            <a:extLst>
+              <a:ext uri="{FF2B5EF4-FFF2-40B4-BE49-F238E27FC236}">
+                <a16:creationId xmlns:a16="http://schemas.microsoft.com/office/drawing/2014/main" id="{C76F7C13-DC91-4820-2669-CC3F1CD9BD4E}"/>
+              </a:ext>
+            </a:extLst>
+          </p:cNvPr>
+          <p:cNvPicPr>
+            <a:picLocks noChangeAspect="1"/>
+          </p:cNvPicPr>
+          <p:nvPr/>
+        </p:nvPicPr>
+        <p:blipFill>
+          <a:blip r:embed="rId2" cstate="print"/>
+          <a:stretch>
+            <a:fillRect/>
+          </a:stretch>
+        </p:blipFill>
+        <p:spPr>
+          <a:xfrm>
+            <a:off x="10899775" y="-128587"/>
+            <a:ext cx="1276350" cy="1276350"/>
+          </a:xfrm>
+          <a:prstGeom prst="rect">
+            <a:avLst/>
+          </a:prstGeom>
+          <a:noFill/>
+          <a:ln w="9525">
+            <a:noFill/>
+          </a:ln>
+        </p:spPr>
+      </p:pic>
+      <p:sp>
+        <p:nvSpPr>
+          <p:cNvPr id="12" name="Slide Number Placeholder 3">
+            <a:extLst>
+              <a:ext uri="{FF2B5EF4-FFF2-40B4-BE49-F238E27FC236}">
+                <a16:creationId xmlns:a16="http://schemas.microsoft.com/office/drawing/2014/main" id="{F826CDB6-686C-9DDB-CBC0-C330AC8CF119}"/>
+              </a:ext>
+            </a:extLst>
+          </p:cNvPr>
+          <p:cNvSpPr txBox="1">
+            <a:spLocks/>
+          </p:cNvSpPr>
+          <p:nvPr/>
+        </p:nvSpPr>
+        <p:spPr>
+          <a:xfrm>
+            <a:off x="9067800" y="6176963"/>
+            <a:ext cx="2743200" cy="365125"/>
+          </a:xfrm>
+          <a:prstGeom prst="rect">
+            <a:avLst/>
+          </a:prstGeom>
+          <a:noFill/>
+          <a:ln>
+            <a:noFill/>
+          </a:ln>
+        </p:spPr>
+        <p:txBody>
+          <a:bodyPr anchor="ctr" anchorCtr="0"/>
+          <a:lstStyle>
+            <a:defPPr>
+              <a:defRPr lang="x-none"/>
+            </a:defPPr>
+            <a:lvl1pPr marL="0" algn="l" defTabSz="914400" rtl="0" eaLnBrk="1" latinLnBrk="0" hangingPunct="1">
+              <a:defRPr sz="1800" kern="1200">
+                <a:solidFill>
+                  <a:schemeClr val="tx1"/>
+                </a:solidFill>
+                <a:latin typeface="+mn-lt"/>
+                <a:ea typeface="+mn-ea"/>
+                <a:cs typeface="+mn-cs"/>
+              </a:defRPr>
+            </a:lvl1pPr>
+            <a:lvl2pPr marL="457200" algn="l" defTabSz="914400" rtl="0" eaLnBrk="1" latinLnBrk="0" hangingPunct="1">
+              <a:defRPr sz="1800" kern="1200">
+                <a:solidFill>
+                  <a:schemeClr val="tx1"/>
+                </a:solidFill>
+                <a:latin typeface="+mn-lt"/>
+                <a:ea typeface="+mn-ea"/>
+                <a:cs typeface="+mn-cs"/>
+              </a:defRPr>
+            </a:lvl2pPr>
+            <a:lvl3pPr marL="914400" algn="l" defTabSz="914400" rtl="0" eaLnBrk="1" latinLnBrk="0" hangingPunct="1">
+              <a:defRPr sz="1800" kern="1200">
+                <a:solidFill>
+                  <a:schemeClr val="tx1"/>
+                </a:solidFill>
+                <a:latin typeface="+mn-lt"/>
+                <a:ea typeface="+mn-ea"/>
+                <a:cs typeface="+mn-cs"/>
+              </a:defRPr>
+            </a:lvl3pPr>
+            <a:lvl4pPr marL="1371600" algn="l" defTabSz="914400" rtl="0" eaLnBrk="1" latinLnBrk="0" hangingPunct="1">
+              <a:defRPr sz="1800" kern="1200">
+                <a:solidFill>
+                  <a:schemeClr val="tx1"/>
+                </a:solidFill>
+                <a:latin typeface="+mn-lt"/>
+                <a:ea typeface="+mn-ea"/>
+                <a:cs typeface="+mn-cs"/>
+              </a:defRPr>
+            </a:lvl4pPr>
+            <a:lvl5pPr marL="1828800" algn="l" defTabSz="914400" rtl="0" eaLnBrk="1" latinLnBrk="0" hangingPunct="1">
+              <a:defRPr sz="1800" kern="1200">
+                <a:solidFill>
+                  <a:schemeClr val="tx1"/>
+                </a:solidFill>
+                <a:latin typeface="+mn-lt"/>
+                <a:ea typeface="+mn-ea"/>
+                <a:cs typeface="+mn-cs"/>
+              </a:defRPr>
+            </a:lvl5pPr>
+            <a:lvl6pPr marL="2286000" algn="l" defTabSz="914400" rtl="0" eaLnBrk="1" latinLnBrk="0" hangingPunct="1">
+              <a:defRPr sz="1800" kern="1200">
+                <a:solidFill>
+                  <a:schemeClr val="tx1"/>
+                </a:solidFill>
+                <a:latin typeface="+mn-lt"/>
+                <a:ea typeface="+mn-ea"/>
+                <a:cs typeface="+mn-cs"/>
+              </a:defRPr>
+            </a:lvl6pPr>
+            <a:lvl7pPr marL="2743200" algn="l" defTabSz="914400" rtl="0" eaLnBrk="1" latinLnBrk="0" hangingPunct="1">
+              <a:defRPr sz="1800" kern="1200">
+                <a:solidFill>
+                  <a:schemeClr val="tx1"/>
+                </a:solidFill>
+                <a:latin typeface="+mn-lt"/>
+                <a:ea typeface="+mn-ea"/>
+                <a:cs typeface="+mn-cs"/>
+              </a:defRPr>
+            </a:lvl7pPr>
+            <a:lvl8pPr marL="3200400" algn="l" defTabSz="914400" rtl="0" eaLnBrk="1" latinLnBrk="0" hangingPunct="1">
+              <a:defRPr sz="1800" kern="1200">
+                <a:solidFill>
+                  <a:schemeClr val="tx1"/>
+                </a:solidFill>
+                <a:latin typeface="+mn-lt"/>
+                <a:ea typeface="+mn-ea"/>
+                <a:cs typeface="+mn-cs"/>
+              </a:defRPr>
+            </a:lvl8pPr>
+            <a:lvl9pPr marL="3657600" algn="l" defTabSz="914400" rtl="0" eaLnBrk="1" latinLnBrk="0" hangingPunct="1">
+              <a:defRPr sz="1800" kern="1200">
+                <a:solidFill>
+                  <a:schemeClr val="tx1"/>
+                </a:solidFill>
+                <a:latin typeface="+mn-lt"/>
+                <a:ea typeface="+mn-ea"/>
+                <a:cs typeface="+mn-cs"/>
+              </a:defRPr>
+            </a:lvl9pPr>
+          </a:lstStyle>
+          <a:p>
+            <a:pPr algn="r">
+              <a:spcBef>
+                <a:spcPct val="0"/>
+              </a:spcBef>
+            </a:pPr>
+            <a:fld id="{9A0DB2DC-4C9A-4742-B13C-FB6460FD3503}" type="slidenum">
+              <a:rPr lang="en-IN" altLang="en-US" sz="1200" b="1" smtClean="0">
+                <a:solidFill>
+                  <a:srgbClr val="C00000"/>
+                </a:solidFill>
+              </a:rPr>
+              <a:pPr algn="r">
+                <a:spcBef>
+                  <a:spcPct val="0"/>
+                </a:spcBef>
+              </a:pPr>
+              <a:t>21</a:t>
+            </a:fld>
+            <a:endParaRPr lang="en-IN" altLang="en-US" sz="1200" b="1" dirty="0">
+              <a:solidFill>
+                <a:srgbClr val="C00000"/>
+              </a:solidFill>
+            </a:endParaRPr>
+          </a:p>
+        </p:txBody>
+      </p:sp>
+      <p:pic>
+        <p:nvPicPr>
+          <p:cNvPr id="2" name="Picture 1">
+            <a:extLst>
+              <a:ext uri="{FF2B5EF4-FFF2-40B4-BE49-F238E27FC236}">
+                <a16:creationId xmlns:a16="http://schemas.microsoft.com/office/drawing/2014/main" id="{B2DDE2C4-CB4D-8146-9B09-B6675DC79F9B}"/>
+              </a:ext>
+            </a:extLst>
+          </p:cNvPr>
+          <p:cNvPicPr>
+            <a:picLocks noChangeAspect="1"/>
+          </p:cNvPicPr>
+          <p:nvPr/>
+        </p:nvPicPr>
+        <p:blipFill>
+          <a:blip r:embed="rId3" cstate="print">
+            <a:extLst>
+              <a:ext uri="{28A0092B-C50C-407E-A947-70E740481C1C}">
+                <a14:useLocalDpi xmlns:a14="http://schemas.microsoft.com/office/drawing/2010/main" val="0"/>
+              </a:ext>
+            </a:extLst>
+          </a:blip>
+          <a:srcRect/>
+          <a:stretch>
+            <a:fillRect/>
+          </a:stretch>
+        </p:blipFill>
+        <p:spPr bwMode="auto">
+          <a:xfrm>
+            <a:off x="1195468" y="743939"/>
+            <a:ext cx="9688432" cy="4906918"/>
+          </a:xfrm>
+          <a:prstGeom prst="rect">
+            <a:avLst/>
+          </a:prstGeom>
+          <a:noFill/>
+          <a:ln>
+            <a:noFill/>
+          </a:ln>
+        </p:spPr>
+      </p:pic>
+      <p:sp>
+        <p:nvSpPr>
+          <p:cNvPr id="5" name="TextBox 4">
+            <a:extLst>
+              <a:ext uri="{FF2B5EF4-FFF2-40B4-BE49-F238E27FC236}">
+                <a16:creationId xmlns:a16="http://schemas.microsoft.com/office/drawing/2014/main" id="{B6E0BF4B-92EA-5B19-D939-134A2272B2C2}"/>
+              </a:ext>
+            </a:extLst>
+          </p:cNvPr>
+          <p:cNvSpPr txBox="1"/>
+          <p:nvPr/>
+        </p:nvSpPr>
+        <p:spPr>
+          <a:xfrm>
+            <a:off x="4359014" y="5775470"/>
+            <a:ext cx="4131844" cy="369332"/>
+          </a:xfrm>
+          <a:prstGeom prst="rect">
+            <a:avLst/>
+          </a:prstGeom>
+          <a:noFill/>
+        </p:spPr>
+        <p:txBody>
+          <a:bodyPr wrap="square">
+            <a:spAutoFit/>
+          </a:bodyPr>
+          <a:lstStyle/>
+          <a:p>
+            <a:r>
+              <a:rPr lang="en-IN" sz="1800" b="1" dirty="0">
+                <a:effectLst/>
+                <a:latin typeface="Times New Roman" panose="02020603050405020304" pitchFamily="18" charset="0"/>
+                <a:ea typeface="Segoe UI Symbol" panose="020B0502040204020203" pitchFamily="34" charset="0"/>
+              </a:rPr>
+              <a:t>Fig 3: Voiceover Generation Phase</a:t>
+            </a:r>
+            <a:endParaRPr lang="en-IN" dirty="0"/>
+          </a:p>
+        </p:txBody>
+      </p:sp>
+    </p:spTree>
+    <p:extLst>
+      <p:ext uri="{BB962C8B-B14F-4D97-AF65-F5344CB8AC3E}">
+        <p14:creationId xmlns:p14="http://schemas.microsoft.com/office/powerpoint/2010/main" val="3562426496"/>
+      </p:ext>
+    </p:extLst>
+  </p:cSld>
+  <p:clrMapOvr>
+    <a:masterClrMapping/>
+  </p:clrMapOvr>
+</p:sld>
+</file>
+
+<file path=ppt/slides/slide22.xml><?xml version="1.0" encoding="utf-8"?>
 <p:sld xmlns:a="http://schemas.openxmlformats.org/drawingml/2006/main" xmlns:r="http://schemas.openxmlformats.org/officeDocument/2006/relationships" xmlns:p="http://schemas.openxmlformats.org/presentationml/2006/main">
   <p:cSld>
     <p:spTree>
@@ -12134,7 +13822,7 @@
                   <a:spcPct val="0"/>
                 </a:spcBef>
               </a:pPr>
-              <a:t>20</a:t>
+              <a:t>22</a:t>
             </a:fld>
             <a:endParaRPr lang="en-IN" altLang="en-US" sz="1200" b="1" dirty="0">
               <a:solidFill>
@@ -12250,7 +13938,7 @@
 </p:sld>
 </file>
 
-<file path=ppt/slides/slide21.xml><?xml version="1.0" encoding="utf-8"?>
+<file path=ppt/slides/slide23.xml><?xml version="1.0" encoding="utf-8"?>
 <p:sld xmlns:a="http://schemas.openxmlformats.org/drawingml/2006/main" xmlns:r="http://schemas.openxmlformats.org/officeDocument/2006/relationships" xmlns:p="http://schemas.openxmlformats.org/presentationml/2006/main">
   <p:cSld>
     <p:spTree>
@@ -12708,7 +14396,7 @@
                   <a:spcPct val="0"/>
                 </a:spcBef>
               </a:pPr>
-              <a:t>21</a:t>
+              <a:t>23</a:t>
             </a:fld>
             <a:endParaRPr lang="en-IN" altLang="en-US" sz="1200" b="1" dirty="0">
               <a:solidFill>
@@ -12824,7 +14512,7 @@
 </p:sld>
 </file>
 
-<file path=ppt/slides/slide22.xml><?xml version="1.0" encoding="utf-8"?>
+<file path=ppt/slides/slide24.xml><?xml version="1.0" encoding="utf-8"?>
 <p:sld xmlns:a="http://schemas.openxmlformats.org/drawingml/2006/main" xmlns:r="http://schemas.openxmlformats.org/officeDocument/2006/relationships" xmlns:p="http://schemas.openxmlformats.org/presentationml/2006/main">
   <p:cSld>
     <p:spTree>
@@ -13282,7 +14970,7 @@
                   <a:spcPct val="0"/>
                 </a:spcBef>
               </a:pPr>
-              <a:t>22</a:t>
+              <a:t>24</a:t>
             </a:fld>
             <a:endParaRPr lang="en-IN" altLang="en-US" sz="1200" b="1" dirty="0">
               <a:solidFill>
@@ -13398,7 +15086,7 @@
 </p:sld>
 </file>
 
-<file path=ppt/slides/slide23.xml><?xml version="1.0" encoding="utf-8"?>
+<file path=ppt/slides/slide25.xml><?xml version="1.0" encoding="utf-8"?>
 <p:sld xmlns:a="http://schemas.openxmlformats.org/drawingml/2006/main" xmlns:r="http://schemas.openxmlformats.org/officeDocument/2006/relationships" xmlns:p="http://schemas.openxmlformats.org/presentationml/2006/main">
   <p:cSld>
     <p:spTree>
@@ -13620,7 +15308,7 @@
                 <a:latin typeface="Times New Roman" panose="02020603050405020304" pitchFamily="18" charset="0"/>
                 <a:cs typeface="Times New Roman" panose="02020603050405020304" pitchFamily="18" charset="0"/>
               </a:rPr>
-              <a:t>Conclusion</a:t>
+              <a:t>Testing</a:t>
             </a:r>
           </a:p>
         </p:txBody>
@@ -13919,7 +15607,7 @@
                   <a:spcPct val="0"/>
                 </a:spcBef>
               </a:pPr>
-              <a:t>23</a:t>
+              <a:t>25</a:t>
             </a:fld>
             <a:endParaRPr lang="en-IN" altLang="en-US" sz="1200" b="1" dirty="0">
               <a:solidFill>
@@ -13954,6 +15642,897 @@
         </p:spPr>
         <p:txBody>
           <a:bodyPr vert="horz" wrap="square" lIns="91440" tIns="45720" rIns="91440" bIns="45720" rtlCol="0" anchor="t" anchorCtr="0">
+            <a:normAutofit fontScale="70000" lnSpcReduction="20000"/>
+          </a:bodyPr>
+          <a:lstStyle>
+            <a:lvl1pPr marL="0" indent="0" algn="ctr" defTabSz="914400" rtl="0" eaLnBrk="1" latinLnBrk="0" hangingPunct="1">
+              <a:lnSpc>
+                <a:spcPct val="90000"/>
+              </a:lnSpc>
+              <a:spcBef>
+                <a:spcPts val="1000"/>
+              </a:spcBef>
+              <a:buFont typeface="Arial" panose="020B0604020202020204" pitchFamily="34" charset="0"/>
+              <a:buNone/>
+              <a:defRPr sz="2400" kern="1200">
+                <a:solidFill>
+                  <a:schemeClr val="tx1"/>
+                </a:solidFill>
+                <a:latin typeface="+mn-lt"/>
+                <a:ea typeface="+mn-ea"/>
+                <a:cs typeface="+mn-cs"/>
+              </a:defRPr>
+            </a:lvl1pPr>
+            <a:lvl2pPr marL="457200" indent="0" algn="ctr" defTabSz="914400" rtl="0" eaLnBrk="1" latinLnBrk="0" hangingPunct="1">
+              <a:lnSpc>
+                <a:spcPct val="90000"/>
+              </a:lnSpc>
+              <a:spcBef>
+                <a:spcPts val="500"/>
+              </a:spcBef>
+              <a:buFont typeface="Arial" panose="020B0604020202020204" pitchFamily="34" charset="0"/>
+              <a:buNone/>
+              <a:defRPr sz="2000" kern="1200">
+                <a:solidFill>
+                  <a:schemeClr val="tx1"/>
+                </a:solidFill>
+                <a:latin typeface="+mn-lt"/>
+                <a:ea typeface="+mn-ea"/>
+                <a:cs typeface="+mn-cs"/>
+              </a:defRPr>
+            </a:lvl2pPr>
+            <a:lvl3pPr marL="914400" indent="0" algn="ctr" defTabSz="914400" rtl="0" eaLnBrk="1" latinLnBrk="0" hangingPunct="1">
+              <a:lnSpc>
+                <a:spcPct val="90000"/>
+              </a:lnSpc>
+              <a:spcBef>
+                <a:spcPts val="500"/>
+              </a:spcBef>
+              <a:buFont typeface="Arial" panose="020B0604020202020204" pitchFamily="34" charset="0"/>
+              <a:buNone/>
+              <a:defRPr sz="1800" kern="1200">
+                <a:solidFill>
+                  <a:schemeClr val="tx1"/>
+                </a:solidFill>
+                <a:latin typeface="+mn-lt"/>
+                <a:ea typeface="+mn-ea"/>
+                <a:cs typeface="+mn-cs"/>
+              </a:defRPr>
+            </a:lvl3pPr>
+            <a:lvl4pPr marL="1371600" indent="0" algn="ctr" defTabSz="914400" rtl="0" eaLnBrk="1" latinLnBrk="0" hangingPunct="1">
+              <a:lnSpc>
+                <a:spcPct val="90000"/>
+              </a:lnSpc>
+              <a:spcBef>
+                <a:spcPts val="500"/>
+              </a:spcBef>
+              <a:buFont typeface="Arial" panose="020B0604020202020204" pitchFamily="34" charset="0"/>
+              <a:buNone/>
+              <a:defRPr sz="1600" kern="1200">
+                <a:solidFill>
+                  <a:schemeClr val="tx1"/>
+                </a:solidFill>
+                <a:latin typeface="+mn-lt"/>
+                <a:ea typeface="+mn-ea"/>
+                <a:cs typeface="+mn-cs"/>
+              </a:defRPr>
+            </a:lvl4pPr>
+            <a:lvl5pPr marL="1828800" indent="0" algn="ctr" defTabSz="914400" rtl="0" eaLnBrk="1" latinLnBrk="0" hangingPunct="1">
+              <a:lnSpc>
+                <a:spcPct val="90000"/>
+              </a:lnSpc>
+              <a:spcBef>
+                <a:spcPts val="500"/>
+              </a:spcBef>
+              <a:buFont typeface="Arial" panose="020B0604020202020204" pitchFamily="34" charset="0"/>
+              <a:buNone/>
+              <a:defRPr sz="1600" kern="1200">
+                <a:solidFill>
+                  <a:schemeClr val="tx1"/>
+                </a:solidFill>
+                <a:latin typeface="+mn-lt"/>
+                <a:ea typeface="+mn-ea"/>
+                <a:cs typeface="+mn-cs"/>
+              </a:defRPr>
+            </a:lvl5pPr>
+            <a:lvl6pPr marL="2286000" indent="0" algn="ctr" defTabSz="914400" rtl="0" eaLnBrk="1" latinLnBrk="0" hangingPunct="1">
+              <a:lnSpc>
+                <a:spcPct val="90000"/>
+              </a:lnSpc>
+              <a:spcBef>
+                <a:spcPts val="500"/>
+              </a:spcBef>
+              <a:buFont typeface="Arial" panose="020B0604020202020204" pitchFamily="34" charset="0"/>
+              <a:buNone/>
+              <a:defRPr sz="1600" kern="1200">
+                <a:solidFill>
+                  <a:schemeClr val="tx1"/>
+                </a:solidFill>
+                <a:latin typeface="+mn-lt"/>
+                <a:ea typeface="+mn-ea"/>
+                <a:cs typeface="+mn-cs"/>
+              </a:defRPr>
+            </a:lvl6pPr>
+            <a:lvl7pPr marL="2743200" indent="0" algn="ctr" defTabSz="914400" rtl="0" eaLnBrk="1" latinLnBrk="0" hangingPunct="1">
+              <a:lnSpc>
+                <a:spcPct val="90000"/>
+              </a:lnSpc>
+              <a:spcBef>
+                <a:spcPts val="500"/>
+              </a:spcBef>
+              <a:buFont typeface="Arial" panose="020B0604020202020204" pitchFamily="34" charset="0"/>
+              <a:buNone/>
+              <a:defRPr sz="1600" kern="1200">
+                <a:solidFill>
+                  <a:schemeClr val="tx1"/>
+                </a:solidFill>
+                <a:latin typeface="+mn-lt"/>
+                <a:ea typeface="+mn-ea"/>
+                <a:cs typeface="+mn-cs"/>
+              </a:defRPr>
+            </a:lvl7pPr>
+            <a:lvl8pPr marL="3200400" indent="0" algn="ctr" defTabSz="914400" rtl="0" eaLnBrk="1" latinLnBrk="0" hangingPunct="1">
+              <a:lnSpc>
+                <a:spcPct val="90000"/>
+              </a:lnSpc>
+              <a:spcBef>
+                <a:spcPts val="500"/>
+              </a:spcBef>
+              <a:buFont typeface="Arial" panose="020B0604020202020204" pitchFamily="34" charset="0"/>
+              <a:buNone/>
+              <a:defRPr sz="1600" kern="1200">
+                <a:solidFill>
+                  <a:schemeClr val="tx1"/>
+                </a:solidFill>
+                <a:latin typeface="+mn-lt"/>
+                <a:ea typeface="+mn-ea"/>
+                <a:cs typeface="+mn-cs"/>
+              </a:defRPr>
+            </a:lvl8pPr>
+            <a:lvl9pPr marL="3657600" indent="0" algn="ctr" defTabSz="914400" rtl="0" eaLnBrk="1" latinLnBrk="0" hangingPunct="1">
+              <a:lnSpc>
+                <a:spcPct val="90000"/>
+              </a:lnSpc>
+              <a:spcBef>
+                <a:spcPts val="500"/>
+              </a:spcBef>
+              <a:buFont typeface="Arial" panose="020B0604020202020204" pitchFamily="34" charset="0"/>
+              <a:buNone/>
+              <a:defRPr sz="1600" kern="1200">
+                <a:solidFill>
+                  <a:schemeClr val="tx1"/>
+                </a:solidFill>
+                <a:latin typeface="+mn-lt"/>
+                <a:ea typeface="+mn-ea"/>
+                <a:cs typeface="+mn-cs"/>
+              </a:defRPr>
+            </a:lvl9pPr>
+          </a:lstStyle>
+          <a:p>
+            <a:pPr marL="457200" lvl="0" indent="-457200" algn="l" eaLnBrk="0" fontAlgn="base" hangingPunct="0">
+              <a:lnSpc>
+                <a:spcPct val="150000"/>
+              </a:lnSpc>
+              <a:spcBef>
+                <a:spcPct val="0"/>
+              </a:spcBef>
+              <a:spcAft>
+                <a:spcPct val="0"/>
+              </a:spcAft>
+              <a:buFont typeface="Arial" panose="020B0604020202020204" pitchFamily="34" charset="0"/>
+              <a:buChar char="•"/>
+            </a:pPr>
+            <a:r>
+              <a:rPr lang="en-US" altLang="en-US" sz="3200" dirty="0">
+                <a:latin typeface="Times New Roman" pitchFamily="18" charset="0"/>
+                <a:cs typeface="Times New Roman" pitchFamily="18" charset="0"/>
+              </a:rPr>
+              <a:t>The AI-Driven Automated Video Generator underwent thorough testing and evaluation across all functional modules to validate its performance, stability, and real-world applicability. The system was assessed through end-to-end user flows, simulating diverse usage scenarios to ensure that each component delivered a cohesive, reliable, and intuitive experience from start to finish.</a:t>
+            </a:r>
+          </a:p>
+          <a:p>
+            <a:pPr marL="457200" lvl="0" indent="-457200" algn="l" eaLnBrk="0" fontAlgn="base" hangingPunct="0">
+              <a:lnSpc>
+                <a:spcPct val="150000"/>
+              </a:lnSpc>
+              <a:spcBef>
+                <a:spcPct val="0"/>
+              </a:spcBef>
+              <a:spcAft>
+                <a:spcPct val="0"/>
+              </a:spcAft>
+              <a:buFont typeface="Arial" panose="020B0604020202020204" pitchFamily="34" charset="0"/>
+              <a:buChar char="•"/>
+            </a:pPr>
+            <a:r>
+              <a:rPr lang="en-US" altLang="en-US" sz="3200" dirty="0">
+                <a:latin typeface="Times New Roman" pitchFamily="18" charset="0"/>
+                <a:cs typeface="Times New Roman" pitchFamily="18" charset="0"/>
+              </a:rPr>
+              <a:t>Session-Based Navigation and Workflow Integrity</a:t>
+            </a:r>
+          </a:p>
+          <a:p>
+            <a:pPr marL="457200" lvl="0" indent="-457200" algn="l" eaLnBrk="0" fontAlgn="base" hangingPunct="0">
+              <a:lnSpc>
+                <a:spcPct val="150000"/>
+              </a:lnSpc>
+              <a:spcBef>
+                <a:spcPct val="0"/>
+              </a:spcBef>
+              <a:spcAft>
+                <a:spcPct val="0"/>
+              </a:spcAft>
+              <a:buFont typeface="Arial" panose="020B0604020202020204" pitchFamily="34" charset="0"/>
+              <a:buChar char="•"/>
+            </a:pPr>
+            <a:r>
+              <a:rPr lang="en-US" altLang="en-US" sz="3200" dirty="0">
+                <a:latin typeface="Times New Roman" pitchFamily="18" charset="0"/>
+                <a:cs typeface="Times New Roman" pitchFamily="18" charset="0"/>
+              </a:rPr>
+              <a:t>A session-based navigation mechanism was implemented using </a:t>
+            </a:r>
+            <a:r>
+              <a:rPr lang="en-US" altLang="en-US" sz="3200" dirty="0" err="1">
+                <a:latin typeface="Times New Roman" pitchFamily="18" charset="0"/>
+                <a:cs typeface="Times New Roman" pitchFamily="18" charset="0"/>
+              </a:rPr>
+              <a:t>Streamlit's</a:t>
+            </a:r>
+            <a:r>
+              <a:rPr lang="en-US" altLang="en-US" sz="3200" dirty="0">
+                <a:latin typeface="Times New Roman" pitchFamily="18" charset="0"/>
+                <a:cs typeface="Times New Roman" pitchFamily="18" charset="0"/>
+              </a:rPr>
+              <a:t> </a:t>
+            </a:r>
+            <a:r>
+              <a:rPr lang="en-US" altLang="en-US" sz="3200" dirty="0" err="1">
+                <a:latin typeface="Times New Roman" pitchFamily="18" charset="0"/>
+                <a:cs typeface="Times New Roman" pitchFamily="18" charset="0"/>
+              </a:rPr>
+              <a:t>session_state</a:t>
+            </a:r>
+            <a:r>
+              <a:rPr lang="en-US" altLang="en-US" sz="3200" dirty="0">
+                <a:latin typeface="Times New Roman" pitchFamily="18" charset="0"/>
+                <a:cs typeface="Times New Roman" pitchFamily="18" charset="0"/>
+              </a:rPr>
+              <a:t>, which played a critical role in maintaining continuity across the three main stages of the application:</a:t>
+            </a:r>
+          </a:p>
+          <a:p>
+            <a:pPr lvl="1" algn="l" eaLnBrk="0" fontAlgn="base" hangingPunct="0">
+              <a:lnSpc>
+                <a:spcPct val="150000"/>
+              </a:lnSpc>
+              <a:spcBef>
+                <a:spcPct val="0"/>
+              </a:spcBef>
+              <a:spcAft>
+                <a:spcPct val="0"/>
+              </a:spcAft>
+            </a:pPr>
+            <a:r>
+              <a:rPr lang="en-US" altLang="en-US" sz="2800" dirty="0">
+                <a:latin typeface="Times New Roman" pitchFamily="18" charset="0"/>
+                <a:cs typeface="Times New Roman" pitchFamily="18" charset="0"/>
+              </a:rPr>
+              <a:t>1. Script Generation</a:t>
+            </a:r>
+          </a:p>
+          <a:p>
+            <a:pPr lvl="1" algn="l" eaLnBrk="0" fontAlgn="base" hangingPunct="0">
+              <a:lnSpc>
+                <a:spcPct val="150000"/>
+              </a:lnSpc>
+              <a:spcBef>
+                <a:spcPct val="0"/>
+              </a:spcBef>
+              <a:spcAft>
+                <a:spcPct val="0"/>
+              </a:spcAft>
+            </a:pPr>
+            <a:r>
+              <a:rPr lang="en-US" altLang="en-US" sz="2800" dirty="0">
+                <a:latin typeface="Times New Roman" pitchFamily="18" charset="0"/>
+                <a:cs typeface="Times New Roman" pitchFamily="18" charset="0"/>
+              </a:rPr>
+              <a:t>2. Voiceover Creation</a:t>
+            </a:r>
+          </a:p>
+          <a:p>
+            <a:pPr lvl="1" algn="l" eaLnBrk="0" fontAlgn="base" hangingPunct="0">
+              <a:lnSpc>
+                <a:spcPct val="150000"/>
+              </a:lnSpc>
+              <a:spcBef>
+                <a:spcPct val="0"/>
+              </a:spcBef>
+              <a:spcAft>
+                <a:spcPct val="0"/>
+              </a:spcAft>
+            </a:pPr>
+            <a:r>
+              <a:rPr lang="en-US" altLang="en-US" sz="2800" dirty="0">
+                <a:latin typeface="Times New Roman" pitchFamily="18" charset="0"/>
+                <a:cs typeface="Times New Roman" pitchFamily="18" charset="0"/>
+              </a:rPr>
+              <a:t>3. Video Compilation</a:t>
+            </a:r>
+          </a:p>
+        </p:txBody>
+      </p:sp>
+    </p:spTree>
+    <p:extLst>
+      <p:ext uri="{BB962C8B-B14F-4D97-AF65-F5344CB8AC3E}">
+        <p14:creationId xmlns:p14="http://schemas.microsoft.com/office/powerpoint/2010/main" val="854143978"/>
+      </p:ext>
+    </p:extLst>
+  </p:cSld>
+  <p:clrMapOvr>
+    <a:masterClrMapping/>
+  </p:clrMapOvr>
+</p:sld>
+</file>
+
+<file path=ppt/slides/slide26.xml><?xml version="1.0" encoding="utf-8"?>
+<p:sld xmlns:a="http://schemas.openxmlformats.org/drawingml/2006/main" xmlns:r="http://schemas.openxmlformats.org/officeDocument/2006/relationships" xmlns:p="http://schemas.openxmlformats.org/presentationml/2006/main">
+  <p:cSld>
+    <p:spTree>
+      <p:nvGrpSpPr>
+        <p:cNvPr id="1" name="">
+          <a:extLst>
+            <a:ext uri="{FF2B5EF4-FFF2-40B4-BE49-F238E27FC236}">
+              <a16:creationId xmlns:a16="http://schemas.microsoft.com/office/drawing/2014/main" id="{7B8AB1C8-ECEC-010C-BC1E-6EEEAE4B62C1}"/>
+            </a:ext>
+          </a:extLst>
+        </p:cNvPr>
+        <p:cNvGrpSpPr/>
+        <p:nvPr/>
+      </p:nvGrpSpPr>
+      <p:grpSpPr>
+        <a:xfrm>
+          <a:off x="0" y="0"/>
+          <a:ext cx="0" cy="0"/>
+          <a:chOff x="0" y="0"/>
+          <a:chExt cx="0" cy="0"/>
+        </a:xfrm>
+      </p:grpSpPr>
+      <p:sp>
+        <p:nvSpPr>
+          <p:cNvPr id="6" name="Rounded Rectangle 4">
+            <a:extLst>
+              <a:ext uri="{FF2B5EF4-FFF2-40B4-BE49-F238E27FC236}">
+                <a16:creationId xmlns:a16="http://schemas.microsoft.com/office/drawing/2014/main" id="{8147AEEB-BEF0-2864-42F6-49BC5CBB9315}"/>
+              </a:ext>
+            </a:extLst>
+          </p:cNvPr>
+          <p:cNvSpPr/>
+          <p:nvPr/>
+        </p:nvSpPr>
+        <p:spPr>
+          <a:xfrm>
+            <a:off x="0" y="6462940"/>
+            <a:ext cx="12207875" cy="393700"/>
+          </a:xfrm>
+          <a:prstGeom prst="rect">
+            <a:avLst/>
+          </a:prstGeom>
+          <a:solidFill>
+            <a:srgbClr val="5B9BD5"/>
+          </a:solidFill>
+        </p:spPr>
+        <p:style>
+          <a:lnRef idx="2">
+            <a:schemeClr val="accent1">
+              <a:shade val="50000"/>
+            </a:schemeClr>
+          </a:lnRef>
+          <a:fillRef idx="1">
+            <a:schemeClr val="accent1"/>
+          </a:fillRef>
+          <a:effectRef idx="0">
+            <a:schemeClr val="accent1"/>
+          </a:effectRef>
+          <a:fontRef idx="minor">
+            <a:schemeClr val="lt1"/>
+          </a:fontRef>
+        </p:style>
+        <p:txBody>
+          <a:bodyPr anchor="ctr"/>
+          <a:lstStyle/>
+          <a:p>
+            <a:pPr marL="0" marR="0" lvl="0" indent="0" algn="ctr" defTabSz="914400" rtl="0" eaLnBrk="0" fontAlgn="base" latinLnBrk="0" hangingPunct="0">
+              <a:lnSpc>
+                <a:spcPct val="100000"/>
+              </a:lnSpc>
+              <a:spcBef>
+                <a:spcPct val="0"/>
+              </a:spcBef>
+              <a:spcAft>
+                <a:spcPct val="0"/>
+              </a:spcAft>
+              <a:buClrTx/>
+              <a:buSzTx/>
+              <a:buFontTx/>
+              <a:buNone/>
+              <a:defRPr/>
+            </a:pPr>
+            <a:endParaRPr kumimoji="0" lang="en-IN" sz="1800" b="1" i="0" u="none" strike="noStrike" kern="1200" cap="none" spc="0" normalizeH="0" baseline="0" noProof="0" dirty="0">
+              <a:ln>
+                <a:noFill/>
+              </a:ln>
+              <a:solidFill>
+                <a:schemeClr val="tx1"/>
+              </a:solidFill>
+              <a:effectLst/>
+              <a:uLnTx/>
+              <a:uFillTx/>
+              <a:latin typeface="Arial Rounded MT Bold" pitchFamily="34" charset="0"/>
+              <a:ea typeface="+mn-ea"/>
+              <a:cs typeface="+mn-cs"/>
+            </a:endParaRPr>
+          </a:p>
+        </p:txBody>
+      </p:sp>
+      <p:sp>
+        <p:nvSpPr>
+          <p:cNvPr id="7" name="TextBox 6">
+            <a:extLst>
+              <a:ext uri="{FF2B5EF4-FFF2-40B4-BE49-F238E27FC236}">
+                <a16:creationId xmlns:a16="http://schemas.microsoft.com/office/drawing/2014/main" id="{A161A39D-DF31-A7CF-ECED-2BD0B9848BC3}"/>
+              </a:ext>
+            </a:extLst>
+          </p:cNvPr>
+          <p:cNvSpPr txBox="1"/>
+          <p:nvPr/>
+        </p:nvSpPr>
+        <p:spPr>
+          <a:xfrm>
+            <a:off x="443971" y="6490513"/>
+            <a:ext cx="11288182" cy="338554"/>
+          </a:xfrm>
+          <a:prstGeom prst="rect">
+            <a:avLst/>
+          </a:prstGeom>
+          <a:noFill/>
+        </p:spPr>
+        <p:txBody>
+          <a:bodyPr wrap="square" rtlCol="0">
+            <a:spAutoFit/>
+          </a:bodyPr>
+          <a:lstStyle/>
+          <a:p>
+            <a:pPr marL="0" marR="0" lvl="0" indent="0" algn="ctr" defTabSz="914400" rtl="0" eaLnBrk="0" fontAlgn="base" latinLnBrk="0" hangingPunct="0">
+              <a:lnSpc>
+                <a:spcPct val="100000"/>
+              </a:lnSpc>
+              <a:spcBef>
+                <a:spcPct val="0"/>
+              </a:spcBef>
+              <a:spcAft>
+                <a:spcPct val="0"/>
+              </a:spcAft>
+              <a:buClrTx/>
+              <a:buSzTx/>
+              <a:buFontTx/>
+              <a:buNone/>
+              <a:defRPr/>
+            </a:pPr>
+            <a:r>
+              <a:rPr kumimoji="0" lang="en-IN" sz="1600" b="1" i="0" u="none" strike="noStrike" kern="1200" cap="none" spc="0" normalizeH="0" baseline="0" noProof="0" dirty="0">
+                <a:ln>
+                  <a:noFill/>
+                </a:ln>
+                <a:solidFill>
+                  <a:schemeClr val="tx1"/>
+                </a:solidFill>
+                <a:effectLst/>
+                <a:uLnTx/>
+                <a:uFillTx/>
+                <a:latin typeface="Arial Rounded MT Bold" pitchFamily="34" charset="0"/>
+                <a:ea typeface="+mn-ea"/>
+                <a:cs typeface="+mn-cs"/>
+              </a:rPr>
+              <a:t>B.Tech III Year – II Sem | Dept of Computational Intelligence| Application Development – II | Project Review</a:t>
+            </a:r>
+          </a:p>
+        </p:txBody>
+      </p:sp>
+      <p:sp>
+        <p:nvSpPr>
+          <p:cNvPr id="3" name="Title 1">
+            <a:extLst>
+              <a:ext uri="{FF2B5EF4-FFF2-40B4-BE49-F238E27FC236}">
+                <a16:creationId xmlns:a16="http://schemas.microsoft.com/office/drawing/2014/main" id="{92707BC0-C8D4-F3C4-69B8-C7D9209E99A4}"/>
+              </a:ext>
+            </a:extLst>
+          </p:cNvPr>
+          <p:cNvSpPr txBox="1">
+            <a:spLocks/>
+          </p:cNvSpPr>
+          <p:nvPr/>
+        </p:nvSpPr>
+        <p:spPr>
+          <a:xfrm>
+            <a:off x="443971" y="509588"/>
+            <a:ext cx="10515600" cy="598488"/>
+          </a:xfrm>
+          <a:prstGeom prst="rect">
+            <a:avLst/>
+          </a:prstGeom>
+        </p:spPr>
+        <p:txBody>
+          <a:bodyPr vert="horz" wrap="square" lIns="91440" tIns="45720" rIns="91440" bIns="45720" numCol="1" rtlCol="0" anchor="ctr" anchorCtr="0" compatLnSpc="1">
+            <a:normAutofit fontScale="90000" lnSpcReduction="20000"/>
+          </a:bodyPr>
+          <a:lstStyle>
+            <a:lvl1pPr algn="ctr" defTabSz="914400" rtl="0" eaLnBrk="1" latinLnBrk="0" hangingPunct="1">
+              <a:lnSpc>
+                <a:spcPct val="90000"/>
+              </a:lnSpc>
+              <a:spcBef>
+                <a:spcPct val="0"/>
+              </a:spcBef>
+              <a:buNone/>
+              <a:defRPr sz="6000" kern="1200">
+                <a:solidFill>
+                  <a:schemeClr val="tx1"/>
+                </a:solidFill>
+                <a:latin typeface="+mj-lt"/>
+                <a:ea typeface="+mj-ea"/>
+                <a:cs typeface="+mj-cs"/>
+              </a:defRPr>
+            </a:lvl1pPr>
+          </a:lstStyle>
+          <a:p>
+            <a:pPr algn="l">
+              <a:defRPr/>
+            </a:pPr>
+            <a:r>
+              <a:rPr lang="en-IN" sz="4890" b="1" dirty="0">
+                <a:solidFill>
+                  <a:srgbClr val="00B0F0"/>
+                </a:solidFill>
+                <a:latin typeface="Times New Roman" panose="02020603050405020304" pitchFamily="18" charset="0"/>
+                <a:cs typeface="Times New Roman" panose="02020603050405020304" pitchFamily="18" charset="0"/>
+              </a:rPr>
+              <a:t>Conclusion &amp; Future Enhancements</a:t>
+            </a:r>
+          </a:p>
+        </p:txBody>
+      </p:sp>
+      <p:sp>
+        <p:nvSpPr>
+          <p:cNvPr id="8" name="Rounded Rectangle 4">
+            <a:extLst>
+              <a:ext uri="{FF2B5EF4-FFF2-40B4-BE49-F238E27FC236}">
+                <a16:creationId xmlns:a16="http://schemas.microsoft.com/office/drawing/2014/main" id="{8DB6BB9D-69D1-3721-E653-FCDB41E22F52}"/>
+              </a:ext>
+            </a:extLst>
+          </p:cNvPr>
+          <p:cNvSpPr/>
+          <p:nvPr/>
+        </p:nvSpPr>
+        <p:spPr>
+          <a:xfrm>
+            <a:off x="-15875" y="-10805"/>
+            <a:ext cx="12207875" cy="393700"/>
+          </a:xfrm>
+          <a:prstGeom prst="rect">
+            <a:avLst/>
+          </a:prstGeom>
+          <a:solidFill>
+            <a:srgbClr val="5B9BD5"/>
+          </a:solidFill>
+        </p:spPr>
+        <p:style>
+          <a:lnRef idx="2">
+            <a:schemeClr val="accent1">
+              <a:shade val="50000"/>
+            </a:schemeClr>
+          </a:lnRef>
+          <a:fillRef idx="1">
+            <a:schemeClr val="accent1"/>
+          </a:fillRef>
+          <a:effectRef idx="0">
+            <a:schemeClr val="accent1"/>
+          </a:effectRef>
+          <a:fontRef idx="minor">
+            <a:schemeClr val="lt1"/>
+          </a:fontRef>
+        </p:style>
+        <p:txBody>
+          <a:bodyPr anchor="ctr"/>
+          <a:lstStyle/>
+          <a:p>
+            <a:pPr marL="0" marR="0" lvl="0" indent="0" algn="ctr" defTabSz="914400" rtl="0" eaLnBrk="0" fontAlgn="base" latinLnBrk="0" hangingPunct="0">
+              <a:lnSpc>
+                <a:spcPct val="100000"/>
+              </a:lnSpc>
+              <a:spcBef>
+                <a:spcPct val="0"/>
+              </a:spcBef>
+              <a:spcAft>
+                <a:spcPct val="0"/>
+              </a:spcAft>
+              <a:buClrTx/>
+              <a:buSzTx/>
+              <a:buFontTx/>
+              <a:buNone/>
+              <a:defRPr/>
+            </a:pPr>
+            <a:endParaRPr kumimoji="0" lang="en-IN" sz="1800" b="1" i="0" u="none" strike="noStrike" kern="1200" cap="none" spc="0" normalizeH="0" baseline="0" noProof="0" dirty="0">
+              <a:ln>
+                <a:noFill/>
+              </a:ln>
+              <a:solidFill>
+                <a:schemeClr val="tx1"/>
+              </a:solidFill>
+              <a:effectLst/>
+              <a:uLnTx/>
+              <a:uFillTx/>
+              <a:latin typeface="Arial Rounded MT Bold" pitchFamily="34" charset="0"/>
+              <a:ea typeface="+mn-ea"/>
+              <a:cs typeface="+mn-cs"/>
+            </a:endParaRPr>
+          </a:p>
+        </p:txBody>
+      </p:sp>
+      <p:sp>
+        <p:nvSpPr>
+          <p:cNvPr id="9" name="TextBox 8">
+            <a:extLst>
+              <a:ext uri="{FF2B5EF4-FFF2-40B4-BE49-F238E27FC236}">
+                <a16:creationId xmlns:a16="http://schemas.microsoft.com/office/drawing/2014/main" id="{5E01FC84-2A71-7341-2103-BF58F219D4E5}"/>
+              </a:ext>
+            </a:extLst>
+          </p:cNvPr>
+          <p:cNvSpPr txBox="1"/>
+          <p:nvPr/>
+        </p:nvSpPr>
+        <p:spPr>
+          <a:xfrm>
+            <a:off x="2801516" y="16768"/>
+            <a:ext cx="6588967" cy="338554"/>
+          </a:xfrm>
+          <a:prstGeom prst="rect">
+            <a:avLst/>
+          </a:prstGeom>
+          <a:noFill/>
+        </p:spPr>
+        <p:txBody>
+          <a:bodyPr wrap="square" rtlCol="0">
+            <a:spAutoFit/>
+          </a:bodyPr>
+          <a:lstStyle/>
+          <a:p>
+            <a:r>
+              <a:rPr lang="en-US" sz="1600" b="1" dirty="0">
+                <a:latin typeface="Arial Rounded MT Bold" panose="020F0704030504030204" pitchFamily="34" charset="0"/>
+                <a:cs typeface="Arial" panose="020B0604020202020204" pitchFamily="34" charset="0"/>
+              </a:rPr>
+              <a:t>MALLA REDDY COLLEGE OF ENGINEERING AND TECHNOLOGY</a:t>
+            </a:r>
+            <a:endParaRPr lang="x-none" sz="1600" b="1" dirty="0">
+              <a:latin typeface="Arial Rounded MT Bold" panose="020F0704030504030204" pitchFamily="34" charset="0"/>
+              <a:cs typeface="Arial" panose="020B0604020202020204" pitchFamily="34" charset="0"/>
+            </a:endParaRPr>
+          </a:p>
+        </p:txBody>
+      </p:sp>
+      <p:pic>
+        <p:nvPicPr>
+          <p:cNvPr id="10" name="Picture 6">
+            <a:extLst>
+              <a:ext uri="{FF2B5EF4-FFF2-40B4-BE49-F238E27FC236}">
+                <a16:creationId xmlns:a16="http://schemas.microsoft.com/office/drawing/2014/main" id="{37037A12-390E-E9D9-9455-D97BCE413FF6}"/>
+              </a:ext>
+            </a:extLst>
+          </p:cNvPr>
+          <p:cNvPicPr>
+            <a:picLocks noChangeAspect="1"/>
+          </p:cNvPicPr>
+          <p:nvPr/>
+        </p:nvPicPr>
+        <p:blipFill>
+          <a:blip r:embed="rId2" cstate="print"/>
+          <a:stretch>
+            <a:fillRect/>
+          </a:stretch>
+        </p:blipFill>
+        <p:spPr>
+          <a:xfrm>
+            <a:off x="10899775" y="-128587"/>
+            <a:ext cx="1276350" cy="1276350"/>
+          </a:xfrm>
+          <a:prstGeom prst="rect">
+            <a:avLst/>
+          </a:prstGeom>
+          <a:noFill/>
+          <a:ln w="9525">
+            <a:noFill/>
+          </a:ln>
+        </p:spPr>
+      </p:pic>
+      <p:sp>
+        <p:nvSpPr>
+          <p:cNvPr id="13" name="Slide Number Placeholder 3">
+            <a:extLst>
+              <a:ext uri="{FF2B5EF4-FFF2-40B4-BE49-F238E27FC236}">
+                <a16:creationId xmlns:a16="http://schemas.microsoft.com/office/drawing/2014/main" id="{456FEF93-2D33-EC28-9B79-82F486A96EA8}"/>
+              </a:ext>
+            </a:extLst>
+          </p:cNvPr>
+          <p:cNvSpPr txBox="1">
+            <a:spLocks/>
+          </p:cNvSpPr>
+          <p:nvPr/>
+        </p:nvSpPr>
+        <p:spPr>
+          <a:xfrm>
+            <a:off x="9067800" y="6176963"/>
+            <a:ext cx="2743200" cy="365125"/>
+          </a:xfrm>
+          <a:prstGeom prst="rect">
+            <a:avLst/>
+          </a:prstGeom>
+          <a:noFill/>
+          <a:ln>
+            <a:noFill/>
+          </a:ln>
+        </p:spPr>
+        <p:txBody>
+          <a:bodyPr anchor="ctr" anchorCtr="0"/>
+          <a:lstStyle>
+            <a:defPPr>
+              <a:defRPr lang="x-none"/>
+            </a:defPPr>
+            <a:lvl1pPr marL="0" algn="l" defTabSz="914400" rtl="0" eaLnBrk="1" latinLnBrk="0" hangingPunct="1">
+              <a:defRPr sz="1800" kern="1200">
+                <a:solidFill>
+                  <a:schemeClr val="tx1"/>
+                </a:solidFill>
+                <a:latin typeface="+mn-lt"/>
+                <a:ea typeface="+mn-ea"/>
+                <a:cs typeface="+mn-cs"/>
+              </a:defRPr>
+            </a:lvl1pPr>
+            <a:lvl2pPr marL="457200" algn="l" defTabSz="914400" rtl="0" eaLnBrk="1" latinLnBrk="0" hangingPunct="1">
+              <a:defRPr sz="1800" kern="1200">
+                <a:solidFill>
+                  <a:schemeClr val="tx1"/>
+                </a:solidFill>
+                <a:latin typeface="+mn-lt"/>
+                <a:ea typeface="+mn-ea"/>
+                <a:cs typeface="+mn-cs"/>
+              </a:defRPr>
+            </a:lvl2pPr>
+            <a:lvl3pPr marL="914400" algn="l" defTabSz="914400" rtl="0" eaLnBrk="1" latinLnBrk="0" hangingPunct="1">
+              <a:defRPr sz="1800" kern="1200">
+                <a:solidFill>
+                  <a:schemeClr val="tx1"/>
+                </a:solidFill>
+                <a:latin typeface="+mn-lt"/>
+                <a:ea typeface="+mn-ea"/>
+                <a:cs typeface="+mn-cs"/>
+              </a:defRPr>
+            </a:lvl3pPr>
+            <a:lvl4pPr marL="1371600" algn="l" defTabSz="914400" rtl="0" eaLnBrk="1" latinLnBrk="0" hangingPunct="1">
+              <a:defRPr sz="1800" kern="1200">
+                <a:solidFill>
+                  <a:schemeClr val="tx1"/>
+                </a:solidFill>
+                <a:latin typeface="+mn-lt"/>
+                <a:ea typeface="+mn-ea"/>
+                <a:cs typeface="+mn-cs"/>
+              </a:defRPr>
+            </a:lvl4pPr>
+            <a:lvl5pPr marL="1828800" algn="l" defTabSz="914400" rtl="0" eaLnBrk="1" latinLnBrk="0" hangingPunct="1">
+              <a:defRPr sz="1800" kern="1200">
+                <a:solidFill>
+                  <a:schemeClr val="tx1"/>
+                </a:solidFill>
+                <a:latin typeface="+mn-lt"/>
+                <a:ea typeface="+mn-ea"/>
+                <a:cs typeface="+mn-cs"/>
+              </a:defRPr>
+            </a:lvl5pPr>
+            <a:lvl6pPr marL="2286000" algn="l" defTabSz="914400" rtl="0" eaLnBrk="1" latinLnBrk="0" hangingPunct="1">
+              <a:defRPr sz="1800" kern="1200">
+                <a:solidFill>
+                  <a:schemeClr val="tx1"/>
+                </a:solidFill>
+                <a:latin typeface="+mn-lt"/>
+                <a:ea typeface="+mn-ea"/>
+                <a:cs typeface="+mn-cs"/>
+              </a:defRPr>
+            </a:lvl6pPr>
+            <a:lvl7pPr marL="2743200" algn="l" defTabSz="914400" rtl="0" eaLnBrk="1" latinLnBrk="0" hangingPunct="1">
+              <a:defRPr sz="1800" kern="1200">
+                <a:solidFill>
+                  <a:schemeClr val="tx1"/>
+                </a:solidFill>
+                <a:latin typeface="+mn-lt"/>
+                <a:ea typeface="+mn-ea"/>
+                <a:cs typeface="+mn-cs"/>
+              </a:defRPr>
+            </a:lvl7pPr>
+            <a:lvl8pPr marL="3200400" algn="l" defTabSz="914400" rtl="0" eaLnBrk="1" latinLnBrk="0" hangingPunct="1">
+              <a:defRPr sz="1800" kern="1200">
+                <a:solidFill>
+                  <a:schemeClr val="tx1"/>
+                </a:solidFill>
+                <a:latin typeface="+mn-lt"/>
+                <a:ea typeface="+mn-ea"/>
+                <a:cs typeface="+mn-cs"/>
+              </a:defRPr>
+            </a:lvl8pPr>
+            <a:lvl9pPr marL="3657600" algn="l" defTabSz="914400" rtl="0" eaLnBrk="1" latinLnBrk="0" hangingPunct="1">
+              <a:defRPr sz="1800" kern="1200">
+                <a:solidFill>
+                  <a:schemeClr val="tx1"/>
+                </a:solidFill>
+                <a:latin typeface="+mn-lt"/>
+                <a:ea typeface="+mn-ea"/>
+                <a:cs typeface="+mn-cs"/>
+              </a:defRPr>
+            </a:lvl9pPr>
+          </a:lstStyle>
+          <a:p>
+            <a:pPr algn="r">
+              <a:spcBef>
+                <a:spcPct val="0"/>
+              </a:spcBef>
+            </a:pPr>
+            <a:fld id="{9A0DB2DC-4C9A-4742-B13C-FB6460FD3503}" type="slidenum">
+              <a:rPr lang="en-IN" altLang="en-US" sz="1200" b="1" smtClean="0">
+                <a:solidFill>
+                  <a:srgbClr val="C00000"/>
+                </a:solidFill>
+              </a:rPr>
+              <a:pPr algn="r">
+                <a:spcBef>
+                  <a:spcPct val="0"/>
+                </a:spcBef>
+              </a:pPr>
+              <a:t>26</a:t>
+            </a:fld>
+            <a:endParaRPr lang="en-IN" altLang="en-US" sz="1200" b="1" dirty="0">
+              <a:solidFill>
+                <a:srgbClr val="C00000"/>
+              </a:solidFill>
+            </a:endParaRPr>
+          </a:p>
+        </p:txBody>
+      </p:sp>
+      <p:sp>
+        <p:nvSpPr>
+          <p:cNvPr id="2" name="Content Placeholder 2">
+            <a:extLst>
+              <a:ext uri="{FF2B5EF4-FFF2-40B4-BE49-F238E27FC236}">
+                <a16:creationId xmlns:a16="http://schemas.microsoft.com/office/drawing/2014/main" id="{5330D409-A6A2-5C15-5D80-36AB699746BF}"/>
+              </a:ext>
+            </a:extLst>
+          </p:cNvPr>
+          <p:cNvSpPr txBox="1">
+            <a:spLocks/>
+          </p:cNvSpPr>
+          <p:nvPr/>
+        </p:nvSpPr>
+        <p:spPr>
+          <a:xfrm>
+            <a:off x="901382" y="1112431"/>
+            <a:ext cx="10405110" cy="5351145"/>
+          </a:xfrm>
+          <a:prstGeom prst="rect">
+            <a:avLst/>
+          </a:prstGeom>
+        </p:spPr>
+        <p:txBody>
+          <a:bodyPr vert="horz" wrap="square" lIns="91440" tIns="45720" rIns="91440" bIns="45720" rtlCol="0" anchor="t" anchorCtr="0">
             <a:normAutofit/>
           </a:bodyPr>
           <a:lstStyle>
@@ -14245,11 +16824,835 @@
               <a:buChar char="•"/>
             </a:pPr>
             <a:r>
+              <a:rPr lang="en-US" b="0" i="0" u="none" strike="noStrike" baseline="0" dirty="0">
+                <a:solidFill>
+                  <a:srgbClr val="000000"/>
+                </a:solidFill>
+                <a:latin typeface="Times New Roman" panose="02020603050405020304" pitchFamily="18" charset="0"/>
+              </a:rPr>
+              <a:t>Additionally, the </a:t>
+            </a:r>
+            <a:r>
+              <a:rPr lang="en-US" b="1" i="0" u="none" strike="noStrike" baseline="0" dirty="0">
+                <a:solidFill>
+                  <a:srgbClr val="000000"/>
+                </a:solidFill>
+                <a:latin typeface="Times New Roman" panose="02020603050405020304" pitchFamily="18" charset="0"/>
+              </a:rPr>
+              <a:t>modular architecture </a:t>
+            </a:r>
+            <a:r>
+              <a:rPr lang="en-US" b="0" i="0" u="none" strike="noStrike" baseline="0" dirty="0">
+                <a:solidFill>
+                  <a:srgbClr val="000000"/>
+                </a:solidFill>
+                <a:latin typeface="Times New Roman" panose="02020603050405020304" pitchFamily="18" charset="0"/>
+              </a:rPr>
+              <a:t>ensures that each component functions independently, allowing for </a:t>
+            </a:r>
+            <a:r>
+              <a:rPr lang="en-US" b="1" i="0" u="none" strike="noStrike" baseline="0" dirty="0">
+                <a:solidFill>
+                  <a:srgbClr val="000000"/>
+                </a:solidFill>
+                <a:latin typeface="Times New Roman" panose="02020603050405020304" pitchFamily="18" charset="0"/>
+              </a:rPr>
+              <a:t>future enhancements </a:t>
+            </a:r>
+            <a:r>
+              <a:rPr lang="en-US" b="0" i="0" u="none" strike="noStrike" baseline="0" dirty="0">
+                <a:solidFill>
+                  <a:srgbClr val="000000"/>
+                </a:solidFill>
+                <a:latin typeface="Times New Roman" panose="02020603050405020304" pitchFamily="18" charset="0"/>
+              </a:rPr>
+              <a:t>such </a:t>
+            </a:r>
+            <a:r>
+              <a:rPr lang="en-US" b="1" i="0" u="none" strike="noStrike" baseline="0" dirty="0">
+                <a:solidFill>
+                  <a:srgbClr val="000000"/>
+                </a:solidFill>
+                <a:latin typeface="Times New Roman" panose="02020603050405020304" pitchFamily="18" charset="0"/>
+              </a:rPr>
+              <a:t>as multilingual support, alternative AI models </a:t>
+            </a:r>
+            <a:r>
+              <a:rPr lang="en-US" b="0" i="0" u="none" strike="noStrike" baseline="0" dirty="0">
+                <a:solidFill>
+                  <a:srgbClr val="000000"/>
+                </a:solidFill>
+                <a:latin typeface="Times New Roman" panose="02020603050405020304" pitchFamily="18" charset="0"/>
+              </a:rPr>
+              <a:t>and integration with additional media libraries. </a:t>
+            </a:r>
+            <a:endParaRPr lang="en-US" altLang="en-US" sz="3200" dirty="0">
+              <a:latin typeface="Times New Roman" pitchFamily="18" charset="0"/>
+              <a:cs typeface="Times New Roman" pitchFamily="18" charset="0"/>
+            </a:endParaRPr>
+          </a:p>
+        </p:txBody>
+      </p:sp>
+    </p:spTree>
+    <p:extLst>
+      <p:ext uri="{BB962C8B-B14F-4D97-AF65-F5344CB8AC3E}">
+        <p14:creationId xmlns:p14="http://schemas.microsoft.com/office/powerpoint/2010/main" val="232026482"/>
+      </p:ext>
+    </p:extLst>
+  </p:cSld>
+  <p:clrMapOvr>
+    <a:masterClrMapping/>
+  </p:clrMapOvr>
+</p:sld>
+</file>
+
+<file path=ppt/slides/slide27.xml><?xml version="1.0" encoding="utf-8"?>
+<p:sld xmlns:a="http://schemas.openxmlformats.org/drawingml/2006/main" xmlns:r="http://schemas.openxmlformats.org/officeDocument/2006/relationships" xmlns:p="http://schemas.openxmlformats.org/presentationml/2006/main">
+  <p:cSld>
+    <p:spTree>
+      <p:nvGrpSpPr>
+        <p:cNvPr id="1" name="">
+          <a:extLst>
+            <a:ext uri="{FF2B5EF4-FFF2-40B4-BE49-F238E27FC236}">
+              <a16:creationId xmlns:a16="http://schemas.microsoft.com/office/drawing/2014/main" id="{AAE94091-AB76-AA12-31D5-307E6F355CAA}"/>
+            </a:ext>
+          </a:extLst>
+        </p:cNvPr>
+        <p:cNvGrpSpPr/>
+        <p:nvPr/>
+      </p:nvGrpSpPr>
+      <p:grpSpPr>
+        <a:xfrm>
+          <a:off x="0" y="0"/>
+          <a:ext cx="0" cy="0"/>
+          <a:chOff x="0" y="0"/>
+          <a:chExt cx="0" cy="0"/>
+        </a:xfrm>
+      </p:grpSpPr>
+      <p:sp>
+        <p:nvSpPr>
+          <p:cNvPr id="6" name="Rounded Rectangle 4">
+            <a:extLst>
+              <a:ext uri="{FF2B5EF4-FFF2-40B4-BE49-F238E27FC236}">
+                <a16:creationId xmlns:a16="http://schemas.microsoft.com/office/drawing/2014/main" id="{8C755BAD-A653-296B-E1A6-FDFC7B1EC2A1}"/>
+              </a:ext>
+            </a:extLst>
+          </p:cNvPr>
+          <p:cNvSpPr/>
+          <p:nvPr/>
+        </p:nvSpPr>
+        <p:spPr>
+          <a:xfrm>
+            <a:off x="0" y="6462940"/>
+            <a:ext cx="12207875" cy="393700"/>
+          </a:xfrm>
+          <a:prstGeom prst="rect">
+            <a:avLst/>
+          </a:prstGeom>
+          <a:solidFill>
+            <a:srgbClr val="5B9BD5"/>
+          </a:solidFill>
+        </p:spPr>
+        <p:style>
+          <a:lnRef idx="2">
+            <a:schemeClr val="accent1">
+              <a:shade val="50000"/>
+            </a:schemeClr>
+          </a:lnRef>
+          <a:fillRef idx="1">
+            <a:schemeClr val="accent1"/>
+          </a:fillRef>
+          <a:effectRef idx="0">
+            <a:schemeClr val="accent1"/>
+          </a:effectRef>
+          <a:fontRef idx="minor">
+            <a:schemeClr val="lt1"/>
+          </a:fontRef>
+        </p:style>
+        <p:txBody>
+          <a:bodyPr anchor="ctr"/>
+          <a:lstStyle/>
+          <a:p>
+            <a:pPr marL="0" marR="0" lvl="0" indent="0" algn="ctr" defTabSz="914400" rtl="0" eaLnBrk="0" fontAlgn="base" latinLnBrk="0" hangingPunct="0">
+              <a:lnSpc>
+                <a:spcPct val="100000"/>
+              </a:lnSpc>
+              <a:spcBef>
+                <a:spcPct val="0"/>
+              </a:spcBef>
+              <a:spcAft>
+                <a:spcPct val="0"/>
+              </a:spcAft>
+              <a:buClrTx/>
+              <a:buSzTx/>
+              <a:buFontTx/>
+              <a:buNone/>
+              <a:defRPr/>
+            </a:pPr>
+            <a:endParaRPr kumimoji="0" lang="en-IN" sz="1800" b="1" i="0" u="none" strike="noStrike" kern="1200" cap="none" spc="0" normalizeH="0" baseline="0" noProof="0" dirty="0">
+              <a:ln>
+                <a:noFill/>
+              </a:ln>
+              <a:solidFill>
+                <a:schemeClr val="tx1"/>
+              </a:solidFill>
+              <a:effectLst/>
+              <a:uLnTx/>
+              <a:uFillTx/>
+              <a:latin typeface="Arial Rounded MT Bold" pitchFamily="34" charset="0"/>
+              <a:ea typeface="+mn-ea"/>
+              <a:cs typeface="+mn-cs"/>
+            </a:endParaRPr>
+          </a:p>
+        </p:txBody>
+      </p:sp>
+      <p:sp>
+        <p:nvSpPr>
+          <p:cNvPr id="7" name="TextBox 6">
+            <a:extLst>
+              <a:ext uri="{FF2B5EF4-FFF2-40B4-BE49-F238E27FC236}">
+                <a16:creationId xmlns:a16="http://schemas.microsoft.com/office/drawing/2014/main" id="{E01C4B55-377E-D156-E629-9161D39CC7DF}"/>
+              </a:ext>
+            </a:extLst>
+          </p:cNvPr>
+          <p:cNvSpPr txBox="1"/>
+          <p:nvPr/>
+        </p:nvSpPr>
+        <p:spPr>
+          <a:xfrm>
+            <a:off x="443971" y="6490513"/>
+            <a:ext cx="11288182" cy="338554"/>
+          </a:xfrm>
+          <a:prstGeom prst="rect">
+            <a:avLst/>
+          </a:prstGeom>
+          <a:noFill/>
+        </p:spPr>
+        <p:txBody>
+          <a:bodyPr wrap="square" rtlCol="0">
+            <a:spAutoFit/>
+          </a:bodyPr>
+          <a:lstStyle/>
+          <a:p>
+            <a:pPr marL="0" marR="0" lvl="0" indent="0" algn="ctr" defTabSz="914400" rtl="0" eaLnBrk="0" fontAlgn="base" latinLnBrk="0" hangingPunct="0">
+              <a:lnSpc>
+                <a:spcPct val="100000"/>
+              </a:lnSpc>
+              <a:spcBef>
+                <a:spcPct val="0"/>
+              </a:spcBef>
+              <a:spcAft>
+                <a:spcPct val="0"/>
+              </a:spcAft>
+              <a:buClrTx/>
+              <a:buSzTx/>
+              <a:buFontTx/>
+              <a:buNone/>
+              <a:defRPr/>
+            </a:pPr>
+            <a:r>
+              <a:rPr kumimoji="0" lang="en-IN" sz="1600" b="1" i="0" u="none" strike="noStrike" kern="1200" cap="none" spc="0" normalizeH="0" baseline="0" noProof="0" dirty="0">
+                <a:ln>
+                  <a:noFill/>
+                </a:ln>
+                <a:solidFill>
+                  <a:schemeClr val="tx1"/>
+                </a:solidFill>
+                <a:effectLst/>
+                <a:uLnTx/>
+                <a:uFillTx/>
+                <a:latin typeface="Arial Rounded MT Bold" pitchFamily="34" charset="0"/>
+                <a:ea typeface="+mn-ea"/>
+                <a:cs typeface="+mn-cs"/>
+              </a:rPr>
+              <a:t>B.Tech III Year – II Sem | Dept of Computational Intelligence| Application Development – II | Project Review</a:t>
+            </a:r>
+          </a:p>
+        </p:txBody>
+      </p:sp>
+      <p:sp>
+        <p:nvSpPr>
+          <p:cNvPr id="3" name="Title 1">
+            <a:extLst>
+              <a:ext uri="{FF2B5EF4-FFF2-40B4-BE49-F238E27FC236}">
+                <a16:creationId xmlns:a16="http://schemas.microsoft.com/office/drawing/2014/main" id="{38ED2CDF-26EE-B6ED-04B7-B59581FC9558}"/>
+              </a:ext>
+            </a:extLst>
+          </p:cNvPr>
+          <p:cNvSpPr txBox="1">
+            <a:spLocks/>
+          </p:cNvSpPr>
+          <p:nvPr/>
+        </p:nvSpPr>
+        <p:spPr>
+          <a:xfrm>
+            <a:off x="443971" y="509588"/>
+            <a:ext cx="10515600" cy="598488"/>
+          </a:xfrm>
+          <a:prstGeom prst="rect">
+            <a:avLst/>
+          </a:prstGeom>
+        </p:spPr>
+        <p:txBody>
+          <a:bodyPr vert="horz" wrap="square" lIns="91440" tIns="45720" rIns="91440" bIns="45720" numCol="1" rtlCol="0" anchor="ctr" anchorCtr="0" compatLnSpc="1">
+            <a:normAutofit fontScale="90000" lnSpcReduction="20000"/>
+          </a:bodyPr>
+          <a:lstStyle>
+            <a:lvl1pPr algn="ctr" defTabSz="914400" rtl="0" eaLnBrk="1" latinLnBrk="0" hangingPunct="1">
+              <a:lnSpc>
+                <a:spcPct val="90000"/>
+              </a:lnSpc>
+              <a:spcBef>
+                <a:spcPct val="0"/>
+              </a:spcBef>
+              <a:buNone/>
+              <a:defRPr sz="6000" kern="1200">
+                <a:solidFill>
+                  <a:schemeClr val="tx1"/>
+                </a:solidFill>
+                <a:latin typeface="+mj-lt"/>
+                <a:ea typeface="+mj-ea"/>
+                <a:cs typeface="+mj-cs"/>
+              </a:defRPr>
+            </a:lvl1pPr>
+          </a:lstStyle>
+          <a:p>
+            <a:pPr algn="l">
+              <a:defRPr/>
+            </a:pPr>
+            <a:r>
+              <a:rPr lang="en-IN" sz="4890" b="1" dirty="0">
+                <a:solidFill>
+                  <a:srgbClr val="00B0F0"/>
+                </a:solidFill>
+                <a:latin typeface="Times New Roman" panose="02020603050405020304" pitchFamily="18" charset="0"/>
+                <a:cs typeface="Times New Roman" panose="02020603050405020304" pitchFamily="18" charset="0"/>
+              </a:rPr>
+              <a:t>References</a:t>
+            </a:r>
+          </a:p>
+        </p:txBody>
+      </p:sp>
+      <p:sp>
+        <p:nvSpPr>
+          <p:cNvPr id="8" name="Rounded Rectangle 4">
+            <a:extLst>
+              <a:ext uri="{FF2B5EF4-FFF2-40B4-BE49-F238E27FC236}">
+                <a16:creationId xmlns:a16="http://schemas.microsoft.com/office/drawing/2014/main" id="{9F60EE9C-28ED-B7AE-7415-B75672CE081E}"/>
+              </a:ext>
+            </a:extLst>
+          </p:cNvPr>
+          <p:cNvSpPr/>
+          <p:nvPr/>
+        </p:nvSpPr>
+        <p:spPr>
+          <a:xfrm>
+            <a:off x="-15875" y="-10805"/>
+            <a:ext cx="12207875" cy="393700"/>
+          </a:xfrm>
+          <a:prstGeom prst="rect">
+            <a:avLst/>
+          </a:prstGeom>
+          <a:solidFill>
+            <a:srgbClr val="5B9BD5"/>
+          </a:solidFill>
+        </p:spPr>
+        <p:style>
+          <a:lnRef idx="2">
+            <a:schemeClr val="accent1">
+              <a:shade val="50000"/>
+            </a:schemeClr>
+          </a:lnRef>
+          <a:fillRef idx="1">
+            <a:schemeClr val="accent1"/>
+          </a:fillRef>
+          <a:effectRef idx="0">
+            <a:schemeClr val="accent1"/>
+          </a:effectRef>
+          <a:fontRef idx="minor">
+            <a:schemeClr val="lt1"/>
+          </a:fontRef>
+        </p:style>
+        <p:txBody>
+          <a:bodyPr anchor="ctr"/>
+          <a:lstStyle/>
+          <a:p>
+            <a:pPr marL="0" marR="0" lvl="0" indent="0" algn="ctr" defTabSz="914400" rtl="0" eaLnBrk="0" fontAlgn="base" latinLnBrk="0" hangingPunct="0">
+              <a:lnSpc>
+                <a:spcPct val="100000"/>
+              </a:lnSpc>
+              <a:spcBef>
+                <a:spcPct val="0"/>
+              </a:spcBef>
+              <a:spcAft>
+                <a:spcPct val="0"/>
+              </a:spcAft>
+              <a:buClrTx/>
+              <a:buSzTx/>
+              <a:buFontTx/>
+              <a:buNone/>
+              <a:defRPr/>
+            </a:pPr>
+            <a:endParaRPr kumimoji="0" lang="en-IN" sz="1800" b="1" i="0" u="none" strike="noStrike" kern="1200" cap="none" spc="0" normalizeH="0" baseline="0" noProof="0" dirty="0">
+              <a:ln>
+                <a:noFill/>
+              </a:ln>
+              <a:solidFill>
+                <a:schemeClr val="tx1"/>
+              </a:solidFill>
+              <a:effectLst/>
+              <a:uLnTx/>
+              <a:uFillTx/>
+              <a:latin typeface="Arial Rounded MT Bold" pitchFamily="34" charset="0"/>
+              <a:ea typeface="+mn-ea"/>
+              <a:cs typeface="+mn-cs"/>
+            </a:endParaRPr>
+          </a:p>
+        </p:txBody>
+      </p:sp>
+      <p:sp>
+        <p:nvSpPr>
+          <p:cNvPr id="9" name="TextBox 8">
+            <a:extLst>
+              <a:ext uri="{FF2B5EF4-FFF2-40B4-BE49-F238E27FC236}">
+                <a16:creationId xmlns:a16="http://schemas.microsoft.com/office/drawing/2014/main" id="{C6EC8E6C-C765-7F74-85EA-0F4F3C236287}"/>
+              </a:ext>
+            </a:extLst>
+          </p:cNvPr>
+          <p:cNvSpPr txBox="1"/>
+          <p:nvPr/>
+        </p:nvSpPr>
+        <p:spPr>
+          <a:xfrm>
+            <a:off x="2801516" y="16768"/>
+            <a:ext cx="6588967" cy="338554"/>
+          </a:xfrm>
+          <a:prstGeom prst="rect">
+            <a:avLst/>
+          </a:prstGeom>
+          <a:noFill/>
+        </p:spPr>
+        <p:txBody>
+          <a:bodyPr wrap="square" rtlCol="0">
+            <a:spAutoFit/>
+          </a:bodyPr>
+          <a:lstStyle/>
+          <a:p>
+            <a:r>
+              <a:rPr lang="en-US" sz="1600" b="1" dirty="0">
+                <a:latin typeface="Arial Rounded MT Bold" panose="020F0704030504030204" pitchFamily="34" charset="0"/>
+                <a:cs typeface="Arial" panose="020B0604020202020204" pitchFamily="34" charset="0"/>
+              </a:rPr>
+              <a:t>MALLA REDDY COLLEGE OF ENGINEERING AND TECHNOLOGY</a:t>
+            </a:r>
+            <a:endParaRPr lang="x-none" sz="1600" b="1" dirty="0">
+              <a:latin typeface="Arial Rounded MT Bold" panose="020F0704030504030204" pitchFamily="34" charset="0"/>
+              <a:cs typeface="Arial" panose="020B0604020202020204" pitchFamily="34" charset="0"/>
+            </a:endParaRPr>
+          </a:p>
+        </p:txBody>
+      </p:sp>
+      <p:pic>
+        <p:nvPicPr>
+          <p:cNvPr id="10" name="Picture 6">
+            <a:extLst>
+              <a:ext uri="{FF2B5EF4-FFF2-40B4-BE49-F238E27FC236}">
+                <a16:creationId xmlns:a16="http://schemas.microsoft.com/office/drawing/2014/main" id="{A035FDDB-A166-B887-B7BB-A76BC203A446}"/>
+              </a:ext>
+            </a:extLst>
+          </p:cNvPr>
+          <p:cNvPicPr>
+            <a:picLocks noChangeAspect="1"/>
+          </p:cNvPicPr>
+          <p:nvPr/>
+        </p:nvPicPr>
+        <p:blipFill>
+          <a:blip r:embed="rId2" cstate="print"/>
+          <a:stretch>
+            <a:fillRect/>
+          </a:stretch>
+        </p:blipFill>
+        <p:spPr>
+          <a:xfrm>
+            <a:off x="10899775" y="-128587"/>
+            <a:ext cx="1276350" cy="1276350"/>
+          </a:xfrm>
+          <a:prstGeom prst="rect">
+            <a:avLst/>
+          </a:prstGeom>
+          <a:noFill/>
+          <a:ln w="9525">
+            <a:noFill/>
+          </a:ln>
+        </p:spPr>
+      </p:pic>
+      <p:sp>
+        <p:nvSpPr>
+          <p:cNvPr id="13" name="Slide Number Placeholder 3">
+            <a:extLst>
+              <a:ext uri="{FF2B5EF4-FFF2-40B4-BE49-F238E27FC236}">
+                <a16:creationId xmlns:a16="http://schemas.microsoft.com/office/drawing/2014/main" id="{551058AA-E618-1545-7EED-8E4982D0C641}"/>
+              </a:ext>
+            </a:extLst>
+          </p:cNvPr>
+          <p:cNvSpPr txBox="1">
+            <a:spLocks/>
+          </p:cNvSpPr>
+          <p:nvPr/>
+        </p:nvSpPr>
+        <p:spPr>
+          <a:xfrm>
+            <a:off x="9067800" y="6176963"/>
+            <a:ext cx="2743200" cy="365125"/>
+          </a:xfrm>
+          <a:prstGeom prst="rect">
+            <a:avLst/>
+          </a:prstGeom>
+          <a:noFill/>
+          <a:ln>
+            <a:noFill/>
+          </a:ln>
+        </p:spPr>
+        <p:txBody>
+          <a:bodyPr anchor="ctr" anchorCtr="0"/>
+          <a:lstStyle>
+            <a:defPPr>
+              <a:defRPr lang="x-none"/>
+            </a:defPPr>
+            <a:lvl1pPr marL="0" algn="l" defTabSz="914400" rtl="0" eaLnBrk="1" latinLnBrk="0" hangingPunct="1">
+              <a:defRPr sz="1800" kern="1200">
+                <a:solidFill>
+                  <a:schemeClr val="tx1"/>
+                </a:solidFill>
+                <a:latin typeface="+mn-lt"/>
+                <a:ea typeface="+mn-ea"/>
+                <a:cs typeface="+mn-cs"/>
+              </a:defRPr>
+            </a:lvl1pPr>
+            <a:lvl2pPr marL="457200" algn="l" defTabSz="914400" rtl="0" eaLnBrk="1" latinLnBrk="0" hangingPunct="1">
+              <a:defRPr sz="1800" kern="1200">
+                <a:solidFill>
+                  <a:schemeClr val="tx1"/>
+                </a:solidFill>
+                <a:latin typeface="+mn-lt"/>
+                <a:ea typeface="+mn-ea"/>
+                <a:cs typeface="+mn-cs"/>
+              </a:defRPr>
+            </a:lvl2pPr>
+            <a:lvl3pPr marL="914400" algn="l" defTabSz="914400" rtl="0" eaLnBrk="1" latinLnBrk="0" hangingPunct="1">
+              <a:defRPr sz="1800" kern="1200">
+                <a:solidFill>
+                  <a:schemeClr val="tx1"/>
+                </a:solidFill>
+                <a:latin typeface="+mn-lt"/>
+                <a:ea typeface="+mn-ea"/>
+                <a:cs typeface="+mn-cs"/>
+              </a:defRPr>
+            </a:lvl3pPr>
+            <a:lvl4pPr marL="1371600" algn="l" defTabSz="914400" rtl="0" eaLnBrk="1" latinLnBrk="0" hangingPunct="1">
+              <a:defRPr sz="1800" kern="1200">
+                <a:solidFill>
+                  <a:schemeClr val="tx1"/>
+                </a:solidFill>
+                <a:latin typeface="+mn-lt"/>
+                <a:ea typeface="+mn-ea"/>
+                <a:cs typeface="+mn-cs"/>
+              </a:defRPr>
+            </a:lvl4pPr>
+            <a:lvl5pPr marL="1828800" algn="l" defTabSz="914400" rtl="0" eaLnBrk="1" latinLnBrk="0" hangingPunct="1">
+              <a:defRPr sz="1800" kern="1200">
+                <a:solidFill>
+                  <a:schemeClr val="tx1"/>
+                </a:solidFill>
+                <a:latin typeface="+mn-lt"/>
+                <a:ea typeface="+mn-ea"/>
+                <a:cs typeface="+mn-cs"/>
+              </a:defRPr>
+            </a:lvl5pPr>
+            <a:lvl6pPr marL="2286000" algn="l" defTabSz="914400" rtl="0" eaLnBrk="1" latinLnBrk="0" hangingPunct="1">
+              <a:defRPr sz="1800" kern="1200">
+                <a:solidFill>
+                  <a:schemeClr val="tx1"/>
+                </a:solidFill>
+                <a:latin typeface="+mn-lt"/>
+                <a:ea typeface="+mn-ea"/>
+                <a:cs typeface="+mn-cs"/>
+              </a:defRPr>
+            </a:lvl6pPr>
+            <a:lvl7pPr marL="2743200" algn="l" defTabSz="914400" rtl="0" eaLnBrk="1" latinLnBrk="0" hangingPunct="1">
+              <a:defRPr sz="1800" kern="1200">
+                <a:solidFill>
+                  <a:schemeClr val="tx1"/>
+                </a:solidFill>
+                <a:latin typeface="+mn-lt"/>
+                <a:ea typeface="+mn-ea"/>
+                <a:cs typeface="+mn-cs"/>
+              </a:defRPr>
+            </a:lvl7pPr>
+            <a:lvl8pPr marL="3200400" algn="l" defTabSz="914400" rtl="0" eaLnBrk="1" latinLnBrk="0" hangingPunct="1">
+              <a:defRPr sz="1800" kern="1200">
+                <a:solidFill>
+                  <a:schemeClr val="tx1"/>
+                </a:solidFill>
+                <a:latin typeface="+mn-lt"/>
+                <a:ea typeface="+mn-ea"/>
+                <a:cs typeface="+mn-cs"/>
+              </a:defRPr>
+            </a:lvl8pPr>
+            <a:lvl9pPr marL="3657600" algn="l" defTabSz="914400" rtl="0" eaLnBrk="1" latinLnBrk="0" hangingPunct="1">
+              <a:defRPr sz="1800" kern="1200">
+                <a:solidFill>
+                  <a:schemeClr val="tx1"/>
+                </a:solidFill>
+                <a:latin typeface="+mn-lt"/>
+                <a:ea typeface="+mn-ea"/>
+                <a:cs typeface="+mn-cs"/>
+              </a:defRPr>
+            </a:lvl9pPr>
+          </a:lstStyle>
+          <a:p>
+            <a:pPr algn="r">
+              <a:spcBef>
+                <a:spcPct val="0"/>
+              </a:spcBef>
+            </a:pPr>
+            <a:fld id="{9A0DB2DC-4C9A-4742-B13C-FB6460FD3503}" type="slidenum">
+              <a:rPr lang="en-IN" altLang="en-US" sz="1200" b="1" smtClean="0">
+                <a:solidFill>
+                  <a:srgbClr val="C00000"/>
+                </a:solidFill>
+              </a:rPr>
+              <a:pPr algn="r">
+                <a:spcBef>
+                  <a:spcPct val="0"/>
+                </a:spcBef>
+              </a:pPr>
+              <a:t>27</a:t>
+            </a:fld>
+            <a:endParaRPr lang="en-IN" altLang="en-US" sz="1200" b="1" dirty="0">
+              <a:solidFill>
+                <a:srgbClr val="C00000"/>
+              </a:solidFill>
+            </a:endParaRPr>
+          </a:p>
+        </p:txBody>
+      </p:sp>
+      <p:sp>
+        <p:nvSpPr>
+          <p:cNvPr id="2" name="Content Placeholder 2">
+            <a:extLst>
+              <a:ext uri="{FF2B5EF4-FFF2-40B4-BE49-F238E27FC236}">
+                <a16:creationId xmlns:a16="http://schemas.microsoft.com/office/drawing/2014/main" id="{8E2D4ADF-16B5-57DF-66B4-A82797B994CF}"/>
+              </a:ext>
+            </a:extLst>
+          </p:cNvPr>
+          <p:cNvSpPr txBox="1">
+            <a:spLocks/>
+          </p:cNvSpPr>
+          <p:nvPr/>
+        </p:nvSpPr>
+        <p:spPr>
+          <a:xfrm>
+            <a:off x="901382" y="1112431"/>
+            <a:ext cx="10405110" cy="5351145"/>
+          </a:xfrm>
+          <a:prstGeom prst="rect">
+            <a:avLst/>
+          </a:prstGeom>
+        </p:spPr>
+        <p:txBody>
+          <a:bodyPr vert="horz" wrap="square" lIns="91440" tIns="45720" rIns="91440" bIns="45720" rtlCol="0" anchor="t" anchorCtr="0">
+            <a:normAutofit/>
+          </a:bodyPr>
+          <a:lstStyle>
+            <a:lvl1pPr marL="0" indent="0" algn="ctr" defTabSz="914400" rtl="0" eaLnBrk="1" latinLnBrk="0" hangingPunct="1">
+              <a:lnSpc>
+                <a:spcPct val="90000"/>
+              </a:lnSpc>
+              <a:spcBef>
+                <a:spcPts val="1000"/>
+              </a:spcBef>
+              <a:buFont typeface="Arial" panose="020B0604020202020204" pitchFamily="34" charset="0"/>
+              <a:buNone/>
+              <a:defRPr sz="2400" kern="1200">
+                <a:solidFill>
+                  <a:schemeClr val="tx1"/>
+                </a:solidFill>
+                <a:latin typeface="+mn-lt"/>
+                <a:ea typeface="+mn-ea"/>
+                <a:cs typeface="+mn-cs"/>
+              </a:defRPr>
+            </a:lvl1pPr>
+            <a:lvl2pPr marL="457200" indent="0" algn="ctr" defTabSz="914400" rtl="0" eaLnBrk="1" latinLnBrk="0" hangingPunct="1">
+              <a:lnSpc>
+                <a:spcPct val="90000"/>
+              </a:lnSpc>
+              <a:spcBef>
+                <a:spcPts val="500"/>
+              </a:spcBef>
+              <a:buFont typeface="Arial" panose="020B0604020202020204" pitchFamily="34" charset="0"/>
+              <a:buNone/>
+              <a:defRPr sz="2000" kern="1200">
+                <a:solidFill>
+                  <a:schemeClr val="tx1"/>
+                </a:solidFill>
+                <a:latin typeface="+mn-lt"/>
+                <a:ea typeface="+mn-ea"/>
+                <a:cs typeface="+mn-cs"/>
+              </a:defRPr>
+            </a:lvl2pPr>
+            <a:lvl3pPr marL="914400" indent="0" algn="ctr" defTabSz="914400" rtl="0" eaLnBrk="1" latinLnBrk="0" hangingPunct="1">
+              <a:lnSpc>
+                <a:spcPct val="90000"/>
+              </a:lnSpc>
+              <a:spcBef>
+                <a:spcPts val="500"/>
+              </a:spcBef>
+              <a:buFont typeface="Arial" panose="020B0604020202020204" pitchFamily="34" charset="0"/>
+              <a:buNone/>
+              <a:defRPr sz="1800" kern="1200">
+                <a:solidFill>
+                  <a:schemeClr val="tx1"/>
+                </a:solidFill>
+                <a:latin typeface="+mn-lt"/>
+                <a:ea typeface="+mn-ea"/>
+                <a:cs typeface="+mn-cs"/>
+              </a:defRPr>
+            </a:lvl3pPr>
+            <a:lvl4pPr marL="1371600" indent="0" algn="ctr" defTabSz="914400" rtl="0" eaLnBrk="1" latinLnBrk="0" hangingPunct="1">
+              <a:lnSpc>
+                <a:spcPct val="90000"/>
+              </a:lnSpc>
+              <a:spcBef>
+                <a:spcPts val="500"/>
+              </a:spcBef>
+              <a:buFont typeface="Arial" panose="020B0604020202020204" pitchFamily="34" charset="0"/>
+              <a:buNone/>
+              <a:defRPr sz="1600" kern="1200">
+                <a:solidFill>
+                  <a:schemeClr val="tx1"/>
+                </a:solidFill>
+                <a:latin typeface="+mn-lt"/>
+                <a:ea typeface="+mn-ea"/>
+                <a:cs typeface="+mn-cs"/>
+              </a:defRPr>
+            </a:lvl4pPr>
+            <a:lvl5pPr marL="1828800" indent="0" algn="ctr" defTabSz="914400" rtl="0" eaLnBrk="1" latinLnBrk="0" hangingPunct="1">
+              <a:lnSpc>
+                <a:spcPct val="90000"/>
+              </a:lnSpc>
+              <a:spcBef>
+                <a:spcPts val="500"/>
+              </a:spcBef>
+              <a:buFont typeface="Arial" panose="020B0604020202020204" pitchFamily="34" charset="0"/>
+              <a:buNone/>
+              <a:defRPr sz="1600" kern="1200">
+                <a:solidFill>
+                  <a:schemeClr val="tx1"/>
+                </a:solidFill>
+                <a:latin typeface="+mn-lt"/>
+                <a:ea typeface="+mn-ea"/>
+                <a:cs typeface="+mn-cs"/>
+              </a:defRPr>
+            </a:lvl5pPr>
+            <a:lvl6pPr marL="2286000" indent="0" algn="ctr" defTabSz="914400" rtl="0" eaLnBrk="1" latinLnBrk="0" hangingPunct="1">
+              <a:lnSpc>
+                <a:spcPct val="90000"/>
+              </a:lnSpc>
+              <a:spcBef>
+                <a:spcPts val="500"/>
+              </a:spcBef>
+              <a:buFont typeface="Arial" panose="020B0604020202020204" pitchFamily="34" charset="0"/>
+              <a:buNone/>
+              <a:defRPr sz="1600" kern="1200">
+                <a:solidFill>
+                  <a:schemeClr val="tx1"/>
+                </a:solidFill>
+                <a:latin typeface="+mn-lt"/>
+                <a:ea typeface="+mn-ea"/>
+                <a:cs typeface="+mn-cs"/>
+              </a:defRPr>
+            </a:lvl6pPr>
+            <a:lvl7pPr marL="2743200" indent="0" algn="ctr" defTabSz="914400" rtl="0" eaLnBrk="1" latinLnBrk="0" hangingPunct="1">
+              <a:lnSpc>
+                <a:spcPct val="90000"/>
+              </a:lnSpc>
+              <a:spcBef>
+                <a:spcPts val="500"/>
+              </a:spcBef>
+              <a:buFont typeface="Arial" panose="020B0604020202020204" pitchFamily="34" charset="0"/>
+              <a:buNone/>
+              <a:defRPr sz="1600" kern="1200">
+                <a:solidFill>
+                  <a:schemeClr val="tx1"/>
+                </a:solidFill>
+                <a:latin typeface="+mn-lt"/>
+                <a:ea typeface="+mn-ea"/>
+                <a:cs typeface="+mn-cs"/>
+              </a:defRPr>
+            </a:lvl7pPr>
+            <a:lvl8pPr marL="3200400" indent="0" algn="ctr" defTabSz="914400" rtl="0" eaLnBrk="1" latinLnBrk="0" hangingPunct="1">
+              <a:lnSpc>
+                <a:spcPct val="90000"/>
+              </a:lnSpc>
+              <a:spcBef>
+                <a:spcPts val="500"/>
+              </a:spcBef>
+              <a:buFont typeface="Arial" panose="020B0604020202020204" pitchFamily="34" charset="0"/>
+              <a:buNone/>
+              <a:defRPr sz="1600" kern="1200">
+                <a:solidFill>
+                  <a:schemeClr val="tx1"/>
+                </a:solidFill>
+                <a:latin typeface="+mn-lt"/>
+                <a:ea typeface="+mn-ea"/>
+                <a:cs typeface="+mn-cs"/>
+              </a:defRPr>
+            </a:lvl8pPr>
+            <a:lvl9pPr marL="3657600" indent="0" algn="ctr" defTabSz="914400" rtl="0" eaLnBrk="1" latinLnBrk="0" hangingPunct="1">
+              <a:lnSpc>
+                <a:spcPct val="90000"/>
+              </a:lnSpc>
+              <a:spcBef>
+                <a:spcPts val="500"/>
+              </a:spcBef>
+              <a:buFont typeface="Arial" panose="020B0604020202020204" pitchFamily="34" charset="0"/>
+              <a:buNone/>
+              <a:defRPr sz="1600" kern="1200">
+                <a:solidFill>
+                  <a:schemeClr val="tx1"/>
+                </a:solidFill>
+                <a:latin typeface="+mn-lt"/>
+                <a:ea typeface="+mn-ea"/>
+                <a:cs typeface="+mn-cs"/>
+              </a:defRPr>
+            </a:lvl9pPr>
+          </a:lstStyle>
+          <a:p>
+            <a:pPr lvl="0" algn="l" eaLnBrk="0" fontAlgn="base" hangingPunct="0">
+              <a:lnSpc>
+                <a:spcPct val="150000"/>
+              </a:lnSpc>
+              <a:spcBef>
+                <a:spcPct val="0"/>
+              </a:spcBef>
+              <a:spcAft>
+                <a:spcPct val="0"/>
+              </a:spcAft>
+            </a:pPr>
+            <a:r>
+              <a:rPr lang="en-US" altLang="en-US" b="1" dirty="0">
+                <a:latin typeface="Times New Roman" pitchFamily="18" charset="0"/>
+                <a:cs typeface="Times New Roman" pitchFamily="18" charset="0"/>
+              </a:rPr>
+              <a:t>[1] AI-Powered Content Creation </a:t>
+            </a:r>
+            <a:r>
               <a:rPr lang="en-US" altLang="en-US" dirty="0">
                 <a:latin typeface="Times New Roman" pitchFamily="18" charset="0"/>
                 <a:cs typeface="Times New Roman" pitchFamily="18" charset="0"/>
               </a:rPr>
-              <a:t>Offers flexibility for user modifications at any stage.</a:t>
+              <a:t>– A study on Generative AI in multimedia production.</a:t>
             </a:r>
           </a:p>
           <a:p>
@@ -14263,15 +17666,47 @@
               <a:spcAft>
                 <a:spcPct val="0"/>
               </a:spcAft>
-              <a:buFontTx/>
-              <a:buChar char="•"/>
             </a:pPr>
+            <a:r>
+              <a:rPr lang="en-US" altLang="en-US" b="1" dirty="0">
+                <a:latin typeface="Times New Roman" pitchFamily="18" charset="0"/>
+                <a:cs typeface="Times New Roman" pitchFamily="18" charset="0"/>
+              </a:rPr>
+              <a:t>[2] Text-to-Video AI Models </a:t>
+            </a:r>
             <a:r>
               <a:rPr lang="en-US" altLang="en-US" dirty="0">
                 <a:latin typeface="Times New Roman" pitchFamily="18" charset="0"/>
                 <a:cs typeface="Times New Roman" pitchFamily="18" charset="0"/>
               </a:rPr>
-              <a:t>Provides an efficient, user-friendly solution for producing high-quality, social media-ready videos. </a:t>
+              <a:t>– Research on Natural Language Processing (NLP) and Deep Learning for automated video synthesis.</a:t>
+            </a:r>
+          </a:p>
+          <a:p>
+            <a:pPr lvl="0" algn="l" eaLnBrk="0" fontAlgn="base" hangingPunct="0">
+              <a:lnSpc>
+                <a:spcPct val="150000"/>
+              </a:lnSpc>
+              <a:spcBef>
+                <a:spcPct val="0"/>
+              </a:spcBef>
+              <a:spcAft>
+                <a:spcPct val="0"/>
+              </a:spcAft>
+            </a:pPr>
+            <a:r>
+              <a:rPr lang="en-US" altLang="en-US" b="1" dirty="0">
+                <a:latin typeface="Times New Roman" pitchFamily="18" charset="0"/>
+                <a:cs typeface="Times New Roman" pitchFamily="18" charset="0"/>
+              </a:rPr>
+              <a:t>[3] Ethical AI Guidelines for Content Creation </a:t>
+            </a:r>
+            <a:r>
+              <a:rPr lang="en-US" altLang="en-US" dirty="0">
+                <a:latin typeface="Times New Roman" pitchFamily="18" charset="0"/>
+                <a:cs typeface="Times New Roman" pitchFamily="18" charset="0"/>
+              </a:rPr>
+              <a:t>– IEEE standards ensuring AI-generated media complies with ethical AI guidelines.</a:t>
             </a:r>
           </a:p>
         </p:txBody>
@@ -14279,7 +17714,811 @@
     </p:spTree>
     <p:extLst>
       <p:ext uri="{BB962C8B-B14F-4D97-AF65-F5344CB8AC3E}">
-        <p14:creationId xmlns:p14="http://schemas.microsoft.com/office/powerpoint/2010/main" val="854143978"/>
+        <p14:creationId xmlns:p14="http://schemas.microsoft.com/office/powerpoint/2010/main" val="3221988536"/>
+      </p:ext>
+    </p:extLst>
+  </p:cSld>
+  <p:clrMapOvr>
+    <a:masterClrMapping/>
+  </p:clrMapOvr>
+</p:sld>
+</file>
+
+<file path=ppt/slides/slide28.xml><?xml version="1.0" encoding="utf-8"?>
+<p:sld xmlns:a="http://schemas.openxmlformats.org/drawingml/2006/main" xmlns:r="http://schemas.openxmlformats.org/officeDocument/2006/relationships" xmlns:p="http://schemas.openxmlformats.org/presentationml/2006/main">
+  <p:cSld>
+    <p:spTree>
+      <p:nvGrpSpPr>
+        <p:cNvPr id="1" name="">
+          <a:extLst>
+            <a:ext uri="{FF2B5EF4-FFF2-40B4-BE49-F238E27FC236}">
+              <a16:creationId xmlns:a16="http://schemas.microsoft.com/office/drawing/2014/main" id="{711576B4-012A-F0FB-5558-4361EF3967F2}"/>
+            </a:ext>
+          </a:extLst>
+        </p:cNvPr>
+        <p:cNvGrpSpPr/>
+        <p:nvPr/>
+      </p:nvGrpSpPr>
+      <p:grpSpPr>
+        <a:xfrm>
+          <a:off x="0" y="0"/>
+          <a:ext cx="0" cy="0"/>
+          <a:chOff x="0" y="0"/>
+          <a:chExt cx="0" cy="0"/>
+        </a:xfrm>
+      </p:grpSpPr>
+      <p:sp>
+        <p:nvSpPr>
+          <p:cNvPr id="6" name="Rounded Rectangle 4">
+            <a:extLst>
+              <a:ext uri="{FF2B5EF4-FFF2-40B4-BE49-F238E27FC236}">
+                <a16:creationId xmlns:a16="http://schemas.microsoft.com/office/drawing/2014/main" id="{B5D12A3C-AF2C-B59A-8154-0139D1F6DFE5}"/>
+              </a:ext>
+            </a:extLst>
+          </p:cNvPr>
+          <p:cNvSpPr/>
+          <p:nvPr/>
+        </p:nvSpPr>
+        <p:spPr>
+          <a:xfrm>
+            <a:off x="0" y="6462940"/>
+            <a:ext cx="12207875" cy="393700"/>
+          </a:xfrm>
+          <a:prstGeom prst="rect">
+            <a:avLst/>
+          </a:prstGeom>
+          <a:solidFill>
+            <a:srgbClr val="5B9BD5"/>
+          </a:solidFill>
+        </p:spPr>
+        <p:style>
+          <a:lnRef idx="2">
+            <a:schemeClr val="accent1">
+              <a:shade val="50000"/>
+            </a:schemeClr>
+          </a:lnRef>
+          <a:fillRef idx="1">
+            <a:schemeClr val="accent1"/>
+          </a:fillRef>
+          <a:effectRef idx="0">
+            <a:schemeClr val="accent1"/>
+          </a:effectRef>
+          <a:fontRef idx="minor">
+            <a:schemeClr val="lt1"/>
+          </a:fontRef>
+        </p:style>
+        <p:txBody>
+          <a:bodyPr anchor="ctr"/>
+          <a:lstStyle/>
+          <a:p>
+            <a:pPr marL="0" marR="0" lvl="0" indent="0" algn="ctr" defTabSz="914400" rtl="0" eaLnBrk="0" fontAlgn="base" latinLnBrk="0" hangingPunct="0">
+              <a:lnSpc>
+                <a:spcPct val="100000"/>
+              </a:lnSpc>
+              <a:spcBef>
+                <a:spcPct val="0"/>
+              </a:spcBef>
+              <a:spcAft>
+                <a:spcPct val="0"/>
+              </a:spcAft>
+              <a:buClrTx/>
+              <a:buSzTx/>
+              <a:buFontTx/>
+              <a:buNone/>
+              <a:defRPr/>
+            </a:pPr>
+            <a:endParaRPr kumimoji="0" lang="en-IN" sz="1800" b="1" i="0" u="none" strike="noStrike" kern="1200" cap="none" spc="0" normalizeH="0" baseline="0" noProof="0" dirty="0">
+              <a:ln>
+                <a:noFill/>
+              </a:ln>
+              <a:solidFill>
+                <a:schemeClr val="tx1"/>
+              </a:solidFill>
+              <a:effectLst/>
+              <a:uLnTx/>
+              <a:uFillTx/>
+              <a:latin typeface="Arial Rounded MT Bold" pitchFamily="34" charset="0"/>
+              <a:ea typeface="+mn-ea"/>
+              <a:cs typeface="+mn-cs"/>
+            </a:endParaRPr>
+          </a:p>
+        </p:txBody>
+      </p:sp>
+      <p:sp>
+        <p:nvSpPr>
+          <p:cNvPr id="7" name="TextBox 6">
+            <a:extLst>
+              <a:ext uri="{FF2B5EF4-FFF2-40B4-BE49-F238E27FC236}">
+                <a16:creationId xmlns:a16="http://schemas.microsoft.com/office/drawing/2014/main" id="{1E4D8128-FA5A-65D0-7B7C-E07DD63BF165}"/>
+              </a:ext>
+            </a:extLst>
+          </p:cNvPr>
+          <p:cNvSpPr txBox="1"/>
+          <p:nvPr/>
+        </p:nvSpPr>
+        <p:spPr>
+          <a:xfrm>
+            <a:off x="443971" y="6490513"/>
+            <a:ext cx="11288182" cy="338554"/>
+          </a:xfrm>
+          <a:prstGeom prst="rect">
+            <a:avLst/>
+          </a:prstGeom>
+          <a:noFill/>
+        </p:spPr>
+        <p:txBody>
+          <a:bodyPr wrap="square" rtlCol="0">
+            <a:spAutoFit/>
+          </a:bodyPr>
+          <a:lstStyle/>
+          <a:p>
+            <a:pPr marL="0" marR="0" lvl="0" indent="0" algn="ctr" defTabSz="914400" rtl="0" eaLnBrk="0" fontAlgn="base" latinLnBrk="0" hangingPunct="0">
+              <a:lnSpc>
+                <a:spcPct val="100000"/>
+              </a:lnSpc>
+              <a:spcBef>
+                <a:spcPct val="0"/>
+              </a:spcBef>
+              <a:spcAft>
+                <a:spcPct val="0"/>
+              </a:spcAft>
+              <a:buClrTx/>
+              <a:buSzTx/>
+              <a:buFontTx/>
+              <a:buNone/>
+              <a:defRPr/>
+            </a:pPr>
+            <a:r>
+              <a:rPr kumimoji="0" lang="en-IN" sz="1600" b="1" i="0" u="none" strike="noStrike" kern="1200" cap="none" spc="0" normalizeH="0" baseline="0" noProof="0" dirty="0">
+                <a:ln>
+                  <a:noFill/>
+                </a:ln>
+                <a:solidFill>
+                  <a:schemeClr val="tx1"/>
+                </a:solidFill>
+                <a:effectLst/>
+                <a:uLnTx/>
+                <a:uFillTx/>
+                <a:latin typeface="Arial Rounded MT Bold" pitchFamily="34" charset="0"/>
+                <a:ea typeface="+mn-ea"/>
+                <a:cs typeface="+mn-cs"/>
+              </a:rPr>
+              <a:t>B.Tech III Year – II Sem | Dept of Computational Intelligence| Application Development – II | Project Review</a:t>
+            </a:r>
+          </a:p>
+        </p:txBody>
+      </p:sp>
+      <p:sp>
+        <p:nvSpPr>
+          <p:cNvPr id="3" name="Title 1">
+            <a:extLst>
+              <a:ext uri="{FF2B5EF4-FFF2-40B4-BE49-F238E27FC236}">
+                <a16:creationId xmlns:a16="http://schemas.microsoft.com/office/drawing/2014/main" id="{ADE4EF08-71A0-FFDF-D0A5-DC1F2DEFB6FA}"/>
+              </a:ext>
+            </a:extLst>
+          </p:cNvPr>
+          <p:cNvSpPr txBox="1">
+            <a:spLocks/>
+          </p:cNvSpPr>
+          <p:nvPr/>
+        </p:nvSpPr>
+        <p:spPr>
+          <a:xfrm>
+            <a:off x="4579569" y="1919901"/>
+            <a:ext cx="3016984" cy="598488"/>
+          </a:xfrm>
+          <a:prstGeom prst="rect">
+            <a:avLst/>
+          </a:prstGeom>
+        </p:spPr>
+        <p:txBody>
+          <a:bodyPr vert="horz" wrap="square" lIns="91440" tIns="45720" rIns="91440" bIns="45720" numCol="1" rtlCol="0" anchor="ctr" anchorCtr="0" compatLnSpc="1">
+            <a:normAutofit fontScale="90000" lnSpcReduction="20000"/>
+          </a:bodyPr>
+          <a:lstStyle>
+            <a:lvl1pPr algn="ctr" defTabSz="914400" rtl="0" eaLnBrk="1" latinLnBrk="0" hangingPunct="1">
+              <a:lnSpc>
+                <a:spcPct val="90000"/>
+              </a:lnSpc>
+              <a:spcBef>
+                <a:spcPct val="0"/>
+              </a:spcBef>
+              <a:buNone/>
+              <a:defRPr sz="6000" kern="1200">
+                <a:solidFill>
+                  <a:schemeClr val="tx1"/>
+                </a:solidFill>
+                <a:latin typeface="+mj-lt"/>
+                <a:ea typeface="+mj-ea"/>
+                <a:cs typeface="+mj-cs"/>
+              </a:defRPr>
+            </a:lvl1pPr>
+          </a:lstStyle>
+          <a:p>
+            <a:pPr algn="l">
+              <a:defRPr/>
+            </a:pPr>
+            <a:r>
+              <a:rPr lang="en-IN" sz="4890" b="1" dirty="0">
+                <a:solidFill>
+                  <a:srgbClr val="00B0F0"/>
+                </a:solidFill>
+                <a:latin typeface="Times New Roman" panose="02020603050405020304" pitchFamily="18" charset="0"/>
+                <a:cs typeface="Times New Roman" panose="02020603050405020304" pitchFamily="18" charset="0"/>
+              </a:rPr>
+              <a:t>Thank you</a:t>
+            </a:r>
+          </a:p>
+        </p:txBody>
+      </p:sp>
+      <p:sp>
+        <p:nvSpPr>
+          <p:cNvPr id="8" name="Rounded Rectangle 4">
+            <a:extLst>
+              <a:ext uri="{FF2B5EF4-FFF2-40B4-BE49-F238E27FC236}">
+                <a16:creationId xmlns:a16="http://schemas.microsoft.com/office/drawing/2014/main" id="{7C64CD4D-BC5A-173E-6473-33DC051203B6}"/>
+              </a:ext>
+            </a:extLst>
+          </p:cNvPr>
+          <p:cNvSpPr/>
+          <p:nvPr/>
+        </p:nvSpPr>
+        <p:spPr>
+          <a:xfrm>
+            <a:off x="-15875" y="-10805"/>
+            <a:ext cx="12207875" cy="393700"/>
+          </a:xfrm>
+          <a:prstGeom prst="rect">
+            <a:avLst/>
+          </a:prstGeom>
+          <a:solidFill>
+            <a:srgbClr val="5B9BD5"/>
+          </a:solidFill>
+        </p:spPr>
+        <p:style>
+          <a:lnRef idx="2">
+            <a:schemeClr val="accent1">
+              <a:shade val="50000"/>
+            </a:schemeClr>
+          </a:lnRef>
+          <a:fillRef idx="1">
+            <a:schemeClr val="accent1"/>
+          </a:fillRef>
+          <a:effectRef idx="0">
+            <a:schemeClr val="accent1"/>
+          </a:effectRef>
+          <a:fontRef idx="minor">
+            <a:schemeClr val="lt1"/>
+          </a:fontRef>
+        </p:style>
+        <p:txBody>
+          <a:bodyPr anchor="ctr"/>
+          <a:lstStyle/>
+          <a:p>
+            <a:pPr marL="0" marR="0" lvl="0" indent="0" algn="ctr" defTabSz="914400" rtl="0" eaLnBrk="0" fontAlgn="base" latinLnBrk="0" hangingPunct="0">
+              <a:lnSpc>
+                <a:spcPct val="100000"/>
+              </a:lnSpc>
+              <a:spcBef>
+                <a:spcPct val="0"/>
+              </a:spcBef>
+              <a:spcAft>
+                <a:spcPct val="0"/>
+              </a:spcAft>
+              <a:buClrTx/>
+              <a:buSzTx/>
+              <a:buFontTx/>
+              <a:buNone/>
+              <a:defRPr/>
+            </a:pPr>
+            <a:endParaRPr kumimoji="0" lang="en-IN" sz="1800" b="1" i="0" u="none" strike="noStrike" kern="1200" cap="none" spc="0" normalizeH="0" baseline="0" noProof="0" dirty="0">
+              <a:ln>
+                <a:noFill/>
+              </a:ln>
+              <a:solidFill>
+                <a:schemeClr val="tx1"/>
+              </a:solidFill>
+              <a:effectLst/>
+              <a:uLnTx/>
+              <a:uFillTx/>
+              <a:latin typeface="Arial Rounded MT Bold" pitchFamily="34" charset="0"/>
+              <a:ea typeface="+mn-ea"/>
+              <a:cs typeface="+mn-cs"/>
+            </a:endParaRPr>
+          </a:p>
+        </p:txBody>
+      </p:sp>
+      <p:sp>
+        <p:nvSpPr>
+          <p:cNvPr id="9" name="TextBox 8">
+            <a:extLst>
+              <a:ext uri="{FF2B5EF4-FFF2-40B4-BE49-F238E27FC236}">
+                <a16:creationId xmlns:a16="http://schemas.microsoft.com/office/drawing/2014/main" id="{2AB0EE9C-EEA4-3DAA-3BC2-437FA2B83627}"/>
+              </a:ext>
+            </a:extLst>
+          </p:cNvPr>
+          <p:cNvSpPr txBox="1"/>
+          <p:nvPr/>
+        </p:nvSpPr>
+        <p:spPr>
+          <a:xfrm>
+            <a:off x="2801516" y="16768"/>
+            <a:ext cx="6588967" cy="338554"/>
+          </a:xfrm>
+          <a:prstGeom prst="rect">
+            <a:avLst/>
+          </a:prstGeom>
+          <a:noFill/>
+        </p:spPr>
+        <p:txBody>
+          <a:bodyPr wrap="square" rtlCol="0">
+            <a:spAutoFit/>
+          </a:bodyPr>
+          <a:lstStyle/>
+          <a:p>
+            <a:r>
+              <a:rPr lang="en-US" sz="1600" b="1" dirty="0">
+                <a:latin typeface="Arial Rounded MT Bold" panose="020F0704030504030204" pitchFamily="34" charset="0"/>
+                <a:cs typeface="Arial" panose="020B0604020202020204" pitchFamily="34" charset="0"/>
+              </a:rPr>
+              <a:t>MALLA REDDY COLLEGE OF ENGINEERING AND TECHNOLOGY</a:t>
+            </a:r>
+            <a:endParaRPr lang="x-none" sz="1600" b="1" dirty="0">
+              <a:latin typeface="Arial Rounded MT Bold" panose="020F0704030504030204" pitchFamily="34" charset="0"/>
+              <a:cs typeface="Arial" panose="020B0604020202020204" pitchFamily="34" charset="0"/>
+            </a:endParaRPr>
+          </a:p>
+        </p:txBody>
+      </p:sp>
+      <p:pic>
+        <p:nvPicPr>
+          <p:cNvPr id="10" name="Picture 6">
+            <a:extLst>
+              <a:ext uri="{FF2B5EF4-FFF2-40B4-BE49-F238E27FC236}">
+                <a16:creationId xmlns:a16="http://schemas.microsoft.com/office/drawing/2014/main" id="{2AB36878-64B7-0A9C-3290-81CD0224F480}"/>
+              </a:ext>
+            </a:extLst>
+          </p:cNvPr>
+          <p:cNvPicPr>
+            <a:picLocks noChangeAspect="1"/>
+          </p:cNvPicPr>
+          <p:nvPr/>
+        </p:nvPicPr>
+        <p:blipFill>
+          <a:blip r:embed="rId2" cstate="print"/>
+          <a:stretch>
+            <a:fillRect/>
+          </a:stretch>
+        </p:blipFill>
+        <p:spPr>
+          <a:xfrm>
+            <a:off x="10899775" y="-128587"/>
+            <a:ext cx="1276350" cy="1276350"/>
+          </a:xfrm>
+          <a:prstGeom prst="rect">
+            <a:avLst/>
+          </a:prstGeom>
+          <a:noFill/>
+          <a:ln w="9525">
+            <a:noFill/>
+          </a:ln>
+        </p:spPr>
+      </p:pic>
+      <p:sp>
+        <p:nvSpPr>
+          <p:cNvPr id="13" name="Slide Number Placeholder 3">
+            <a:extLst>
+              <a:ext uri="{FF2B5EF4-FFF2-40B4-BE49-F238E27FC236}">
+                <a16:creationId xmlns:a16="http://schemas.microsoft.com/office/drawing/2014/main" id="{045F9ED0-A1C2-100B-3CA7-CE8C1BFD698F}"/>
+              </a:ext>
+            </a:extLst>
+          </p:cNvPr>
+          <p:cNvSpPr txBox="1">
+            <a:spLocks/>
+          </p:cNvSpPr>
+          <p:nvPr/>
+        </p:nvSpPr>
+        <p:spPr>
+          <a:xfrm>
+            <a:off x="9067800" y="6176963"/>
+            <a:ext cx="2743200" cy="365125"/>
+          </a:xfrm>
+          <a:prstGeom prst="rect">
+            <a:avLst/>
+          </a:prstGeom>
+          <a:noFill/>
+          <a:ln>
+            <a:noFill/>
+          </a:ln>
+        </p:spPr>
+        <p:txBody>
+          <a:bodyPr anchor="ctr" anchorCtr="0"/>
+          <a:lstStyle>
+            <a:defPPr>
+              <a:defRPr lang="x-none"/>
+            </a:defPPr>
+            <a:lvl1pPr marL="0" algn="l" defTabSz="914400" rtl="0" eaLnBrk="1" latinLnBrk="0" hangingPunct="1">
+              <a:defRPr sz="1800" kern="1200">
+                <a:solidFill>
+                  <a:schemeClr val="tx1"/>
+                </a:solidFill>
+                <a:latin typeface="+mn-lt"/>
+                <a:ea typeface="+mn-ea"/>
+                <a:cs typeface="+mn-cs"/>
+              </a:defRPr>
+            </a:lvl1pPr>
+            <a:lvl2pPr marL="457200" algn="l" defTabSz="914400" rtl="0" eaLnBrk="1" latinLnBrk="0" hangingPunct="1">
+              <a:defRPr sz="1800" kern="1200">
+                <a:solidFill>
+                  <a:schemeClr val="tx1"/>
+                </a:solidFill>
+                <a:latin typeface="+mn-lt"/>
+                <a:ea typeface="+mn-ea"/>
+                <a:cs typeface="+mn-cs"/>
+              </a:defRPr>
+            </a:lvl2pPr>
+            <a:lvl3pPr marL="914400" algn="l" defTabSz="914400" rtl="0" eaLnBrk="1" latinLnBrk="0" hangingPunct="1">
+              <a:defRPr sz="1800" kern="1200">
+                <a:solidFill>
+                  <a:schemeClr val="tx1"/>
+                </a:solidFill>
+                <a:latin typeface="+mn-lt"/>
+                <a:ea typeface="+mn-ea"/>
+                <a:cs typeface="+mn-cs"/>
+              </a:defRPr>
+            </a:lvl3pPr>
+            <a:lvl4pPr marL="1371600" algn="l" defTabSz="914400" rtl="0" eaLnBrk="1" latinLnBrk="0" hangingPunct="1">
+              <a:defRPr sz="1800" kern="1200">
+                <a:solidFill>
+                  <a:schemeClr val="tx1"/>
+                </a:solidFill>
+                <a:latin typeface="+mn-lt"/>
+                <a:ea typeface="+mn-ea"/>
+                <a:cs typeface="+mn-cs"/>
+              </a:defRPr>
+            </a:lvl4pPr>
+            <a:lvl5pPr marL="1828800" algn="l" defTabSz="914400" rtl="0" eaLnBrk="1" latinLnBrk="0" hangingPunct="1">
+              <a:defRPr sz="1800" kern="1200">
+                <a:solidFill>
+                  <a:schemeClr val="tx1"/>
+                </a:solidFill>
+                <a:latin typeface="+mn-lt"/>
+                <a:ea typeface="+mn-ea"/>
+                <a:cs typeface="+mn-cs"/>
+              </a:defRPr>
+            </a:lvl5pPr>
+            <a:lvl6pPr marL="2286000" algn="l" defTabSz="914400" rtl="0" eaLnBrk="1" latinLnBrk="0" hangingPunct="1">
+              <a:defRPr sz="1800" kern="1200">
+                <a:solidFill>
+                  <a:schemeClr val="tx1"/>
+                </a:solidFill>
+                <a:latin typeface="+mn-lt"/>
+                <a:ea typeface="+mn-ea"/>
+                <a:cs typeface="+mn-cs"/>
+              </a:defRPr>
+            </a:lvl6pPr>
+            <a:lvl7pPr marL="2743200" algn="l" defTabSz="914400" rtl="0" eaLnBrk="1" latinLnBrk="0" hangingPunct="1">
+              <a:defRPr sz="1800" kern="1200">
+                <a:solidFill>
+                  <a:schemeClr val="tx1"/>
+                </a:solidFill>
+                <a:latin typeface="+mn-lt"/>
+                <a:ea typeface="+mn-ea"/>
+                <a:cs typeface="+mn-cs"/>
+              </a:defRPr>
+            </a:lvl7pPr>
+            <a:lvl8pPr marL="3200400" algn="l" defTabSz="914400" rtl="0" eaLnBrk="1" latinLnBrk="0" hangingPunct="1">
+              <a:defRPr sz="1800" kern="1200">
+                <a:solidFill>
+                  <a:schemeClr val="tx1"/>
+                </a:solidFill>
+                <a:latin typeface="+mn-lt"/>
+                <a:ea typeface="+mn-ea"/>
+                <a:cs typeface="+mn-cs"/>
+              </a:defRPr>
+            </a:lvl8pPr>
+            <a:lvl9pPr marL="3657600" algn="l" defTabSz="914400" rtl="0" eaLnBrk="1" latinLnBrk="0" hangingPunct="1">
+              <a:defRPr sz="1800" kern="1200">
+                <a:solidFill>
+                  <a:schemeClr val="tx1"/>
+                </a:solidFill>
+                <a:latin typeface="+mn-lt"/>
+                <a:ea typeface="+mn-ea"/>
+                <a:cs typeface="+mn-cs"/>
+              </a:defRPr>
+            </a:lvl9pPr>
+          </a:lstStyle>
+          <a:p>
+            <a:pPr algn="r">
+              <a:spcBef>
+                <a:spcPct val="0"/>
+              </a:spcBef>
+            </a:pPr>
+            <a:fld id="{9A0DB2DC-4C9A-4742-B13C-FB6460FD3503}" type="slidenum">
+              <a:rPr lang="en-IN" altLang="en-US" sz="1200" b="1" smtClean="0">
+                <a:solidFill>
+                  <a:srgbClr val="C00000"/>
+                </a:solidFill>
+              </a:rPr>
+              <a:pPr algn="r">
+                <a:spcBef>
+                  <a:spcPct val="0"/>
+                </a:spcBef>
+              </a:pPr>
+              <a:t>28</a:t>
+            </a:fld>
+            <a:endParaRPr lang="en-IN" altLang="en-US" sz="1200" b="1" dirty="0">
+              <a:solidFill>
+                <a:srgbClr val="C00000"/>
+              </a:solidFill>
+            </a:endParaRPr>
+          </a:p>
+        </p:txBody>
+      </p:sp>
+      <p:sp>
+        <p:nvSpPr>
+          <p:cNvPr id="2" name="Content Placeholder 2">
+            <a:extLst>
+              <a:ext uri="{FF2B5EF4-FFF2-40B4-BE49-F238E27FC236}">
+                <a16:creationId xmlns:a16="http://schemas.microsoft.com/office/drawing/2014/main" id="{FC45905A-F713-7C71-DB23-5DAAB6C05E07}"/>
+              </a:ext>
+            </a:extLst>
+          </p:cNvPr>
+          <p:cNvSpPr txBox="1">
+            <a:spLocks/>
+          </p:cNvSpPr>
+          <p:nvPr/>
+        </p:nvSpPr>
+        <p:spPr>
+          <a:xfrm>
+            <a:off x="2714004" y="2741645"/>
+            <a:ext cx="6984089" cy="1918846"/>
+          </a:xfrm>
+          <a:prstGeom prst="rect">
+            <a:avLst/>
+          </a:prstGeom>
+        </p:spPr>
+        <p:txBody>
+          <a:bodyPr vert="horz" wrap="square" lIns="91440" tIns="45720" rIns="91440" bIns="45720" rtlCol="0" anchor="t" anchorCtr="0">
+            <a:normAutofit/>
+          </a:bodyPr>
+          <a:lstStyle>
+            <a:lvl1pPr marL="0" indent="0" algn="ctr" defTabSz="914400" rtl="0" eaLnBrk="1" latinLnBrk="0" hangingPunct="1">
+              <a:lnSpc>
+                <a:spcPct val="90000"/>
+              </a:lnSpc>
+              <a:spcBef>
+                <a:spcPts val="1000"/>
+              </a:spcBef>
+              <a:buFont typeface="Arial" panose="020B0604020202020204" pitchFamily="34" charset="0"/>
+              <a:buNone/>
+              <a:defRPr sz="2400" kern="1200">
+                <a:solidFill>
+                  <a:schemeClr val="tx1"/>
+                </a:solidFill>
+                <a:latin typeface="+mn-lt"/>
+                <a:ea typeface="+mn-ea"/>
+                <a:cs typeface="+mn-cs"/>
+              </a:defRPr>
+            </a:lvl1pPr>
+            <a:lvl2pPr marL="457200" indent="0" algn="ctr" defTabSz="914400" rtl="0" eaLnBrk="1" latinLnBrk="0" hangingPunct="1">
+              <a:lnSpc>
+                <a:spcPct val="90000"/>
+              </a:lnSpc>
+              <a:spcBef>
+                <a:spcPts val="500"/>
+              </a:spcBef>
+              <a:buFont typeface="Arial" panose="020B0604020202020204" pitchFamily="34" charset="0"/>
+              <a:buNone/>
+              <a:defRPr sz="2000" kern="1200">
+                <a:solidFill>
+                  <a:schemeClr val="tx1"/>
+                </a:solidFill>
+                <a:latin typeface="+mn-lt"/>
+                <a:ea typeface="+mn-ea"/>
+                <a:cs typeface="+mn-cs"/>
+              </a:defRPr>
+            </a:lvl2pPr>
+            <a:lvl3pPr marL="914400" indent="0" algn="ctr" defTabSz="914400" rtl="0" eaLnBrk="1" latinLnBrk="0" hangingPunct="1">
+              <a:lnSpc>
+                <a:spcPct val="90000"/>
+              </a:lnSpc>
+              <a:spcBef>
+                <a:spcPts val="500"/>
+              </a:spcBef>
+              <a:buFont typeface="Arial" panose="020B0604020202020204" pitchFamily="34" charset="0"/>
+              <a:buNone/>
+              <a:defRPr sz="1800" kern="1200">
+                <a:solidFill>
+                  <a:schemeClr val="tx1"/>
+                </a:solidFill>
+                <a:latin typeface="+mn-lt"/>
+                <a:ea typeface="+mn-ea"/>
+                <a:cs typeface="+mn-cs"/>
+              </a:defRPr>
+            </a:lvl3pPr>
+            <a:lvl4pPr marL="1371600" indent="0" algn="ctr" defTabSz="914400" rtl="0" eaLnBrk="1" latinLnBrk="0" hangingPunct="1">
+              <a:lnSpc>
+                <a:spcPct val="90000"/>
+              </a:lnSpc>
+              <a:spcBef>
+                <a:spcPts val="500"/>
+              </a:spcBef>
+              <a:buFont typeface="Arial" panose="020B0604020202020204" pitchFamily="34" charset="0"/>
+              <a:buNone/>
+              <a:defRPr sz="1600" kern="1200">
+                <a:solidFill>
+                  <a:schemeClr val="tx1"/>
+                </a:solidFill>
+                <a:latin typeface="+mn-lt"/>
+                <a:ea typeface="+mn-ea"/>
+                <a:cs typeface="+mn-cs"/>
+              </a:defRPr>
+            </a:lvl4pPr>
+            <a:lvl5pPr marL="1828800" indent="0" algn="ctr" defTabSz="914400" rtl="0" eaLnBrk="1" latinLnBrk="0" hangingPunct="1">
+              <a:lnSpc>
+                <a:spcPct val="90000"/>
+              </a:lnSpc>
+              <a:spcBef>
+                <a:spcPts val="500"/>
+              </a:spcBef>
+              <a:buFont typeface="Arial" panose="020B0604020202020204" pitchFamily="34" charset="0"/>
+              <a:buNone/>
+              <a:defRPr sz="1600" kern="1200">
+                <a:solidFill>
+                  <a:schemeClr val="tx1"/>
+                </a:solidFill>
+                <a:latin typeface="+mn-lt"/>
+                <a:ea typeface="+mn-ea"/>
+                <a:cs typeface="+mn-cs"/>
+              </a:defRPr>
+            </a:lvl5pPr>
+            <a:lvl6pPr marL="2286000" indent="0" algn="ctr" defTabSz="914400" rtl="0" eaLnBrk="1" latinLnBrk="0" hangingPunct="1">
+              <a:lnSpc>
+                <a:spcPct val="90000"/>
+              </a:lnSpc>
+              <a:spcBef>
+                <a:spcPts val="500"/>
+              </a:spcBef>
+              <a:buFont typeface="Arial" panose="020B0604020202020204" pitchFamily="34" charset="0"/>
+              <a:buNone/>
+              <a:defRPr sz="1600" kern="1200">
+                <a:solidFill>
+                  <a:schemeClr val="tx1"/>
+                </a:solidFill>
+                <a:latin typeface="+mn-lt"/>
+                <a:ea typeface="+mn-ea"/>
+                <a:cs typeface="+mn-cs"/>
+              </a:defRPr>
+            </a:lvl6pPr>
+            <a:lvl7pPr marL="2743200" indent="0" algn="ctr" defTabSz="914400" rtl="0" eaLnBrk="1" latinLnBrk="0" hangingPunct="1">
+              <a:lnSpc>
+                <a:spcPct val="90000"/>
+              </a:lnSpc>
+              <a:spcBef>
+                <a:spcPts val="500"/>
+              </a:spcBef>
+              <a:buFont typeface="Arial" panose="020B0604020202020204" pitchFamily="34" charset="0"/>
+              <a:buNone/>
+              <a:defRPr sz="1600" kern="1200">
+                <a:solidFill>
+                  <a:schemeClr val="tx1"/>
+                </a:solidFill>
+                <a:latin typeface="+mn-lt"/>
+                <a:ea typeface="+mn-ea"/>
+                <a:cs typeface="+mn-cs"/>
+              </a:defRPr>
+            </a:lvl7pPr>
+            <a:lvl8pPr marL="3200400" indent="0" algn="ctr" defTabSz="914400" rtl="0" eaLnBrk="1" latinLnBrk="0" hangingPunct="1">
+              <a:lnSpc>
+                <a:spcPct val="90000"/>
+              </a:lnSpc>
+              <a:spcBef>
+                <a:spcPts val="500"/>
+              </a:spcBef>
+              <a:buFont typeface="Arial" panose="020B0604020202020204" pitchFamily="34" charset="0"/>
+              <a:buNone/>
+              <a:defRPr sz="1600" kern="1200">
+                <a:solidFill>
+                  <a:schemeClr val="tx1"/>
+                </a:solidFill>
+                <a:latin typeface="+mn-lt"/>
+                <a:ea typeface="+mn-ea"/>
+                <a:cs typeface="+mn-cs"/>
+              </a:defRPr>
+            </a:lvl8pPr>
+            <a:lvl9pPr marL="3657600" indent="0" algn="ctr" defTabSz="914400" rtl="0" eaLnBrk="1" latinLnBrk="0" hangingPunct="1">
+              <a:lnSpc>
+                <a:spcPct val="90000"/>
+              </a:lnSpc>
+              <a:spcBef>
+                <a:spcPts val="500"/>
+              </a:spcBef>
+              <a:buFont typeface="Arial" panose="020B0604020202020204" pitchFamily="34" charset="0"/>
+              <a:buNone/>
+              <a:defRPr sz="1600" kern="1200">
+                <a:solidFill>
+                  <a:schemeClr val="tx1"/>
+                </a:solidFill>
+                <a:latin typeface="+mn-lt"/>
+                <a:ea typeface="+mn-ea"/>
+                <a:cs typeface="+mn-cs"/>
+              </a:defRPr>
+            </a:lvl9pPr>
+          </a:lstStyle>
+          <a:p>
+            <a:pPr marL="457200" lvl="0" indent="-457200" algn="l" eaLnBrk="0" fontAlgn="base" hangingPunct="0">
+              <a:lnSpc>
+                <a:spcPct val="150000"/>
+              </a:lnSpc>
+              <a:spcBef>
+                <a:spcPct val="0"/>
+              </a:spcBef>
+              <a:spcAft>
+                <a:spcPct val="0"/>
+              </a:spcAft>
+              <a:buAutoNum type="arabicPeriod"/>
+            </a:pPr>
+            <a:r>
+              <a:rPr lang="en-US" altLang="en-US" b="1" dirty="0">
+                <a:latin typeface="Times New Roman" pitchFamily="18" charset="0"/>
+                <a:cs typeface="Times New Roman" pitchFamily="18" charset="0"/>
+              </a:rPr>
+              <a:t>Durishetty Anirudh          – 22N31A6648</a:t>
+            </a:r>
+          </a:p>
+          <a:p>
+            <a:pPr marL="457200" lvl="0" indent="-457200" algn="l" eaLnBrk="0" fontAlgn="base" hangingPunct="0">
+              <a:lnSpc>
+                <a:spcPct val="150000"/>
+              </a:lnSpc>
+              <a:spcBef>
+                <a:spcPct val="0"/>
+              </a:spcBef>
+              <a:spcAft>
+                <a:spcPct val="0"/>
+              </a:spcAft>
+              <a:buAutoNum type="arabicPeriod"/>
+            </a:pPr>
+            <a:r>
+              <a:rPr lang="en-US" altLang="en-US" b="1" dirty="0">
+                <a:latin typeface="Times New Roman" pitchFamily="18" charset="0"/>
+                <a:cs typeface="Times New Roman" pitchFamily="18" charset="0"/>
+              </a:rPr>
+              <a:t>Betham Vignesh Reddy    – 22N31A6626</a:t>
+            </a:r>
+          </a:p>
+          <a:p>
+            <a:pPr marL="457200" lvl="0" indent="-457200" algn="l" eaLnBrk="0" fontAlgn="base" hangingPunct="0">
+              <a:lnSpc>
+                <a:spcPct val="150000"/>
+              </a:lnSpc>
+              <a:spcBef>
+                <a:spcPct val="0"/>
+              </a:spcBef>
+              <a:spcAft>
+                <a:spcPct val="0"/>
+              </a:spcAft>
+              <a:buAutoNum type="arabicPeriod"/>
+            </a:pPr>
+            <a:r>
+              <a:rPr lang="en-US" altLang="en-US" b="1" dirty="0">
+                <a:latin typeface="Times New Roman" pitchFamily="18" charset="0"/>
+                <a:cs typeface="Times New Roman" pitchFamily="18" charset="0"/>
+              </a:rPr>
+              <a:t>B. Ranjith Kumar             – 22N31A6622</a:t>
+            </a:r>
+            <a:endParaRPr lang="en-US" altLang="en-US" dirty="0">
+              <a:latin typeface="Times New Roman" pitchFamily="18" charset="0"/>
+              <a:cs typeface="Times New Roman" pitchFamily="18" charset="0"/>
+            </a:endParaRPr>
+          </a:p>
+        </p:txBody>
+      </p:sp>
+    </p:spTree>
+    <p:extLst>
+      <p:ext uri="{BB962C8B-B14F-4D97-AF65-F5344CB8AC3E}">
+        <p14:creationId xmlns:p14="http://schemas.microsoft.com/office/powerpoint/2010/main" val="2473620985"/>
       </p:ext>
     </p:extLst>
   </p:cSld>
@@ -16402,10 +20641,12 @@
             </a:lvl9pPr>
           </a:lstStyle>
           <a:p>
-            <a:pPr marL="712299" lvl="1" indent="-356150" algn="just">
+            <a:pPr marL="813349" lvl="1" indent="-457200" algn="just">
               <a:lnSpc>
                 <a:spcPts val="4453"/>
               </a:lnSpc>
+              <a:buFont typeface="Arial" panose="020B0604020202020204" pitchFamily="34" charset="0"/>
+              <a:buChar char="•"/>
             </a:pPr>
             <a:r>
               <a:rPr lang="en-US" sz="2600" spc="197" dirty="0">
@@ -16417,14 +20658,16 @@
                 <a:cs typeface="Times New Roman" pitchFamily="18" charset="0"/>
                 <a:sym typeface="DM Sans"/>
               </a:rPr>
-              <a:t>Current tools provide isolated solutions like script generation,</a:t>
-            </a:r>
-          </a:p>
-          <a:p>
-            <a:pPr marL="712299" lvl="1" indent="-356150" algn="just">
+              <a:t>Current tools provide isolated solutions like script generation, captioning, or video editing.</a:t>
+            </a:r>
+          </a:p>
+          <a:p>
+            <a:pPr marL="813349" lvl="1" indent="-457200" algn="just">
               <a:lnSpc>
                 <a:spcPts val="4453"/>
               </a:lnSpc>
+              <a:buFont typeface="Arial" panose="020B0604020202020204" pitchFamily="34" charset="0"/>
+              <a:buChar char="•"/>
             </a:pPr>
             <a:r>
               <a:rPr lang="en-US" sz="2600" spc="197" dirty="0">
@@ -16436,14 +20679,16 @@
                 <a:cs typeface="Times New Roman" pitchFamily="18" charset="0"/>
                 <a:sym typeface="DM Sans"/>
               </a:rPr>
-              <a:t>captioning, or video editing.Users often rely on multiple</a:t>
-            </a:r>
-          </a:p>
-          <a:p>
-            <a:pPr marL="712299" lvl="1" indent="-356150" algn="just">
+              <a:t>Users often rely on multiple platforms to complete a single project.</a:t>
+            </a:r>
+          </a:p>
+          <a:p>
+            <a:pPr marL="813349" lvl="1" indent="-457200" algn="just">
               <a:lnSpc>
                 <a:spcPts val="4453"/>
               </a:lnSpc>
+              <a:buFont typeface="Arial" panose="020B0604020202020204" pitchFamily="34" charset="0"/>
+              <a:buChar char="•"/>
             </a:pPr>
             <a:r>
               <a:rPr lang="en-US" sz="2600" spc="197" dirty="0">
@@ -16455,45 +20700,7 @@
                 <a:cs typeface="Times New Roman" pitchFamily="18" charset="0"/>
                 <a:sym typeface="DM Sans"/>
               </a:rPr>
-              <a:t>platforms to complete a single project.These systems are time</a:t>
-            </a:r>
-          </a:p>
-          <a:p>
-            <a:pPr marL="712299" lvl="1" indent="-356150" algn="just">
-              <a:lnSpc>
-                <a:spcPts val="4453"/>
-              </a:lnSpc>
-            </a:pPr>
-            <a:r>
-              <a:rPr lang="en-US" sz="2600" spc="197" dirty="0">
-                <a:solidFill>
-                  <a:srgbClr val="000000"/>
-                </a:solidFill>
-                <a:latin typeface="Times New Roman" pitchFamily="18" charset="0"/>
-                <a:ea typeface="DM Sans"/>
-                <a:cs typeface="Times New Roman" pitchFamily="18" charset="0"/>
-                <a:sym typeface="DM Sans"/>
-              </a:rPr>
-              <a:t>consuming, lack integration, and are inefficient for fast-paced</a:t>
-            </a:r>
-          </a:p>
-          <a:p>
-            <a:pPr marL="712299" lvl="1" indent="-356150" algn="just">
-              <a:lnSpc>
-                <a:spcPts val="4453"/>
-              </a:lnSpc>
-            </a:pPr>
-            <a:r>
-              <a:rPr lang="en-US" sz="2600" spc="197" dirty="0">
-                <a:solidFill>
-                  <a:srgbClr val="000000"/>
-                </a:solidFill>
-                <a:latin typeface="Times New Roman" pitchFamily="18" charset="0"/>
-                <a:ea typeface="DM Sans"/>
-                <a:cs typeface="Times New Roman" pitchFamily="18" charset="0"/>
-                <a:sym typeface="DM Sans"/>
-              </a:rPr>
-              <a:t>content creation needs.</a:t>
+              <a:t>These systems are time consuming, lack integration, and are inefficient for fast-paced content creation needs.</a:t>
             </a:r>
           </a:p>
           <a:p>
